--- a/docs/04_배포자료/슬라이드/8주차-코드로움직이기.pptx
+++ b/docs/04_배포자료/슬라이드/8주차-코드로움직이기.pptx
@@ -19,9 +19,10 @@
     <p:sldId id="267" r:id="rId13"/>
     <p:sldId id="268" r:id="rId14"/>
     <p:sldId id="269" r:id="rId15"/>
+    <p:sldId id="270" r:id="rId16"/>
   </p:sldIdLst>
   <p:notesMasterIdLst>
-    <p:notesMasterId r:id="rId16"/>
+    <p:notesMasterId r:id="rId17"/>
   </p:notesMasterIdLst>
   <p:sldSz cx="12192000" cy="6858000"/>
   <p:notesSz cx="6858000" cy="12192000"/>
@@ -603,7 +604,7 @@
           <a:p>
             <a:r>
               <a:rPr lang="en-US" dirty="0"/>
-              <a:t>Play 후 Game 창을 한 번 클릭해야 키가 먹는다. 한/영도 영문이어야 한다. 안 움직인다는 질문의 대부분이 이 둘이다.</a:t>
+              <a:t>이름도 같이 바꾼다. 안 바꾸면 나중에 moveSpeed = 3 을 보고 왜 이렇게 큰지 모른다. / 곱했는데 거의 안 움직인다는 학생이 오늘 1등이다. 값을 안 바꿔서 그렇다. 단위가 바뀌었다고 말해준다.</a:t>
             </a:r>
             <a:endParaRPr lang="en-US" dirty="0"/>
           </a:p>
@@ -691,7 +692,7 @@
           <a:p>
             <a:r>
               <a:rPr lang="en-US" dirty="0"/>
-              <a:t>WASD 가 되면 3분쯤 그냥 놀게 둔다. 이 순간이 Phase 2 의 목표다. 대각선이 빠른 건 눈치챈 학생에게만 normalized 를 개별로 알려준다.</a:t>
+              <a:t>Play 후 Game 창을 한 번 클릭해야 키가 먹는다. 한/영도 영문이어야 한다. 안 움직인다는 질문의 대부분이 이 둘이다.</a:t>
             </a:r>
             <a:endParaRPr lang="en-US" dirty="0"/>
           </a:p>
@@ -779,7 +780,7 @@
           <a:p>
             <a:r>
               <a:rPr lang="en-US" dirty="0"/>
-              <a:t>Active Input Handling 은 Project Settings &gt; Player &gt; Other Settings 에 있다. 바꾸면 에디터 재시작이 필요하다.</a:t>
+              <a:t>WASD 가 되면 3분쯤 그냥 놀게 둔다. 이 순간이 Phase 2 의 목표다. 대각선이 빠른 건 눈치챈 학생에게만 normalized 를 개별로 알려준다.</a:t>
             </a:r>
             <a:endParaRPr lang="en-US" dirty="0"/>
           </a:p>
@@ -867,7 +868,7 @@
           <a:p>
             <a:r>
               <a:rPr lang="en-US" dirty="0"/>
-              <a:t>Phase 3(물리·충돌)는 오늘 것 위에 그대로 쌓인다. 여기서 못 따라온 학생은 9주차에 더 못 따라온다.</a:t>
+              <a:t>Active Input Handling 은 Project Settings &gt; Player &gt; Other Settings 에 있다. 바꾸면 에디터 재시작이 필요하다.</a:t>
             </a:r>
             <a:endParaRPr lang="en-US" dirty="0"/>
           </a:p>
@@ -955,7 +956,7 @@
           <a:p>
             <a:r>
               <a:rPr lang="en-US" dirty="0"/>
-              <a:t>034 에서 Rigidbody 를 맛만 보여준 이유가 여기 있다. 조작이 먼저고 물리가 나중이다.</a:t>
+              <a:t>Phase 3(물리·충돌)는 오늘 것 위에 그대로 쌓인다. 여기서 못 따라온 학생은 9주차에 더 못 따라온다.</a:t>
             </a:r>
             <a:endParaRPr lang="en-US" dirty="0"/>
           </a:p>
@@ -979,6 +980,94 @@
             <a:fld id="{F7021451-1387-4CA6-816F-3879F97B5CBC}" type="slidenum">
               <a:rPr lang="en-US"/>
               <a:t>14</a:t>
+            </a:fld>
+            <a:endParaRPr lang="en-US"/>
+          </a:p>
+        </p:txBody>
+      </p:sp>
+    </p:spTree>
+    <p:extLst>
+      <p:ext uri="{BB962C8B-B14F-4D97-AF65-F5344CB8AC3E}">
+        <p14:creationId xmlns:p14="http://schemas.microsoft.com/office/powerpoint/2010/main" val="1024086991"/>
+      </p:ext>
+    </p:extLst>
+  </p:cSld>
+  <p:clrMapOvr>
+    <a:masterClrMapping/>
+  </p:clrMapOvr>
+</p:notes>
+</file>
+
+<file path=ppt/notesSlides/notesSlide15.xml><?xml version="1.0" encoding="utf-8"?>
+<p:notes xmlns:a="http://schemas.openxmlformats.org/drawingml/2006/main" xmlns:r="http://schemas.openxmlformats.org/officeDocument/2006/relationships" xmlns:p="http://schemas.openxmlformats.org/presentationml/2006/main">
+  <p:cSld>
+    <p:spTree>
+      <p:nvGrpSpPr>
+        <p:cNvPr id="1" name=""/>
+        <p:cNvGrpSpPr/>
+        <p:nvPr/>
+      </p:nvGrpSpPr>
+      <p:grpSpPr>
+        <a:xfrm>
+          <a:off x="0" y="0"/>
+          <a:ext cx="0" cy="0"/>
+          <a:chOff x="0" y="0"/>
+          <a:chExt cx="0" cy="0"/>
+        </a:xfrm>
+      </p:grpSpPr>
+      <p:sp>
+        <p:nvSpPr>
+          <p:cNvPr id="2" name="Slide Image Placeholder 1"/>
+          <p:cNvSpPr>
+            <a:spLocks noGrp="1" noRot="1" noChangeAspect="1"/>
+          </p:cNvSpPr>
+          <p:nvPr>
+            <p:ph type="sldImg"/>
+          </p:nvPr>
+        </p:nvSpPr>
+        <p:spPr/>
+      </p:sp>
+      <p:sp>
+        <p:nvSpPr>
+          <p:cNvPr id="3" name="Notes Placeholder 2"/>
+          <p:cNvSpPr>
+            <a:spLocks noGrp="1"/>
+          </p:cNvSpPr>
+          <p:nvPr>
+            <p:ph type="body" idx="1"/>
+          </p:nvPr>
+        </p:nvSpPr>
+        <p:spPr/>
+        <p:txBody>
+          <a:bodyPr/>
+          <a:lstStyle/>
+          <a:p>
+            <a:r>
+              <a:rPr lang="en-US" dirty="0"/>
+              <a:t>034 에서 Rigidbody 를 맛만 보여준 이유가 여기 있다. 조작이 먼저고 물리가 나중이다.</a:t>
+            </a:r>
+            <a:endParaRPr lang="en-US" dirty="0"/>
+          </a:p>
+        </p:txBody>
+      </p:sp>
+      <p:sp>
+        <p:nvSpPr>
+          <p:cNvPr id="4" name="Slide Number Placeholder 3"/>
+          <p:cNvSpPr>
+            <a:spLocks noGrp="1"/>
+          </p:cNvSpPr>
+          <p:nvPr>
+            <p:ph type="sldNum" sz="quarter" idx="10"/>
+          </p:nvPr>
+        </p:nvSpPr>
+        <p:spPr/>
+        <p:txBody>
+          <a:bodyPr/>
+          <a:lstStyle/>
+          <a:p>
+            <a:fld id="{F7021451-1387-4CA6-816F-3879F97B5CBC}" type="slidenum">
+              <a:rPr lang="en-US"/>
+              <a:t>15</a:t>
             </a:fld>
             <a:endParaRPr lang="en-US"/>
           </a:p>
@@ -1659,7 +1748,7 @@
           <a:p>
             <a:r>
               <a:rPr lang="en-US" dirty="0"/>
-              <a:t>이름도 같이 바꾼다. 안 바꾸면 나중에 moveSpeed = 3 을 보고 왜 이렇게 큰지 모른다. / 곱했는데 거의 안 움직인다는 학생이 오늘 1등이다. 값을 안 바꿔서 그렇다. 단위가 바뀌었다고 말해준다.</a:t>
+              <a:t>여기가 이 회차의 전부다. '1초 동안 더하면 얼마?' 를 먼저 묻고 학생이 답하게 둔다. 답은 1초. 그다음에 곱셈을 보여준다. 실측: frameCount=267, deltaTime 평균=0.0070, 평균 x 프레임수 = 1.871 = 그때의 Time.time. 합이 곧 경과 시간이다.</a:t>
             </a:r>
             <a:endParaRPr lang="en-US" dirty="0"/>
           </a:p>
@@ -2447,7 +2536,7 @@
                 <a:ea typeface="Pretendard SemiBold" pitchFamily="34" charset="-122"/>
                 <a:cs typeface="Pretendard SemiBold" pitchFamily="34" charset="-120"/>
               </a:rPr>
-              <a:t>040</a:t>
+              <a:t>039</a:t>
             </a:r>
             <a:endParaRPr lang="en-US" sz="950" dirty="0"/>
           </a:p>
@@ -2486,7 +2575,7 @@
                 <a:ea typeface="Pretendard SemiBold" pitchFamily="34" charset="-122"/>
                 <a:cs typeface="Pretendard SemiBold" pitchFamily="34" charset="-120"/>
               </a:rPr>
-              <a:t>키를 누르면 숫자가 나온다.</a:t>
+              <a:t>곱하면 값의 의미가 바뀐다.</a:t>
             </a:r>
             <a:endParaRPr lang="en-US" sz="2600" dirty="0"/>
           </a:p>
@@ -2525,7 +2614,7 @@
                 <a:ea typeface="Pretendard Light" pitchFamily="34" charset="-122"/>
                 <a:cs typeface="Pretendard Light" pitchFamily="34" charset="-120"/>
               </a:rPr>
-              <a:t>032에서 배운 그대로다. 양수면 오른쪽, 음수면 왼쪽.</a:t>
+              <a:t>값이 갑자기 커져 놀라는데 단위가 바뀐 것이다. 0.05를 60번 하면 3이다.</a:t>
             </a:r>
             <a:endParaRPr lang="en-US" sz="1500" dirty="0"/>
           </a:p>
@@ -2533,18 +2622,57 @@
       </p:sp>
       <p:sp>
         <p:nvSpPr>
-          <p:cNvPr id="6" name="Shape 4"/>
+          <p:cNvPr id="6" name="Text 4"/>
+          <p:cNvSpPr txBox="1"/>
+          <p:nvPr/>
+        </p:nvSpPr>
+        <p:spPr>
+          <a:xfrm>
+            <a:off x="758952" y="1965960"/>
+            <a:ext cx="3657600" cy="274320"/>
+          </a:xfrm>
+          <a:prstGeom prst="rect">
+            <a:avLst/>
+          </a:prstGeom>
+          <a:noFill/>
+          <a:ln/>
+        </p:spPr>
+        <p:txBody>
+          <a:bodyPr wrap="square" lIns="0" tIns="0" rIns="0" bIns="0" rtlCol="0" anchor="ctr"/>
+          <a:lstStyle/>
+          <a:p>
+            <a:pPr indent="0" marL="0">
+              <a:buNone/>
+            </a:pPr>
+            <a:r>
+              <a:rPr lang="en-US" sz="950" dirty="0">
+                <a:solidFill>
+                  <a:srgbClr val="707070"/>
+                </a:solidFill>
+                <a:latin typeface="Pretendard SemiBold" pitchFamily="34" charset="0"/>
+                <a:ea typeface="Pretendard SemiBold" pitchFamily="34" charset="-122"/>
+                <a:cs typeface="Pretendard SemiBold" pitchFamily="34" charset="-120"/>
+              </a:rPr>
+              <a:t>고치기 전</a:t>
+            </a:r>
+            <a:endParaRPr lang="en-US" sz="950" dirty="0"/>
+          </a:p>
+        </p:txBody>
+      </p:sp>
+      <p:sp>
+        <p:nvSpPr>
+          <p:cNvPr id="7" name="Shape 5"/>
           <p:cNvSpPr/>
           <p:nvPr/>
         </p:nvSpPr>
         <p:spPr>
           <a:xfrm>
-            <a:off x="758952" y="1965960"/>
-            <a:ext cx="5486400" cy="1280160"/>
+            <a:off x="758952" y="2331720"/>
+            <a:ext cx="5486400" cy="1463040"/>
           </a:xfrm>
           <a:prstGeom prst="roundRect">
             <a:avLst>
-              <a:gd name="adj" fmla="val 11929"/>
+              <a:gd name="adj" fmla="val 10438"/>
             </a:avLst>
           </a:prstGeom>
           <a:solidFill>
@@ -2560,14 +2688,14 @@
       </p:sp>
       <p:sp>
         <p:nvSpPr>
-          <p:cNvPr id="7" name="Text 5"/>
-          <p:cNvSpPr txBox="1"/>
-          <p:nvPr/>
-        </p:nvSpPr>
-        <p:spPr>
-          <a:xfrm>
-            <a:off x="1014984" y="2167128"/>
-            <a:ext cx="4974336" cy="877824"/>
+          <p:cNvPr id="8" name="Text 6"/>
+          <p:cNvSpPr txBox="1"/>
+          <p:nvPr/>
+        </p:nvSpPr>
+        <p:spPr>
+          <a:xfrm>
+            <a:off x="1014984" y="2532888"/>
+            <a:ext cx="4974336" cy="1060704"/>
           </a:xfrm>
           <a:prstGeom prst="rect">
             <a:avLst/>
@@ -2586,7 +2714,7 @@
               <a:buNone/>
             </a:pPr>
             <a:r>
-              <a:rPr lang="en-US" sz="1150" b="1" dirty="0">
+              <a:rPr lang="en-US" sz="1150" dirty="0">
                 <a:solidFill>
                   <a:srgbClr val="141414"/>
                 </a:solidFill>
@@ -2594,7 +2722,7 @@
                 <a:ea typeface="Consolas" pitchFamily="34" charset="-122"/>
                 <a:cs typeface="Consolas" pitchFamily="34" charset="-120"/>
               </a:rPr>
-              <a:t>float h = Input.GetAxisRaw("Horizontal");</a:t>
+              <a:t>[SerializeField] float moveStep = 0.05f;</a:t>
             </a:r>
             <a:endParaRPr lang="en-US" sz="1150" dirty="0"/>
           </a:p>
@@ -2606,7 +2734,7 @@
               <a:buNone/>
             </a:pPr>
             <a:r>
-              <a:rPr lang="en-US" sz="1150" b="1" dirty="0">
+              <a:rPr lang="en-US" sz="1150" dirty="0">
                 <a:solidFill>
                   <a:srgbClr val="141414"/>
                 </a:solidFill>
@@ -2614,22 +2742,42 @@
                 <a:ea typeface="Consolas" pitchFamily="34" charset="-122"/>
                 <a:cs typeface="Consolas" pitchFamily="34" charset="-120"/>
               </a:rPr>
-              <a:t>float v = Input.GetAxisRaw("Vertical");</a:t>
+              <a:t> </a:t>
             </a:r>
             <a:endParaRPr lang="en-US" sz="1150" dirty="0"/>
           </a:p>
-        </p:txBody>
-      </p:sp>
-      <p:sp>
-        <p:nvSpPr>
-          <p:cNvPr id="8" name="Text 6"/>
-          <p:cNvSpPr txBox="1"/>
-          <p:nvPr/>
-        </p:nvSpPr>
-        <p:spPr>
-          <a:xfrm>
-            <a:off x="758952" y="3520440"/>
-            <a:ext cx="2194560" cy="274320"/>
+          <a:p>
+            <a:pPr indent="0" marL="0">
+              <a:lnSpc>
+                <a:spcPct val="132000"/>
+              </a:lnSpc>
+              <a:buNone/>
+            </a:pPr>
+            <a:r>
+              <a:rPr lang="en-US" sz="1150" dirty="0">
+                <a:solidFill>
+                  <a:srgbClr val="141414"/>
+                </a:solidFill>
+                <a:latin typeface="Consolas" pitchFamily="34" charset="0"/>
+                <a:ea typeface="Consolas" pitchFamily="34" charset="-122"/>
+                <a:cs typeface="Consolas" pitchFamily="34" charset="-120"/>
+              </a:rPr>
+              <a:t>position + moveDir * moveStep;</a:t>
+            </a:r>
+            <a:endParaRPr lang="en-US" sz="1150" dirty="0"/>
+          </a:p>
+        </p:txBody>
+      </p:sp>
+      <p:sp>
+        <p:nvSpPr>
+          <p:cNvPr id="9" name="Text 7"/>
+          <p:cNvSpPr txBox="1"/>
+          <p:nvPr/>
+        </p:nvSpPr>
+        <p:spPr>
+          <a:xfrm>
+            <a:off x="6537960" y="1965960"/>
+            <a:ext cx="3657600" cy="274320"/>
           </a:xfrm>
           <a:prstGeom prst="rect">
             <a:avLst/>
@@ -2647,13 +2795,13 @@
             <a:r>
               <a:rPr lang="en-US" sz="950" dirty="0">
                 <a:solidFill>
-                  <a:srgbClr val="707070"/>
+                  <a:srgbClr val="141414"/>
                 </a:solidFill>
                 <a:latin typeface="Pretendard SemiBold" pitchFamily="34" charset="0"/>
                 <a:ea typeface="Pretendard SemiBold" pitchFamily="34" charset="-122"/>
                 <a:cs typeface="Pretendard SemiBold" pitchFamily="34" charset="-120"/>
               </a:rPr>
-              <a:t>누르는 키</a:t>
+              <a:t>고친 뒤</a:t>
             </a:r>
             <a:endParaRPr lang="en-US" sz="950" dirty="0"/>
           </a:p>
@@ -2661,819 +2809,18 @@
       </p:sp>
       <p:sp>
         <p:nvSpPr>
-          <p:cNvPr id="9" name="Text 7"/>
-          <p:cNvSpPr txBox="1"/>
-          <p:nvPr/>
-        </p:nvSpPr>
-        <p:spPr>
-          <a:xfrm>
-            <a:off x="2953512" y="3520440"/>
-            <a:ext cx="1645920" cy="274320"/>
-          </a:xfrm>
-          <a:prstGeom prst="rect">
-            <a:avLst/>
-          </a:prstGeom>
-          <a:noFill/>
-          <a:ln/>
-        </p:spPr>
-        <p:txBody>
-          <a:bodyPr wrap="square" lIns="0" tIns="0" rIns="0" bIns="0" rtlCol="0" anchor="ctr"/>
-          <a:lstStyle/>
-          <a:p>
-            <a:pPr indent="0" marL="0">
-              <a:buNone/>
-            </a:pPr>
-            <a:r>
-              <a:rPr lang="en-US" sz="950" dirty="0">
-                <a:solidFill>
-                  <a:srgbClr val="707070"/>
-                </a:solidFill>
-                <a:latin typeface="Pretendard SemiBold" pitchFamily="34" charset="0"/>
-                <a:ea typeface="Pretendard SemiBold" pitchFamily="34" charset="-122"/>
-                <a:cs typeface="Pretendard SemiBold" pitchFamily="34" charset="-120"/>
-              </a:rPr>
-              <a:t>h</a:t>
-            </a:r>
-            <a:endParaRPr lang="en-US" sz="950" dirty="0"/>
-          </a:p>
-        </p:txBody>
-      </p:sp>
-      <p:sp>
-        <p:nvSpPr>
-          <p:cNvPr id="10" name="Text 8"/>
-          <p:cNvSpPr txBox="1"/>
-          <p:nvPr/>
-        </p:nvSpPr>
-        <p:spPr>
-          <a:xfrm>
-            <a:off x="4599432" y="3520440"/>
-            <a:ext cx="1645920" cy="274320"/>
-          </a:xfrm>
-          <a:prstGeom prst="rect">
-            <a:avLst/>
-          </a:prstGeom>
-          <a:noFill/>
-          <a:ln/>
-        </p:spPr>
-        <p:txBody>
-          <a:bodyPr wrap="square" lIns="0" tIns="0" rIns="0" bIns="0" rtlCol="0" anchor="ctr"/>
-          <a:lstStyle/>
-          <a:p>
-            <a:pPr indent="0" marL="0">
-              <a:buNone/>
-            </a:pPr>
-            <a:r>
-              <a:rPr lang="en-US" sz="950" dirty="0">
-                <a:solidFill>
-                  <a:srgbClr val="707070"/>
-                </a:solidFill>
-                <a:latin typeface="Pretendard SemiBold" pitchFamily="34" charset="0"/>
-                <a:ea typeface="Pretendard SemiBold" pitchFamily="34" charset="-122"/>
-                <a:cs typeface="Pretendard SemiBold" pitchFamily="34" charset="-120"/>
-              </a:rPr>
-              <a:t>v</a:t>
-            </a:r>
-            <a:endParaRPr lang="en-US" sz="950" dirty="0"/>
-          </a:p>
-        </p:txBody>
-      </p:sp>
-      <p:sp>
-        <p:nvSpPr>
-          <p:cNvPr id="11" name="Shape 9"/>
+          <p:cNvPr id="10" name="Shape 8"/>
           <p:cNvSpPr/>
           <p:nvPr/>
         </p:nvSpPr>
         <p:spPr>
           <a:xfrm>
-            <a:off x="758952" y="3922776"/>
-            <a:ext cx="5486400" cy="0"/>
-          </a:xfrm>
-          <a:prstGeom prst="line">
-            <a:avLst/>
-          </a:prstGeom>
-          <a:noFill/>
-          <a:ln w="12700">
-            <a:solidFill>
-              <a:srgbClr val="E0E0E0"/>
-            </a:solidFill>
-            <a:prstDash val="solid"/>
-          </a:ln>
-        </p:spPr>
-      </p:sp>
-      <p:sp>
-        <p:nvSpPr>
-          <p:cNvPr id="12" name="Text 10"/>
-          <p:cNvSpPr txBox="1"/>
-          <p:nvPr/>
-        </p:nvSpPr>
-        <p:spPr>
-          <a:xfrm>
-            <a:off x="758952" y="4087368"/>
-            <a:ext cx="2194560" cy="365760"/>
-          </a:xfrm>
-          <a:prstGeom prst="rect">
-            <a:avLst/>
-          </a:prstGeom>
-          <a:noFill/>
-          <a:ln/>
-        </p:spPr>
-        <p:txBody>
-          <a:bodyPr wrap="square" lIns="0" tIns="0" rIns="0" bIns="0" rtlCol="0" anchor="ctr"/>
-          <a:lstStyle/>
-          <a:p>
-            <a:pPr indent="0" marL="0">
-              <a:buNone/>
-            </a:pPr>
-            <a:r>
-              <a:rPr lang="en-US" sz="1200" dirty="0">
-                <a:solidFill>
-                  <a:srgbClr val="141414"/>
-                </a:solidFill>
-                <a:latin typeface="Pretendard" pitchFamily="34" charset="0"/>
-                <a:ea typeface="Pretendard" pitchFamily="34" charset="-122"/>
-                <a:cs typeface="Pretendard" pitchFamily="34" charset="-120"/>
-              </a:rPr>
-              <a:t>아무것도</a:t>
-            </a:r>
-            <a:endParaRPr lang="en-US" sz="1200" dirty="0"/>
-          </a:p>
-        </p:txBody>
-      </p:sp>
-      <p:sp>
-        <p:nvSpPr>
-          <p:cNvPr id="13" name="Text 11"/>
-          <p:cNvSpPr txBox="1"/>
-          <p:nvPr/>
-        </p:nvSpPr>
-        <p:spPr>
-          <a:xfrm>
-            <a:off x="2953512" y="4087368"/>
-            <a:ext cx="1645920" cy="365760"/>
-          </a:xfrm>
-          <a:prstGeom prst="rect">
-            <a:avLst/>
-          </a:prstGeom>
-          <a:noFill/>
-          <a:ln/>
-        </p:spPr>
-        <p:txBody>
-          <a:bodyPr wrap="square" lIns="0" tIns="0" rIns="0" bIns="0" rtlCol="0" anchor="ctr"/>
-          <a:lstStyle/>
-          <a:p>
-            <a:pPr indent="0" marL="0">
-              <a:buNone/>
-            </a:pPr>
-            <a:r>
-              <a:rPr lang="en-US" sz="1200" dirty="0">
-                <a:solidFill>
-                  <a:srgbClr val="707070"/>
-                </a:solidFill>
-                <a:latin typeface="Consolas" pitchFamily="34" charset="0"/>
-                <a:ea typeface="Consolas" pitchFamily="34" charset="-122"/>
-                <a:cs typeface="Consolas" pitchFamily="34" charset="-120"/>
-              </a:rPr>
-              <a:t>0</a:t>
-            </a:r>
-            <a:endParaRPr lang="en-US" sz="1200" dirty="0"/>
-          </a:p>
-        </p:txBody>
-      </p:sp>
-      <p:sp>
-        <p:nvSpPr>
-          <p:cNvPr id="14" name="Text 12"/>
-          <p:cNvSpPr txBox="1"/>
-          <p:nvPr/>
-        </p:nvSpPr>
-        <p:spPr>
-          <a:xfrm>
-            <a:off x="4599432" y="4087368"/>
-            <a:ext cx="1645920" cy="365760"/>
-          </a:xfrm>
-          <a:prstGeom prst="rect">
-            <a:avLst/>
-          </a:prstGeom>
-          <a:noFill/>
-          <a:ln/>
-        </p:spPr>
-        <p:txBody>
-          <a:bodyPr wrap="square" lIns="0" tIns="0" rIns="0" bIns="0" rtlCol="0" anchor="ctr"/>
-          <a:lstStyle/>
-          <a:p>
-            <a:pPr indent="0" marL="0">
-              <a:buNone/>
-            </a:pPr>
-            <a:r>
-              <a:rPr lang="en-US" sz="1200" dirty="0">
-                <a:solidFill>
-                  <a:srgbClr val="707070"/>
-                </a:solidFill>
-                <a:latin typeface="Consolas" pitchFamily="34" charset="0"/>
-                <a:ea typeface="Consolas" pitchFamily="34" charset="-122"/>
-                <a:cs typeface="Consolas" pitchFamily="34" charset="-120"/>
-              </a:rPr>
-              <a:t>0</a:t>
-            </a:r>
-            <a:endParaRPr lang="en-US" sz="1200" dirty="0"/>
-          </a:p>
-        </p:txBody>
-      </p:sp>
-      <p:sp>
-        <p:nvSpPr>
-          <p:cNvPr id="15" name="Shape 13"/>
-          <p:cNvSpPr/>
-          <p:nvPr/>
-        </p:nvSpPr>
-        <p:spPr>
-          <a:xfrm>
-            <a:off x="758952" y="4562856"/>
-            <a:ext cx="5486400" cy="0"/>
-          </a:xfrm>
-          <a:prstGeom prst="line">
-            <a:avLst/>
-          </a:prstGeom>
-          <a:noFill/>
-          <a:ln w="12700">
-            <a:solidFill>
-              <a:srgbClr val="F0F0F0"/>
-            </a:solidFill>
-            <a:prstDash val="solid"/>
-          </a:ln>
-        </p:spPr>
-      </p:sp>
-      <p:sp>
-        <p:nvSpPr>
-          <p:cNvPr id="16" name="Text 14"/>
-          <p:cNvSpPr txBox="1"/>
-          <p:nvPr/>
-        </p:nvSpPr>
-        <p:spPr>
-          <a:xfrm>
-            <a:off x="758952" y="4672584"/>
-            <a:ext cx="2194560" cy="365760"/>
-          </a:xfrm>
-          <a:prstGeom prst="rect">
-            <a:avLst/>
-          </a:prstGeom>
-          <a:noFill/>
-          <a:ln/>
-        </p:spPr>
-        <p:txBody>
-          <a:bodyPr wrap="square" lIns="0" tIns="0" rIns="0" bIns="0" rtlCol="0" anchor="ctr"/>
-          <a:lstStyle/>
-          <a:p>
-            <a:pPr indent="0" marL="0">
-              <a:buNone/>
-            </a:pPr>
-            <a:r>
-              <a:rPr lang="en-US" sz="1200" dirty="0">
-                <a:solidFill>
-                  <a:srgbClr val="141414"/>
-                </a:solidFill>
-                <a:latin typeface="Pretendard" pitchFamily="34" charset="0"/>
-                <a:ea typeface="Pretendard" pitchFamily="34" charset="-122"/>
-                <a:cs typeface="Pretendard" pitchFamily="34" charset="-120"/>
-              </a:rPr>
-              <a:t>D 또는 →</a:t>
-            </a:r>
-            <a:endParaRPr lang="en-US" sz="1200" dirty="0"/>
-          </a:p>
-        </p:txBody>
-      </p:sp>
-      <p:sp>
-        <p:nvSpPr>
-          <p:cNvPr id="17" name="Text 15"/>
-          <p:cNvSpPr txBox="1"/>
-          <p:nvPr/>
-        </p:nvSpPr>
-        <p:spPr>
-          <a:xfrm>
-            <a:off x="2953512" y="4672584"/>
-            <a:ext cx="1645920" cy="365760"/>
-          </a:xfrm>
-          <a:prstGeom prst="rect">
-            <a:avLst/>
-          </a:prstGeom>
-          <a:noFill/>
-          <a:ln/>
-        </p:spPr>
-        <p:txBody>
-          <a:bodyPr wrap="square" lIns="0" tIns="0" rIns="0" bIns="0" rtlCol="0" anchor="ctr"/>
-          <a:lstStyle/>
-          <a:p>
-            <a:pPr indent="0" marL="0">
-              <a:buNone/>
-            </a:pPr>
-            <a:r>
-              <a:rPr lang="en-US" sz="1200" dirty="0">
-                <a:solidFill>
-                  <a:srgbClr val="707070"/>
-                </a:solidFill>
-                <a:latin typeface="Consolas" pitchFamily="34" charset="0"/>
-                <a:ea typeface="Consolas" pitchFamily="34" charset="-122"/>
-                <a:cs typeface="Consolas" pitchFamily="34" charset="-120"/>
-              </a:rPr>
-              <a:t>1</a:t>
-            </a:r>
-            <a:endParaRPr lang="en-US" sz="1200" dirty="0"/>
-          </a:p>
-        </p:txBody>
-      </p:sp>
-      <p:sp>
-        <p:nvSpPr>
-          <p:cNvPr id="18" name="Text 16"/>
-          <p:cNvSpPr txBox="1"/>
-          <p:nvPr/>
-        </p:nvSpPr>
-        <p:spPr>
-          <a:xfrm>
-            <a:off x="4599432" y="4672584"/>
-            <a:ext cx="1645920" cy="365760"/>
-          </a:xfrm>
-          <a:prstGeom prst="rect">
-            <a:avLst/>
-          </a:prstGeom>
-          <a:noFill/>
-          <a:ln/>
-        </p:spPr>
-        <p:txBody>
-          <a:bodyPr wrap="square" lIns="0" tIns="0" rIns="0" bIns="0" rtlCol="0" anchor="ctr"/>
-          <a:lstStyle/>
-          <a:p>
-            <a:pPr indent="0" marL="0">
-              <a:buNone/>
-            </a:pPr>
-            <a:r>
-              <a:rPr lang="en-US" sz="1200" dirty="0">
-                <a:solidFill>
-                  <a:srgbClr val="707070"/>
-                </a:solidFill>
-                <a:latin typeface="Consolas" pitchFamily="34" charset="0"/>
-                <a:ea typeface="Consolas" pitchFamily="34" charset="-122"/>
-                <a:cs typeface="Consolas" pitchFamily="34" charset="-120"/>
-              </a:rPr>
-              <a:t>0</a:t>
-            </a:r>
-            <a:endParaRPr lang="en-US" sz="1200" dirty="0"/>
-          </a:p>
-        </p:txBody>
-      </p:sp>
-      <p:sp>
-        <p:nvSpPr>
-          <p:cNvPr id="19" name="Shape 17"/>
-          <p:cNvSpPr/>
-          <p:nvPr/>
-        </p:nvSpPr>
-        <p:spPr>
-          <a:xfrm>
-            <a:off x="758952" y="5148072"/>
-            <a:ext cx="5486400" cy="0"/>
-          </a:xfrm>
-          <a:prstGeom prst="line">
-            <a:avLst/>
-          </a:prstGeom>
-          <a:noFill/>
-          <a:ln w="12700">
-            <a:solidFill>
-              <a:srgbClr val="F0F0F0"/>
-            </a:solidFill>
-            <a:prstDash val="solid"/>
-          </a:ln>
-        </p:spPr>
-      </p:sp>
-      <p:sp>
-        <p:nvSpPr>
-          <p:cNvPr id="20" name="Text 18"/>
-          <p:cNvSpPr txBox="1"/>
-          <p:nvPr/>
-        </p:nvSpPr>
-        <p:spPr>
-          <a:xfrm>
-            <a:off x="758952" y="5257800"/>
-            <a:ext cx="2194560" cy="365760"/>
-          </a:xfrm>
-          <a:prstGeom prst="rect">
-            <a:avLst/>
-          </a:prstGeom>
-          <a:noFill/>
-          <a:ln/>
-        </p:spPr>
-        <p:txBody>
-          <a:bodyPr wrap="square" lIns="0" tIns="0" rIns="0" bIns="0" rtlCol="0" anchor="ctr"/>
-          <a:lstStyle/>
-          <a:p>
-            <a:pPr indent="0" marL="0">
-              <a:buNone/>
-            </a:pPr>
-            <a:r>
-              <a:rPr lang="en-US" sz="1200" dirty="0">
-                <a:solidFill>
-                  <a:srgbClr val="141414"/>
-                </a:solidFill>
-                <a:latin typeface="Pretendard" pitchFamily="34" charset="0"/>
-                <a:ea typeface="Pretendard" pitchFamily="34" charset="-122"/>
-                <a:cs typeface="Pretendard" pitchFamily="34" charset="-120"/>
-              </a:rPr>
-              <a:t>A 또는 ←</a:t>
-            </a:r>
-            <a:endParaRPr lang="en-US" sz="1200" dirty="0"/>
-          </a:p>
-        </p:txBody>
-      </p:sp>
-      <p:sp>
-        <p:nvSpPr>
-          <p:cNvPr id="21" name="Text 19"/>
-          <p:cNvSpPr txBox="1"/>
-          <p:nvPr/>
-        </p:nvSpPr>
-        <p:spPr>
-          <a:xfrm>
-            <a:off x="2953512" y="5257800"/>
-            <a:ext cx="1645920" cy="365760"/>
-          </a:xfrm>
-          <a:prstGeom prst="rect">
-            <a:avLst/>
-          </a:prstGeom>
-          <a:noFill/>
-          <a:ln/>
-        </p:spPr>
-        <p:txBody>
-          <a:bodyPr wrap="square" lIns="0" tIns="0" rIns="0" bIns="0" rtlCol="0" anchor="ctr"/>
-          <a:lstStyle/>
-          <a:p>
-            <a:pPr indent="0" marL="0">
-              <a:buNone/>
-            </a:pPr>
-            <a:r>
-              <a:rPr lang="en-US" sz="1200" dirty="0">
-                <a:solidFill>
-                  <a:srgbClr val="707070"/>
-                </a:solidFill>
-                <a:latin typeface="Consolas" pitchFamily="34" charset="0"/>
-                <a:ea typeface="Consolas" pitchFamily="34" charset="-122"/>
-                <a:cs typeface="Consolas" pitchFamily="34" charset="-120"/>
-              </a:rPr>
-              <a:t>-1</a:t>
-            </a:r>
-            <a:endParaRPr lang="en-US" sz="1200" dirty="0"/>
-          </a:p>
-        </p:txBody>
-      </p:sp>
-      <p:sp>
-        <p:nvSpPr>
-          <p:cNvPr id="22" name="Text 20"/>
-          <p:cNvSpPr txBox="1"/>
-          <p:nvPr/>
-        </p:nvSpPr>
-        <p:spPr>
-          <a:xfrm>
-            <a:off x="4599432" y="5257800"/>
-            <a:ext cx="1645920" cy="365760"/>
-          </a:xfrm>
-          <a:prstGeom prst="rect">
-            <a:avLst/>
-          </a:prstGeom>
-          <a:noFill/>
-          <a:ln/>
-        </p:spPr>
-        <p:txBody>
-          <a:bodyPr wrap="square" lIns="0" tIns="0" rIns="0" bIns="0" rtlCol="0" anchor="ctr"/>
-          <a:lstStyle/>
-          <a:p>
-            <a:pPr indent="0" marL="0">
-              <a:buNone/>
-            </a:pPr>
-            <a:r>
-              <a:rPr lang="en-US" sz="1200" dirty="0">
-                <a:solidFill>
-                  <a:srgbClr val="707070"/>
-                </a:solidFill>
-                <a:latin typeface="Consolas" pitchFamily="34" charset="0"/>
-                <a:ea typeface="Consolas" pitchFamily="34" charset="-122"/>
-                <a:cs typeface="Consolas" pitchFamily="34" charset="-120"/>
-              </a:rPr>
-              <a:t>0</a:t>
-            </a:r>
-            <a:endParaRPr lang="en-US" sz="1200" dirty="0"/>
-          </a:p>
-        </p:txBody>
-      </p:sp>
-      <p:sp>
-        <p:nvSpPr>
-          <p:cNvPr id="23" name="Shape 21"/>
-          <p:cNvSpPr/>
-          <p:nvPr/>
-        </p:nvSpPr>
-        <p:spPr>
-          <a:xfrm>
-            <a:off x="758952" y="5733288"/>
-            <a:ext cx="5486400" cy="0"/>
-          </a:xfrm>
-          <a:prstGeom prst="line">
-            <a:avLst/>
-          </a:prstGeom>
-          <a:noFill/>
-          <a:ln w="12700">
-            <a:solidFill>
-              <a:srgbClr val="F0F0F0"/>
-            </a:solidFill>
-            <a:prstDash val="solid"/>
-          </a:ln>
-        </p:spPr>
-      </p:sp>
-      <p:sp>
-        <p:nvSpPr>
-          <p:cNvPr id="24" name="Text 22"/>
-          <p:cNvSpPr txBox="1"/>
-          <p:nvPr/>
-        </p:nvSpPr>
-        <p:spPr>
-          <a:xfrm>
-            <a:off x="758952" y="5843016"/>
-            <a:ext cx="2194560" cy="365760"/>
-          </a:xfrm>
-          <a:prstGeom prst="rect">
-            <a:avLst/>
-          </a:prstGeom>
-          <a:noFill/>
-          <a:ln/>
-        </p:spPr>
-        <p:txBody>
-          <a:bodyPr wrap="square" lIns="0" tIns="0" rIns="0" bIns="0" rtlCol="0" anchor="ctr"/>
-          <a:lstStyle/>
-          <a:p>
-            <a:pPr indent="0" marL="0">
-              <a:buNone/>
-            </a:pPr>
-            <a:r>
-              <a:rPr lang="en-US" sz="1200" dirty="0">
-                <a:solidFill>
-                  <a:srgbClr val="141414"/>
-                </a:solidFill>
-                <a:latin typeface="Pretendard" pitchFamily="34" charset="0"/>
-                <a:ea typeface="Pretendard" pitchFamily="34" charset="-122"/>
-                <a:cs typeface="Pretendard" pitchFamily="34" charset="-120"/>
-              </a:rPr>
-              <a:t>W 또는 ↑</a:t>
-            </a:r>
-            <a:endParaRPr lang="en-US" sz="1200" dirty="0"/>
-          </a:p>
-        </p:txBody>
-      </p:sp>
-      <p:sp>
-        <p:nvSpPr>
-          <p:cNvPr id="25" name="Text 23"/>
-          <p:cNvSpPr txBox="1"/>
-          <p:nvPr/>
-        </p:nvSpPr>
-        <p:spPr>
-          <a:xfrm>
-            <a:off x="2953512" y="5843016"/>
-            <a:ext cx="1645920" cy="365760"/>
-          </a:xfrm>
-          <a:prstGeom prst="rect">
-            <a:avLst/>
-          </a:prstGeom>
-          <a:noFill/>
-          <a:ln/>
-        </p:spPr>
-        <p:txBody>
-          <a:bodyPr wrap="square" lIns="0" tIns="0" rIns="0" bIns="0" rtlCol="0" anchor="ctr"/>
-          <a:lstStyle/>
-          <a:p>
-            <a:pPr indent="0" marL="0">
-              <a:buNone/>
-            </a:pPr>
-            <a:r>
-              <a:rPr lang="en-US" sz="1200" dirty="0">
-                <a:solidFill>
-                  <a:srgbClr val="707070"/>
-                </a:solidFill>
-                <a:latin typeface="Consolas" pitchFamily="34" charset="0"/>
-                <a:ea typeface="Consolas" pitchFamily="34" charset="-122"/>
-                <a:cs typeface="Consolas" pitchFamily="34" charset="-120"/>
-              </a:rPr>
-              <a:t>0</a:t>
-            </a:r>
-            <a:endParaRPr lang="en-US" sz="1200" dirty="0"/>
-          </a:p>
-        </p:txBody>
-      </p:sp>
-      <p:sp>
-        <p:nvSpPr>
-          <p:cNvPr id="26" name="Text 24"/>
-          <p:cNvSpPr txBox="1"/>
-          <p:nvPr/>
-        </p:nvSpPr>
-        <p:spPr>
-          <a:xfrm>
-            <a:off x="4599432" y="5843016"/>
-            <a:ext cx="1645920" cy="365760"/>
-          </a:xfrm>
-          <a:prstGeom prst="rect">
-            <a:avLst/>
-          </a:prstGeom>
-          <a:noFill/>
-          <a:ln/>
-        </p:spPr>
-        <p:txBody>
-          <a:bodyPr wrap="square" lIns="0" tIns="0" rIns="0" bIns="0" rtlCol="0" anchor="ctr"/>
-          <a:lstStyle/>
-          <a:p>
-            <a:pPr indent="0" marL="0">
-              <a:buNone/>
-            </a:pPr>
-            <a:r>
-              <a:rPr lang="en-US" sz="1200" dirty="0">
-                <a:solidFill>
-                  <a:srgbClr val="707070"/>
-                </a:solidFill>
-                <a:latin typeface="Consolas" pitchFamily="34" charset="0"/>
-                <a:ea typeface="Consolas" pitchFamily="34" charset="-122"/>
-                <a:cs typeface="Consolas" pitchFamily="34" charset="-120"/>
-              </a:rPr>
-              <a:t>1</a:t>
-            </a:r>
-            <a:endParaRPr lang="en-US" sz="1200" dirty="0"/>
-          </a:p>
-        </p:txBody>
-      </p:sp>
-      <p:sp>
-        <p:nvSpPr>
-          <p:cNvPr id="27" name="Shape 25"/>
-          <p:cNvSpPr/>
-          <p:nvPr/>
-        </p:nvSpPr>
-        <p:spPr>
-          <a:xfrm>
-            <a:off x="758952" y="6318504"/>
-            <a:ext cx="5486400" cy="0"/>
-          </a:xfrm>
-          <a:prstGeom prst="line">
-            <a:avLst/>
-          </a:prstGeom>
-          <a:noFill/>
-          <a:ln w="12700">
-            <a:solidFill>
-              <a:srgbClr val="F0F0F0"/>
-            </a:solidFill>
-            <a:prstDash val="solid"/>
-          </a:ln>
-        </p:spPr>
-      </p:sp>
-      <p:sp>
-        <p:nvSpPr>
-          <p:cNvPr id="28" name="Text 26"/>
-          <p:cNvSpPr txBox="1"/>
-          <p:nvPr/>
-        </p:nvSpPr>
-        <p:spPr>
-          <a:xfrm>
-            <a:off x="758952" y="6428232"/>
-            <a:ext cx="2194560" cy="365760"/>
-          </a:xfrm>
-          <a:prstGeom prst="rect">
-            <a:avLst/>
-          </a:prstGeom>
-          <a:noFill/>
-          <a:ln/>
-        </p:spPr>
-        <p:txBody>
-          <a:bodyPr wrap="square" lIns="0" tIns="0" rIns="0" bIns="0" rtlCol="0" anchor="ctr"/>
-          <a:lstStyle/>
-          <a:p>
-            <a:pPr indent="0" marL="0">
-              <a:buNone/>
-            </a:pPr>
-            <a:r>
-              <a:rPr lang="en-US" sz="1200" dirty="0">
-                <a:solidFill>
-                  <a:srgbClr val="141414"/>
-                </a:solidFill>
-                <a:latin typeface="Pretendard" pitchFamily="34" charset="0"/>
-                <a:ea typeface="Pretendard" pitchFamily="34" charset="-122"/>
-                <a:cs typeface="Pretendard" pitchFamily="34" charset="-120"/>
-              </a:rPr>
-              <a:t>S 또는 ↓</a:t>
-            </a:r>
-            <a:endParaRPr lang="en-US" sz="1200" dirty="0"/>
-          </a:p>
-        </p:txBody>
-      </p:sp>
-      <p:sp>
-        <p:nvSpPr>
-          <p:cNvPr id="29" name="Text 27"/>
-          <p:cNvSpPr txBox="1"/>
-          <p:nvPr/>
-        </p:nvSpPr>
-        <p:spPr>
-          <a:xfrm>
-            <a:off x="2953512" y="6428232"/>
-            <a:ext cx="1645920" cy="365760"/>
-          </a:xfrm>
-          <a:prstGeom prst="rect">
-            <a:avLst/>
-          </a:prstGeom>
-          <a:noFill/>
-          <a:ln/>
-        </p:spPr>
-        <p:txBody>
-          <a:bodyPr wrap="square" lIns="0" tIns="0" rIns="0" bIns="0" rtlCol="0" anchor="ctr"/>
-          <a:lstStyle/>
-          <a:p>
-            <a:pPr indent="0" marL="0">
-              <a:buNone/>
-            </a:pPr>
-            <a:r>
-              <a:rPr lang="en-US" sz="1200" dirty="0">
-                <a:solidFill>
-                  <a:srgbClr val="707070"/>
-                </a:solidFill>
-                <a:latin typeface="Consolas" pitchFamily="34" charset="0"/>
-                <a:ea typeface="Consolas" pitchFamily="34" charset="-122"/>
-                <a:cs typeface="Consolas" pitchFamily="34" charset="-120"/>
-              </a:rPr>
-              <a:t>0</a:t>
-            </a:r>
-            <a:endParaRPr lang="en-US" sz="1200" dirty="0"/>
-          </a:p>
-        </p:txBody>
-      </p:sp>
-      <p:sp>
-        <p:nvSpPr>
-          <p:cNvPr id="30" name="Text 28"/>
-          <p:cNvSpPr txBox="1"/>
-          <p:nvPr/>
-        </p:nvSpPr>
-        <p:spPr>
-          <a:xfrm>
-            <a:off x="4599432" y="6428232"/>
-            <a:ext cx="1645920" cy="365760"/>
-          </a:xfrm>
-          <a:prstGeom prst="rect">
-            <a:avLst/>
-          </a:prstGeom>
-          <a:noFill/>
-          <a:ln/>
-        </p:spPr>
-        <p:txBody>
-          <a:bodyPr wrap="square" lIns="0" tIns="0" rIns="0" bIns="0" rtlCol="0" anchor="ctr"/>
-          <a:lstStyle/>
-          <a:p>
-            <a:pPr indent="0" marL="0">
-              <a:buNone/>
-            </a:pPr>
-            <a:r>
-              <a:rPr lang="en-US" sz="1200" dirty="0">
-                <a:solidFill>
-                  <a:srgbClr val="707070"/>
-                </a:solidFill>
-                <a:latin typeface="Consolas" pitchFamily="34" charset="0"/>
-                <a:ea typeface="Consolas" pitchFamily="34" charset="-122"/>
-                <a:cs typeface="Consolas" pitchFamily="34" charset="-120"/>
-              </a:rPr>
-              <a:t>-1</a:t>
-            </a:r>
-            <a:endParaRPr lang="en-US" sz="1200" dirty="0"/>
-          </a:p>
-        </p:txBody>
-      </p:sp>
-      <p:sp>
-        <p:nvSpPr>
-          <p:cNvPr id="31" name="Shape 29"/>
-          <p:cNvSpPr/>
-          <p:nvPr/>
-        </p:nvSpPr>
-        <p:spPr>
-          <a:xfrm>
-            <a:off x="758952" y="6903720"/>
-            <a:ext cx="5486400" cy="0"/>
-          </a:xfrm>
-          <a:prstGeom prst="line">
-            <a:avLst/>
-          </a:prstGeom>
-          <a:noFill/>
-          <a:ln w="12700">
-            <a:solidFill>
-              <a:srgbClr val="F0F0F0"/>
-            </a:solidFill>
-            <a:prstDash val="solid"/>
-          </a:ln>
-        </p:spPr>
-      </p:sp>
-      <p:sp>
-        <p:nvSpPr>
-          <p:cNvPr id="32" name="Shape 30"/>
-          <p:cNvSpPr/>
-          <p:nvPr/>
-        </p:nvSpPr>
-        <p:spPr>
-          <a:xfrm>
-            <a:off x="6720840" y="1965960"/>
-            <a:ext cx="4711903" cy="2103120"/>
+            <a:off x="6537960" y="2331720"/>
+            <a:ext cx="4894783" cy="1463040"/>
           </a:xfrm>
           <a:prstGeom prst="roundRect">
             <a:avLst>
-              <a:gd name="adj" fmla="val 7261"/>
+              <a:gd name="adj" fmla="val 10438"/>
             </a:avLst>
           </a:prstGeom>
           <a:solidFill>
@@ -3489,14 +2836,14 @@
       </p:sp>
       <p:sp>
         <p:nvSpPr>
-          <p:cNvPr id="33" name="Text 31"/>
-          <p:cNvSpPr txBox="1"/>
-          <p:nvPr/>
-        </p:nvSpPr>
-        <p:spPr>
-          <a:xfrm>
-            <a:off x="6976872" y="2167128"/>
-            <a:ext cx="4199839" cy="1700784"/>
+          <p:cNvPr id="11" name="Text 9"/>
+          <p:cNvSpPr txBox="1"/>
+          <p:nvPr/>
+        </p:nvSpPr>
+        <p:spPr>
+          <a:xfrm>
+            <a:off x="6793992" y="2532888"/>
+            <a:ext cx="4382719" cy="1060704"/>
           </a:xfrm>
           <a:prstGeom prst="rect">
             <a:avLst/>
@@ -3523,7 +2870,7 @@
                 <a:ea typeface="Consolas" pitchFamily="34" charset="-122"/>
                 <a:cs typeface="Consolas" pitchFamily="34" charset="-120"/>
               </a:rPr>
-              <a:t>Vector3 dir = new Vector3(h, v, 0f);</a:t>
+              <a:t>[SerializeField] float moveSpeed = 3f;</a:t>
             </a:r>
             <a:endParaRPr lang="en-US" sz="1150" dirty="0"/>
           </a:p>
@@ -3555,7 +2902,7 @@
               <a:buNone/>
             </a:pPr>
             <a:r>
-              <a:rPr lang="en-US" sz="1150" dirty="0">
+              <a:rPr lang="en-US" sz="1150" b="1" dirty="0">
                 <a:solidFill>
                   <a:srgbClr val="141414"/>
                 </a:solidFill>
@@ -3563,19 +2910,217 @@
                 <a:ea typeface="Consolas" pitchFamily="34" charset="-122"/>
                 <a:cs typeface="Consolas" pitchFamily="34" charset="-120"/>
               </a:rPr>
-              <a:t>transform.position =</a:t>
+              <a:t>position + moveDir * moveSpeed * Time.deltaTime;</a:t>
             </a:r>
             <a:endParaRPr lang="en-US" sz="1150" dirty="0"/>
           </a:p>
-          <a:p>
-            <a:pPr indent="0" marL="0">
-              <a:lnSpc>
-                <a:spcPct val="132000"/>
-              </a:lnSpc>
-              <a:buNone/>
-            </a:pPr>
-            <a:r>
-              <a:rPr lang="en-US" sz="1150" dirty="0">
+        </p:txBody>
+      </p:sp>
+      <p:sp>
+        <p:nvSpPr>
+          <p:cNvPr id="12" name="Text 10"/>
+          <p:cNvSpPr txBox="1"/>
+          <p:nvPr/>
+        </p:nvSpPr>
+        <p:spPr>
+          <a:xfrm>
+            <a:off x="758952" y="4160520"/>
+            <a:ext cx="2743200" cy="274320"/>
+          </a:xfrm>
+          <a:prstGeom prst="rect">
+            <a:avLst/>
+          </a:prstGeom>
+          <a:noFill/>
+          <a:ln/>
+        </p:spPr>
+        <p:txBody>
+          <a:bodyPr wrap="square" lIns="0" tIns="0" rIns="0" bIns="0" rtlCol="0" anchor="ctr"/>
+          <a:lstStyle/>
+          <a:p>
+            <a:pPr indent="0" marL="0">
+              <a:buNone/>
+            </a:pPr>
+            <a:r>
+              <a:rPr lang="en-US" sz="950" dirty="0">
+                <a:solidFill>
+                  <a:srgbClr val="707070"/>
+                </a:solidFill>
+                <a:latin typeface="Pretendard SemiBold" pitchFamily="34" charset="0"/>
+                <a:ea typeface="Pretendard SemiBold" pitchFamily="34" charset="-122"/>
+                <a:cs typeface="Pretendard SemiBold" pitchFamily="34" charset="-120"/>
+              </a:rPr>
+              <a:t>스크립트</a:t>
+            </a:r>
+            <a:endParaRPr lang="en-US" sz="950" dirty="0"/>
+          </a:p>
+        </p:txBody>
+      </p:sp>
+      <p:sp>
+        <p:nvSpPr>
+          <p:cNvPr id="13" name="Text 11"/>
+          <p:cNvSpPr txBox="1"/>
+          <p:nvPr/>
+        </p:nvSpPr>
+        <p:spPr>
+          <a:xfrm>
+            <a:off x="3502152" y="4160520"/>
+            <a:ext cx="3108960" cy="274320"/>
+          </a:xfrm>
+          <a:prstGeom prst="rect">
+            <a:avLst/>
+          </a:prstGeom>
+          <a:noFill/>
+          <a:ln/>
+        </p:spPr>
+        <p:txBody>
+          <a:bodyPr wrap="square" lIns="0" tIns="0" rIns="0" bIns="0" rtlCol="0" anchor="ctr"/>
+          <a:lstStyle/>
+          <a:p>
+            <a:pPr indent="0" marL="0">
+              <a:buNone/>
+            </a:pPr>
+            <a:r>
+              <a:rPr lang="en-US" sz="950" dirty="0">
+                <a:solidFill>
+                  <a:srgbClr val="707070"/>
+                </a:solidFill>
+                <a:latin typeface="Pretendard SemiBold" pitchFamily="34" charset="0"/>
+                <a:ea typeface="Pretendard SemiBold" pitchFamily="34" charset="-122"/>
+                <a:cs typeface="Pretendard SemiBold" pitchFamily="34" charset="-120"/>
+              </a:rPr>
+              <a:t>이전</a:t>
+            </a:r>
+            <a:endParaRPr lang="en-US" sz="950" dirty="0"/>
+          </a:p>
+        </p:txBody>
+      </p:sp>
+      <p:sp>
+        <p:nvSpPr>
+          <p:cNvPr id="14" name="Text 12"/>
+          <p:cNvSpPr txBox="1"/>
+          <p:nvPr/>
+        </p:nvSpPr>
+        <p:spPr>
+          <a:xfrm>
+            <a:off x="6611112" y="4160520"/>
+            <a:ext cx="3108960" cy="274320"/>
+          </a:xfrm>
+          <a:prstGeom prst="rect">
+            <a:avLst/>
+          </a:prstGeom>
+          <a:noFill/>
+          <a:ln/>
+        </p:spPr>
+        <p:txBody>
+          <a:bodyPr wrap="square" lIns="0" tIns="0" rIns="0" bIns="0" rtlCol="0" anchor="ctr"/>
+          <a:lstStyle/>
+          <a:p>
+            <a:pPr indent="0" marL="0">
+              <a:buNone/>
+            </a:pPr>
+            <a:r>
+              <a:rPr lang="en-US" sz="950" dirty="0">
+                <a:solidFill>
+                  <a:srgbClr val="707070"/>
+                </a:solidFill>
+                <a:latin typeface="Pretendard SemiBold" pitchFamily="34" charset="0"/>
+                <a:ea typeface="Pretendard SemiBold" pitchFamily="34" charset="-122"/>
+                <a:cs typeface="Pretendard SemiBold" pitchFamily="34" charset="-120"/>
+              </a:rPr>
+              <a:t>이후</a:t>
+            </a:r>
+            <a:endParaRPr lang="en-US" sz="950" dirty="0"/>
+          </a:p>
+        </p:txBody>
+      </p:sp>
+      <p:sp>
+        <p:nvSpPr>
+          <p:cNvPr id="15" name="Text 13"/>
+          <p:cNvSpPr txBox="1"/>
+          <p:nvPr/>
+        </p:nvSpPr>
+        <p:spPr>
+          <a:xfrm>
+            <a:off x="9720072" y="4160520"/>
+            <a:ext cx="2606040" cy="274320"/>
+          </a:xfrm>
+          <a:prstGeom prst="rect">
+            <a:avLst/>
+          </a:prstGeom>
+          <a:noFill/>
+          <a:ln/>
+        </p:spPr>
+        <p:txBody>
+          <a:bodyPr wrap="square" lIns="0" tIns="0" rIns="0" bIns="0" rtlCol="0" anchor="ctr"/>
+          <a:lstStyle/>
+          <a:p>
+            <a:pPr indent="0" marL="0">
+              <a:buNone/>
+            </a:pPr>
+            <a:r>
+              <a:rPr lang="en-US" sz="950" dirty="0">
+                <a:solidFill>
+                  <a:srgbClr val="707070"/>
+                </a:solidFill>
+                <a:latin typeface="Pretendard SemiBold" pitchFamily="34" charset="0"/>
+                <a:ea typeface="Pretendard SemiBold" pitchFamily="34" charset="-122"/>
+                <a:cs typeface="Pretendard SemiBold" pitchFamily="34" charset="-120"/>
+              </a:rPr>
+              <a:t>뜻</a:t>
+            </a:r>
+            <a:endParaRPr lang="en-US" sz="950" dirty="0"/>
+          </a:p>
+        </p:txBody>
+      </p:sp>
+      <p:sp>
+        <p:nvSpPr>
+          <p:cNvPr id="16" name="Shape 14"/>
+          <p:cNvSpPr/>
+          <p:nvPr/>
+        </p:nvSpPr>
+        <p:spPr>
+          <a:xfrm>
+            <a:off x="758952" y="4562856"/>
+            <a:ext cx="10673791" cy="0"/>
+          </a:xfrm>
+          <a:prstGeom prst="line">
+            <a:avLst/>
+          </a:prstGeom>
+          <a:noFill/>
+          <a:ln w="12700">
+            <a:solidFill>
+              <a:srgbClr val="E0E0E0"/>
+            </a:solidFill>
+            <a:prstDash val="solid"/>
+          </a:ln>
+        </p:spPr>
+      </p:sp>
+      <p:sp>
+        <p:nvSpPr>
+          <p:cNvPr id="17" name="Text 15"/>
+          <p:cNvSpPr txBox="1"/>
+          <p:nvPr/>
+        </p:nvSpPr>
+        <p:spPr>
+          <a:xfrm>
+            <a:off x="758952" y="4727448"/>
+            <a:ext cx="2743200" cy="365760"/>
+          </a:xfrm>
+          <a:prstGeom prst="rect">
+            <a:avLst/>
+          </a:prstGeom>
+          <a:noFill/>
+          <a:ln/>
+        </p:spPr>
+        <p:txBody>
+          <a:bodyPr wrap="square" lIns="0" tIns="0" rIns="0" bIns="0" rtlCol="0" anchor="ctr"/>
+          <a:lstStyle/>
+          <a:p>
+            <a:pPr indent="0" marL="0">
+              <a:buNone/>
+            </a:pPr>
+            <a:r>
+              <a:rPr lang="en-US" sz="1200" dirty="0">
                 <a:solidFill>
                   <a:srgbClr val="141414"/>
                 </a:solidFill>
@@ -3583,96 +3128,112 @@
                 <a:ea typeface="Consolas" pitchFamily="34" charset="-122"/>
                 <a:cs typeface="Consolas" pitchFamily="34" charset="-120"/>
               </a:rPr>
-              <a:t>    transform.position</a:t>
-            </a:r>
-            <a:endParaRPr lang="en-US" sz="1150" dirty="0"/>
-          </a:p>
-          <a:p>
-            <a:pPr indent="0" marL="0">
-              <a:lnSpc>
-                <a:spcPct val="132000"/>
-              </a:lnSpc>
-              <a:buNone/>
-            </a:pPr>
-            <a:r>
-              <a:rPr lang="en-US" sz="1150" b="1" dirty="0">
-                <a:solidFill>
-                  <a:srgbClr val="141414"/>
+              <a:t>Spinner</a:t>
+            </a:r>
+            <a:endParaRPr lang="en-US" sz="1200" dirty="0"/>
+          </a:p>
+        </p:txBody>
+      </p:sp>
+      <p:sp>
+        <p:nvSpPr>
+          <p:cNvPr id="18" name="Text 16"/>
+          <p:cNvSpPr txBox="1"/>
+          <p:nvPr/>
+        </p:nvSpPr>
+        <p:spPr>
+          <a:xfrm>
+            <a:off x="3502152" y="4727448"/>
+            <a:ext cx="3108960" cy="365760"/>
+          </a:xfrm>
+          <a:prstGeom prst="rect">
+            <a:avLst/>
+          </a:prstGeom>
+          <a:noFill/>
+          <a:ln/>
+        </p:spPr>
+        <p:txBody>
+          <a:bodyPr wrap="square" lIns="0" tIns="0" rIns="0" bIns="0" rtlCol="0" anchor="ctr"/>
+          <a:lstStyle/>
+          <a:p>
+            <a:pPr indent="0" marL="0">
+              <a:buNone/>
+            </a:pPr>
+            <a:r>
+              <a:rPr lang="en-US" sz="1200" dirty="0">
+                <a:solidFill>
+                  <a:srgbClr val="707070"/>
                 </a:solidFill>
                 <a:latin typeface="Consolas" pitchFamily="34" charset="0"/>
                 <a:ea typeface="Consolas" pitchFamily="34" charset="-122"/>
                 <a:cs typeface="Consolas" pitchFamily="34" charset="-120"/>
               </a:rPr>
-              <a:t>    + dir * moveSpeed * Time.deltaTime;</a:t>
-            </a:r>
-            <a:endParaRPr lang="en-US" sz="1150" dirty="0"/>
-          </a:p>
-        </p:txBody>
-      </p:sp>
-      <p:sp>
-        <p:nvSpPr>
-          <p:cNvPr id="34" name="Text 32"/>
-          <p:cNvSpPr txBox="1"/>
-          <p:nvPr/>
-        </p:nvSpPr>
-        <p:spPr>
-          <a:xfrm>
-            <a:off x="6720840" y="4343400"/>
-            <a:ext cx="4711903" cy="402336"/>
-          </a:xfrm>
-          <a:prstGeom prst="rect">
-            <a:avLst/>
-          </a:prstGeom>
-          <a:noFill/>
-          <a:ln/>
-        </p:spPr>
-        <p:txBody>
-          <a:bodyPr wrap="square" lIns="0" tIns="0" rIns="0" bIns="0" rtlCol="0" anchor="ctr"/>
-          <a:lstStyle/>
-          <a:p>
-            <a:pPr indent="0" marL="0">
-              <a:buNone/>
-            </a:pPr>
-            <a:r>
-              <a:rPr lang="en-US" sz="1900" dirty="0">
+              <a:t>rotateStep 1.5</a:t>
+            </a:r>
+            <a:endParaRPr lang="en-US" sz="1200" dirty="0"/>
+          </a:p>
+        </p:txBody>
+      </p:sp>
+      <p:sp>
+        <p:nvSpPr>
+          <p:cNvPr id="19" name="Text 17"/>
+          <p:cNvSpPr txBox="1"/>
+          <p:nvPr/>
+        </p:nvSpPr>
+        <p:spPr>
+          <a:xfrm>
+            <a:off x="6611112" y="4727448"/>
+            <a:ext cx="3108960" cy="365760"/>
+          </a:xfrm>
+          <a:prstGeom prst="rect">
+            <a:avLst/>
+          </a:prstGeom>
+          <a:noFill/>
+          <a:ln/>
+        </p:spPr>
+        <p:txBody>
+          <a:bodyPr wrap="square" lIns="0" tIns="0" rIns="0" bIns="0" rtlCol="0" anchor="ctr"/>
+          <a:lstStyle/>
+          <a:p>
+            <a:pPr indent="0" marL="0">
+              <a:buNone/>
+            </a:pPr>
+            <a:r>
+              <a:rPr lang="en-US" sz="1200" dirty="0">
                 <a:solidFill>
                   <a:srgbClr val="141414"/>
                 </a:solidFill>
-                <a:latin typeface="Pretendard SemiBold" pitchFamily="34" charset="0"/>
-                <a:ea typeface="Pretendard SemiBold" pitchFamily="34" charset="-122"/>
-                <a:cs typeface="Pretendard SemiBold" pitchFamily="34" charset="-120"/>
-              </a:rPr>
-              <a:t>새로 배운 건 첫 두 줄뿐이다.</a:t>
-            </a:r>
-            <a:endParaRPr lang="en-US" sz="1900" dirty="0"/>
-          </a:p>
-        </p:txBody>
-      </p:sp>
-      <p:sp>
-        <p:nvSpPr>
-          <p:cNvPr id="35" name="Text 33"/>
-          <p:cNvSpPr txBox="1"/>
-          <p:nvPr/>
-        </p:nvSpPr>
-        <p:spPr>
-          <a:xfrm>
-            <a:off x="6720840" y="4800600"/>
-            <a:ext cx="4711903" cy="914400"/>
-          </a:xfrm>
-          <a:prstGeom prst="rect">
-            <a:avLst/>
-          </a:prstGeom>
-          <a:noFill/>
-          <a:ln/>
-        </p:spPr>
-        <p:txBody>
-          <a:bodyPr wrap="square" lIns="0" tIns="0" rIns="0" bIns="0" rtlCol="0" anchor="ctr"/>
-          <a:lstStyle/>
-          <a:p>
-            <a:pPr indent="0" marL="0">
-              <a:lnSpc>
-                <a:spcPct val="138000"/>
-              </a:lnSpc>
+                <a:latin typeface="Consolas" pitchFamily="34" charset="0"/>
+                <a:ea typeface="Consolas" pitchFamily="34" charset="-122"/>
+                <a:cs typeface="Consolas" pitchFamily="34" charset="-120"/>
+              </a:rPr>
+              <a:t>rotateSpeed 90</a:t>
+            </a:r>
+            <a:endParaRPr lang="en-US" sz="1200" dirty="0"/>
+          </a:p>
+        </p:txBody>
+      </p:sp>
+      <p:sp>
+        <p:nvSpPr>
+          <p:cNvPr id="20" name="Text 18"/>
+          <p:cNvSpPr txBox="1"/>
+          <p:nvPr/>
+        </p:nvSpPr>
+        <p:spPr>
+          <a:xfrm>
+            <a:off x="9720072" y="4727448"/>
+            <a:ext cx="2606040" cy="365760"/>
+          </a:xfrm>
+          <a:prstGeom prst="rect">
+            <a:avLst/>
+          </a:prstGeom>
+          <a:noFill/>
+          <a:ln/>
+        </p:spPr>
+        <p:txBody>
+          <a:bodyPr wrap="square" lIns="0" tIns="0" rIns="0" bIns="0" rtlCol="0" anchor="ctr"/>
+          <a:lstStyle/>
+          <a:p>
+            <a:pPr indent="0" marL="0">
               <a:buNone/>
             </a:pPr>
             <a:r>
@@ -3680,15 +3241,396 @@
                 <a:solidFill>
                   <a:srgbClr val="707070"/>
                 </a:solidFill>
-                <a:latin typeface="Pretendard Light" pitchFamily="34" charset="0"/>
-                <a:ea typeface="Pretendard Light" pitchFamily="34" charset="-122"/>
-                <a:cs typeface="Pretendard Light" pitchFamily="34" charset="-120"/>
-              </a:rPr>
-              <a:t>나머지는 038·039에서 한 그대로다. 키를 안 누르면 dir이 (0,0,0)이라 안 움직인다 — 조건문이 필요 없다.</a:t>
+                <a:latin typeface="Pretendard" pitchFamily="34" charset="0"/>
+                <a:ea typeface="Pretendard" pitchFamily="34" charset="-122"/>
+                <a:cs typeface="Pretendard" pitchFamily="34" charset="-120"/>
+              </a:rPr>
+              <a:t>4초에 한 바퀴</a:t>
             </a:r>
             <a:endParaRPr lang="en-US" sz="1200" dirty="0"/>
           </a:p>
         </p:txBody>
+      </p:sp>
+      <p:sp>
+        <p:nvSpPr>
+          <p:cNvPr id="21" name="Shape 19"/>
+          <p:cNvSpPr/>
+          <p:nvPr/>
+        </p:nvSpPr>
+        <p:spPr>
+          <a:xfrm>
+            <a:off x="758952" y="5202936"/>
+            <a:ext cx="10673791" cy="0"/>
+          </a:xfrm>
+          <a:prstGeom prst="line">
+            <a:avLst/>
+          </a:prstGeom>
+          <a:noFill/>
+          <a:ln w="12700">
+            <a:solidFill>
+              <a:srgbClr val="F0F0F0"/>
+            </a:solidFill>
+            <a:prstDash val="solid"/>
+          </a:ln>
+        </p:spPr>
+      </p:sp>
+      <p:sp>
+        <p:nvSpPr>
+          <p:cNvPr id="22" name="Text 20"/>
+          <p:cNvSpPr txBox="1"/>
+          <p:nvPr/>
+        </p:nvSpPr>
+        <p:spPr>
+          <a:xfrm>
+            <a:off x="758952" y="5312664"/>
+            <a:ext cx="2743200" cy="365760"/>
+          </a:xfrm>
+          <a:prstGeom prst="rect">
+            <a:avLst/>
+          </a:prstGeom>
+          <a:noFill/>
+          <a:ln/>
+        </p:spPr>
+        <p:txBody>
+          <a:bodyPr wrap="square" lIns="0" tIns="0" rIns="0" bIns="0" rtlCol="0" anchor="ctr"/>
+          <a:lstStyle/>
+          <a:p>
+            <a:pPr indent="0" marL="0">
+              <a:buNone/>
+            </a:pPr>
+            <a:r>
+              <a:rPr lang="en-US" sz="1200" dirty="0">
+                <a:solidFill>
+                  <a:srgbClr val="141414"/>
+                </a:solidFill>
+                <a:latin typeface="Consolas" pitchFamily="34" charset="0"/>
+                <a:ea typeface="Consolas" pitchFamily="34" charset="-122"/>
+                <a:cs typeface="Consolas" pitchFamily="34" charset="-120"/>
+              </a:rPr>
+              <a:t>Bouncer</a:t>
+            </a:r>
+            <a:endParaRPr lang="en-US" sz="1200" dirty="0"/>
+          </a:p>
+        </p:txBody>
+      </p:sp>
+      <p:sp>
+        <p:nvSpPr>
+          <p:cNvPr id="23" name="Text 21"/>
+          <p:cNvSpPr txBox="1"/>
+          <p:nvPr/>
+        </p:nvSpPr>
+        <p:spPr>
+          <a:xfrm>
+            <a:off x="3502152" y="5312664"/>
+            <a:ext cx="3108960" cy="365760"/>
+          </a:xfrm>
+          <a:prstGeom prst="rect">
+            <a:avLst/>
+          </a:prstGeom>
+          <a:noFill/>
+          <a:ln/>
+        </p:spPr>
+        <p:txBody>
+          <a:bodyPr wrap="square" lIns="0" tIns="0" rIns="0" bIns="0" rtlCol="0" anchor="ctr"/>
+          <a:lstStyle/>
+          <a:p>
+            <a:pPr indent="0" marL="0">
+              <a:buNone/>
+            </a:pPr>
+            <a:r>
+              <a:rPr lang="en-US" sz="1200" dirty="0">
+                <a:solidFill>
+                  <a:srgbClr val="707070"/>
+                </a:solidFill>
+                <a:latin typeface="Consolas" pitchFamily="34" charset="0"/>
+                <a:ea typeface="Consolas" pitchFamily="34" charset="-122"/>
+                <a:cs typeface="Consolas" pitchFamily="34" charset="-120"/>
+              </a:rPr>
+              <a:t>scaleStep 0.01</a:t>
+            </a:r>
+            <a:endParaRPr lang="en-US" sz="1200" dirty="0"/>
+          </a:p>
+        </p:txBody>
+      </p:sp>
+      <p:sp>
+        <p:nvSpPr>
+          <p:cNvPr id="24" name="Text 22"/>
+          <p:cNvSpPr txBox="1"/>
+          <p:nvPr/>
+        </p:nvSpPr>
+        <p:spPr>
+          <a:xfrm>
+            <a:off x="6611112" y="5312664"/>
+            <a:ext cx="3108960" cy="365760"/>
+          </a:xfrm>
+          <a:prstGeom prst="rect">
+            <a:avLst/>
+          </a:prstGeom>
+          <a:noFill/>
+          <a:ln/>
+        </p:spPr>
+        <p:txBody>
+          <a:bodyPr wrap="square" lIns="0" tIns="0" rIns="0" bIns="0" rtlCol="0" anchor="ctr"/>
+          <a:lstStyle/>
+          <a:p>
+            <a:pPr indent="0" marL="0">
+              <a:buNone/>
+            </a:pPr>
+            <a:r>
+              <a:rPr lang="en-US" sz="1200" dirty="0">
+                <a:solidFill>
+                  <a:srgbClr val="141414"/>
+                </a:solidFill>
+                <a:latin typeface="Consolas" pitchFamily="34" charset="0"/>
+                <a:ea typeface="Consolas" pitchFamily="34" charset="-122"/>
+                <a:cs typeface="Consolas" pitchFamily="34" charset="-120"/>
+              </a:rPr>
+              <a:t>scaleSpeed 0.5</a:t>
+            </a:r>
+            <a:endParaRPr lang="en-US" sz="1200" dirty="0"/>
+          </a:p>
+        </p:txBody>
+      </p:sp>
+      <p:sp>
+        <p:nvSpPr>
+          <p:cNvPr id="25" name="Text 23"/>
+          <p:cNvSpPr txBox="1"/>
+          <p:nvPr/>
+        </p:nvSpPr>
+        <p:spPr>
+          <a:xfrm>
+            <a:off x="9720072" y="5312664"/>
+            <a:ext cx="2606040" cy="365760"/>
+          </a:xfrm>
+          <a:prstGeom prst="rect">
+            <a:avLst/>
+          </a:prstGeom>
+          <a:noFill/>
+          <a:ln/>
+        </p:spPr>
+        <p:txBody>
+          <a:bodyPr wrap="square" lIns="0" tIns="0" rIns="0" bIns="0" rtlCol="0" anchor="ctr"/>
+          <a:lstStyle/>
+          <a:p>
+            <a:pPr indent="0" marL="0">
+              <a:buNone/>
+            </a:pPr>
+            <a:r>
+              <a:rPr lang="en-US" sz="1200" dirty="0">
+                <a:solidFill>
+                  <a:srgbClr val="707070"/>
+                </a:solidFill>
+                <a:latin typeface="Pretendard" pitchFamily="34" charset="0"/>
+                <a:ea typeface="Pretendard" pitchFamily="34" charset="-122"/>
+                <a:cs typeface="Pretendard" pitchFamily="34" charset="-120"/>
+              </a:rPr>
+              <a:t>1초에 0.5씩</a:t>
+            </a:r>
+            <a:endParaRPr lang="en-US" sz="1200" dirty="0"/>
+          </a:p>
+        </p:txBody>
+      </p:sp>
+      <p:sp>
+        <p:nvSpPr>
+          <p:cNvPr id="26" name="Shape 24"/>
+          <p:cNvSpPr/>
+          <p:nvPr/>
+        </p:nvSpPr>
+        <p:spPr>
+          <a:xfrm>
+            <a:off x="758952" y="5788152"/>
+            <a:ext cx="10673791" cy="0"/>
+          </a:xfrm>
+          <a:prstGeom prst="line">
+            <a:avLst/>
+          </a:prstGeom>
+          <a:noFill/>
+          <a:ln w="12700">
+            <a:solidFill>
+              <a:srgbClr val="F0F0F0"/>
+            </a:solidFill>
+            <a:prstDash val="solid"/>
+          </a:ln>
+        </p:spPr>
+      </p:sp>
+      <p:sp>
+        <p:nvSpPr>
+          <p:cNvPr id="27" name="Text 25"/>
+          <p:cNvSpPr txBox="1"/>
+          <p:nvPr/>
+        </p:nvSpPr>
+        <p:spPr>
+          <a:xfrm>
+            <a:off x="758952" y="5897880"/>
+            <a:ext cx="2743200" cy="365760"/>
+          </a:xfrm>
+          <a:prstGeom prst="rect">
+            <a:avLst/>
+          </a:prstGeom>
+          <a:noFill/>
+          <a:ln/>
+        </p:spPr>
+        <p:txBody>
+          <a:bodyPr wrap="square" lIns="0" tIns="0" rIns="0" bIns="0" rtlCol="0" anchor="ctr"/>
+          <a:lstStyle/>
+          <a:p>
+            <a:pPr indent="0" marL="0">
+              <a:buNone/>
+            </a:pPr>
+            <a:r>
+              <a:rPr lang="en-US" sz="1200" dirty="0">
+                <a:solidFill>
+                  <a:srgbClr val="141414"/>
+                </a:solidFill>
+                <a:latin typeface="Consolas" pitchFamily="34" charset="0"/>
+                <a:ea typeface="Consolas" pitchFamily="34" charset="-122"/>
+                <a:cs typeface="Consolas" pitchFamily="34" charset="-120"/>
+              </a:rPr>
+              <a:t>Mover</a:t>
+            </a:r>
+            <a:endParaRPr lang="en-US" sz="1200" dirty="0"/>
+          </a:p>
+        </p:txBody>
+      </p:sp>
+      <p:sp>
+        <p:nvSpPr>
+          <p:cNvPr id="28" name="Text 26"/>
+          <p:cNvSpPr txBox="1"/>
+          <p:nvPr/>
+        </p:nvSpPr>
+        <p:spPr>
+          <a:xfrm>
+            <a:off x="3502152" y="5897880"/>
+            <a:ext cx="3108960" cy="365760"/>
+          </a:xfrm>
+          <a:prstGeom prst="rect">
+            <a:avLst/>
+          </a:prstGeom>
+          <a:noFill/>
+          <a:ln/>
+        </p:spPr>
+        <p:txBody>
+          <a:bodyPr wrap="square" lIns="0" tIns="0" rIns="0" bIns="0" rtlCol="0" anchor="ctr"/>
+          <a:lstStyle/>
+          <a:p>
+            <a:pPr indent="0" marL="0">
+              <a:buNone/>
+            </a:pPr>
+            <a:r>
+              <a:rPr lang="en-US" sz="1200" dirty="0">
+                <a:solidFill>
+                  <a:srgbClr val="707070"/>
+                </a:solidFill>
+                <a:latin typeface="Consolas" pitchFamily="34" charset="0"/>
+                <a:ea typeface="Consolas" pitchFamily="34" charset="-122"/>
+                <a:cs typeface="Consolas" pitchFamily="34" charset="-120"/>
+              </a:rPr>
+              <a:t>moveStep 0.05</a:t>
+            </a:r>
+            <a:endParaRPr lang="en-US" sz="1200" dirty="0"/>
+          </a:p>
+        </p:txBody>
+      </p:sp>
+      <p:sp>
+        <p:nvSpPr>
+          <p:cNvPr id="29" name="Text 27"/>
+          <p:cNvSpPr txBox="1"/>
+          <p:nvPr/>
+        </p:nvSpPr>
+        <p:spPr>
+          <a:xfrm>
+            <a:off x="6611112" y="5897880"/>
+            <a:ext cx="3108960" cy="365760"/>
+          </a:xfrm>
+          <a:prstGeom prst="rect">
+            <a:avLst/>
+          </a:prstGeom>
+          <a:noFill/>
+          <a:ln/>
+        </p:spPr>
+        <p:txBody>
+          <a:bodyPr wrap="square" lIns="0" tIns="0" rIns="0" bIns="0" rtlCol="0" anchor="ctr"/>
+          <a:lstStyle/>
+          <a:p>
+            <a:pPr indent="0" marL="0">
+              <a:buNone/>
+            </a:pPr>
+            <a:r>
+              <a:rPr lang="en-US" sz="1200" dirty="0">
+                <a:solidFill>
+                  <a:srgbClr val="141414"/>
+                </a:solidFill>
+                <a:latin typeface="Consolas" pitchFamily="34" charset="0"/>
+                <a:ea typeface="Consolas" pitchFamily="34" charset="-122"/>
+                <a:cs typeface="Consolas" pitchFamily="34" charset="-120"/>
+              </a:rPr>
+              <a:t>moveSpeed 3</a:t>
+            </a:r>
+            <a:endParaRPr lang="en-US" sz="1200" dirty="0"/>
+          </a:p>
+        </p:txBody>
+      </p:sp>
+      <p:sp>
+        <p:nvSpPr>
+          <p:cNvPr id="30" name="Text 28"/>
+          <p:cNvSpPr txBox="1"/>
+          <p:nvPr/>
+        </p:nvSpPr>
+        <p:spPr>
+          <a:xfrm>
+            <a:off x="9720072" y="5897880"/>
+            <a:ext cx="2606040" cy="365760"/>
+          </a:xfrm>
+          <a:prstGeom prst="rect">
+            <a:avLst/>
+          </a:prstGeom>
+          <a:noFill/>
+          <a:ln/>
+        </p:spPr>
+        <p:txBody>
+          <a:bodyPr wrap="square" lIns="0" tIns="0" rIns="0" bIns="0" rtlCol="0" anchor="ctr"/>
+          <a:lstStyle/>
+          <a:p>
+            <a:pPr indent="0" marL="0">
+              <a:buNone/>
+            </a:pPr>
+            <a:r>
+              <a:rPr lang="en-US" sz="1200" dirty="0">
+                <a:solidFill>
+                  <a:srgbClr val="707070"/>
+                </a:solidFill>
+                <a:latin typeface="Pretendard" pitchFamily="34" charset="0"/>
+                <a:ea typeface="Pretendard" pitchFamily="34" charset="-122"/>
+                <a:cs typeface="Pretendard" pitchFamily="34" charset="-120"/>
+              </a:rPr>
+              <a:t>1초에 3만큼</a:t>
+            </a:r>
+            <a:endParaRPr lang="en-US" sz="1200" dirty="0"/>
+          </a:p>
+        </p:txBody>
+      </p:sp>
+      <p:sp>
+        <p:nvSpPr>
+          <p:cNvPr id="31" name="Shape 29"/>
+          <p:cNvSpPr/>
+          <p:nvPr/>
+        </p:nvSpPr>
+        <p:spPr>
+          <a:xfrm>
+            <a:off x="758952" y="6373368"/>
+            <a:ext cx="10673791" cy="0"/>
+          </a:xfrm>
+          <a:prstGeom prst="line">
+            <a:avLst/>
+          </a:prstGeom>
+          <a:noFill/>
+          <a:ln w="12700">
+            <a:solidFill>
+              <a:srgbClr val="F0F0F0"/>
+            </a:solidFill>
+            <a:prstDash val="solid"/>
+          </a:ln>
+        </p:spPr>
       </p:sp>
     </p:spTree>
   </p:cSld>
@@ -3821,7 +3763,7 @@
                 <a:ea typeface="Pretendard SemiBold" pitchFamily="34" charset="-122"/>
                 <a:cs typeface="Pretendard SemiBold" pitchFamily="34" charset="-120"/>
               </a:rPr>
-              <a:t>실습 — WASD로 움직이는 캐릭터.</a:t>
+              <a:t>키를 누르면 숫자가 나온다.</a:t>
             </a:r>
             <a:endParaRPr lang="en-US" sz="2600" dirty="0"/>
           </a:p>
@@ -3860,7 +3802,7 @@
                 <a:ea typeface="Pretendard Light" pitchFamily="34" charset="-122"/>
                 <a:cs typeface="Pretendard Light" pitchFamily="34" charset="-120"/>
               </a:rPr>
-              <a:t>8주를 기다린 결과물이다. 서두르지 않는다.</a:t>
+              <a:t>032에서 배운 그대로다. 양수면 오른쪽, 음수면 왼쪽.</a:t>
             </a:r>
             <a:endParaRPr lang="en-US" sz="1500" dirty="0"/>
           </a:p>
@@ -3875,11 +3817,11 @@
         <p:spPr>
           <a:xfrm>
             <a:off x="758952" y="1965960"/>
-            <a:ext cx="6035040" cy="3566160"/>
+            <a:ext cx="5486400" cy="1280160"/>
           </a:xfrm>
           <a:prstGeom prst="roundRect">
             <a:avLst>
-              <a:gd name="adj" fmla="val 4282"/>
+              <a:gd name="adj" fmla="val 11929"/>
             </a:avLst>
           </a:prstGeom>
           <a:solidFill>
@@ -3902,7 +3844,7 @@
         <p:spPr>
           <a:xfrm>
             <a:off x="1014984" y="2167128"/>
-            <a:ext cx="5522976" cy="3163824"/>
+            <a:ext cx="4974336" cy="877824"/>
           </a:xfrm>
           <a:prstGeom prst="rect">
             <a:avLst/>
@@ -3921,7 +3863,7 @@
               <a:buNone/>
             </a:pPr>
             <a:r>
-              <a:rPr lang="en-US" sz="1150" dirty="0">
+              <a:rPr lang="en-US" sz="1150" b="1" dirty="0">
                 <a:solidFill>
                   <a:srgbClr val="141414"/>
                 </a:solidFill>
@@ -3929,7 +3871,7 @@
                 <a:ea typeface="Consolas" pitchFamily="34" charset="-122"/>
                 <a:cs typeface="Consolas" pitchFamily="34" charset="-120"/>
               </a:rPr>
-              <a:t>public class PlayerMove : MonoBehaviour</a:t>
+              <a:t>float h = Input.GetAxisRaw("Horizontal");</a:t>
             </a:r>
             <a:endParaRPr lang="en-US" sz="1150" dirty="0"/>
           </a:p>
@@ -3941,7 +3883,7 @@
               <a:buNone/>
             </a:pPr>
             <a:r>
-              <a:rPr lang="en-US" sz="1150" dirty="0">
+              <a:rPr lang="en-US" sz="1150" b="1" dirty="0">
                 <a:solidFill>
                   <a:srgbClr val="141414"/>
                 </a:solidFill>
@@ -3949,119 +3891,536 @@
                 <a:ea typeface="Consolas" pitchFamily="34" charset="-122"/>
                 <a:cs typeface="Consolas" pitchFamily="34" charset="-120"/>
               </a:rPr>
-              <a:t>{</a:t>
+              <a:t>float v = Input.GetAxisRaw("Vertical");</a:t>
             </a:r>
             <a:endParaRPr lang="en-US" sz="1150" dirty="0"/>
           </a:p>
-          <a:p>
-            <a:pPr indent="0" marL="0">
-              <a:lnSpc>
-                <a:spcPct val="132000"/>
-              </a:lnSpc>
-              <a:buNone/>
-            </a:pPr>
-            <a:r>
-              <a:rPr lang="en-US" sz="1150" dirty="0">
+        </p:txBody>
+      </p:sp>
+      <p:sp>
+        <p:nvSpPr>
+          <p:cNvPr id="8" name="Text 6"/>
+          <p:cNvSpPr txBox="1"/>
+          <p:nvPr/>
+        </p:nvSpPr>
+        <p:spPr>
+          <a:xfrm>
+            <a:off x="758952" y="3520440"/>
+            <a:ext cx="2194560" cy="274320"/>
+          </a:xfrm>
+          <a:prstGeom prst="rect">
+            <a:avLst/>
+          </a:prstGeom>
+          <a:noFill/>
+          <a:ln/>
+        </p:spPr>
+        <p:txBody>
+          <a:bodyPr wrap="square" lIns="0" tIns="0" rIns="0" bIns="0" rtlCol="0" anchor="ctr"/>
+          <a:lstStyle/>
+          <a:p>
+            <a:pPr indent="0" marL="0">
+              <a:buNone/>
+            </a:pPr>
+            <a:r>
+              <a:rPr lang="en-US" sz="950" dirty="0">
+                <a:solidFill>
+                  <a:srgbClr val="707070"/>
+                </a:solidFill>
+                <a:latin typeface="Pretendard SemiBold" pitchFamily="34" charset="0"/>
+                <a:ea typeface="Pretendard SemiBold" pitchFamily="34" charset="-122"/>
+                <a:cs typeface="Pretendard SemiBold" pitchFamily="34" charset="-120"/>
+              </a:rPr>
+              <a:t>누르는 키</a:t>
+            </a:r>
+            <a:endParaRPr lang="en-US" sz="950" dirty="0"/>
+          </a:p>
+        </p:txBody>
+      </p:sp>
+      <p:sp>
+        <p:nvSpPr>
+          <p:cNvPr id="9" name="Text 7"/>
+          <p:cNvSpPr txBox="1"/>
+          <p:nvPr/>
+        </p:nvSpPr>
+        <p:spPr>
+          <a:xfrm>
+            <a:off x="2953512" y="3520440"/>
+            <a:ext cx="1645920" cy="274320"/>
+          </a:xfrm>
+          <a:prstGeom prst="rect">
+            <a:avLst/>
+          </a:prstGeom>
+          <a:noFill/>
+          <a:ln/>
+        </p:spPr>
+        <p:txBody>
+          <a:bodyPr wrap="square" lIns="0" tIns="0" rIns="0" bIns="0" rtlCol="0" anchor="ctr"/>
+          <a:lstStyle/>
+          <a:p>
+            <a:pPr indent="0" marL="0">
+              <a:buNone/>
+            </a:pPr>
+            <a:r>
+              <a:rPr lang="en-US" sz="950" dirty="0">
+                <a:solidFill>
+                  <a:srgbClr val="707070"/>
+                </a:solidFill>
+                <a:latin typeface="Pretendard SemiBold" pitchFamily="34" charset="0"/>
+                <a:ea typeface="Pretendard SemiBold" pitchFamily="34" charset="-122"/>
+                <a:cs typeface="Pretendard SemiBold" pitchFamily="34" charset="-120"/>
+              </a:rPr>
+              <a:t>h</a:t>
+            </a:r>
+            <a:endParaRPr lang="en-US" sz="950" dirty="0"/>
+          </a:p>
+        </p:txBody>
+      </p:sp>
+      <p:sp>
+        <p:nvSpPr>
+          <p:cNvPr id="10" name="Text 8"/>
+          <p:cNvSpPr txBox="1"/>
+          <p:nvPr/>
+        </p:nvSpPr>
+        <p:spPr>
+          <a:xfrm>
+            <a:off x="4599432" y="3520440"/>
+            <a:ext cx="1645920" cy="274320"/>
+          </a:xfrm>
+          <a:prstGeom prst="rect">
+            <a:avLst/>
+          </a:prstGeom>
+          <a:noFill/>
+          <a:ln/>
+        </p:spPr>
+        <p:txBody>
+          <a:bodyPr wrap="square" lIns="0" tIns="0" rIns="0" bIns="0" rtlCol="0" anchor="ctr"/>
+          <a:lstStyle/>
+          <a:p>
+            <a:pPr indent="0" marL="0">
+              <a:buNone/>
+            </a:pPr>
+            <a:r>
+              <a:rPr lang="en-US" sz="950" dirty="0">
+                <a:solidFill>
+                  <a:srgbClr val="707070"/>
+                </a:solidFill>
+                <a:latin typeface="Pretendard SemiBold" pitchFamily="34" charset="0"/>
+                <a:ea typeface="Pretendard SemiBold" pitchFamily="34" charset="-122"/>
+                <a:cs typeface="Pretendard SemiBold" pitchFamily="34" charset="-120"/>
+              </a:rPr>
+              <a:t>v</a:t>
+            </a:r>
+            <a:endParaRPr lang="en-US" sz="950" dirty="0"/>
+          </a:p>
+        </p:txBody>
+      </p:sp>
+      <p:sp>
+        <p:nvSpPr>
+          <p:cNvPr id="11" name="Shape 9"/>
+          <p:cNvSpPr/>
+          <p:nvPr/>
+        </p:nvSpPr>
+        <p:spPr>
+          <a:xfrm>
+            <a:off x="758952" y="3922776"/>
+            <a:ext cx="5486400" cy="0"/>
+          </a:xfrm>
+          <a:prstGeom prst="line">
+            <a:avLst/>
+          </a:prstGeom>
+          <a:noFill/>
+          <a:ln w="12700">
+            <a:solidFill>
+              <a:srgbClr val="E0E0E0"/>
+            </a:solidFill>
+            <a:prstDash val="solid"/>
+          </a:ln>
+        </p:spPr>
+      </p:sp>
+      <p:sp>
+        <p:nvSpPr>
+          <p:cNvPr id="12" name="Text 10"/>
+          <p:cNvSpPr txBox="1"/>
+          <p:nvPr/>
+        </p:nvSpPr>
+        <p:spPr>
+          <a:xfrm>
+            <a:off x="758952" y="4087368"/>
+            <a:ext cx="2194560" cy="365760"/>
+          </a:xfrm>
+          <a:prstGeom prst="rect">
+            <a:avLst/>
+          </a:prstGeom>
+          <a:noFill/>
+          <a:ln/>
+        </p:spPr>
+        <p:txBody>
+          <a:bodyPr wrap="square" lIns="0" tIns="0" rIns="0" bIns="0" rtlCol="0" anchor="ctr"/>
+          <a:lstStyle/>
+          <a:p>
+            <a:pPr indent="0" marL="0">
+              <a:buNone/>
+            </a:pPr>
+            <a:r>
+              <a:rPr lang="en-US" sz="1200" dirty="0">
                 <a:solidFill>
                   <a:srgbClr val="141414"/>
+                </a:solidFill>
+                <a:latin typeface="Pretendard" pitchFamily="34" charset="0"/>
+                <a:ea typeface="Pretendard" pitchFamily="34" charset="-122"/>
+                <a:cs typeface="Pretendard" pitchFamily="34" charset="-120"/>
+              </a:rPr>
+              <a:t>아무것도</a:t>
+            </a:r>
+            <a:endParaRPr lang="en-US" sz="1200" dirty="0"/>
+          </a:p>
+        </p:txBody>
+      </p:sp>
+      <p:sp>
+        <p:nvSpPr>
+          <p:cNvPr id="13" name="Text 11"/>
+          <p:cNvSpPr txBox="1"/>
+          <p:nvPr/>
+        </p:nvSpPr>
+        <p:spPr>
+          <a:xfrm>
+            <a:off x="2953512" y="4087368"/>
+            <a:ext cx="1645920" cy="365760"/>
+          </a:xfrm>
+          <a:prstGeom prst="rect">
+            <a:avLst/>
+          </a:prstGeom>
+          <a:noFill/>
+          <a:ln/>
+        </p:spPr>
+        <p:txBody>
+          <a:bodyPr wrap="square" lIns="0" tIns="0" rIns="0" bIns="0" rtlCol="0" anchor="ctr"/>
+          <a:lstStyle/>
+          <a:p>
+            <a:pPr indent="0" marL="0">
+              <a:buNone/>
+            </a:pPr>
+            <a:r>
+              <a:rPr lang="en-US" sz="1200" dirty="0">
+                <a:solidFill>
+                  <a:srgbClr val="707070"/>
                 </a:solidFill>
                 <a:latin typeface="Consolas" pitchFamily="34" charset="0"/>
                 <a:ea typeface="Consolas" pitchFamily="34" charset="-122"/>
                 <a:cs typeface="Consolas" pitchFamily="34" charset="-120"/>
               </a:rPr>
-              <a:t>    [SerializeField] float moveSpeed = 5f;</a:t>
-            </a:r>
-            <a:endParaRPr lang="en-US" sz="1150" dirty="0"/>
-          </a:p>
-          <a:p>
-            <a:pPr indent="0" marL="0">
-              <a:lnSpc>
-                <a:spcPct val="132000"/>
-              </a:lnSpc>
-              <a:buNone/>
-            </a:pPr>
-            <a:r>
-              <a:rPr lang="en-US" sz="1150" dirty="0">
-                <a:solidFill>
-                  <a:srgbClr val="141414"/>
+              <a:t>0</a:t>
+            </a:r>
+            <a:endParaRPr lang="en-US" sz="1200" dirty="0"/>
+          </a:p>
+        </p:txBody>
+      </p:sp>
+      <p:sp>
+        <p:nvSpPr>
+          <p:cNvPr id="14" name="Text 12"/>
+          <p:cNvSpPr txBox="1"/>
+          <p:nvPr/>
+        </p:nvSpPr>
+        <p:spPr>
+          <a:xfrm>
+            <a:off x="4599432" y="4087368"/>
+            <a:ext cx="1645920" cy="365760"/>
+          </a:xfrm>
+          <a:prstGeom prst="rect">
+            <a:avLst/>
+          </a:prstGeom>
+          <a:noFill/>
+          <a:ln/>
+        </p:spPr>
+        <p:txBody>
+          <a:bodyPr wrap="square" lIns="0" tIns="0" rIns="0" bIns="0" rtlCol="0" anchor="ctr"/>
+          <a:lstStyle/>
+          <a:p>
+            <a:pPr indent="0" marL="0">
+              <a:buNone/>
+            </a:pPr>
+            <a:r>
+              <a:rPr lang="en-US" sz="1200" dirty="0">
+                <a:solidFill>
+                  <a:srgbClr val="707070"/>
                 </a:solidFill>
                 <a:latin typeface="Consolas" pitchFamily="34" charset="0"/>
                 <a:ea typeface="Consolas" pitchFamily="34" charset="-122"/>
                 <a:cs typeface="Consolas" pitchFamily="34" charset="-120"/>
               </a:rPr>
-              <a:t>    [SerializeField] GameObject item;</a:t>
-            </a:r>
-            <a:endParaRPr lang="en-US" sz="1150" dirty="0"/>
-          </a:p>
-          <a:p>
-            <a:pPr indent="0" marL="0">
-              <a:lnSpc>
-                <a:spcPct val="132000"/>
-              </a:lnSpc>
-              <a:buNone/>
-            </a:pPr>
-            <a:r>
-              <a:rPr lang="en-US" sz="1150" dirty="0">
+              <a:t>0</a:t>
+            </a:r>
+            <a:endParaRPr lang="en-US" sz="1200" dirty="0"/>
+          </a:p>
+        </p:txBody>
+      </p:sp>
+      <p:sp>
+        <p:nvSpPr>
+          <p:cNvPr id="15" name="Shape 13"/>
+          <p:cNvSpPr/>
+          <p:nvPr/>
+        </p:nvSpPr>
+        <p:spPr>
+          <a:xfrm>
+            <a:off x="758952" y="4562856"/>
+            <a:ext cx="5486400" cy="0"/>
+          </a:xfrm>
+          <a:prstGeom prst="line">
+            <a:avLst/>
+          </a:prstGeom>
+          <a:noFill/>
+          <a:ln w="12700">
+            <a:solidFill>
+              <a:srgbClr val="F0F0F0"/>
+            </a:solidFill>
+            <a:prstDash val="solid"/>
+          </a:ln>
+        </p:spPr>
+      </p:sp>
+      <p:sp>
+        <p:nvSpPr>
+          <p:cNvPr id="16" name="Text 14"/>
+          <p:cNvSpPr txBox="1"/>
+          <p:nvPr/>
+        </p:nvSpPr>
+        <p:spPr>
+          <a:xfrm>
+            <a:off x="758952" y="4672584"/>
+            <a:ext cx="2194560" cy="365760"/>
+          </a:xfrm>
+          <a:prstGeom prst="rect">
+            <a:avLst/>
+          </a:prstGeom>
+          <a:noFill/>
+          <a:ln/>
+        </p:spPr>
+        <p:txBody>
+          <a:bodyPr wrap="square" lIns="0" tIns="0" rIns="0" bIns="0" rtlCol="0" anchor="ctr"/>
+          <a:lstStyle/>
+          <a:p>
+            <a:pPr indent="0" marL="0">
+              <a:buNone/>
+            </a:pPr>
+            <a:r>
+              <a:rPr lang="en-US" sz="1200" dirty="0">
                 <a:solidFill>
                   <a:srgbClr val="141414"/>
+                </a:solidFill>
+                <a:latin typeface="Pretendard" pitchFamily="34" charset="0"/>
+                <a:ea typeface="Pretendard" pitchFamily="34" charset="-122"/>
+                <a:cs typeface="Pretendard" pitchFamily="34" charset="-120"/>
+              </a:rPr>
+              <a:t>D 또는 →</a:t>
+            </a:r>
+            <a:endParaRPr lang="en-US" sz="1200" dirty="0"/>
+          </a:p>
+        </p:txBody>
+      </p:sp>
+      <p:sp>
+        <p:nvSpPr>
+          <p:cNvPr id="17" name="Text 15"/>
+          <p:cNvSpPr txBox="1"/>
+          <p:nvPr/>
+        </p:nvSpPr>
+        <p:spPr>
+          <a:xfrm>
+            <a:off x="2953512" y="4672584"/>
+            <a:ext cx="1645920" cy="365760"/>
+          </a:xfrm>
+          <a:prstGeom prst="rect">
+            <a:avLst/>
+          </a:prstGeom>
+          <a:noFill/>
+          <a:ln/>
+        </p:spPr>
+        <p:txBody>
+          <a:bodyPr wrap="square" lIns="0" tIns="0" rIns="0" bIns="0" rtlCol="0" anchor="ctr"/>
+          <a:lstStyle/>
+          <a:p>
+            <a:pPr indent="0" marL="0">
+              <a:buNone/>
+            </a:pPr>
+            <a:r>
+              <a:rPr lang="en-US" sz="1200" dirty="0">
+                <a:solidFill>
+                  <a:srgbClr val="707070"/>
                 </a:solidFill>
                 <a:latin typeface="Consolas" pitchFamily="34" charset="0"/>
                 <a:ea typeface="Consolas" pitchFamily="34" charset="-122"/>
                 <a:cs typeface="Consolas" pitchFamily="34" charset="-120"/>
               </a:rPr>
-              <a:t> </a:t>
-            </a:r>
-            <a:endParaRPr lang="en-US" sz="1150" dirty="0"/>
-          </a:p>
-          <a:p>
-            <a:pPr indent="0" marL="0">
-              <a:lnSpc>
-                <a:spcPct val="132000"/>
-              </a:lnSpc>
-              <a:buNone/>
-            </a:pPr>
-            <a:r>
-              <a:rPr lang="en-US" sz="1150" dirty="0">
-                <a:solidFill>
-                  <a:srgbClr val="141414"/>
+              <a:t>1</a:t>
+            </a:r>
+            <a:endParaRPr lang="en-US" sz="1200" dirty="0"/>
+          </a:p>
+        </p:txBody>
+      </p:sp>
+      <p:sp>
+        <p:nvSpPr>
+          <p:cNvPr id="18" name="Text 16"/>
+          <p:cNvSpPr txBox="1"/>
+          <p:nvPr/>
+        </p:nvSpPr>
+        <p:spPr>
+          <a:xfrm>
+            <a:off x="4599432" y="4672584"/>
+            <a:ext cx="1645920" cy="365760"/>
+          </a:xfrm>
+          <a:prstGeom prst="rect">
+            <a:avLst/>
+          </a:prstGeom>
+          <a:noFill/>
+          <a:ln/>
+        </p:spPr>
+        <p:txBody>
+          <a:bodyPr wrap="square" lIns="0" tIns="0" rIns="0" bIns="0" rtlCol="0" anchor="ctr"/>
+          <a:lstStyle/>
+          <a:p>
+            <a:pPr indent="0" marL="0">
+              <a:buNone/>
+            </a:pPr>
+            <a:r>
+              <a:rPr lang="en-US" sz="1200" dirty="0">
+                <a:solidFill>
+                  <a:srgbClr val="707070"/>
                 </a:solidFill>
                 <a:latin typeface="Consolas" pitchFamily="34" charset="0"/>
                 <a:ea typeface="Consolas" pitchFamily="34" charset="-122"/>
                 <a:cs typeface="Consolas" pitchFamily="34" charset="-120"/>
               </a:rPr>
-              <a:t>    void Update()</a:t>
-            </a:r>
-            <a:endParaRPr lang="en-US" sz="1150" dirty="0"/>
-          </a:p>
-          <a:p>
-            <a:pPr indent="0" marL="0">
-              <a:lnSpc>
-                <a:spcPct val="132000"/>
-              </a:lnSpc>
-              <a:buNone/>
-            </a:pPr>
-            <a:r>
-              <a:rPr lang="en-US" sz="1150" dirty="0">
+              <a:t>0</a:t>
+            </a:r>
+            <a:endParaRPr lang="en-US" sz="1200" dirty="0"/>
+          </a:p>
+        </p:txBody>
+      </p:sp>
+      <p:sp>
+        <p:nvSpPr>
+          <p:cNvPr id="19" name="Shape 17"/>
+          <p:cNvSpPr/>
+          <p:nvPr/>
+        </p:nvSpPr>
+        <p:spPr>
+          <a:xfrm>
+            <a:off x="758952" y="5148072"/>
+            <a:ext cx="5486400" cy="0"/>
+          </a:xfrm>
+          <a:prstGeom prst="line">
+            <a:avLst/>
+          </a:prstGeom>
+          <a:noFill/>
+          <a:ln w="12700">
+            <a:solidFill>
+              <a:srgbClr val="F0F0F0"/>
+            </a:solidFill>
+            <a:prstDash val="solid"/>
+          </a:ln>
+        </p:spPr>
+      </p:sp>
+      <p:sp>
+        <p:nvSpPr>
+          <p:cNvPr id="20" name="Text 18"/>
+          <p:cNvSpPr txBox="1"/>
+          <p:nvPr/>
+        </p:nvSpPr>
+        <p:spPr>
+          <a:xfrm>
+            <a:off x="758952" y="5257800"/>
+            <a:ext cx="2194560" cy="365760"/>
+          </a:xfrm>
+          <a:prstGeom prst="rect">
+            <a:avLst/>
+          </a:prstGeom>
+          <a:noFill/>
+          <a:ln/>
+        </p:spPr>
+        <p:txBody>
+          <a:bodyPr wrap="square" lIns="0" tIns="0" rIns="0" bIns="0" rtlCol="0" anchor="ctr"/>
+          <a:lstStyle/>
+          <a:p>
+            <a:pPr indent="0" marL="0">
+              <a:buNone/>
+            </a:pPr>
+            <a:r>
+              <a:rPr lang="en-US" sz="1200" dirty="0">
                 <a:solidFill>
                   <a:srgbClr val="141414"/>
+                </a:solidFill>
+                <a:latin typeface="Pretendard" pitchFamily="34" charset="0"/>
+                <a:ea typeface="Pretendard" pitchFamily="34" charset="-122"/>
+                <a:cs typeface="Pretendard" pitchFamily="34" charset="-120"/>
+              </a:rPr>
+              <a:t>A 또는 ←</a:t>
+            </a:r>
+            <a:endParaRPr lang="en-US" sz="1200" dirty="0"/>
+          </a:p>
+        </p:txBody>
+      </p:sp>
+      <p:sp>
+        <p:nvSpPr>
+          <p:cNvPr id="21" name="Text 19"/>
+          <p:cNvSpPr txBox="1"/>
+          <p:nvPr/>
+        </p:nvSpPr>
+        <p:spPr>
+          <a:xfrm>
+            <a:off x="2953512" y="5257800"/>
+            <a:ext cx="1645920" cy="365760"/>
+          </a:xfrm>
+          <a:prstGeom prst="rect">
+            <a:avLst/>
+          </a:prstGeom>
+          <a:noFill/>
+          <a:ln/>
+        </p:spPr>
+        <p:txBody>
+          <a:bodyPr wrap="square" lIns="0" tIns="0" rIns="0" bIns="0" rtlCol="0" anchor="ctr"/>
+          <a:lstStyle/>
+          <a:p>
+            <a:pPr indent="0" marL="0">
+              <a:buNone/>
+            </a:pPr>
+            <a:r>
+              <a:rPr lang="en-US" sz="1200" dirty="0">
+                <a:solidFill>
+                  <a:srgbClr val="707070"/>
                 </a:solidFill>
                 <a:latin typeface="Consolas" pitchFamily="34" charset="0"/>
                 <a:ea typeface="Consolas" pitchFamily="34" charset="-122"/>
                 <a:cs typeface="Consolas" pitchFamily="34" charset="-120"/>
               </a:rPr>
-              <a:t>    {</a:t>
-            </a:r>
-            <a:endParaRPr lang="en-US" sz="1150" dirty="0"/>
-          </a:p>
-          <a:p>
-            <a:pPr indent="0" marL="0">
-              <a:lnSpc>
-                <a:spcPct val="132000"/>
-              </a:lnSpc>
-              <a:buNone/>
-            </a:pPr>
-            <a:r>
-              <a:rPr lang="en-US" sz="1150" dirty="0">
+              <a:t>-1</a:t>
+            </a:r>
+            <a:endParaRPr lang="en-US" sz="1200" dirty="0"/>
+          </a:p>
+        </p:txBody>
+      </p:sp>
+      <p:sp>
+        <p:nvSpPr>
+          <p:cNvPr id="22" name="Text 20"/>
+          <p:cNvSpPr txBox="1"/>
+          <p:nvPr/>
+        </p:nvSpPr>
+        <p:spPr>
+          <a:xfrm>
+            <a:off x="4599432" y="5257800"/>
+            <a:ext cx="1645920" cy="365760"/>
+          </a:xfrm>
+          <a:prstGeom prst="rect">
+            <a:avLst/>
+          </a:prstGeom>
+          <a:noFill/>
+          <a:ln/>
+        </p:spPr>
+        <p:txBody>
+          <a:bodyPr wrap="square" lIns="0" tIns="0" rIns="0" bIns="0" rtlCol="0" anchor="ctr"/>
+          <a:lstStyle/>
+          <a:p>
+            <a:pPr indent="0" marL="0">
+              <a:buNone/>
+            </a:pPr>
+            <a:r>
+              <a:rPr lang="en-US" sz="1200" dirty="0">
                 <a:solidFill>
                   <a:srgbClr val="707070"/>
                 </a:solidFill>
@@ -4069,19 +4428,100 @@
                 <a:ea typeface="Consolas" pitchFamily="34" charset="-122"/>
                 <a:cs typeface="Consolas" pitchFamily="34" charset="-120"/>
               </a:rPr>
-              <a:t>        // TODO ①~③ 이동</a:t>
-            </a:r>
-            <a:endParaRPr lang="en-US" sz="1150" dirty="0"/>
-          </a:p>
-          <a:p>
-            <a:pPr indent="0" marL="0">
-              <a:lnSpc>
-                <a:spcPct val="132000"/>
-              </a:lnSpc>
-              <a:buNone/>
-            </a:pPr>
-            <a:r>
-              <a:rPr lang="en-US" sz="1150" dirty="0">
+              <a:t>0</a:t>
+            </a:r>
+            <a:endParaRPr lang="en-US" sz="1200" dirty="0"/>
+          </a:p>
+        </p:txBody>
+      </p:sp>
+      <p:sp>
+        <p:nvSpPr>
+          <p:cNvPr id="23" name="Shape 21"/>
+          <p:cNvSpPr/>
+          <p:nvPr/>
+        </p:nvSpPr>
+        <p:spPr>
+          <a:xfrm>
+            <a:off x="758952" y="5733288"/>
+            <a:ext cx="5486400" cy="0"/>
+          </a:xfrm>
+          <a:prstGeom prst="line">
+            <a:avLst/>
+          </a:prstGeom>
+          <a:noFill/>
+          <a:ln w="12700">
+            <a:solidFill>
+              <a:srgbClr val="F0F0F0"/>
+            </a:solidFill>
+            <a:prstDash val="solid"/>
+          </a:ln>
+        </p:spPr>
+      </p:sp>
+      <p:sp>
+        <p:nvSpPr>
+          <p:cNvPr id="24" name="Text 22"/>
+          <p:cNvSpPr txBox="1"/>
+          <p:nvPr/>
+        </p:nvSpPr>
+        <p:spPr>
+          <a:xfrm>
+            <a:off x="758952" y="5843016"/>
+            <a:ext cx="2194560" cy="365760"/>
+          </a:xfrm>
+          <a:prstGeom prst="rect">
+            <a:avLst/>
+          </a:prstGeom>
+          <a:noFill/>
+          <a:ln/>
+        </p:spPr>
+        <p:txBody>
+          <a:bodyPr wrap="square" lIns="0" tIns="0" rIns="0" bIns="0" rtlCol="0" anchor="ctr"/>
+          <a:lstStyle/>
+          <a:p>
+            <a:pPr indent="0" marL="0">
+              <a:buNone/>
+            </a:pPr>
+            <a:r>
+              <a:rPr lang="en-US" sz="1200" dirty="0">
+                <a:solidFill>
+                  <a:srgbClr val="141414"/>
+                </a:solidFill>
+                <a:latin typeface="Pretendard" pitchFamily="34" charset="0"/>
+                <a:ea typeface="Pretendard" pitchFamily="34" charset="-122"/>
+                <a:cs typeface="Pretendard" pitchFamily="34" charset="-120"/>
+              </a:rPr>
+              <a:t>W 또는 ↑</a:t>
+            </a:r>
+            <a:endParaRPr lang="en-US" sz="1200" dirty="0"/>
+          </a:p>
+        </p:txBody>
+      </p:sp>
+      <p:sp>
+        <p:nvSpPr>
+          <p:cNvPr id="25" name="Text 23"/>
+          <p:cNvSpPr txBox="1"/>
+          <p:nvPr/>
+        </p:nvSpPr>
+        <p:spPr>
+          <a:xfrm>
+            <a:off x="2953512" y="5843016"/>
+            <a:ext cx="1645920" cy="365760"/>
+          </a:xfrm>
+          <a:prstGeom prst="rect">
+            <a:avLst/>
+          </a:prstGeom>
+          <a:noFill/>
+          <a:ln/>
+        </p:spPr>
+        <p:txBody>
+          <a:bodyPr wrap="square" lIns="0" tIns="0" rIns="0" bIns="0" rtlCol="0" anchor="ctr"/>
+          <a:lstStyle/>
+          <a:p>
+            <a:pPr indent="0" marL="0">
+              <a:buNone/>
+            </a:pPr>
+            <a:r>
+              <a:rPr lang="en-US" sz="1200" dirty="0">
                 <a:solidFill>
                   <a:srgbClr val="707070"/>
                 </a:solidFill>
@@ -4089,59 +4529,178 @@
                 <a:ea typeface="Consolas" pitchFamily="34" charset="-122"/>
                 <a:cs typeface="Consolas" pitchFamily="34" charset="-120"/>
               </a:rPr>
-              <a:t>        // TODO ④ 스페이스로 item 토글</a:t>
-            </a:r>
-            <a:endParaRPr lang="en-US" sz="1150" dirty="0"/>
-          </a:p>
-          <a:p>
-            <a:pPr indent="0" marL="0">
-              <a:lnSpc>
-                <a:spcPct val="132000"/>
-              </a:lnSpc>
-              <a:buNone/>
-            </a:pPr>
-            <a:r>
-              <a:rPr lang="en-US" sz="1150" dirty="0">
-                <a:solidFill>
-                  <a:srgbClr val="141414"/>
+              <a:t>0</a:t>
+            </a:r>
+            <a:endParaRPr lang="en-US" sz="1200" dirty="0"/>
+          </a:p>
+        </p:txBody>
+      </p:sp>
+      <p:sp>
+        <p:nvSpPr>
+          <p:cNvPr id="26" name="Text 24"/>
+          <p:cNvSpPr txBox="1"/>
+          <p:nvPr/>
+        </p:nvSpPr>
+        <p:spPr>
+          <a:xfrm>
+            <a:off x="4599432" y="5843016"/>
+            <a:ext cx="1645920" cy="365760"/>
+          </a:xfrm>
+          <a:prstGeom prst="rect">
+            <a:avLst/>
+          </a:prstGeom>
+          <a:noFill/>
+          <a:ln/>
+        </p:spPr>
+        <p:txBody>
+          <a:bodyPr wrap="square" lIns="0" tIns="0" rIns="0" bIns="0" rtlCol="0" anchor="ctr"/>
+          <a:lstStyle/>
+          <a:p>
+            <a:pPr indent="0" marL="0">
+              <a:buNone/>
+            </a:pPr>
+            <a:r>
+              <a:rPr lang="en-US" sz="1200" dirty="0">
+                <a:solidFill>
+                  <a:srgbClr val="707070"/>
                 </a:solidFill>
                 <a:latin typeface="Consolas" pitchFamily="34" charset="0"/>
                 <a:ea typeface="Consolas" pitchFamily="34" charset="-122"/>
                 <a:cs typeface="Consolas" pitchFamily="34" charset="-120"/>
               </a:rPr>
-              <a:t>    }</a:t>
-            </a:r>
-            <a:endParaRPr lang="en-US" sz="1150" dirty="0"/>
-          </a:p>
-          <a:p>
-            <a:pPr indent="0" marL="0">
-              <a:lnSpc>
-                <a:spcPct val="132000"/>
-              </a:lnSpc>
-              <a:buNone/>
-            </a:pPr>
-            <a:r>
-              <a:rPr lang="en-US" sz="1150" dirty="0">
+              <a:t>1</a:t>
+            </a:r>
+            <a:endParaRPr lang="en-US" sz="1200" dirty="0"/>
+          </a:p>
+        </p:txBody>
+      </p:sp>
+      <p:sp>
+        <p:nvSpPr>
+          <p:cNvPr id="27" name="Shape 25"/>
+          <p:cNvSpPr/>
+          <p:nvPr/>
+        </p:nvSpPr>
+        <p:spPr>
+          <a:xfrm>
+            <a:off x="758952" y="6318504"/>
+            <a:ext cx="5486400" cy="0"/>
+          </a:xfrm>
+          <a:prstGeom prst="line">
+            <a:avLst/>
+          </a:prstGeom>
+          <a:noFill/>
+          <a:ln w="12700">
+            <a:solidFill>
+              <a:srgbClr val="F0F0F0"/>
+            </a:solidFill>
+            <a:prstDash val="solid"/>
+          </a:ln>
+        </p:spPr>
+      </p:sp>
+      <p:sp>
+        <p:nvSpPr>
+          <p:cNvPr id="28" name="Text 26"/>
+          <p:cNvSpPr txBox="1"/>
+          <p:nvPr/>
+        </p:nvSpPr>
+        <p:spPr>
+          <a:xfrm>
+            <a:off x="758952" y="6428232"/>
+            <a:ext cx="2194560" cy="365760"/>
+          </a:xfrm>
+          <a:prstGeom prst="rect">
+            <a:avLst/>
+          </a:prstGeom>
+          <a:noFill/>
+          <a:ln/>
+        </p:spPr>
+        <p:txBody>
+          <a:bodyPr wrap="square" lIns="0" tIns="0" rIns="0" bIns="0" rtlCol="0" anchor="ctr"/>
+          <a:lstStyle/>
+          <a:p>
+            <a:pPr indent="0" marL="0">
+              <a:buNone/>
+            </a:pPr>
+            <a:r>
+              <a:rPr lang="en-US" sz="1200" dirty="0">
                 <a:solidFill>
                   <a:srgbClr val="141414"/>
+                </a:solidFill>
+                <a:latin typeface="Pretendard" pitchFamily="34" charset="0"/>
+                <a:ea typeface="Pretendard" pitchFamily="34" charset="-122"/>
+                <a:cs typeface="Pretendard" pitchFamily="34" charset="-120"/>
+              </a:rPr>
+              <a:t>S 또는 ↓</a:t>
+            </a:r>
+            <a:endParaRPr lang="en-US" sz="1200" dirty="0"/>
+          </a:p>
+        </p:txBody>
+      </p:sp>
+      <p:sp>
+        <p:nvSpPr>
+          <p:cNvPr id="29" name="Text 27"/>
+          <p:cNvSpPr txBox="1"/>
+          <p:nvPr/>
+        </p:nvSpPr>
+        <p:spPr>
+          <a:xfrm>
+            <a:off x="2953512" y="6428232"/>
+            <a:ext cx="1645920" cy="365760"/>
+          </a:xfrm>
+          <a:prstGeom prst="rect">
+            <a:avLst/>
+          </a:prstGeom>
+          <a:noFill/>
+          <a:ln/>
+        </p:spPr>
+        <p:txBody>
+          <a:bodyPr wrap="square" lIns="0" tIns="0" rIns="0" bIns="0" rtlCol="0" anchor="ctr"/>
+          <a:lstStyle/>
+          <a:p>
+            <a:pPr indent="0" marL="0">
+              <a:buNone/>
+            </a:pPr>
+            <a:r>
+              <a:rPr lang="en-US" sz="1200" dirty="0">
+                <a:solidFill>
+                  <a:srgbClr val="707070"/>
                 </a:solidFill>
                 <a:latin typeface="Consolas" pitchFamily="34" charset="0"/>
                 <a:ea typeface="Consolas" pitchFamily="34" charset="-122"/>
                 <a:cs typeface="Consolas" pitchFamily="34" charset="-120"/>
               </a:rPr>
-              <a:t> </a:t>
-            </a:r>
-            <a:endParaRPr lang="en-US" sz="1150" dirty="0"/>
-          </a:p>
-          <a:p>
-            <a:pPr indent="0" marL="0">
-              <a:lnSpc>
-                <a:spcPct val="132000"/>
-              </a:lnSpc>
-              <a:buNone/>
-            </a:pPr>
-            <a:r>
-              <a:rPr lang="en-US" sz="1150" dirty="0">
+              <a:t>0</a:t>
+            </a:r>
+            <a:endParaRPr lang="en-US" sz="1200" dirty="0"/>
+          </a:p>
+        </p:txBody>
+      </p:sp>
+      <p:sp>
+        <p:nvSpPr>
+          <p:cNvPr id="30" name="Text 28"/>
+          <p:cNvSpPr txBox="1"/>
+          <p:nvPr/>
+        </p:nvSpPr>
+        <p:spPr>
+          <a:xfrm>
+            <a:off x="4599432" y="6428232"/>
+            <a:ext cx="1645920" cy="365760"/>
+          </a:xfrm>
+          <a:prstGeom prst="rect">
+            <a:avLst/>
+          </a:prstGeom>
+          <a:noFill/>
+          <a:ln/>
+        </p:spPr>
+        <p:txBody>
+          <a:bodyPr wrap="square" lIns="0" tIns="0" rIns="0" bIns="0" rtlCol="0" anchor="ctr"/>
+          <a:lstStyle/>
+          <a:p>
+            <a:pPr indent="0" marL="0">
+              <a:buNone/>
+            </a:pPr>
+            <a:r>
+              <a:rPr lang="en-US" sz="1200" dirty="0">
                 <a:solidFill>
                   <a:srgbClr val="707070"/>
                 </a:solidFill>
@@ -4149,46 +4708,49 @@
                 <a:ea typeface="Consolas" pitchFamily="34" charset="-122"/>
                 <a:cs typeface="Consolas" pitchFamily="34" charset="-120"/>
               </a:rPr>
-              <a:t>    // TODO ⑤ [ContextMenu] 원점으로</a:t>
-            </a:r>
-            <a:endParaRPr lang="en-US" sz="1150" dirty="0"/>
-          </a:p>
-          <a:p>
-            <a:pPr indent="0" marL="0">
-              <a:lnSpc>
-                <a:spcPct val="132000"/>
-              </a:lnSpc>
-              <a:buNone/>
-            </a:pPr>
-            <a:r>
-              <a:rPr lang="en-US" sz="1150" dirty="0">
-                <a:solidFill>
-                  <a:srgbClr val="141414"/>
-                </a:solidFill>
-                <a:latin typeface="Consolas" pitchFamily="34" charset="0"/>
-                <a:ea typeface="Consolas" pitchFamily="34" charset="-122"/>
-                <a:cs typeface="Consolas" pitchFamily="34" charset="-120"/>
-              </a:rPr>
-              <a:t>}</a:t>
-            </a:r>
-            <a:endParaRPr lang="en-US" sz="1150" dirty="0"/>
-          </a:p>
-        </p:txBody>
-      </p:sp>
-      <p:sp>
-        <p:nvSpPr>
-          <p:cNvPr id="8" name="Shape 6"/>
+              <a:t>-1</a:t>
+            </a:r>
+            <a:endParaRPr lang="en-US" sz="1200" dirty="0"/>
+          </a:p>
+        </p:txBody>
+      </p:sp>
+      <p:sp>
+        <p:nvSpPr>
+          <p:cNvPr id="31" name="Shape 29"/>
           <p:cNvSpPr/>
           <p:nvPr/>
         </p:nvSpPr>
         <p:spPr>
           <a:xfrm>
-            <a:off x="7086600" y="1965960"/>
-            <a:ext cx="4343400" cy="2944368"/>
+            <a:off x="758952" y="6903720"/>
+            <a:ext cx="5486400" cy="0"/>
+          </a:xfrm>
+          <a:prstGeom prst="line">
+            <a:avLst/>
+          </a:prstGeom>
+          <a:noFill/>
+          <a:ln w="12700">
+            <a:solidFill>
+              <a:srgbClr val="F0F0F0"/>
+            </a:solidFill>
+            <a:prstDash val="solid"/>
+          </a:ln>
+        </p:spPr>
+      </p:sp>
+      <p:sp>
+        <p:nvSpPr>
+          <p:cNvPr id="32" name="Shape 30"/>
+          <p:cNvSpPr/>
+          <p:nvPr/>
+        </p:nvSpPr>
+        <p:spPr>
+          <a:xfrm>
+            <a:off x="6720840" y="1965960"/>
+            <a:ext cx="4711903" cy="2103120"/>
           </a:xfrm>
           <a:prstGeom prst="roundRect">
             <a:avLst>
-              <a:gd name="adj" fmla="val 7764"/>
+              <a:gd name="adj" fmla="val 7261"/>
             </a:avLst>
           </a:prstGeom>
           <a:solidFill>
@@ -4202,95 +4764,154 @@
           </a:ln>
         </p:spPr>
       </p:sp>
-      <p:pic>
-        <p:nvPicPr>
-          <p:cNvPr id="9" name="Image 0" descr="C:\Users\user\AppData\Local\Temp\claude\C--Users-user-Github-WaveBreaker\fd97bec6-cef8-4bf5-a447-9a0fa572b36e\scratchpad\shots2\final\040_Input.png">    </p:cNvPr>
-          <p:cNvPicPr>
-            <a:picLocks noChangeAspect="1"/>
-          </p:cNvPicPr>
-          <p:nvPr/>
-        </p:nvPicPr>
-        <p:blipFill>
-          <a:blip r:embed="rId1"/>
-          <a:stretch>
-            <a:fillRect/>
-          </a:stretch>
-        </p:blipFill>
-        <p:spPr>
-          <a:xfrm>
-            <a:off x="7287768" y="2167128"/>
-            <a:ext cx="3941064" cy="2066544"/>
-          </a:xfrm>
-          <a:prstGeom prst="rect">
-            <a:avLst/>
-          </a:prstGeom>
-        </p:spPr>
-      </p:pic>
-      <p:sp>
-        <p:nvSpPr>
-          <p:cNvPr id="10" name="Text 7"/>
-          <p:cNvSpPr txBox="1"/>
-          <p:nvPr/>
-        </p:nvSpPr>
-        <p:spPr>
-          <a:xfrm>
-            <a:off x="7287768" y="4306824"/>
-            <a:ext cx="3941064" cy="310896"/>
-          </a:xfrm>
-          <a:prstGeom prst="rect">
-            <a:avLst/>
-          </a:prstGeom>
-          <a:noFill/>
-          <a:ln/>
-        </p:spPr>
-        <p:txBody>
-          <a:bodyPr wrap="square" lIns="0" tIns="0" rIns="0" bIns="0" rtlCol="0" anchor="ctr"/>
-          <a:lstStyle/>
-          <a:p>
-            <a:pPr algn="ctr" indent="0" marL="0">
-              <a:buNone/>
-            </a:pPr>
-            <a:r>
-              <a:rPr lang="en-US" sz="950" dirty="0">
-                <a:solidFill>
-                  <a:srgbClr val="ADADAD"/>
-                </a:solidFill>
-                <a:latin typeface="Pretendard" pitchFamily="34" charset="0"/>
-                <a:ea typeface="Pretendard" pitchFamily="34" charset="-122"/>
-                <a:cs typeface="Pretendard" pitchFamily="34" charset="-120"/>
-              </a:rPr>
-              <a:t>040_Input_Done — Player 와 Item</a:t>
-            </a:r>
-            <a:endParaRPr lang="en-US" sz="950" dirty="0"/>
-          </a:p>
-        </p:txBody>
-      </p:sp>
-      <p:sp>
-        <p:nvSpPr>
-          <p:cNvPr id="11" name="Text 8"/>
-          <p:cNvSpPr txBox="1"/>
-          <p:nvPr/>
-        </p:nvSpPr>
-        <p:spPr>
-          <a:xfrm>
-            <a:off x="7086600" y="4892040"/>
-            <a:ext cx="4343400" cy="329184"/>
-          </a:xfrm>
-          <a:prstGeom prst="rect">
-            <a:avLst/>
-          </a:prstGeom>
-          <a:noFill/>
-          <a:ln/>
-        </p:spPr>
-        <p:txBody>
-          <a:bodyPr wrap="square" lIns="0" tIns="0" rIns="0" bIns="0" rtlCol="0" anchor="ctr"/>
-          <a:lstStyle/>
-          <a:p>
-            <a:pPr indent="0" marL="0">
-              <a:buNone/>
-            </a:pPr>
-            <a:r>
-              <a:rPr lang="en-US" sz="1400" dirty="0">
+      <p:sp>
+        <p:nvSpPr>
+          <p:cNvPr id="33" name="Text 31"/>
+          <p:cNvSpPr txBox="1"/>
+          <p:nvPr/>
+        </p:nvSpPr>
+        <p:spPr>
+          <a:xfrm>
+            <a:off x="6976872" y="2167128"/>
+            <a:ext cx="4199839" cy="1700784"/>
+          </a:xfrm>
+          <a:prstGeom prst="rect">
+            <a:avLst/>
+          </a:prstGeom>
+          <a:noFill/>
+          <a:ln/>
+        </p:spPr>
+        <p:txBody>
+          <a:bodyPr wrap="square" lIns="0" tIns="0" rIns="0" bIns="0" rtlCol="0" anchor="t"/>
+          <a:lstStyle/>
+          <a:p>
+            <a:pPr indent="0" marL="0">
+              <a:lnSpc>
+                <a:spcPct val="132000"/>
+              </a:lnSpc>
+              <a:buNone/>
+            </a:pPr>
+            <a:r>
+              <a:rPr lang="en-US" sz="1150" b="1" dirty="0">
+                <a:solidFill>
+                  <a:srgbClr val="141414"/>
+                </a:solidFill>
+                <a:latin typeface="Consolas" pitchFamily="34" charset="0"/>
+                <a:ea typeface="Consolas" pitchFamily="34" charset="-122"/>
+                <a:cs typeface="Consolas" pitchFamily="34" charset="-120"/>
+              </a:rPr>
+              <a:t>Vector3 dir = new Vector3(h, v, 0f);</a:t>
+            </a:r>
+            <a:endParaRPr lang="en-US" sz="1150" dirty="0"/>
+          </a:p>
+          <a:p>
+            <a:pPr indent="0" marL="0">
+              <a:lnSpc>
+                <a:spcPct val="132000"/>
+              </a:lnSpc>
+              <a:buNone/>
+            </a:pPr>
+            <a:r>
+              <a:rPr lang="en-US" sz="1150" dirty="0">
+                <a:solidFill>
+                  <a:srgbClr val="141414"/>
+                </a:solidFill>
+                <a:latin typeface="Consolas" pitchFamily="34" charset="0"/>
+                <a:ea typeface="Consolas" pitchFamily="34" charset="-122"/>
+                <a:cs typeface="Consolas" pitchFamily="34" charset="-120"/>
+              </a:rPr>
+              <a:t> </a:t>
+            </a:r>
+            <a:endParaRPr lang="en-US" sz="1150" dirty="0"/>
+          </a:p>
+          <a:p>
+            <a:pPr indent="0" marL="0">
+              <a:lnSpc>
+                <a:spcPct val="132000"/>
+              </a:lnSpc>
+              <a:buNone/>
+            </a:pPr>
+            <a:r>
+              <a:rPr lang="en-US" sz="1150" dirty="0">
+                <a:solidFill>
+                  <a:srgbClr val="141414"/>
+                </a:solidFill>
+                <a:latin typeface="Consolas" pitchFamily="34" charset="0"/>
+                <a:ea typeface="Consolas" pitchFamily="34" charset="-122"/>
+                <a:cs typeface="Consolas" pitchFamily="34" charset="-120"/>
+              </a:rPr>
+              <a:t>transform.position =</a:t>
+            </a:r>
+            <a:endParaRPr lang="en-US" sz="1150" dirty="0"/>
+          </a:p>
+          <a:p>
+            <a:pPr indent="0" marL="0">
+              <a:lnSpc>
+                <a:spcPct val="132000"/>
+              </a:lnSpc>
+              <a:buNone/>
+            </a:pPr>
+            <a:r>
+              <a:rPr lang="en-US" sz="1150" dirty="0">
+                <a:solidFill>
+                  <a:srgbClr val="141414"/>
+                </a:solidFill>
+                <a:latin typeface="Consolas" pitchFamily="34" charset="0"/>
+                <a:ea typeface="Consolas" pitchFamily="34" charset="-122"/>
+                <a:cs typeface="Consolas" pitchFamily="34" charset="-120"/>
+              </a:rPr>
+              <a:t>    transform.position</a:t>
+            </a:r>
+            <a:endParaRPr lang="en-US" sz="1150" dirty="0"/>
+          </a:p>
+          <a:p>
+            <a:pPr indent="0" marL="0">
+              <a:lnSpc>
+                <a:spcPct val="132000"/>
+              </a:lnSpc>
+              <a:buNone/>
+            </a:pPr>
+            <a:r>
+              <a:rPr lang="en-US" sz="1150" b="1" dirty="0">
+                <a:solidFill>
+                  <a:srgbClr val="141414"/>
+                </a:solidFill>
+                <a:latin typeface="Consolas" pitchFamily="34" charset="0"/>
+                <a:ea typeface="Consolas" pitchFamily="34" charset="-122"/>
+                <a:cs typeface="Consolas" pitchFamily="34" charset="-120"/>
+              </a:rPr>
+              <a:t>    + dir * moveSpeed * Time.deltaTime;</a:t>
+            </a:r>
+            <a:endParaRPr lang="en-US" sz="1150" dirty="0"/>
+          </a:p>
+        </p:txBody>
+      </p:sp>
+      <p:sp>
+        <p:nvSpPr>
+          <p:cNvPr id="34" name="Text 32"/>
+          <p:cNvSpPr txBox="1"/>
+          <p:nvPr/>
+        </p:nvSpPr>
+        <p:spPr>
+          <a:xfrm>
+            <a:off x="6720840" y="4343400"/>
+            <a:ext cx="4711903" cy="402336"/>
+          </a:xfrm>
+          <a:prstGeom prst="rect">
+            <a:avLst/>
+          </a:prstGeom>
+          <a:noFill/>
+          <a:ln/>
+        </p:spPr>
+        <p:txBody>
+          <a:bodyPr wrap="square" lIns="0" tIns="0" rIns="0" bIns="0" rtlCol="0" anchor="ctr"/>
+          <a:lstStyle/>
+          <a:p>
+            <a:pPr indent="0" marL="0">
+              <a:buNone/>
+            </a:pPr>
+            <a:r>
+              <a:rPr lang="en-US" sz="1900" dirty="0">
                 <a:solidFill>
                   <a:srgbClr val="141414"/>
                 </a:solidFill>
@@ -4298,22 +4919,22 @@
                 <a:ea typeface="Pretendard SemiBold" pitchFamily="34" charset="-122"/>
                 <a:cs typeface="Pretendard SemiBold" pitchFamily="34" charset="-120"/>
               </a:rPr>
-              <a:t>Inspector의 Item 칸이 비어 있으면</a:t>
-            </a:r>
-            <a:endParaRPr lang="en-US" sz="1400" dirty="0"/>
-          </a:p>
-        </p:txBody>
-      </p:sp>
-      <p:sp>
-        <p:nvSpPr>
-          <p:cNvPr id="12" name="Text 9"/>
-          <p:cNvSpPr txBox="1"/>
-          <p:nvPr/>
-        </p:nvSpPr>
-        <p:spPr>
-          <a:xfrm>
-            <a:off x="7086600" y="5285232"/>
-            <a:ext cx="4343400" cy="731520"/>
+              <a:t>새로 배운 건 첫 두 줄뿐이다.</a:t>
+            </a:r>
+            <a:endParaRPr lang="en-US" sz="1900" dirty="0"/>
+          </a:p>
+        </p:txBody>
+      </p:sp>
+      <p:sp>
+        <p:nvSpPr>
+          <p:cNvPr id="35" name="Text 33"/>
+          <p:cNvSpPr txBox="1"/>
+          <p:nvPr/>
+        </p:nvSpPr>
+        <p:spPr>
+          <a:xfrm>
+            <a:off x="6720840" y="4800600"/>
+            <a:ext cx="4711903" cy="914400"/>
           </a:xfrm>
           <a:prstGeom prst="rect">
             <a:avLst/>
@@ -4340,7 +4961,7 @@
                 <a:ea typeface="Pretendard Light" pitchFamily="34" charset="-122"/>
                 <a:cs typeface="Pretendard Light" pitchFamily="34" charset="-120"/>
               </a:rPr>
-              <a:t>스페이스를 누르는 순간 NullReferenceException 이 난다. Hierarchy에서 드래그해 넣는다.</a:t>
+              <a:t>나머지는 038·039에서 한 그대로다. 키를 안 누르면 dir이 (0,0,0)이라 안 움직인다 — 조건문이 필요 없다.</a:t>
             </a:r>
             <a:endParaRPr lang="en-US" sz="1200" dirty="0"/>
           </a:p>
@@ -4380,679 +5001,18 @@
       </p:grpSpPr>
       <p:sp>
         <p:nvSpPr>
-          <p:cNvPr id="2" name="Text 0"/>
-          <p:cNvSpPr txBox="1"/>
-          <p:nvPr/>
-        </p:nvSpPr>
-        <p:spPr>
-          <a:xfrm>
-            <a:off x="758952" y="566928"/>
-            <a:ext cx="10673791" cy="457200"/>
-          </a:xfrm>
-          <a:prstGeom prst="rect">
-            <a:avLst/>
-          </a:prstGeom>
-          <a:noFill/>
-          <a:ln/>
-        </p:spPr>
-        <p:txBody>
-          <a:bodyPr wrap="square" lIns="0" tIns="0" rIns="0" bIns="0" rtlCol="0" anchor="ctr"/>
-          <a:lstStyle/>
-          <a:p>
-            <a:pPr indent="0" marL="0">
-              <a:buNone/>
-            </a:pPr>
-            <a:r>
-              <a:rPr lang="en-US" sz="2600" dirty="0">
-                <a:solidFill>
-                  <a:srgbClr val="141414"/>
-                </a:solidFill>
-                <a:latin typeface="Pretendard SemiBold" pitchFamily="34" charset="0"/>
-                <a:ea typeface="Pretendard SemiBold" pitchFamily="34" charset="-122"/>
-                <a:cs typeface="Pretendard SemiBold" pitchFamily="34" charset="-120"/>
-              </a:rPr>
-              <a:t>이번 주 흔한 사고.</a:t>
-            </a:r>
-            <a:endParaRPr lang="en-US" sz="2600" dirty="0"/>
-          </a:p>
-        </p:txBody>
-      </p:sp>
-      <p:sp>
-        <p:nvSpPr>
-          <p:cNvPr id="3" name="Text 1"/>
-          <p:cNvSpPr txBox="1"/>
-          <p:nvPr/>
-        </p:nvSpPr>
-        <p:spPr>
-          <a:xfrm>
-            <a:off x="758952" y="1060704"/>
-            <a:ext cx="10673791" cy="329184"/>
-          </a:xfrm>
-          <a:prstGeom prst="rect">
-            <a:avLst/>
-          </a:prstGeom>
-          <a:noFill/>
-          <a:ln/>
-        </p:spPr>
-        <p:txBody>
-          <a:bodyPr wrap="square" lIns="0" tIns="0" rIns="0" bIns="0" rtlCol="0" anchor="ctr"/>
-          <a:lstStyle/>
-          <a:p>
-            <a:pPr indent="0" marL="0">
-              <a:buNone/>
-            </a:pPr>
-            <a:r>
-              <a:rPr lang="en-US" sz="1500" dirty="0">
-                <a:solidFill>
-                  <a:srgbClr val="707070"/>
-                </a:solidFill>
-                <a:latin typeface="Pretendard Light" pitchFamily="34" charset="0"/>
-                <a:ea typeface="Pretendard Light" pitchFamily="34" charset="-122"/>
-                <a:cs typeface="Pretendard Light" pitchFamily="34" charset="-120"/>
-              </a:rPr>
-              <a:t>미리 알고 있으면 대응이 빨라진다. 강사용.</a:t>
-            </a:r>
-            <a:endParaRPr lang="en-US" sz="1500" dirty="0"/>
-          </a:p>
-        </p:txBody>
-      </p:sp>
-      <p:sp>
-        <p:nvSpPr>
-          <p:cNvPr id="4" name="Shape 2"/>
+          <p:cNvPr id="2" name="Shape 0"/>
           <p:cNvSpPr/>
           <p:nvPr/>
         </p:nvSpPr>
         <p:spPr>
           <a:xfrm>
-            <a:off x="758952" y="2011680"/>
-            <a:ext cx="10673791" cy="0"/>
-          </a:xfrm>
-          <a:prstGeom prst="line">
-            <a:avLst/>
-          </a:prstGeom>
-          <a:noFill/>
-          <a:ln w="12700">
-            <a:solidFill>
-              <a:srgbClr val="E0E0E0"/>
-            </a:solidFill>
-            <a:prstDash val="solid"/>
-          </a:ln>
-        </p:spPr>
-      </p:sp>
-      <p:sp>
-        <p:nvSpPr>
-          <p:cNvPr id="5" name="Text 3"/>
-          <p:cNvSpPr txBox="1"/>
-          <p:nvPr/>
-        </p:nvSpPr>
-        <p:spPr>
-          <a:xfrm>
-            <a:off x="758952" y="2194560"/>
-            <a:ext cx="3931920" cy="420624"/>
-          </a:xfrm>
-          <a:prstGeom prst="rect">
-            <a:avLst/>
-          </a:prstGeom>
-          <a:noFill/>
-          <a:ln/>
-        </p:spPr>
-        <p:txBody>
-          <a:bodyPr wrap="square" lIns="0" tIns="0" rIns="0" bIns="0" rtlCol="0" anchor="ctr"/>
-          <a:lstStyle/>
-          <a:p>
-            <a:pPr indent="0" marL="0">
-              <a:buNone/>
-            </a:pPr>
-            <a:r>
-              <a:rPr lang="en-US" sz="1550" dirty="0">
-                <a:solidFill>
-                  <a:srgbClr val="141414"/>
-                </a:solidFill>
-                <a:latin typeface="Pretendard SemiBold" pitchFamily="34" charset="0"/>
-                <a:ea typeface="Pretendard SemiBold" pitchFamily="34" charset="-122"/>
-                <a:cs typeface="Pretendard SemiBold" pitchFamily="34" charset="-120"/>
-              </a:rPr>
-              <a:t>Can't add script</a:t>
-            </a:r>
-            <a:endParaRPr lang="en-US" sz="1550" dirty="0"/>
-          </a:p>
-        </p:txBody>
-      </p:sp>
-      <p:sp>
-        <p:nvSpPr>
-          <p:cNvPr id="6" name="Text 4"/>
-          <p:cNvSpPr txBox="1"/>
-          <p:nvPr/>
-        </p:nvSpPr>
-        <p:spPr>
-          <a:xfrm>
-            <a:off x="4873752" y="2194560"/>
-            <a:ext cx="3291840" cy="420624"/>
-          </a:xfrm>
-          <a:prstGeom prst="rect">
-            <a:avLst/>
-          </a:prstGeom>
-          <a:noFill/>
-          <a:ln/>
-        </p:spPr>
-        <p:txBody>
-          <a:bodyPr wrap="square" lIns="0" tIns="0" rIns="0" bIns="0" rtlCol="0" anchor="ctr"/>
-          <a:lstStyle/>
-          <a:p>
-            <a:pPr indent="0" marL="0">
-              <a:buNone/>
-            </a:pPr>
-            <a:r>
-              <a:rPr lang="en-US" sz="1200" dirty="0">
-                <a:solidFill>
-                  <a:srgbClr val="ADADAD"/>
-                </a:solidFill>
-                <a:latin typeface="Pretendard" pitchFamily="34" charset="0"/>
-                <a:ea typeface="Pretendard" pitchFamily="34" charset="-122"/>
-                <a:cs typeface="Pretendard" pitchFamily="34" charset="-120"/>
-              </a:rPr>
-              <a:t>파일명 ≠ 클래스명</a:t>
-            </a:r>
-            <a:endParaRPr lang="en-US" sz="1200" dirty="0"/>
-          </a:p>
-        </p:txBody>
-      </p:sp>
-      <p:sp>
-        <p:nvSpPr>
-          <p:cNvPr id="7" name="Text 5"/>
-          <p:cNvSpPr txBox="1"/>
-          <p:nvPr/>
-        </p:nvSpPr>
-        <p:spPr>
-          <a:xfrm>
-            <a:off x="8257032" y="2194560"/>
-            <a:ext cx="2926080" cy="420624"/>
-          </a:xfrm>
-          <a:prstGeom prst="rect">
-            <a:avLst/>
-          </a:prstGeom>
-          <a:noFill/>
-          <a:ln/>
-        </p:spPr>
-        <p:txBody>
-          <a:bodyPr wrap="square" lIns="0" tIns="0" rIns="0" bIns="0" rtlCol="0" anchor="ctr"/>
-          <a:lstStyle/>
-          <a:p>
-            <a:pPr indent="0" marL="0">
-              <a:buNone/>
-            </a:pPr>
-            <a:r>
-              <a:rPr lang="en-US" sz="1200" dirty="0">
-                <a:solidFill>
-                  <a:srgbClr val="141414"/>
-                </a:solidFill>
-                <a:latin typeface="Pretendard" pitchFamily="34" charset="0"/>
-                <a:ea typeface="Pretendard" pitchFamily="34" charset="-122"/>
-                <a:cs typeface="Pretendard" pitchFamily="34" charset="-120"/>
-              </a:rPr>
-              <a:t>파일을 지우고 다시 만든다</a:t>
-            </a:r>
-            <a:endParaRPr lang="en-US" sz="1200" dirty="0"/>
-          </a:p>
-        </p:txBody>
-      </p:sp>
-      <p:sp>
-        <p:nvSpPr>
-          <p:cNvPr id="8" name="Shape 6"/>
-          <p:cNvSpPr/>
-          <p:nvPr/>
-        </p:nvSpPr>
-        <p:spPr>
-          <a:xfrm>
-            <a:off x="758952" y="2761488"/>
-            <a:ext cx="10673791" cy="0"/>
-          </a:xfrm>
-          <a:prstGeom prst="line">
-            <a:avLst/>
-          </a:prstGeom>
-          <a:noFill/>
-          <a:ln w="12700">
-            <a:solidFill>
-              <a:srgbClr val="F0F0F0"/>
-            </a:solidFill>
-            <a:prstDash val="solid"/>
-          </a:ln>
-        </p:spPr>
-      </p:sp>
-      <p:sp>
-        <p:nvSpPr>
-          <p:cNvPr id="9" name="Text 7"/>
-          <p:cNvSpPr txBox="1"/>
-          <p:nvPr/>
-        </p:nvSpPr>
-        <p:spPr>
-          <a:xfrm>
-            <a:off x="758952" y="2926080"/>
-            <a:ext cx="3931920" cy="420624"/>
-          </a:xfrm>
-          <a:prstGeom prst="rect">
-            <a:avLst/>
-          </a:prstGeom>
-          <a:noFill/>
-          <a:ln/>
-        </p:spPr>
-        <p:txBody>
-          <a:bodyPr wrap="square" lIns="0" tIns="0" rIns="0" bIns="0" rtlCol="0" anchor="ctr"/>
-          <a:lstStyle/>
-          <a:p>
-            <a:pPr indent="0" marL="0">
-              <a:buNone/>
-            </a:pPr>
-            <a:r>
-              <a:rPr lang="en-US" sz="1550" dirty="0">
-                <a:solidFill>
-                  <a:srgbClr val="141414"/>
-                </a:solidFill>
-                <a:latin typeface="Pretendard SemiBold" pitchFamily="34" charset="0"/>
-                <a:ea typeface="Pretendard SemiBold" pitchFamily="34" charset="-122"/>
-                <a:cs typeface="Pretendard SemiBold" pitchFamily="34" charset="-120"/>
-              </a:rPr>
-              <a:t>고쳤는데 반영이 안 됨</a:t>
-            </a:r>
-            <a:endParaRPr lang="en-US" sz="1550" dirty="0"/>
-          </a:p>
-        </p:txBody>
-      </p:sp>
-      <p:sp>
-        <p:nvSpPr>
-          <p:cNvPr id="10" name="Text 8"/>
-          <p:cNvSpPr txBox="1"/>
-          <p:nvPr/>
-        </p:nvSpPr>
-        <p:spPr>
-          <a:xfrm>
-            <a:off x="4873752" y="2926080"/>
-            <a:ext cx="3291840" cy="420624"/>
-          </a:xfrm>
-          <a:prstGeom prst="rect">
-            <a:avLst/>
-          </a:prstGeom>
-          <a:noFill/>
-          <a:ln/>
-        </p:spPr>
-        <p:txBody>
-          <a:bodyPr wrap="square" lIns="0" tIns="0" rIns="0" bIns="0" rtlCol="0" anchor="ctr"/>
-          <a:lstStyle/>
-          <a:p>
-            <a:pPr indent="0" marL="0">
-              <a:buNone/>
-            </a:pPr>
-            <a:r>
-              <a:rPr lang="en-US" sz="1200" dirty="0">
-                <a:solidFill>
-                  <a:srgbClr val="ADADAD"/>
-                </a:solidFill>
-                <a:latin typeface="Pretendard" pitchFamily="34" charset="0"/>
-                <a:ea typeface="Pretendard" pitchFamily="34" charset="-122"/>
-                <a:cs typeface="Pretendard" pitchFamily="34" charset="-120"/>
-              </a:rPr>
-              <a:t>저장 안 함 / 컴파일 대기</a:t>
-            </a:r>
-            <a:endParaRPr lang="en-US" sz="1200" dirty="0"/>
-          </a:p>
-        </p:txBody>
-      </p:sp>
-      <p:sp>
-        <p:nvSpPr>
-          <p:cNvPr id="11" name="Text 9"/>
-          <p:cNvSpPr txBox="1"/>
-          <p:nvPr/>
-        </p:nvSpPr>
-        <p:spPr>
-          <a:xfrm>
-            <a:off x="8257032" y="2926080"/>
-            <a:ext cx="2926080" cy="420624"/>
-          </a:xfrm>
-          <a:prstGeom prst="rect">
-            <a:avLst/>
-          </a:prstGeom>
-          <a:noFill/>
-          <a:ln/>
-        </p:spPr>
-        <p:txBody>
-          <a:bodyPr wrap="square" lIns="0" tIns="0" rIns="0" bIns="0" rtlCol="0" anchor="ctr"/>
-          <a:lstStyle/>
-          <a:p>
-            <a:pPr indent="0" marL="0">
-              <a:buNone/>
-            </a:pPr>
-            <a:r>
-              <a:rPr lang="en-US" sz="1200" dirty="0">
-                <a:solidFill>
-                  <a:srgbClr val="141414"/>
-                </a:solidFill>
-                <a:latin typeface="Pretendard" pitchFamily="34" charset="0"/>
-                <a:ea typeface="Pretendard" pitchFamily="34" charset="-122"/>
-                <a:cs typeface="Pretendard" pitchFamily="34" charset="-120"/>
-              </a:rPr>
-              <a:t>저장 → 전환 → 기다림</a:t>
-            </a:r>
-            <a:endParaRPr lang="en-US" sz="1200" dirty="0"/>
-          </a:p>
-        </p:txBody>
-      </p:sp>
-      <p:sp>
-        <p:nvSpPr>
-          <p:cNvPr id="12" name="Shape 10"/>
-          <p:cNvSpPr/>
-          <p:nvPr/>
-        </p:nvSpPr>
-        <p:spPr>
-          <a:xfrm>
-            <a:off x="758952" y="3493008"/>
-            <a:ext cx="10673791" cy="0"/>
-          </a:xfrm>
-          <a:prstGeom prst="line">
-            <a:avLst/>
-          </a:prstGeom>
-          <a:noFill/>
-          <a:ln w="12700">
-            <a:solidFill>
-              <a:srgbClr val="F0F0F0"/>
-            </a:solidFill>
-            <a:prstDash val="solid"/>
-          </a:ln>
-        </p:spPr>
-      </p:sp>
-      <p:sp>
-        <p:nvSpPr>
-          <p:cNvPr id="13" name="Text 11"/>
-          <p:cNvSpPr txBox="1"/>
-          <p:nvPr/>
-        </p:nvSpPr>
-        <p:spPr>
-          <a:xfrm>
-            <a:off x="758952" y="3657600"/>
-            <a:ext cx="3931920" cy="420624"/>
-          </a:xfrm>
-          <a:prstGeom prst="rect">
-            <a:avLst/>
-          </a:prstGeom>
-          <a:noFill/>
-          <a:ln/>
-        </p:spPr>
-        <p:txBody>
-          <a:bodyPr wrap="square" lIns="0" tIns="0" rIns="0" bIns="0" rtlCol="0" anchor="ctr"/>
-          <a:lstStyle/>
-          <a:p>
-            <a:pPr indent="0" marL="0">
-              <a:buNone/>
-            </a:pPr>
-            <a:r>
-              <a:rPr lang="en-US" sz="1550" dirty="0">
-                <a:solidFill>
-                  <a:srgbClr val="141414"/>
-                </a:solidFill>
-                <a:latin typeface="Pretendard SemiBold" pitchFamily="34" charset="0"/>
-                <a:ea typeface="Pretendard SemiBold" pitchFamily="34" charset="-122"/>
-                <a:cs typeface="Pretendard SemiBold" pitchFamily="34" charset="-120"/>
-              </a:rPr>
-              <a:t>곱했더니 거의 안 움직임</a:t>
-            </a:r>
-            <a:endParaRPr lang="en-US" sz="1550" dirty="0"/>
-          </a:p>
-        </p:txBody>
-      </p:sp>
-      <p:sp>
-        <p:nvSpPr>
-          <p:cNvPr id="14" name="Text 12"/>
-          <p:cNvSpPr txBox="1"/>
-          <p:nvPr/>
-        </p:nvSpPr>
-        <p:spPr>
-          <a:xfrm>
-            <a:off x="4873752" y="3657600"/>
-            <a:ext cx="3291840" cy="420624"/>
-          </a:xfrm>
-          <a:prstGeom prst="rect">
-            <a:avLst/>
-          </a:prstGeom>
-          <a:noFill/>
-          <a:ln/>
-        </p:spPr>
-        <p:txBody>
-          <a:bodyPr wrap="square" lIns="0" tIns="0" rIns="0" bIns="0" rtlCol="0" anchor="ctr"/>
-          <a:lstStyle/>
-          <a:p>
-            <a:pPr indent="0" marL="0">
-              <a:buNone/>
-            </a:pPr>
-            <a:r>
-              <a:rPr lang="en-US" sz="1200" dirty="0">
-                <a:solidFill>
-                  <a:srgbClr val="ADADAD"/>
-                </a:solidFill>
-                <a:latin typeface="Pretendard" pitchFamily="34" charset="0"/>
-                <a:ea typeface="Pretendard" pitchFamily="34" charset="-122"/>
-                <a:cs typeface="Pretendard" pitchFamily="34" charset="-120"/>
-              </a:rPr>
-              <a:t>값을 안 바꿈 (0.05 그대로)</a:t>
-            </a:r>
-            <a:endParaRPr lang="en-US" sz="1200" dirty="0"/>
-          </a:p>
-        </p:txBody>
-      </p:sp>
-      <p:sp>
-        <p:nvSpPr>
-          <p:cNvPr id="15" name="Text 13"/>
-          <p:cNvSpPr txBox="1"/>
-          <p:nvPr/>
-        </p:nvSpPr>
-        <p:spPr>
-          <a:xfrm>
-            <a:off x="8257032" y="3657600"/>
-            <a:ext cx="2926080" cy="420624"/>
-          </a:xfrm>
-          <a:prstGeom prst="rect">
-            <a:avLst/>
-          </a:prstGeom>
-          <a:noFill/>
-          <a:ln/>
-        </p:spPr>
-        <p:txBody>
-          <a:bodyPr wrap="square" lIns="0" tIns="0" rIns="0" bIns="0" rtlCol="0" anchor="ctr"/>
-          <a:lstStyle/>
-          <a:p>
-            <a:pPr indent="0" marL="0">
-              <a:buNone/>
-            </a:pPr>
-            <a:r>
-              <a:rPr lang="en-US" sz="1200" dirty="0">
-                <a:solidFill>
-                  <a:srgbClr val="141414"/>
-                </a:solidFill>
-                <a:latin typeface="Pretendard" pitchFamily="34" charset="0"/>
-                <a:ea typeface="Pretendard" pitchFamily="34" charset="-122"/>
-                <a:cs typeface="Pretendard" pitchFamily="34" charset="-120"/>
-              </a:rPr>
-              <a:t>단위가 바뀌었다. 3으로</a:t>
-            </a:r>
-            <a:endParaRPr lang="en-US" sz="1200" dirty="0"/>
-          </a:p>
-        </p:txBody>
-      </p:sp>
-      <p:sp>
-        <p:nvSpPr>
-          <p:cNvPr id="16" name="Shape 14"/>
-          <p:cNvSpPr/>
-          <p:nvPr/>
-        </p:nvSpPr>
-        <p:spPr>
-          <a:xfrm>
-            <a:off x="758952" y="4224528"/>
-            <a:ext cx="10673791" cy="0"/>
-          </a:xfrm>
-          <a:prstGeom prst="line">
-            <a:avLst/>
-          </a:prstGeom>
-          <a:noFill/>
-          <a:ln w="12700">
-            <a:solidFill>
-              <a:srgbClr val="F0F0F0"/>
-            </a:solidFill>
-            <a:prstDash val="solid"/>
-          </a:ln>
-        </p:spPr>
-      </p:sp>
-      <p:sp>
-        <p:nvSpPr>
-          <p:cNvPr id="17" name="Text 15"/>
-          <p:cNvSpPr txBox="1"/>
-          <p:nvPr/>
-        </p:nvSpPr>
-        <p:spPr>
-          <a:xfrm>
-            <a:off x="758952" y="4389120"/>
-            <a:ext cx="3931920" cy="420624"/>
-          </a:xfrm>
-          <a:prstGeom prst="rect">
-            <a:avLst/>
-          </a:prstGeom>
-          <a:noFill/>
-          <a:ln/>
-        </p:spPr>
-        <p:txBody>
-          <a:bodyPr wrap="square" lIns="0" tIns="0" rIns="0" bIns="0" rtlCol="0" anchor="ctr"/>
-          <a:lstStyle/>
-          <a:p>
-            <a:pPr indent="0" marL="0">
-              <a:buNone/>
-            </a:pPr>
-            <a:r>
-              <a:rPr lang="en-US" sz="1550" dirty="0">
-                <a:solidFill>
-                  <a:srgbClr val="141414"/>
-                </a:solidFill>
-                <a:latin typeface="Pretendard SemiBold" pitchFamily="34" charset="0"/>
-                <a:ea typeface="Pretendard SemiBold" pitchFamily="34" charset="-122"/>
-                <a:cs typeface="Pretendard SemiBold" pitchFamily="34" charset="-120"/>
-              </a:rPr>
-              <a:t>NullReferenceException</a:t>
-            </a:r>
-            <a:endParaRPr lang="en-US" sz="1550" dirty="0"/>
-          </a:p>
-        </p:txBody>
-      </p:sp>
-      <p:sp>
-        <p:nvSpPr>
-          <p:cNvPr id="18" name="Text 16"/>
-          <p:cNvSpPr txBox="1"/>
-          <p:nvPr/>
-        </p:nvSpPr>
-        <p:spPr>
-          <a:xfrm>
-            <a:off x="4873752" y="4389120"/>
-            <a:ext cx="3291840" cy="420624"/>
-          </a:xfrm>
-          <a:prstGeom prst="rect">
-            <a:avLst/>
-          </a:prstGeom>
-          <a:noFill/>
-          <a:ln/>
-        </p:spPr>
-        <p:txBody>
-          <a:bodyPr wrap="square" lIns="0" tIns="0" rIns="0" bIns="0" rtlCol="0" anchor="ctr"/>
-          <a:lstStyle/>
-          <a:p>
-            <a:pPr indent="0" marL="0">
-              <a:buNone/>
-            </a:pPr>
-            <a:r>
-              <a:rPr lang="en-US" sz="1200" dirty="0">
-                <a:solidFill>
-                  <a:srgbClr val="ADADAD"/>
-                </a:solidFill>
-                <a:latin typeface="Pretendard" pitchFamily="34" charset="0"/>
-                <a:ea typeface="Pretendard" pitchFamily="34" charset="-122"/>
-                <a:cs typeface="Pretendard" pitchFamily="34" charset="-120"/>
-              </a:rPr>
-              <a:t>Inspector 칸이 비어 있음</a:t>
-            </a:r>
-            <a:endParaRPr lang="en-US" sz="1200" dirty="0"/>
-          </a:p>
-        </p:txBody>
-      </p:sp>
-      <p:sp>
-        <p:nvSpPr>
-          <p:cNvPr id="19" name="Text 17"/>
-          <p:cNvSpPr txBox="1"/>
-          <p:nvPr/>
-        </p:nvSpPr>
-        <p:spPr>
-          <a:xfrm>
-            <a:off x="8257032" y="4389120"/>
-            <a:ext cx="2926080" cy="420624"/>
-          </a:xfrm>
-          <a:prstGeom prst="rect">
-            <a:avLst/>
-          </a:prstGeom>
-          <a:noFill/>
-          <a:ln/>
-        </p:spPr>
-        <p:txBody>
-          <a:bodyPr wrap="square" lIns="0" tIns="0" rIns="0" bIns="0" rtlCol="0" anchor="ctr"/>
-          <a:lstStyle/>
-          <a:p>
-            <a:pPr indent="0" marL="0">
-              <a:buNone/>
-            </a:pPr>
-            <a:r>
-              <a:rPr lang="en-US" sz="1200" dirty="0">
-                <a:solidFill>
-                  <a:srgbClr val="141414"/>
-                </a:solidFill>
-                <a:latin typeface="Pretendard" pitchFamily="34" charset="0"/>
-                <a:ea typeface="Pretendard" pitchFamily="34" charset="-122"/>
-                <a:cs typeface="Pretendard" pitchFamily="34" charset="-120"/>
-              </a:rPr>
-              <a:t>Hierarchy 에서 드래그</a:t>
-            </a:r>
-            <a:endParaRPr lang="en-US" sz="1200" dirty="0"/>
-          </a:p>
-        </p:txBody>
-      </p:sp>
-      <p:sp>
-        <p:nvSpPr>
-          <p:cNvPr id="20" name="Shape 18"/>
-          <p:cNvSpPr/>
-          <p:nvPr/>
-        </p:nvSpPr>
-        <p:spPr>
-          <a:xfrm>
-            <a:off x="758952" y="4956048"/>
-            <a:ext cx="10673791" cy="0"/>
-          </a:xfrm>
-          <a:prstGeom prst="line">
-            <a:avLst/>
-          </a:prstGeom>
-          <a:noFill/>
-          <a:ln w="12700">
-            <a:solidFill>
-              <a:srgbClr val="F0F0F0"/>
-            </a:solidFill>
-            <a:prstDash val="solid"/>
-          </a:ln>
-        </p:spPr>
-      </p:sp>
-      <p:sp>
-        <p:nvSpPr>
-          <p:cNvPr id="21" name="Shape 19"/>
-          <p:cNvSpPr/>
-          <p:nvPr/>
-        </p:nvSpPr>
-        <p:spPr>
-          <a:xfrm>
-            <a:off x="502920" y="5029200"/>
-            <a:ext cx="11185855" cy="640080"/>
+            <a:off x="758952" y="548640"/>
+            <a:ext cx="585216" cy="274320"/>
           </a:xfrm>
           <a:prstGeom prst="roundRect">
             <a:avLst>
-              <a:gd name="adj" fmla="val 23857"/>
+              <a:gd name="adj" fmla="val 50000"/>
             </a:avLst>
           </a:prstGeom>
           <a:solidFill>
@@ -5068,30 +5028,30 @@
       </p:sp>
       <p:sp>
         <p:nvSpPr>
-          <p:cNvPr id="22" name="Text 20"/>
-          <p:cNvSpPr txBox="1"/>
-          <p:nvPr/>
-        </p:nvSpPr>
-        <p:spPr>
-          <a:xfrm>
-            <a:off x="758952" y="5120640"/>
-            <a:ext cx="3931920" cy="420624"/>
-          </a:xfrm>
-          <a:prstGeom prst="rect">
-            <a:avLst/>
-          </a:prstGeom>
-          <a:noFill/>
-          <a:ln/>
-        </p:spPr>
-        <p:txBody>
-          <a:bodyPr wrap="square" lIns="0" tIns="0" rIns="0" bIns="0" rtlCol="0" anchor="ctr"/>
-          <a:lstStyle/>
-          <a:p>
-            <a:pPr indent="0" marL="0">
-              <a:buNone/>
-            </a:pPr>
-            <a:r>
-              <a:rPr lang="en-US" sz="1550" dirty="0">
+          <p:cNvPr id="3" name="Text 1"/>
+          <p:cNvSpPr txBox="1"/>
+          <p:nvPr/>
+        </p:nvSpPr>
+        <p:spPr>
+          <a:xfrm>
+            <a:off x="758952" y="548640"/>
+            <a:ext cx="585216" cy="274320"/>
+          </a:xfrm>
+          <a:prstGeom prst="rect">
+            <a:avLst/>
+          </a:prstGeom>
+          <a:noFill/>
+          <a:ln/>
+        </p:spPr>
+        <p:txBody>
+          <a:bodyPr wrap="square" lIns="0" tIns="0" rIns="0" bIns="0" rtlCol="0" anchor="ctr"/>
+          <a:lstStyle/>
+          <a:p>
+            <a:pPr algn="ctr" indent="0" marL="0">
+              <a:buNone/>
+            </a:pPr>
+            <a:r>
+              <a:rPr lang="en-US" sz="950" dirty="0">
                 <a:solidFill>
                   <a:srgbClr val="141414"/>
                 </a:solidFill>
@@ -5099,108 +5059,108 @@
                 <a:ea typeface="Pretendard SemiBold" pitchFamily="34" charset="-122"/>
                 <a:cs typeface="Pretendard SemiBold" pitchFamily="34" charset="-120"/>
               </a:rPr>
-              <a:t>키를 눌러도 안 움직임</a:t>
-            </a:r>
-            <a:endParaRPr lang="en-US" sz="1550" dirty="0"/>
-          </a:p>
-        </p:txBody>
-      </p:sp>
-      <p:sp>
-        <p:nvSpPr>
-          <p:cNvPr id="23" name="Text 21"/>
-          <p:cNvSpPr txBox="1"/>
-          <p:nvPr/>
-        </p:nvSpPr>
-        <p:spPr>
-          <a:xfrm>
-            <a:off x="4873752" y="5120640"/>
-            <a:ext cx="3291840" cy="420624"/>
-          </a:xfrm>
-          <a:prstGeom prst="rect">
-            <a:avLst/>
-          </a:prstGeom>
-          <a:noFill/>
-          <a:ln/>
-        </p:spPr>
-        <p:txBody>
-          <a:bodyPr wrap="square" lIns="0" tIns="0" rIns="0" bIns="0" rtlCol="0" anchor="ctr"/>
-          <a:lstStyle/>
-          <a:p>
-            <a:pPr indent="0" marL="0">
-              <a:buNone/>
-            </a:pPr>
-            <a:r>
-              <a:rPr lang="en-US" sz="1200" dirty="0">
-                <a:solidFill>
-                  <a:srgbClr val="ADADAD"/>
-                </a:solidFill>
-                <a:latin typeface="Pretendard" pitchFamily="34" charset="0"/>
-                <a:ea typeface="Pretendard" pitchFamily="34" charset="-122"/>
-                <a:cs typeface="Pretendard" pitchFamily="34" charset="-120"/>
-              </a:rPr>
-              <a:t>Active Input Handling</a:t>
-            </a:r>
-            <a:endParaRPr lang="en-US" sz="1200" dirty="0"/>
-          </a:p>
-        </p:txBody>
-      </p:sp>
-      <p:sp>
-        <p:nvSpPr>
-          <p:cNvPr id="24" name="Text 22"/>
-          <p:cNvSpPr txBox="1"/>
-          <p:nvPr/>
-        </p:nvSpPr>
-        <p:spPr>
-          <a:xfrm>
-            <a:off x="8257032" y="5120640"/>
-            <a:ext cx="2926080" cy="420624"/>
-          </a:xfrm>
-          <a:prstGeom prst="rect">
-            <a:avLst/>
-          </a:prstGeom>
-          <a:noFill/>
-          <a:ln/>
-        </p:spPr>
-        <p:txBody>
-          <a:bodyPr wrap="square" lIns="0" tIns="0" rIns="0" bIns="0" rtlCol="0" anchor="ctr"/>
-          <a:lstStyle/>
-          <a:p>
-            <a:pPr indent="0" marL="0">
-              <a:buNone/>
-            </a:pPr>
-            <a:r>
-              <a:rPr lang="en-US" sz="1200" dirty="0">
+              <a:t>040</a:t>
+            </a:r>
+            <a:endParaRPr lang="en-US" sz="950" dirty="0"/>
+          </a:p>
+        </p:txBody>
+      </p:sp>
+      <p:sp>
+        <p:nvSpPr>
+          <p:cNvPr id="4" name="Text 2"/>
+          <p:cNvSpPr txBox="1"/>
+          <p:nvPr/>
+        </p:nvSpPr>
+        <p:spPr>
+          <a:xfrm>
+            <a:off x="758952" y="914400"/>
+            <a:ext cx="10673791" cy="457200"/>
+          </a:xfrm>
+          <a:prstGeom prst="rect">
+            <a:avLst/>
+          </a:prstGeom>
+          <a:noFill/>
+          <a:ln/>
+        </p:spPr>
+        <p:txBody>
+          <a:bodyPr wrap="square" lIns="0" tIns="0" rIns="0" bIns="0" rtlCol="0" anchor="ctr"/>
+          <a:lstStyle/>
+          <a:p>
+            <a:pPr indent="0" marL="0">
+              <a:buNone/>
+            </a:pPr>
+            <a:r>
+              <a:rPr lang="en-US" sz="2600" dirty="0">
                 <a:solidFill>
                   <a:srgbClr val="141414"/>
                 </a:solidFill>
-                <a:latin typeface="Pretendard" pitchFamily="34" charset="0"/>
-                <a:ea typeface="Pretendard" pitchFamily="34" charset="-122"/>
-                <a:cs typeface="Pretendard" pitchFamily="34" charset="-120"/>
-              </a:rPr>
-              <a:t>Both 로. 에디터 재시작</a:t>
-            </a:r>
-            <a:endParaRPr lang="en-US" sz="1200" dirty="0"/>
-          </a:p>
-        </p:txBody>
-      </p:sp>
-      <p:sp>
-        <p:nvSpPr>
-          <p:cNvPr id="25" name="Shape 23"/>
+                <a:latin typeface="Pretendard SemiBold" pitchFamily="34" charset="0"/>
+                <a:ea typeface="Pretendard SemiBold" pitchFamily="34" charset="-122"/>
+                <a:cs typeface="Pretendard SemiBold" pitchFamily="34" charset="-120"/>
+              </a:rPr>
+              <a:t>실습 — WASD로 움직이는 캐릭터.</a:t>
+            </a:r>
+            <a:endParaRPr lang="en-US" sz="2600" dirty="0"/>
+          </a:p>
+        </p:txBody>
+      </p:sp>
+      <p:sp>
+        <p:nvSpPr>
+          <p:cNvPr id="5" name="Text 3"/>
+          <p:cNvSpPr txBox="1"/>
+          <p:nvPr/>
+        </p:nvSpPr>
+        <p:spPr>
+          <a:xfrm>
+            <a:off x="758952" y="1408176"/>
+            <a:ext cx="10673791" cy="329184"/>
+          </a:xfrm>
+          <a:prstGeom prst="rect">
+            <a:avLst/>
+          </a:prstGeom>
+          <a:noFill/>
+          <a:ln/>
+        </p:spPr>
+        <p:txBody>
+          <a:bodyPr wrap="square" lIns="0" tIns="0" rIns="0" bIns="0" rtlCol="0" anchor="ctr"/>
+          <a:lstStyle/>
+          <a:p>
+            <a:pPr indent="0" marL="0">
+              <a:buNone/>
+            </a:pPr>
+            <a:r>
+              <a:rPr lang="en-US" sz="1500" dirty="0">
+                <a:solidFill>
+                  <a:srgbClr val="707070"/>
+                </a:solidFill>
+                <a:latin typeface="Pretendard Light" pitchFamily="34" charset="0"/>
+                <a:ea typeface="Pretendard Light" pitchFamily="34" charset="-122"/>
+                <a:cs typeface="Pretendard Light" pitchFamily="34" charset="-120"/>
+              </a:rPr>
+              <a:t>8주를 기다린 결과물이다. 서두르지 않는다.</a:t>
+            </a:r>
+            <a:endParaRPr lang="en-US" sz="1500" dirty="0"/>
+          </a:p>
+        </p:txBody>
+      </p:sp>
+      <p:sp>
+        <p:nvSpPr>
+          <p:cNvPr id="6" name="Shape 4"/>
           <p:cNvSpPr/>
           <p:nvPr/>
         </p:nvSpPr>
         <p:spPr>
           <a:xfrm>
-            <a:off x="758952" y="6053328"/>
-            <a:ext cx="4480560" cy="329184"/>
+            <a:off x="758952" y="1965960"/>
+            <a:ext cx="6035040" cy="3566160"/>
           </a:xfrm>
           <a:prstGeom prst="roundRect">
             <a:avLst>
-              <a:gd name="adj" fmla="val 50000"/>
+              <a:gd name="adj" fmla="val 4282"/>
             </a:avLst>
           </a:prstGeom>
           <a:solidFill>
-            <a:srgbClr val="0066FF"/>
+            <a:srgbClr val="F3F3F3"/>
           </a:solidFill>
           <a:ln w="12700">
             <a:solidFill>
@@ -5212,14 +5172,347 @@
       </p:sp>
       <p:sp>
         <p:nvSpPr>
-          <p:cNvPr id="26" name="Text 24"/>
-          <p:cNvSpPr txBox="1"/>
-          <p:nvPr/>
-        </p:nvSpPr>
-        <p:spPr>
-          <a:xfrm>
-            <a:off x="758952" y="6053328"/>
-            <a:ext cx="4480560" cy="329184"/>
+          <p:cNvPr id="7" name="Text 5"/>
+          <p:cNvSpPr txBox="1"/>
+          <p:nvPr/>
+        </p:nvSpPr>
+        <p:spPr>
+          <a:xfrm>
+            <a:off x="1014984" y="2167128"/>
+            <a:ext cx="5522976" cy="3163824"/>
+          </a:xfrm>
+          <a:prstGeom prst="rect">
+            <a:avLst/>
+          </a:prstGeom>
+          <a:noFill/>
+          <a:ln/>
+        </p:spPr>
+        <p:txBody>
+          <a:bodyPr wrap="square" lIns="0" tIns="0" rIns="0" bIns="0" rtlCol="0" anchor="t"/>
+          <a:lstStyle/>
+          <a:p>
+            <a:pPr indent="0" marL="0">
+              <a:lnSpc>
+                <a:spcPct val="132000"/>
+              </a:lnSpc>
+              <a:buNone/>
+            </a:pPr>
+            <a:r>
+              <a:rPr lang="en-US" sz="1150" dirty="0">
+                <a:solidFill>
+                  <a:srgbClr val="141414"/>
+                </a:solidFill>
+                <a:latin typeface="Consolas" pitchFamily="34" charset="0"/>
+                <a:ea typeface="Consolas" pitchFamily="34" charset="-122"/>
+                <a:cs typeface="Consolas" pitchFamily="34" charset="-120"/>
+              </a:rPr>
+              <a:t>public class PlayerMove : MonoBehaviour</a:t>
+            </a:r>
+            <a:endParaRPr lang="en-US" sz="1150" dirty="0"/>
+          </a:p>
+          <a:p>
+            <a:pPr indent="0" marL="0">
+              <a:lnSpc>
+                <a:spcPct val="132000"/>
+              </a:lnSpc>
+              <a:buNone/>
+            </a:pPr>
+            <a:r>
+              <a:rPr lang="en-US" sz="1150" dirty="0">
+                <a:solidFill>
+                  <a:srgbClr val="141414"/>
+                </a:solidFill>
+                <a:latin typeface="Consolas" pitchFamily="34" charset="0"/>
+                <a:ea typeface="Consolas" pitchFamily="34" charset="-122"/>
+                <a:cs typeface="Consolas" pitchFamily="34" charset="-120"/>
+              </a:rPr>
+              <a:t>{</a:t>
+            </a:r>
+            <a:endParaRPr lang="en-US" sz="1150" dirty="0"/>
+          </a:p>
+          <a:p>
+            <a:pPr indent="0" marL="0">
+              <a:lnSpc>
+                <a:spcPct val="132000"/>
+              </a:lnSpc>
+              <a:buNone/>
+            </a:pPr>
+            <a:r>
+              <a:rPr lang="en-US" sz="1150" dirty="0">
+                <a:solidFill>
+                  <a:srgbClr val="141414"/>
+                </a:solidFill>
+                <a:latin typeface="Consolas" pitchFamily="34" charset="0"/>
+                <a:ea typeface="Consolas" pitchFamily="34" charset="-122"/>
+                <a:cs typeface="Consolas" pitchFamily="34" charset="-120"/>
+              </a:rPr>
+              <a:t>    [SerializeField] float moveSpeed = 5f;</a:t>
+            </a:r>
+            <a:endParaRPr lang="en-US" sz="1150" dirty="0"/>
+          </a:p>
+          <a:p>
+            <a:pPr indent="0" marL="0">
+              <a:lnSpc>
+                <a:spcPct val="132000"/>
+              </a:lnSpc>
+              <a:buNone/>
+            </a:pPr>
+            <a:r>
+              <a:rPr lang="en-US" sz="1150" dirty="0">
+                <a:solidFill>
+                  <a:srgbClr val="141414"/>
+                </a:solidFill>
+                <a:latin typeface="Consolas" pitchFamily="34" charset="0"/>
+                <a:ea typeface="Consolas" pitchFamily="34" charset="-122"/>
+                <a:cs typeface="Consolas" pitchFamily="34" charset="-120"/>
+              </a:rPr>
+              <a:t>    [SerializeField] GameObject item;</a:t>
+            </a:r>
+            <a:endParaRPr lang="en-US" sz="1150" dirty="0"/>
+          </a:p>
+          <a:p>
+            <a:pPr indent="0" marL="0">
+              <a:lnSpc>
+                <a:spcPct val="132000"/>
+              </a:lnSpc>
+              <a:buNone/>
+            </a:pPr>
+            <a:r>
+              <a:rPr lang="en-US" sz="1150" dirty="0">
+                <a:solidFill>
+                  <a:srgbClr val="141414"/>
+                </a:solidFill>
+                <a:latin typeface="Consolas" pitchFamily="34" charset="0"/>
+                <a:ea typeface="Consolas" pitchFamily="34" charset="-122"/>
+                <a:cs typeface="Consolas" pitchFamily="34" charset="-120"/>
+              </a:rPr>
+              <a:t> </a:t>
+            </a:r>
+            <a:endParaRPr lang="en-US" sz="1150" dirty="0"/>
+          </a:p>
+          <a:p>
+            <a:pPr indent="0" marL="0">
+              <a:lnSpc>
+                <a:spcPct val="132000"/>
+              </a:lnSpc>
+              <a:buNone/>
+            </a:pPr>
+            <a:r>
+              <a:rPr lang="en-US" sz="1150" dirty="0">
+                <a:solidFill>
+                  <a:srgbClr val="141414"/>
+                </a:solidFill>
+                <a:latin typeface="Consolas" pitchFamily="34" charset="0"/>
+                <a:ea typeface="Consolas" pitchFamily="34" charset="-122"/>
+                <a:cs typeface="Consolas" pitchFamily="34" charset="-120"/>
+              </a:rPr>
+              <a:t>    void Update()</a:t>
+            </a:r>
+            <a:endParaRPr lang="en-US" sz="1150" dirty="0"/>
+          </a:p>
+          <a:p>
+            <a:pPr indent="0" marL="0">
+              <a:lnSpc>
+                <a:spcPct val="132000"/>
+              </a:lnSpc>
+              <a:buNone/>
+            </a:pPr>
+            <a:r>
+              <a:rPr lang="en-US" sz="1150" dirty="0">
+                <a:solidFill>
+                  <a:srgbClr val="141414"/>
+                </a:solidFill>
+                <a:latin typeface="Consolas" pitchFamily="34" charset="0"/>
+                <a:ea typeface="Consolas" pitchFamily="34" charset="-122"/>
+                <a:cs typeface="Consolas" pitchFamily="34" charset="-120"/>
+              </a:rPr>
+              <a:t>    {</a:t>
+            </a:r>
+            <a:endParaRPr lang="en-US" sz="1150" dirty="0"/>
+          </a:p>
+          <a:p>
+            <a:pPr indent="0" marL="0">
+              <a:lnSpc>
+                <a:spcPct val="132000"/>
+              </a:lnSpc>
+              <a:buNone/>
+            </a:pPr>
+            <a:r>
+              <a:rPr lang="en-US" sz="1150" dirty="0">
+                <a:solidFill>
+                  <a:srgbClr val="707070"/>
+                </a:solidFill>
+                <a:latin typeface="Consolas" pitchFamily="34" charset="0"/>
+                <a:ea typeface="Consolas" pitchFamily="34" charset="-122"/>
+                <a:cs typeface="Consolas" pitchFamily="34" charset="-120"/>
+              </a:rPr>
+              <a:t>        // TODO ①~③ 이동</a:t>
+            </a:r>
+            <a:endParaRPr lang="en-US" sz="1150" dirty="0"/>
+          </a:p>
+          <a:p>
+            <a:pPr indent="0" marL="0">
+              <a:lnSpc>
+                <a:spcPct val="132000"/>
+              </a:lnSpc>
+              <a:buNone/>
+            </a:pPr>
+            <a:r>
+              <a:rPr lang="en-US" sz="1150" dirty="0">
+                <a:solidFill>
+                  <a:srgbClr val="707070"/>
+                </a:solidFill>
+                <a:latin typeface="Consolas" pitchFamily="34" charset="0"/>
+                <a:ea typeface="Consolas" pitchFamily="34" charset="-122"/>
+                <a:cs typeface="Consolas" pitchFamily="34" charset="-120"/>
+              </a:rPr>
+              <a:t>        // TODO ④ 스페이스로 item 토글</a:t>
+            </a:r>
+            <a:endParaRPr lang="en-US" sz="1150" dirty="0"/>
+          </a:p>
+          <a:p>
+            <a:pPr indent="0" marL="0">
+              <a:lnSpc>
+                <a:spcPct val="132000"/>
+              </a:lnSpc>
+              <a:buNone/>
+            </a:pPr>
+            <a:r>
+              <a:rPr lang="en-US" sz="1150" dirty="0">
+                <a:solidFill>
+                  <a:srgbClr val="141414"/>
+                </a:solidFill>
+                <a:latin typeface="Consolas" pitchFamily="34" charset="0"/>
+                <a:ea typeface="Consolas" pitchFamily="34" charset="-122"/>
+                <a:cs typeface="Consolas" pitchFamily="34" charset="-120"/>
+              </a:rPr>
+              <a:t>    }</a:t>
+            </a:r>
+            <a:endParaRPr lang="en-US" sz="1150" dirty="0"/>
+          </a:p>
+          <a:p>
+            <a:pPr indent="0" marL="0">
+              <a:lnSpc>
+                <a:spcPct val="132000"/>
+              </a:lnSpc>
+              <a:buNone/>
+            </a:pPr>
+            <a:r>
+              <a:rPr lang="en-US" sz="1150" dirty="0">
+                <a:solidFill>
+                  <a:srgbClr val="141414"/>
+                </a:solidFill>
+                <a:latin typeface="Consolas" pitchFamily="34" charset="0"/>
+                <a:ea typeface="Consolas" pitchFamily="34" charset="-122"/>
+                <a:cs typeface="Consolas" pitchFamily="34" charset="-120"/>
+              </a:rPr>
+              <a:t> </a:t>
+            </a:r>
+            <a:endParaRPr lang="en-US" sz="1150" dirty="0"/>
+          </a:p>
+          <a:p>
+            <a:pPr indent="0" marL="0">
+              <a:lnSpc>
+                <a:spcPct val="132000"/>
+              </a:lnSpc>
+              <a:buNone/>
+            </a:pPr>
+            <a:r>
+              <a:rPr lang="en-US" sz="1150" dirty="0">
+                <a:solidFill>
+                  <a:srgbClr val="707070"/>
+                </a:solidFill>
+                <a:latin typeface="Consolas" pitchFamily="34" charset="0"/>
+                <a:ea typeface="Consolas" pitchFamily="34" charset="-122"/>
+                <a:cs typeface="Consolas" pitchFamily="34" charset="-120"/>
+              </a:rPr>
+              <a:t>    // TODO ⑤ [ContextMenu] 원점으로</a:t>
+            </a:r>
+            <a:endParaRPr lang="en-US" sz="1150" dirty="0"/>
+          </a:p>
+          <a:p>
+            <a:pPr indent="0" marL="0">
+              <a:lnSpc>
+                <a:spcPct val="132000"/>
+              </a:lnSpc>
+              <a:buNone/>
+            </a:pPr>
+            <a:r>
+              <a:rPr lang="en-US" sz="1150" dirty="0">
+                <a:solidFill>
+                  <a:srgbClr val="141414"/>
+                </a:solidFill>
+                <a:latin typeface="Consolas" pitchFamily="34" charset="0"/>
+                <a:ea typeface="Consolas" pitchFamily="34" charset="-122"/>
+                <a:cs typeface="Consolas" pitchFamily="34" charset="-120"/>
+              </a:rPr>
+              <a:t>}</a:t>
+            </a:r>
+            <a:endParaRPr lang="en-US" sz="1150" dirty="0"/>
+          </a:p>
+        </p:txBody>
+      </p:sp>
+      <p:sp>
+        <p:nvSpPr>
+          <p:cNvPr id="8" name="Shape 6"/>
+          <p:cNvSpPr/>
+          <p:nvPr/>
+        </p:nvSpPr>
+        <p:spPr>
+          <a:xfrm>
+            <a:off x="7086600" y="1965960"/>
+            <a:ext cx="4343400" cy="2944368"/>
+          </a:xfrm>
+          <a:prstGeom prst="roundRect">
+            <a:avLst>
+              <a:gd name="adj" fmla="val 7764"/>
+            </a:avLst>
+          </a:prstGeom>
+          <a:solidFill>
+            <a:srgbClr val="F3F3F3"/>
+          </a:solidFill>
+          <a:ln w="12700">
+            <a:solidFill>
+              <a:srgbClr val="333333"/>
+            </a:solidFill>
+            <a:prstDash val="solid"/>
+          </a:ln>
+        </p:spPr>
+      </p:sp>
+      <p:pic>
+        <p:nvPicPr>
+          <p:cNvPr id="9" name="Image 0" descr="C:\Users\user\AppData\Local\Temp\claude\C--Users-user-Github-WaveBreaker\fd97bec6-cef8-4bf5-a447-9a0fa572b36e\scratchpad\shots2\final\040_Input.png">    </p:cNvPr>
+          <p:cNvPicPr>
+            <a:picLocks noChangeAspect="1"/>
+          </p:cNvPicPr>
+          <p:nvPr/>
+        </p:nvPicPr>
+        <p:blipFill>
+          <a:blip r:embed="rId1"/>
+          <a:stretch>
+            <a:fillRect/>
+          </a:stretch>
+        </p:blipFill>
+        <p:spPr>
+          <a:xfrm>
+            <a:off x="7287768" y="2167128"/>
+            <a:ext cx="3941064" cy="2066544"/>
+          </a:xfrm>
+          <a:prstGeom prst="rect">
+            <a:avLst/>
+          </a:prstGeom>
+        </p:spPr>
+      </p:pic>
+      <p:sp>
+        <p:nvSpPr>
+          <p:cNvPr id="10" name="Text 7"/>
+          <p:cNvSpPr txBox="1"/>
+          <p:nvPr/>
+        </p:nvSpPr>
+        <p:spPr>
+          <a:xfrm>
+            <a:off x="7287768" y="4306824"/>
+            <a:ext cx="3941064" cy="310896"/>
           </a:xfrm>
           <a:prstGeom prst="rect">
             <a:avLst/>
@@ -5237,40 +5530,82 @@
             <a:r>
               <a:rPr lang="en-US" sz="950" dirty="0">
                 <a:solidFill>
-                  <a:srgbClr val="FFFFFF"/>
+                  <a:srgbClr val="ADADAD"/>
+                </a:solidFill>
+                <a:latin typeface="Pretendard" pitchFamily="34" charset="0"/>
+                <a:ea typeface="Pretendard" pitchFamily="34" charset="-122"/>
+                <a:cs typeface="Pretendard" pitchFamily="34" charset="-120"/>
+              </a:rPr>
+              <a:t>040_Input_Done — Player 와 Item</a:t>
+            </a:r>
+            <a:endParaRPr lang="en-US" sz="950" dirty="0"/>
+          </a:p>
+        </p:txBody>
+      </p:sp>
+      <p:sp>
+        <p:nvSpPr>
+          <p:cNvPr id="11" name="Text 8"/>
+          <p:cNvSpPr txBox="1"/>
+          <p:nvPr/>
+        </p:nvSpPr>
+        <p:spPr>
+          <a:xfrm>
+            <a:off x="7086600" y="4892040"/>
+            <a:ext cx="4343400" cy="329184"/>
+          </a:xfrm>
+          <a:prstGeom prst="rect">
+            <a:avLst/>
+          </a:prstGeom>
+          <a:noFill/>
+          <a:ln/>
+        </p:spPr>
+        <p:txBody>
+          <a:bodyPr wrap="square" lIns="0" tIns="0" rIns="0" bIns="0" rtlCol="0" anchor="ctr"/>
+          <a:lstStyle/>
+          <a:p>
+            <a:pPr indent="0" marL="0">
+              <a:buNone/>
+            </a:pPr>
+            <a:r>
+              <a:rPr lang="en-US" sz="1400" dirty="0">
+                <a:solidFill>
+                  <a:srgbClr val="141414"/>
                 </a:solidFill>
                 <a:latin typeface="Pretendard SemiBold" pitchFamily="34" charset="0"/>
                 <a:ea typeface="Pretendard SemiBold" pitchFamily="34" charset="-122"/>
                 <a:cs typeface="Pretendard SemiBold" pitchFamily="34" charset="-120"/>
               </a:rPr>
-              <a:t>040 전에 강사가 반드시 확인할 것</a:t>
-            </a:r>
-            <a:endParaRPr lang="en-US" sz="950" dirty="0"/>
-          </a:p>
-        </p:txBody>
-      </p:sp>
-      <p:sp>
-        <p:nvSpPr>
-          <p:cNvPr id="27" name="Text 25"/>
-          <p:cNvSpPr txBox="1"/>
-          <p:nvPr/>
-        </p:nvSpPr>
-        <p:spPr>
-          <a:xfrm>
-            <a:off x="5559552" y="6053328"/>
-            <a:ext cx="5943600" cy="329184"/>
-          </a:xfrm>
-          <a:prstGeom prst="rect">
-            <a:avLst/>
-          </a:prstGeom>
-          <a:noFill/>
-          <a:ln/>
-        </p:spPr>
-        <p:txBody>
-          <a:bodyPr wrap="square" lIns="0" tIns="0" rIns="0" bIns="0" rtlCol="0" anchor="ctr"/>
-          <a:lstStyle/>
-          <a:p>
-            <a:pPr indent="0" marL="0">
+              <a:t>Inspector의 Item 칸이 비어 있으면</a:t>
+            </a:r>
+            <a:endParaRPr lang="en-US" sz="1400" dirty="0"/>
+          </a:p>
+        </p:txBody>
+      </p:sp>
+      <p:sp>
+        <p:nvSpPr>
+          <p:cNvPr id="12" name="Text 9"/>
+          <p:cNvSpPr txBox="1"/>
+          <p:nvPr/>
+        </p:nvSpPr>
+        <p:spPr>
+          <a:xfrm>
+            <a:off x="7086600" y="5285232"/>
+            <a:ext cx="4343400" cy="731520"/>
+          </a:xfrm>
+          <a:prstGeom prst="rect">
+            <a:avLst/>
+          </a:prstGeom>
+          <a:noFill/>
+          <a:ln/>
+        </p:spPr>
+        <p:txBody>
+          <a:bodyPr wrap="square" lIns="0" tIns="0" rIns="0" bIns="0" rtlCol="0" anchor="ctr"/>
+          <a:lstStyle/>
+          <a:p>
+            <a:pPr indent="0" marL="0">
+              <a:lnSpc>
+                <a:spcPct val="138000"/>
+              </a:lnSpc>
               <a:buNone/>
             </a:pPr>
             <a:r>
@@ -5282,7 +5617,7 @@
                 <a:ea typeface="Pretendard Light" pitchFamily="34" charset="-122"/>
                 <a:cs typeface="Pretendard Light" pitchFamily="34" charset="-120"/>
               </a:rPr>
-              <a:t>New 전용이면 Input.GetAxisRaw 가 런타임에 예외를 던진다. 반 전체가 동시에 막힌다.</a:t>
+              <a:t>스페이스를 누르는 순간 NullReferenceException 이 난다. Hierarchy에서 드래그해 넣는다.</a:t>
             </a:r>
             <a:endParaRPr lang="en-US" sz="1200" dirty="0"/>
           </a:p>
@@ -5353,7 +5688,7 @@
                 <a:ea typeface="Pretendard SemiBold" pitchFamily="34" charset="-122"/>
                 <a:cs typeface="Pretendard SemiBold" pitchFamily="34" charset="-120"/>
               </a:rPr>
-              <a:t>Phase 2 종료 조건.</a:t>
+              <a:t>이번 주 흔한 사고.</a:t>
             </a:r>
             <a:endParaRPr lang="en-US" sz="2600" dirty="0"/>
           </a:p>
@@ -5392,7 +5727,7 @@
                 <a:ea typeface="Pretendard Light" pitchFamily="34" charset="-122"/>
                 <a:cs typeface="Pretendard Light" pitchFamily="34" charset="-120"/>
               </a:rPr>
-              <a:t>040 데모에서 한 명씩 확인한다. Phase 3는 이 위에 그대로 쌓인다.</a:t>
+              <a:t>미리 알고 있으면 대응이 빨라진다. 강사용.</a:t>
             </a:r>
             <a:endParaRPr lang="en-US" sz="1500" dirty="0"/>
           </a:p>
@@ -5406,17 +5741,13 @@
         </p:nvSpPr>
         <p:spPr>
           <a:xfrm>
-            <a:off x="758952" y="2176272"/>
-            <a:ext cx="201168" cy="201168"/>
-          </a:xfrm>
-          <a:prstGeom prst="roundRect">
-            <a:avLst>
-              <a:gd name="adj" fmla="val 22727"/>
-            </a:avLst>
-          </a:prstGeom>
-          <a:solidFill>
-            <a:srgbClr val="FFFFFF"/>
-          </a:solidFill>
+            <a:off x="758952" y="2011680"/>
+            <a:ext cx="10673791" cy="0"/>
+          </a:xfrm>
+          <a:prstGeom prst="line">
+            <a:avLst/>
+          </a:prstGeom>
+          <a:noFill/>
           <a:ln w="12700">
             <a:solidFill>
               <a:srgbClr val="E0E0E0"/>
@@ -5433,8 +5764,47 @@
         </p:nvSpPr>
         <p:spPr>
           <a:xfrm>
-            <a:off x="1143000" y="2103120"/>
-            <a:ext cx="4754880" cy="365760"/>
+            <a:off x="758952" y="2194560"/>
+            <a:ext cx="3931920" cy="420624"/>
+          </a:xfrm>
+          <a:prstGeom prst="rect">
+            <a:avLst/>
+          </a:prstGeom>
+          <a:noFill/>
+          <a:ln/>
+        </p:spPr>
+        <p:txBody>
+          <a:bodyPr wrap="square" lIns="0" tIns="0" rIns="0" bIns="0" rtlCol="0" anchor="ctr"/>
+          <a:lstStyle/>
+          <a:p>
+            <a:pPr indent="0" marL="0">
+              <a:buNone/>
+            </a:pPr>
+            <a:r>
+              <a:rPr lang="en-US" sz="1550" dirty="0">
+                <a:solidFill>
+                  <a:srgbClr val="141414"/>
+                </a:solidFill>
+                <a:latin typeface="Pretendard SemiBold" pitchFamily="34" charset="0"/>
+                <a:ea typeface="Pretendard SemiBold" pitchFamily="34" charset="-122"/>
+                <a:cs typeface="Pretendard SemiBold" pitchFamily="34" charset="-120"/>
+              </a:rPr>
+              <a:t>Can't add script</a:t>
+            </a:r>
+            <a:endParaRPr lang="en-US" sz="1550" dirty="0"/>
+          </a:p>
+        </p:txBody>
+      </p:sp>
+      <p:sp>
+        <p:nvSpPr>
+          <p:cNvPr id="6" name="Text 4"/>
+          <p:cNvSpPr txBox="1"/>
+          <p:nvPr/>
+        </p:nvSpPr>
+        <p:spPr>
+          <a:xfrm>
+            <a:off x="4873752" y="2194560"/>
+            <a:ext cx="3291840" cy="420624"/>
           </a:xfrm>
           <a:prstGeom prst="rect">
             <a:avLst/>
@@ -5452,13 +5822,13 @@
             <a:r>
               <a:rPr lang="en-US" sz="1200" dirty="0">
                 <a:solidFill>
-                  <a:srgbClr val="141414"/>
+                  <a:srgbClr val="ADADAD"/>
                 </a:solidFill>
                 <a:latin typeface="Pretendard" pitchFamily="34" charset="0"/>
                 <a:ea typeface="Pretendard" pitchFamily="34" charset="-122"/>
                 <a:cs typeface="Pretendard" pitchFamily="34" charset="-120"/>
               </a:rPr>
-              <a:t>에디터 6개 창의 역할을 말한다</a:t>
+              <a:t>파일명 ≠ 클래스명</a:t>
             </a:r>
             <a:endParaRPr lang="en-US" sz="1200" dirty="0"/>
           </a:p>
@@ -5466,26 +5836,61 @@
       </p:sp>
       <p:sp>
         <p:nvSpPr>
-          <p:cNvPr id="6" name="Shape 4"/>
+          <p:cNvPr id="7" name="Text 5"/>
+          <p:cNvSpPr txBox="1"/>
+          <p:nvPr/>
+        </p:nvSpPr>
+        <p:spPr>
+          <a:xfrm>
+            <a:off x="8257032" y="2194560"/>
+            <a:ext cx="2926080" cy="420624"/>
+          </a:xfrm>
+          <a:prstGeom prst="rect">
+            <a:avLst/>
+          </a:prstGeom>
+          <a:noFill/>
+          <a:ln/>
+        </p:spPr>
+        <p:txBody>
+          <a:bodyPr wrap="square" lIns="0" tIns="0" rIns="0" bIns="0" rtlCol="0" anchor="ctr"/>
+          <a:lstStyle/>
+          <a:p>
+            <a:pPr indent="0" marL="0">
+              <a:buNone/>
+            </a:pPr>
+            <a:r>
+              <a:rPr lang="en-US" sz="1200" dirty="0">
+                <a:solidFill>
+                  <a:srgbClr val="141414"/>
+                </a:solidFill>
+                <a:latin typeface="Pretendard" pitchFamily="34" charset="0"/>
+                <a:ea typeface="Pretendard" pitchFamily="34" charset="-122"/>
+                <a:cs typeface="Pretendard" pitchFamily="34" charset="-120"/>
+              </a:rPr>
+              <a:t>파일을 지우고 다시 만든다</a:t>
+            </a:r>
+            <a:endParaRPr lang="en-US" sz="1200" dirty="0"/>
+          </a:p>
+        </p:txBody>
+      </p:sp>
+      <p:sp>
+        <p:nvSpPr>
+          <p:cNvPr id="8" name="Shape 6"/>
           <p:cNvSpPr/>
           <p:nvPr/>
         </p:nvSpPr>
         <p:spPr>
           <a:xfrm>
-            <a:off x="758952" y="2724912"/>
-            <a:ext cx="201168" cy="201168"/>
-          </a:xfrm>
-          <a:prstGeom prst="roundRect">
-            <a:avLst>
-              <a:gd name="adj" fmla="val 22727"/>
-            </a:avLst>
-          </a:prstGeom>
-          <a:solidFill>
-            <a:srgbClr val="FFFFFF"/>
-          </a:solidFill>
+            <a:off x="758952" y="2761488"/>
+            <a:ext cx="10673791" cy="0"/>
+          </a:xfrm>
+          <a:prstGeom prst="line">
+            <a:avLst/>
+          </a:prstGeom>
+          <a:noFill/>
           <a:ln w="12700">
             <a:solidFill>
-              <a:srgbClr val="E0E0E0"/>
+              <a:srgbClr val="F0F0F0"/>
             </a:solidFill>
             <a:prstDash val="solid"/>
           </a:ln>
@@ -5493,14 +5898,53 @@
       </p:sp>
       <p:sp>
         <p:nvSpPr>
-          <p:cNvPr id="7" name="Text 5"/>
-          <p:cNvSpPr txBox="1"/>
-          <p:nvPr/>
-        </p:nvSpPr>
-        <p:spPr>
-          <a:xfrm>
-            <a:off x="1143000" y="2651760"/>
-            <a:ext cx="4754880" cy="365760"/>
+          <p:cNvPr id="9" name="Text 7"/>
+          <p:cNvSpPr txBox="1"/>
+          <p:nvPr/>
+        </p:nvSpPr>
+        <p:spPr>
+          <a:xfrm>
+            <a:off x="758952" y="2926080"/>
+            <a:ext cx="3931920" cy="420624"/>
+          </a:xfrm>
+          <a:prstGeom prst="rect">
+            <a:avLst/>
+          </a:prstGeom>
+          <a:noFill/>
+          <a:ln/>
+        </p:spPr>
+        <p:txBody>
+          <a:bodyPr wrap="square" lIns="0" tIns="0" rIns="0" bIns="0" rtlCol="0" anchor="ctr"/>
+          <a:lstStyle/>
+          <a:p>
+            <a:pPr indent="0" marL="0">
+              <a:buNone/>
+            </a:pPr>
+            <a:r>
+              <a:rPr lang="en-US" sz="1550" dirty="0">
+                <a:solidFill>
+                  <a:srgbClr val="141414"/>
+                </a:solidFill>
+                <a:latin typeface="Pretendard SemiBold" pitchFamily="34" charset="0"/>
+                <a:ea typeface="Pretendard SemiBold" pitchFamily="34" charset="-122"/>
+                <a:cs typeface="Pretendard SemiBold" pitchFamily="34" charset="-120"/>
+              </a:rPr>
+              <a:t>고쳤는데 반영이 안 됨</a:t>
+            </a:r>
+            <a:endParaRPr lang="en-US" sz="1550" dirty="0"/>
+          </a:p>
+        </p:txBody>
+      </p:sp>
+      <p:sp>
+        <p:nvSpPr>
+          <p:cNvPr id="10" name="Text 8"/>
+          <p:cNvSpPr txBox="1"/>
+          <p:nvPr/>
+        </p:nvSpPr>
+        <p:spPr>
+          <a:xfrm>
+            <a:off x="4873752" y="2926080"/>
+            <a:ext cx="3291840" cy="420624"/>
           </a:xfrm>
           <a:prstGeom prst="rect">
             <a:avLst/>
@@ -5518,13 +5962,13 @@
             <a:r>
               <a:rPr lang="en-US" sz="1200" dirty="0">
                 <a:solidFill>
-                  <a:srgbClr val="141414"/>
+                  <a:srgbClr val="ADADAD"/>
                 </a:solidFill>
                 <a:latin typeface="Pretendard" pitchFamily="34" charset="0"/>
                 <a:ea typeface="Pretendard" pitchFamily="34" charset="-122"/>
                 <a:cs typeface="Pretendard" pitchFamily="34" charset="-120"/>
               </a:rPr>
-              <a:t>F 키로 오브젝트를 찾는다</a:t>
+              <a:t>저장 안 함 / 컴파일 대기</a:t>
             </a:r>
             <a:endParaRPr lang="en-US" sz="1200" dirty="0"/>
           </a:p>
@@ -5532,26 +5976,61 @@
       </p:sp>
       <p:sp>
         <p:nvSpPr>
-          <p:cNvPr id="8" name="Shape 6"/>
+          <p:cNvPr id="11" name="Text 9"/>
+          <p:cNvSpPr txBox="1"/>
+          <p:nvPr/>
+        </p:nvSpPr>
+        <p:spPr>
+          <a:xfrm>
+            <a:off x="8257032" y="2926080"/>
+            <a:ext cx="2926080" cy="420624"/>
+          </a:xfrm>
+          <a:prstGeom prst="rect">
+            <a:avLst/>
+          </a:prstGeom>
+          <a:noFill/>
+          <a:ln/>
+        </p:spPr>
+        <p:txBody>
+          <a:bodyPr wrap="square" lIns="0" tIns="0" rIns="0" bIns="0" rtlCol="0" anchor="ctr"/>
+          <a:lstStyle/>
+          <a:p>
+            <a:pPr indent="0" marL="0">
+              <a:buNone/>
+            </a:pPr>
+            <a:r>
+              <a:rPr lang="en-US" sz="1200" dirty="0">
+                <a:solidFill>
+                  <a:srgbClr val="141414"/>
+                </a:solidFill>
+                <a:latin typeface="Pretendard" pitchFamily="34" charset="0"/>
+                <a:ea typeface="Pretendard" pitchFamily="34" charset="-122"/>
+                <a:cs typeface="Pretendard" pitchFamily="34" charset="-120"/>
+              </a:rPr>
+              <a:t>저장 → 전환 → 기다림</a:t>
+            </a:r>
+            <a:endParaRPr lang="en-US" sz="1200" dirty="0"/>
+          </a:p>
+        </p:txBody>
+      </p:sp>
+      <p:sp>
+        <p:nvSpPr>
+          <p:cNvPr id="12" name="Shape 10"/>
           <p:cNvSpPr/>
           <p:nvPr/>
         </p:nvSpPr>
         <p:spPr>
           <a:xfrm>
-            <a:off x="758952" y="3273552"/>
-            <a:ext cx="201168" cy="201168"/>
-          </a:xfrm>
-          <a:prstGeom prst="roundRect">
-            <a:avLst>
-              <a:gd name="adj" fmla="val 22727"/>
-            </a:avLst>
-          </a:prstGeom>
-          <a:solidFill>
-            <a:srgbClr val="FFFFFF"/>
-          </a:solidFill>
+            <a:off x="758952" y="3493008"/>
+            <a:ext cx="10673791" cy="0"/>
+          </a:xfrm>
+          <a:prstGeom prst="line">
+            <a:avLst/>
+          </a:prstGeom>
+          <a:noFill/>
           <a:ln w="12700">
             <a:solidFill>
-              <a:srgbClr val="E0E0E0"/>
+              <a:srgbClr val="F0F0F0"/>
             </a:solidFill>
             <a:prstDash val="solid"/>
           </a:ln>
@@ -5559,14 +6038,53 @@
       </p:sp>
       <p:sp>
         <p:nvSpPr>
-          <p:cNvPr id="9" name="Text 7"/>
-          <p:cNvSpPr txBox="1"/>
-          <p:nvPr/>
-        </p:nvSpPr>
-        <p:spPr>
-          <a:xfrm>
-            <a:off x="1143000" y="3200400"/>
-            <a:ext cx="4754880" cy="365760"/>
+          <p:cNvPr id="13" name="Text 11"/>
+          <p:cNvSpPr txBox="1"/>
+          <p:nvPr/>
+        </p:nvSpPr>
+        <p:spPr>
+          <a:xfrm>
+            <a:off x="758952" y="3657600"/>
+            <a:ext cx="3931920" cy="420624"/>
+          </a:xfrm>
+          <a:prstGeom prst="rect">
+            <a:avLst/>
+          </a:prstGeom>
+          <a:noFill/>
+          <a:ln/>
+        </p:spPr>
+        <p:txBody>
+          <a:bodyPr wrap="square" lIns="0" tIns="0" rIns="0" bIns="0" rtlCol="0" anchor="ctr"/>
+          <a:lstStyle/>
+          <a:p>
+            <a:pPr indent="0" marL="0">
+              <a:buNone/>
+            </a:pPr>
+            <a:r>
+              <a:rPr lang="en-US" sz="1550" dirty="0">
+                <a:solidFill>
+                  <a:srgbClr val="141414"/>
+                </a:solidFill>
+                <a:latin typeface="Pretendard SemiBold" pitchFamily="34" charset="0"/>
+                <a:ea typeface="Pretendard SemiBold" pitchFamily="34" charset="-122"/>
+                <a:cs typeface="Pretendard SemiBold" pitchFamily="34" charset="-120"/>
+              </a:rPr>
+              <a:t>곱했더니 거의 안 움직임</a:t>
+            </a:r>
+            <a:endParaRPr lang="en-US" sz="1550" dirty="0"/>
+          </a:p>
+        </p:txBody>
+      </p:sp>
+      <p:sp>
+        <p:nvSpPr>
+          <p:cNvPr id="14" name="Text 12"/>
+          <p:cNvSpPr txBox="1"/>
+          <p:nvPr/>
+        </p:nvSpPr>
+        <p:spPr>
+          <a:xfrm>
+            <a:off x="4873752" y="3657600"/>
+            <a:ext cx="3291840" cy="420624"/>
           </a:xfrm>
           <a:prstGeom prst="rect">
             <a:avLst/>
@@ -5584,13 +6102,13 @@
             <a:r>
               <a:rPr lang="en-US" sz="1200" dirty="0">
                 <a:solidFill>
-                  <a:srgbClr val="141414"/>
+                  <a:srgbClr val="ADADAD"/>
                 </a:solidFill>
                 <a:latin typeface="Pretendard" pitchFamily="34" charset="0"/>
                 <a:ea typeface="Pretendard" pitchFamily="34" charset="-122"/>
                 <a:cs typeface="Pretendard" pitchFamily="34" charset="-120"/>
               </a:rPr>
-              <a:t>Component 를 추가·제거한다</a:t>
+              <a:t>값을 안 바꿈 (0.05 그대로)</a:t>
             </a:r>
             <a:endParaRPr lang="en-US" sz="1200" dirty="0"/>
           </a:p>
@@ -5598,26 +6116,61 @@
       </p:sp>
       <p:sp>
         <p:nvSpPr>
-          <p:cNvPr id="10" name="Shape 8"/>
+          <p:cNvPr id="15" name="Text 13"/>
+          <p:cNvSpPr txBox="1"/>
+          <p:nvPr/>
+        </p:nvSpPr>
+        <p:spPr>
+          <a:xfrm>
+            <a:off x="8257032" y="3657600"/>
+            <a:ext cx="2926080" cy="420624"/>
+          </a:xfrm>
+          <a:prstGeom prst="rect">
+            <a:avLst/>
+          </a:prstGeom>
+          <a:noFill/>
+          <a:ln/>
+        </p:spPr>
+        <p:txBody>
+          <a:bodyPr wrap="square" lIns="0" tIns="0" rIns="0" bIns="0" rtlCol="0" anchor="ctr"/>
+          <a:lstStyle/>
+          <a:p>
+            <a:pPr indent="0" marL="0">
+              <a:buNone/>
+            </a:pPr>
+            <a:r>
+              <a:rPr lang="en-US" sz="1200" dirty="0">
+                <a:solidFill>
+                  <a:srgbClr val="141414"/>
+                </a:solidFill>
+                <a:latin typeface="Pretendard" pitchFamily="34" charset="0"/>
+                <a:ea typeface="Pretendard" pitchFamily="34" charset="-122"/>
+                <a:cs typeface="Pretendard" pitchFamily="34" charset="-120"/>
+              </a:rPr>
+              <a:t>단위가 바뀌었다. 3으로</a:t>
+            </a:r>
+            <a:endParaRPr lang="en-US" sz="1200" dirty="0"/>
+          </a:p>
+        </p:txBody>
+      </p:sp>
+      <p:sp>
+        <p:nvSpPr>
+          <p:cNvPr id="16" name="Shape 14"/>
           <p:cNvSpPr/>
           <p:nvPr/>
         </p:nvSpPr>
         <p:spPr>
           <a:xfrm>
-            <a:off x="758952" y="3822192"/>
-            <a:ext cx="201168" cy="201168"/>
-          </a:xfrm>
-          <a:prstGeom prst="roundRect">
-            <a:avLst>
-              <a:gd name="adj" fmla="val 22727"/>
-            </a:avLst>
-          </a:prstGeom>
-          <a:solidFill>
-            <a:srgbClr val="FFFFFF"/>
-          </a:solidFill>
+            <a:off x="758952" y="4224528"/>
+            <a:ext cx="10673791" cy="0"/>
+          </a:xfrm>
+          <a:prstGeom prst="line">
+            <a:avLst/>
+          </a:prstGeom>
+          <a:noFill/>
           <a:ln w="12700">
             <a:solidFill>
-              <a:srgbClr val="E0E0E0"/>
+              <a:srgbClr val="F0F0F0"/>
             </a:solidFill>
             <a:prstDash val="solid"/>
           </a:ln>
@@ -5625,14 +6178,53 @@
       </p:sp>
       <p:sp>
         <p:nvSpPr>
-          <p:cNvPr id="11" name="Text 9"/>
-          <p:cNvSpPr txBox="1"/>
-          <p:nvPr/>
-        </p:nvSpPr>
-        <p:spPr>
-          <a:xfrm>
-            <a:off x="1143000" y="3749040"/>
-            <a:ext cx="4754880" cy="365760"/>
+          <p:cNvPr id="17" name="Text 15"/>
+          <p:cNvSpPr txBox="1"/>
+          <p:nvPr/>
+        </p:nvSpPr>
+        <p:spPr>
+          <a:xfrm>
+            <a:off x="758952" y="4389120"/>
+            <a:ext cx="3931920" cy="420624"/>
+          </a:xfrm>
+          <a:prstGeom prst="rect">
+            <a:avLst/>
+          </a:prstGeom>
+          <a:noFill/>
+          <a:ln/>
+        </p:spPr>
+        <p:txBody>
+          <a:bodyPr wrap="square" lIns="0" tIns="0" rIns="0" bIns="0" rtlCol="0" anchor="ctr"/>
+          <a:lstStyle/>
+          <a:p>
+            <a:pPr indent="0" marL="0">
+              <a:buNone/>
+            </a:pPr>
+            <a:r>
+              <a:rPr lang="en-US" sz="1550" dirty="0">
+                <a:solidFill>
+                  <a:srgbClr val="141414"/>
+                </a:solidFill>
+                <a:latin typeface="Pretendard SemiBold" pitchFamily="34" charset="0"/>
+                <a:ea typeface="Pretendard SemiBold" pitchFamily="34" charset="-122"/>
+                <a:cs typeface="Pretendard SemiBold" pitchFamily="34" charset="-120"/>
+              </a:rPr>
+              <a:t>NullReferenceException</a:t>
+            </a:r>
+            <a:endParaRPr lang="en-US" sz="1550" dirty="0"/>
+          </a:p>
+        </p:txBody>
+      </p:sp>
+      <p:sp>
+        <p:nvSpPr>
+          <p:cNvPr id="18" name="Text 16"/>
+          <p:cNvSpPr txBox="1"/>
+          <p:nvPr/>
+        </p:nvSpPr>
+        <p:spPr>
+          <a:xfrm>
+            <a:off x="4873752" y="4389120"/>
+            <a:ext cx="3291840" cy="420624"/>
           </a:xfrm>
           <a:prstGeom prst="rect">
             <a:avLst/>
@@ -5650,13 +6242,13 @@
             <a:r>
               <a:rPr lang="en-US" sz="1200" dirty="0">
                 <a:solidFill>
-                  <a:srgbClr val="141414"/>
+                  <a:srgbClr val="ADADAD"/>
                 </a:solidFill>
                 <a:latin typeface="Pretendard" pitchFamily="34" charset="0"/>
                 <a:ea typeface="Pretendard" pitchFamily="34" charset="-122"/>
                 <a:cs typeface="Pretendard" pitchFamily="34" charset="-120"/>
               </a:rPr>
-              <a:t>월드 좌표와 로컬 좌표를 구분한다</a:t>
+              <a:t>Inspector 칸이 비어 있음</a:t>
             </a:r>
             <a:endParaRPr lang="en-US" sz="1200" dirty="0"/>
           </a:p>
@@ -5664,26 +6256,61 @@
       </p:sp>
       <p:sp>
         <p:nvSpPr>
-          <p:cNvPr id="12" name="Shape 10"/>
+          <p:cNvPr id="19" name="Text 17"/>
+          <p:cNvSpPr txBox="1"/>
+          <p:nvPr/>
+        </p:nvSpPr>
+        <p:spPr>
+          <a:xfrm>
+            <a:off x="8257032" y="4389120"/>
+            <a:ext cx="2926080" cy="420624"/>
+          </a:xfrm>
+          <a:prstGeom prst="rect">
+            <a:avLst/>
+          </a:prstGeom>
+          <a:noFill/>
+          <a:ln/>
+        </p:spPr>
+        <p:txBody>
+          <a:bodyPr wrap="square" lIns="0" tIns="0" rIns="0" bIns="0" rtlCol="0" anchor="ctr"/>
+          <a:lstStyle/>
+          <a:p>
+            <a:pPr indent="0" marL="0">
+              <a:buNone/>
+            </a:pPr>
+            <a:r>
+              <a:rPr lang="en-US" sz="1200" dirty="0">
+                <a:solidFill>
+                  <a:srgbClr val="141414"/>
+                </a:solidFill>
+                <a:latin typeface="Pretendard" pitchFamily="34" charset="0"/>
+                <a:ea typeface="Pretendard" pitchFamily="34" charset="-122"/>
+                <a:cs typeface="Pretendard" pitchFamily="34" charset="-120"/>
+              </a:rPr>
+              <a:t>Hierarchy 에서 드래그</a:t>
+            </a:r>
+            <a:endParaRPr lang="en-US" sz="1200" dirty="0"/>
+          </a:p>
+        </p:txBody>
+      </p:sp>
+      <p:sp>
+        <p:nvSpPr>
+          <p:cNvPr id="20" name="Shape 18"/>
           <p:cNvSpPr/>
           <p:nvPr/>
         </p:nvSpPr>
         <p:spPr>
           <a:xfrm>
-            <a:off x="758952" y="4370832"/>
-            <a:ext cx="201168" cy="201168"/>
-          </a:xfrm>
-          <a:prstGeom prst="roundRect">
-            <a:avLst>
-              <a:gd name="adj" fmla="val 22727"/>
-            </a:avLst>
-          </a:prstGeom>
-          <a:solidFill>
-            <a:srgbClr val="FFFFFF"/>
-          </a:solidFill>
+            <a:off x="758952" y="4956048"/>
+            <a:ext cx="10673791" cy="0"/>
+          </a:xfrm>
+          <a:prstGeom prst="line">
+            <a:avLst/>
+          </a:prstGeom>
+          <a:noFill/>
           <a:ln w="12700">
             <a:solidFill>
-              <a:srgbClr val="E0E0E0"/>
+              <a:srgbClr val="F0F0F0"/>
             </a:solidFill>
             <a:prstDash val="solid"/>
           </a:ln>
@@ -5691,391 +6318,22 @@
       </p:sp>
       <p:sp>
         <p:nvSpPr>
-          <p:cNvPr id="13" name="Text 11"/>
-          <p:cNvSpPr txBox="1"/>
-          <p:nvPr/>
-        </p:nvSpPr>
-        <p:spPr>
-          <a:xfrm>
-            <a:off x="1143000" y="4297680"/>
-            <a:ext cx="4754880" cy="365760"/>
-          </a:xfrm>
-          <a:prstGeom prst="rect">
-            <a:avLst/>
-          </a:prstGeom>
-          <a:noFill/>
-          <a:ln/>
-        </p:spPr>
-        <p:txBody>
-          <a:bodyPr wrap="square" lIns="0" tIns="0" rIns="0" bIns="0" rtlCol="0" anchor="ctr"/>
-          <a:lstStyle/>
-          <a:p>
-            <a:pPr indent="0" marL="0">
-              <a:buNone/>
-            </a:pPr>
-            <a:r>
-              <a:rPr lang="en-US" sz="1200" dirty="0">
-                <a:solidFill>
-                  <a:srgbClr val="141414"/>
-                </a:solidFill>
-                <a:latin typeface="Pretendard" pitchFamily="34" charset="0"/>
-                <a:ea typeface="Pretendard" pitchFamily="34" charset="-122"/>
-                <a:cs typeface="Pretendard" pitchFamily="34" charset="-120"/>
-              </a:rPr>
-              <a:t>스크립트를 만들어 GameObject 에 붙인다</a:t>
-            </a:r>
-            <a:endParaRPr lang="en-US" sz="1200" dirty="0"/>
-          </a:p>
-        </p:txBody>
-      </p:sp>
-      <p:sp>
-        <p:nvSpPr>
-          <p:cNvPr id="14" name="Shape 12"/>
+          <p:cNvPr id="21" name="Shape 19"/>
           <p:cNvSpPr/>
           <p:nvPr/>
         </p:nvSpPr>
         <p:spPr>
           <a:xfrm>
-            <a:off x="6199632" y="2176272"/>
-            <a:ext cx="201168" cy="201168"/>
+            <a:off x="502920" y="5029200"/>
+            <a:ext cx="11185855" cy="640080"/>
           </a:xfrm>
           <a:prstGeom prst="roundRect">
             <a:avLst>
-              <a:gd name="adj" fmla="val 22727"/>
+              <a:gd name="adj" fmla="val 23857"/>
             </a:avLst>
           </a:prstGeom>
           <a:solidFill>
-            <a:srgbClr val="FFFFFF"/>
-          </a:solidFill>
-          <a:ln w="12700">
-            <a:solidFill>
-              <a:srgbClr val="E0E0E0"/>
-            </a:solidFill>
-            <a:prstDash val="solid"/>
-          </a:ln>
-        </p:spPr>
-      </p:sp>
-      <p:sp>
-        <p:nvSpPr>
-          <p:cNvPr id="15" name="Text 13"/>
-          <p:cNvSpPr txBox="1"/>
-          <p:nvPr/>
-        </p:nvSpPr>
-        <p:spPr>
-          <a:xfrm>
-            <a:off x="6583680" y="2103120"/>
-            <a:ext cx="4754880" cy="365760"/>
-          </a:xfrm>
-          <a:prstGeom prst="rect">
-            <a:avLst/>
-          </a:prstGeom>
-          <a:noFill/>
-          <a:ln/>
-        </p:spPr>
-        <p:txBody>
-          <a:bodyPr wrap="square" lIns="0" tIns="0" rIns="0" bIns="0" rtlCol="0" anchor="ctr"/>
-          <a:lstStyle/>
-          <a:p>
-            <a:pPr indent="0" marL="0">
-              <a:buNone/>
-            </a:pPr>
-            <a:r>
-              <a:rPr lang="en-US" sz="1200" dirty="0">
-                <a:solidFill>
-                  <a:srgbClr val="141414"/>
-                </a:solidFill>
-                <a:latin typeface="Pretendard" pitchFamily="34" charset="0"/>
-                <a:ea typeface="Pretendard" pitchFamily="34" charset="-122"/>
-                <a:cs typeface="Pretendard" pitchFamily="34" charset="-120"/>
-              </a:rPr>
-              <a:t>Start / Update 차이를 한 문장으로 말한다</a:t>
-            </a:r>
-            <a:endParaRPr lang="en-US" sz="1200" dirty="0"/>
-          </a:p>
-        </p:txBody>
-      </p:sp>
-      <p:sp>
-        <p:nvSpPr>
-          <p:cNvPr id="16" name="Shape 14"/>
-          <p:cNvSpPr/>
-          <p:nvPr/>
-        </p:nvSpPr>
-        <p:spPr>
-          <a:xfrm>
-            <a:off x="6199632" y="2724912"/>
-            <a:ext cx="201168" cy="201168"/>
-          </a:xfrm>
-          <a:prstGeom prst="roundRect">
-            <a:avLst>
-              <a:gd name="adj" fmla="val 22727"/>
-            </a:avLst>
-          </a:prstGeom>
-          <a:solidFill>
-            <a:srgbClr val="FFFFFF"/>
-          </a:solidFill>
-          <a:ln w="12700">
-            <a:solidFill>
-              <a:srgbClr val="E0E0E0"/>
-            </a:solidFill>
-            <a:prstDash val="solid"/>
-          </a:ln>
-        </p:spPr>
-      </p:sp>
-      <p:sp>
-        <p:nvSpPr>
-          <p:cNvPr id="17" name="Text 15"/>
-          <p:cNvSpPr txBox="1"/>
-          <p:nvPr/>
-        </p:nvSpPr>
-        <p:spPr>
-          <a:xfrm>
-            <a:off x="6583680" y="2651760"/>
-            <a:ext cx="4754880" cy="365760"/>
-          </a:xfrm>
-          <a:prstGeom prst="rect">
-            <a:avLst/>
-          </a:prstGeom>
-          <a:noFill/>
-          <a:ln/>
-        </p:spPr>
-        <p:txBody>
-          <a:bodyPr wrap="square" lIns="0" tIns="0" rIns="0" bIns="0" rtlCol="0" anchor="ctr"/>
-          <a:lstStyle/>
-          <a:p>
-            <a:pPr indent="0" marL="0">
-              <a:buNone/>
-            </a:pPr>
-            <a:r>
-              <a:rPr lang="en-US" sz="1200" dirty="0">
-                <a:solidFill>
-                  <a:srgbClr val="141414"/>
-                </a:solidFill>
-                <a:latin typeface="Pretendard" pitchFamily="34" charset="0"/>
-                <a:ea typeface="Pretendard" pitchFamily="34" charset="-122"/>
-                <a:cs typeface="Pretendard" pitchFamily="34" charset="-120"/>
-              </a:rPr>
-              <a:t>[SerializeField] 를 Inspector 에서 조절한다</a:t>
-            </a:r>
-            <a:endParaRPr lang="en-US" sz="1200" dirty="0"/>
-          </a:p>
-        </p:txBody>
-      </p:sp>
-      <p:sp>
-        <p:nvSpPr>
-          <p:cNvPr id="18" name="Shape 16"/>
-          <p:cNvSpPr/>
-          <p:nvPr/>
-        </p:nvSpPr>
-        <p:spPr>
-          <a:xfrm>
-            <a:off x="6199632" y="3273552"/>
-            <a:ext cx="201168" cy="201168"/>
-          </a:xfrm>
-          <a:prstGeom prst="roundRect">
-            <a:avLst>
-              <a:gd name="adj" fmla="val 22727"/>
-            </a:avLst>
-          </a:prstGeom>
-          <a:solidFill>
-            <a:srgbClr val="FFFFFF"/>
-          </a:solidFill>
-          <a:ln w="12700">
-            <a:solidFill>
-              <a:srgbClr val="E0E0E0"/>
-            </a:solidFill>
-            <a:prstDash val="solid"/>
-          </a:ln>
-        </p:spPr>
-      </p:sp>
-      <p:sp>
-        <p:nvSpPr>
-          <p:cNvPr id="19" name="Text 17"/>
-          <p:cNvSpPr txBox="1"/>
-          <p:nvPr/>
-        </p:nvSpPr>
-        <p:spPr>
-          <a:xfrm>
-            <a:off x="6583680" y="3200400"/>
-            <a:ext cx="4754880" cy="365760"/>
-          </a:xfrm>
-          <a:prstGeom prst="rect">
-            <a:avLst/>
-          </a:prstGeom>
-          <a:noFill/>
-          <a:ln/>
-        </p:spPr>
-        <p:txBody>
-          <a:bodyPr wrap="square" lIns="0" tIns="0" rIns="0" bIns="0" rtlCol="0" anchor="ctr"/>
-          <a:lstStyle/>
-          <a:p>
-            <a:pPr indent="0" marL="0">
-              <a:buNone/>
-            </a:pPr>
-            <a:r>
-              <a:rPr lang="en-US" sz="1200" dirty="0">
-                <a:solidFill>
-                  <a:srgbClr val="141414"/>
-                </a:solidFill>
-                <a:latin typeface="Pretendard" pitchFamily="34" charset="0"/>
-                <a:ea typeface="Pretendard" pitchFamily="34" charset="-122"/>
-                <a:cs typeface="Pretendard" pitchFamily="34" charset="-120"/>
-              </a:rPr>
-              <a:t>Play 중 변경은 저장되지 않음을 안다</a:t>
-            </a:r>
-            <a:endParaRPr lang="en-US" sz="1200" dirty="0"/>
-          </a:p>
-        </p:txBody>
-      </p:sp>
-      <p:sp>
-        <p:nvSpPr>
-          <p:cNvPr id="20" name="Shape 18"/>
-          <p:cNvSpPr/>
-          <p:nvPr/>
-        </p:nvSpPr>
-        <p:spPr>
-          <a:xfrm>
-            <a:off x="6199632" y="3822192"/>
-            <a:ext cx="201168" cy="201168"/>
-          </a:xfrm>
-          <a:prstGeom prst="roundRect">
-            <a:avLst>
-              <a:gd name="adj" fmla="val 22727"/>
-            </a:avLst>
-          </a:prstGeom>
-          <a:solidFill>
-            <a:srgbClr val="FFFFFF"/>
-          </a:solidFill>
-          <a:ln w="12700">
-            <a:solidFill>
-              <a:srgbClr val="E0E0E0"/>
-            </a:solidFill>
-            <a:prstDash val="solid"/>
-          </a:ln>
-        </p:spPr>
-      </p:sp>
-      <p:sp>
-        <p:nvSpPr>
-          <p:cNvPr id="21" name="Text 19"/>
-          <p:cNvSpPr txBox="1"/>
-          <p:nvPr/>
-        </p:nvSpPr>
-        <p:spPr>
-          <a:xfrm>
-            <a:off x="6583680" y="3749040"/>
-            <a:ext cx="4754880" cy="365760"/>
-          </a:xfrm>
-          <a:prstGeom prst="rect">
-            <a:avLst/>
-          </a:prstGeom>
-          <a:noFill/>
-          <a:ln/>
-        </p:spPr>
-        <p:txBody>
-          <a:bodyPr wrap="square" lIns="0" tIns="0" rIns="0" bIns="0" rtlCol="0" anchor="ctr"/>
-          <a:lstStyle/>
-          <a:p>
-            <a:pPr indent="0" marL="0">
-              <a:buNone/>
-            </a:pPr>
-            <a:r>
-              <a:rPr lang="en-US" sz="1200" dirty="0">
-                <a:solidFill>
-                  <a:srgbClr val="141414"/>
-                </a:solidFill>
-                <a:latin typeface="Pretendard" pitchFamily="34" charset="0"/>
-                <a:ea typeface="Pretendard" pitchFamily="34" charset="-122"/>
-                <a:cs typeface="Pretendard" pitchFamily="34" charset="-120"/>
-              </a:rPr>
-              <a:t>움직이는 코드에 Time.deltaTime 을 곱한다</a:t>
-            </a:r>
-            <a:endParaRPr lang="en-US" sz="1200" dirty="0"/>
-          </a:p>
-        </p:txBody>
-      </p:sp>
-      <p:sp>
-        <p:nvSpPr>
-          <p:cNvPr id="22" name="Shape 20"/>
-          <p:cNvSpPr/>
-          <p:nvPr/>
-        </p:nvSpPr>
-        <p:spPr>
-          <a:xfrm>
-            <a:off x="6199632" y="4370832"/>
-            <a:ext cx="201168" cy="201168"/>
-          </a:xfrm>
-          <a:prstGeom prst="roundRect">
-            <a:avLst>
-              <a:gd name="adj" fmla="val 22727"/>
-            </a:avLst>
-          </a:prstGeom>
-          <a:solidFill>
-            <a:srgbClr val="FFFFFF"/>
-          </a:solidFill>
-          <a:ln w="19050">
-            <a:solidFill>
-              <a:srgbClr val="141414"/>
-            </a:solidFill>
-            <a:prstDash val="solid"/>
-          </a:ln>
-        </p:spPr>
-      </p:sp>
-      <p:sp>
-        <p:nvSpPr>
-          <p:cNvPr id="23" name="Text 21"/>
-          <p:cNvSpPr txBox="1"/>
-          <p:nvPr/>
-        </p:nvSpPr>
-        <p:spPr>
-          <a:xfrm>
-            <a:off x="6583680" y="4297680"/>
-            <a:ext cx="4754880" cy="365760"/>
-          </a:xfrm>
-          <a:prstGeom prst="rect">
-            <a:avLst/>
-          </a:prstGeom>
-          <a:noFill/>
-          <a:ln/>
-        </p:spPr>
-        <p:txBody>
-          <a:bodyPr wrap="square" lIns="0" tIns="0" rIns="0" bIns="0" rtlCol="0" anchor="ctr"/>
-          <a:lstStyle/>
-          <a:p>
-            <a:pPr indent="0" marL="0">
-              <a:buNone/>
-            </a:pPr>
-            <a:r>
-              <a:rPr lang="en-US" sz="1200" dirty="0">
-                <a:solidFill>
-                  <a:srgbClr val="141414"/>
-                </a:solidFill>
-                <a:latin typeface="Pretendard SemiBold" pitchFamily="34" charset="0"/>
-                <a:ea typeface="Pretendard SemiBold" pitchFamily="34" charset="-122"/>
-                <a:cs typeface="Pretendard SemiBold" pitchFamily="34" charset="-120"/>
-              </a:rPr>
-              <a:t>WASD 로 캐릭터를 움직인다</a:t>
-            </a:r>
-            <a:endParaRPr lang="en-US" sz="1200" dirty="0"/>
-          </a:p>
-        </p:txBody>
-      </p:sp>
-      <p:sp>
-        <p:nvSpPr>
-          <p:cNvPr id="24" name="Shape 22"/>
-          <p:cNvSpPr/>
-          <p:nvPr/>
-        </p:nvSpPr>
-        <p:spPr>
-          <a:xfrm>
-            <a:off x="758952" y="5029200"/>
-            <a:ext cx="10673791" cy="1188720"/>
-          </a:xfrm>
-          <a:prstGeom prst="roundRect">
-            <a:avLst>
-              <a:gd name="adj" fmla="val 19231"/>
-            </a:avLst>
-          </a:prstGeom>
-          <a:solidFill>
-            <a:srgbClr val="141414"/>
+            <a:srgbClr val="F3F3F3"/>
           </a:solidFill>
           <a:ln w="12700">
             <a:solidFill>
@@ -6087,42 +6345,147 @@
       </p:sp>
       <p:sp>
         <p:nvSpPr>
-          <p:cNvPr id="25" name="Text 23"/>
-          <p:cNvSpPr txBox="1"/>
-          <p:nvPr/>
-        </p:nvSpPr>
-        <p:spPr>
-          <a:xfrm>
-            <a:off x="1124712" y="5285232"/>
-            <a:ext cx="10332720" cy="402336"/>
-          </a:xfrm>
-          <a:prstGeom prst="rect">
-            <a:avLst/>
-          </a:prstGeom>
-          <a:noFill/>
-          <a:ln/>
-        </p:spPr>
-        <p:txBody>
-          <a:bodyPr wrap="square" lIns="0" tIns="0" rIns="0" bIns="0" rtlCol="0" anchor="ctr"/>
-          <a:lstStyle/>
-          <a:p>
-            <a:pPr indent="0" marL="0">
-              <a:buNone/>
-            </a:pPr>
-            <a:r>
-              <a:rPr lang="en-US" sz="1900" dirty="0">
-                <a:solidFill>
-                  <a:srgbClr val="FFFFFF"/>
+          <p:cNvPr id="22" name="Text 20"/>
+          <p:cNvSpPr txBox="1"/>
+          <p:nvPr/>
+        </p:nvSpPr>
+        <p:spPr>
+          <a:xfrm>
+            <a:off x="758952" y="5120640"/>
+            <a:ext cx="3931920" cy="420624"/>
+          </a:xfrm>
+          <a:prstGeom prst="rect">
+            <a:avLst/>
+          </a:prstGeom>
+          <a:noFill/>
+          <a:ln/>
+        </p:spPr>
+        <p:txBody>
+          <a:bodyPr wrap="square" lIns="0" tIns="0" rIns="0" bIns="0" rtlCol="0" anchor="ctr"/>
+          <a:lstStyle/>
+          <a:p>
+            <a:pPr indent="0" marL="0">
+              <a:buNone/>
+            </a:pPr>
+            <a:r>
+              <a:rPr lang="en-US" sz="1550" dirty="0">
+                <a:solidFill>
+                  <a:srgbClr val="141414"/>
                 </a:solidFill>
                 <a:latin typeface="Pretendard SemiBold" pitchFamily="34" charset="0"/>
                 <a:ea typeface="Pretendard SemiBold" pitchFamily="34" charset="-122"/>
                 <a:cs typeface="Pretendard SemiBold" pitchFamily="34" charset="-120"/>
               </a:rPr>
-              <a:t>하나라도 안 되는 학생이 있으면 이번 주 안에 개별 시간을 잡는다.</a:t>
-            </a:r>
-            <a:endParaRPr lang="en-US" sz="1900" dirty="0"/>
-          </a:p>
-        </p:txBody>
+              <a:t>키를 눌러도 안 움직임</a:t>
+            </a:r>
+            <a:endParaRPr lang="en-US" sz="1550" dirty="0"/>
+          </a:p>
+        </p:txBody>
+      </p:sp>
+      <p:sp>
+        <p:nvSpPr>
+          <p:cNvPr id="23" name="Text 21"/>
+          <p:cNvSpPr txBox="1"/>
+          <p:nvPr/>
+        </p:nvSpPr>
+        <p:spPr>
+          <a:xfrm>
+            <a:off x="4873752" y="5120640"/>
+            <a:ext cx="3291840" cy="420624"/>
+          </a:xfrm>
+          <a:prstGeom prst="rect">
+            <a:avLst/>
+          </a:prstGeom>
+          <a:noFill/>
+          <a:ln/>
+        </p:spPr>
+        <p:txBody>
+          <a:bodyPr wrap="square" lIns="0" tIns="0" rIns="0" bIns="0" rtlCol="0" anchor="ctr"/>
+          <a:lstStyle/>
+          <a:p>
+            <a:pPr indent="0" marL="0">
+              <a:buNone/>
+            </a:pPr>
+            <a:r>
+              <a:rPr lang="en-US" sz="1200" dirty="0">
+                <a:solidFill>
+                  <a:srgbClr val="ADADAD"/>
+                </a:solidFill>
+                <a:latin typeface="Pretendard" pitchFamily="34" charset="0"/>
+                <a:ea typeface="Pretendard" pitchFamily="34" charset="-122"/>
+                <a:cs typeface="Pretendard" pitchFamily="34" charset="-120"/>
+              </a:rPr>
+              <a:t>Active Input Handling</a:t>
+            </a:r>
+            <a:endParaRPr lang="en-US" sz="1200" dirty="0"/>
+          </a:p>
+        </p:txBody>
+      </p:sp>
+      <p:sp>
+        <p:nvSpPr>
+          <p:cNvPr id="24" name="Text 22"/>
+          <p:cNvSpPr txBox="1"/>
+          <p:nvPr/>
+        </p:nvSpPr>
+        <p:spPr>
+          <a:xfrm>
+            <a:off x="8257032" y="5120640"/>
+            <a:ext cx="2926080" cy="420624"/>
+          </a:xfrm>
+          <a:prstGeom prst="rect">
+            <a:avLst/>
+          </a:prstGeom>
+          <a:noFill/>
+          <a:ln/>
+        </p:spPr>
+        <p:txBody>
+          <a:bodyPr wrap="square" lIns="0" tIns="0" rIns="0" bIns="0" rtlCol="0" anchor="ctr"/>
+          <a:lstStyle/>
+          <a:p>
+            <a:pPr indent="0" marL="0">
+              <a:buNone/>
+            </a:pPr>
+            <a:r>
+              <a:rPr lang="en-US" sz="1200" dirty="0">
+                <a:solidFill>
+                  <a:srgbClr val="141414"/>
+                </a:solidFill>
+                <a:latin typeface="Pretendard" pitchFamily="34" charset="0"/>
+                <a:ea typeface="Pretendard" pitchFamily="34" charset="-122"/>
+                <a:cs typeface="Pretendard" pitchFamily="34" charset="-120"/>
+              </a:rPr>
+              <a:t>Both 로. 에디터 재시작</a:t>
+            </a:r>
+            <a:endParaRPr lang="en-US" sz="1200" dirty="0"/>
+          </a:p>
+        </p:txBody>
+      </p:sp>
+      <p:sp>
+        <p:nvSpPr>
+          <p:cNvPr id="25" name="Shape 23"/>
+          <p:cNvSpPr/>
+          <p:nvPr/>
+        </p:nvSpPr>
+        <p:spPr>
+          <a:xfrm>
+            <a:off x="758952" y="6053328"/>
+            <a:ext cx="4480560" cy="329184"/>
+          </a:xfrm>
+          <a:prstGeom prst="roundRect">
+            <a:avLst>
+              <a:gd name="adj" fmla="val 50000"/>
+            </a:avLst>
+          </a:prstGeom>
+          <a:solidFill>
+            <a:srgbClr val="0066FF"/>
+          </a:solidFill>
+          <a:ln w="12700">
+            <a:solidFill>
+              <a:srgbClr val="333333"/>
+            </a:solidFill>
+            <a:prstDash val="solid"/>
+          </a:ln>
+        </p:spPr>
       </p:sp>
       <p:sp>
         <p:nvSpPr>
@@ -6132,8 +6495,47 @@
         </p:nvSpPr>
         <p:spPr>
           <a:xfrm>
-            <a:off x="1124712" y="5760720"/>
-            <a:ext cx="10332720" cy="365760"/>
+            <a:off x="758952" y="6053328"/>
+            <a:ext cx="4480560" cy="329184"/>
+          </a:xfrm>
+          <a:prstGeom prst="rect">
+            <a:avLst/>
+          </a:prstGeom>
+          <a:noFill/>
+          <a:ln/>
+        </p:spPr>
+        <p:txBody>
+          <a:bodyPr wrap="square" lIns="0" tIns="0" rIns="0" bIns="0" rtlCol="0" anchor="ctr"/>
+          <a:lstStyle/>
+          <a:p>
+            <a:pPr algn="ctr" indent="0" marL="0">
+              <a:buNone/>
+            </a:pPr>
+            <a:r>
+              <a:rPr lang="en-US" sz="950" dirty="0">
+                <a:solidFill>
+                  <a:srgbClr val="FFFFFF"/>
+                </a:solidFill>
+                <a:latin typeface="Pretendard SemiBold" pitchFamily="34" charset="0"/>
+                <a:ea typeface="Pretendard SemiBold" pitchFamily="34" charset="-122"/>
+                <a:cs typeface="Pretendard SemiBold" pitchFamily="34" charset="-120"/>
+              </a:rPr>
+              <a:t>040 전에 강사가 반드시 확인할 것</a:t>
+            </a:r>
+            <a:endParaRPr lang="en-US" sz="950" dirty="0"/>
+          </a:p>
+        </p:txBody>
+      </p:sp>
+      <p:sp>
+        <p:nvSpPr>
+          <p:cNvPr id="27" name="Text 25"/>
+          <p:cNvSpPr txBox="1"/>
+          <p:nvPr/>
+        </p:nvSpPr>
+        <p:spPr>
+          <a:xfrm>
+            <a:off x="5559552" y="6053328"/>
+            <a:ext cx="5943600" cy="329184"/>
           </a:xfrm>
           <a:prstGeom prst="rect">
             <a:avLst/>
@@ -6151,13 +6553,13 @@
             <a:r>
               <a:rPr lang="en-US" sz="1200" dirty="0">
                 <a:solidFill>
-                  <a:srgbClr val="ADADAD"/>
+                  <a:srgbClr val="707070"/>
                 </a:solidFill>
                 <a:latin typeface="Pretendard Light" pitchFamily="34" charset="0"/>
                 <a:ea typeface="Pretendard Light" pitchFamily="34" charset="-122"/>
                 <a:cs typeface="Pretendard Light" pitchFamily="34" charset="-120"/>
               </a:rPr>
-              <a:t>Snapshot_P2.zip 을 전원에게 배포한다. 못 따라온 학생은 다음 주에 이걸 열고 시작한다.</a:t>
+              <a:t>New 전용이면 Input.GetAxisRaw 가 런타임에 예외를 던진다. 반 전체가 동시에 막힌다.</a:t>
             </a:r>
             <a:endParaRPr lang="en-US" sz="1200" dirty="0"/>
           </a:p>
@@ -6228,6 +6630,881 @@
                 <a:ea typeface="Pretendard SemiBold" pitchFamily="34" charset="-122"/>
                 <a:cs typeface="Pretendard SemiBold" pitchFamily="34" charset="-120"/>
               </a:rPr>
+              <a:t>Phase 2 종료 조건.</a:t>
+            </a:r>
+            <a:endParaRPr lang="en-US" sz="2600" dirty="0"/>
+          </a:p>
+        </p:txBody>
+      </p:sp>
+      <p:sp>
+        <p:nvSpPr>
+          <p:cNvPr id="3" name="Text 1"/>
+          <p:cNvSpPr txBox="1"/>
+          <p:nvPr/>
+        </p:nvSpPr>
+        <p:spPr>
+          <a:xfrm>
+            <a:off x="758952" y="1060704"/>
+            <a:ext cx="10673791" cy="329184"/>
+          </a:xfrm>
+          <a:prstGeom prst="rect">
+            <a:avLst/>
+          </a:prstGeom>
+          <a:noFill/>
+          <a:ln/>
+        </p:spPr>
+        <p:txBody>
+          <a:bodyPr wrap="square" lIns="0" tIns="0" rIns="0" bIns="0" rtlCol="0" anchor="ctr"/>
+          <a:lstStyle/>
+          <a:p>
+            <a:pPr indent="0" marL="0">
+              <a:buNone/>
+            </a:pPr>
+            <a:r>
+              <a:rPr lang="en-US" sz="1500" dirty="0">
+                <a:solidFill>
+                  <a:srgbClr val="707070"/>
+                </a:solidFill>
+                <a:latin typeface="Pretendard Light" pitchFamily="34" charset="0"/>
+                <a:ea typeface="Pretendard Light" pitchFamily="34" charset="-122"/>
+                <a:cs typeface="Pretendard Light" pitchFamily="34" charset="-120"/>
+              </a:rPr>
+              <a:t>040 데모에서 한 명씩 확인한다. Phase 3는 이 위에 그대로 쌓인다.</a:t>
+            </a:r>
+            <a:endParaRPr lang="en-US" sz="1500" dirty="0"/>
+          </a:p>
+        </p:txBody>
+      </p:sp>
+      <p:sp>
+        <p:nvSpPr>
+          <p:cNvPr id="4" name="Shape 2"/>
+          <p:cNvSpPr/>
+          <p:nvPr/>
+        </p:nvSpPr>
+        <p:spPr>
+          <a:xfrm>
+            <a:off x="758952" y="2176272"/>
+            <a:ext cx="201168" cy="201168"/>
+          </a:xfrm>
+          <a:prstGeom prst="roundRect">
+            <a:avLst>
+              <a:gd name="adj" fmla="val 22727"/>
+            </a:avLst>
+          </a:prstGeom>
+          <a:solidFill>
+            <a:srgbClr val="FFFFFF"/>
+          </a:solidFill>
+          <a:ln w="12700">
+            <a:solidFill>
+              <a:srgbClr val="E0E0E0"/>
+            </a:solidFill>
+            <a:prstDash val="solid"/>
+          </a:ln>
+        </p:spPr>
+      </p:sp>
+      <p:sp>
+        <p:nvSpPr>
+          <p:cNvPr id="5" name="Text 3"/>
+          <p:cNvSpPr txBox="1"/>
+          <p:nvPr/>
+        </p:nvSpPr>
+        <p:spPr>
+          <a:xfrm>
+            <a:off x="1143000" y="2103120"/>
+            <a:ext cx="4754880" cy="365760"/>
+          </a:xfrm>
+          <a:prstGeom prst="rect">
+            <a:avLst/>
+          </a:prstGeom>
+          <a:noFill/>
+          <a:ln/>
+        </p:spPr>
+        <p:txBody>
+          <a:bodyPr wrap="square" lIns="0" tIns="0" rIns="0" bIns="0" rtlCol="0" anchor="ctr"/>
+          <a:lstStyle/>
+          <a:p>
+            <a:pPr indent="0" marL="0">
+              <a:buNone/>
+            </a:pPr>
+            <a:r>
+              <a:rPr lang="en-US" sz="1200" dirty="0">
+                <a:solidFill>
+                  <a:srgbClr val="141414"/>
+                </a:solidFill>
+                <a:latin typeface="Pretendard" pitchFamily="34" charset="0"/>
+                <a:ea typeface="Pretendard" pitchFamily="34" charset="-122"/>
+                <a:cs typeface="Pretendard" pitchFamily="34" charset="-120"/>
+              </a:rPr>
+              <a:t>에디터 6개 창의 역할을 말한다</a:t>
+            </a:r>
+            <a:endParaRPr lang="en-US" sz="1200" dirty="0"/>
+          </a:p>
+        </p:txBody>
+      </p:sp>
+      <p:sp>
+        <p:nvSpPr>
+          <p:cNvPr id="6" name="Shape 4"/>
+          <p:cNvSpPr/>
+          <p:nvPr/>
+        </p:nvSpPr>
+        <p:spPr>
+          <a:xfrm>
+            <a:off x="758952" y="2724912"/>
+            <a:ext cx="201168" cy="201168"/>
+          </a:xfrm>
+          <a:prstGeom prst="roundRect">
+            <a:avLst>
+              <a:gd name="adj" fmla="val 22727"/>
+            </a:avLst>
+          </a:prstGeom>
+          <a:solidFill>
+            <a:srgbClr val="FFFFFF"/>
+          </a:solidFill>
+          <a:ln w="12700">
+            <a:solidFill>
+              <a:srgbClr val="E0E0E0"/>
+            </a:solidFill>
+            <a:prstDash val="solid"/>
+          </a:ln>
+        </p:spPr>
+      </p:sp>
+      <p:sp>
+        <p:nvSpPr>
+          <p:cNvPr id="7" name="Text 5"/>
+          <p:cNvSpPr txBox="1"/>
+          <p:nvPr/>
+        </p:nvSpPr>
+        <p:spPr>
+          <a:xfrm>
+            <a:off x="1143000" y="2651760"/>
+            <a:ext cx="4754880" cy="365760"/>
+          </a:xfrm>
+          <a:prstGeom prst="rect">
+            <a:avLst/>
+          </a:prstGeom>
+          <a:noFill/>
+          <a:ln/>
+        </p:spPr>
+        <p:txBody>
+          <a:bodyPr wrap="square" lIns="0" tIns="0" rIns="0" bIns="0" rtlCol="0" anchor="ctr"/>
+          <a:lstStyle/>
+          <a:p>
+            <a:pPr indent="0" marL="0">
+              <a:buNone/>
+            </a:pPr>
+            <a:r>
+              <a:rPr lang="en-US" sz="1200" dirty="0">
+                <a:solidFill>
+                  <a:srgbClr val="141414"/>
+                </a:solidFill>
+                <a:latin typeface="Pretendard" pitchFamily="34" charset="0"/>
+                <a:ea typeface="Pretendard" pitchFamily="34" charset="-122"/>
+                <a:cs typeface="Pretendard" pitchFamily="34" charset="-120"/>
+              </a:rPr>
+              <a:t>F 키로 오브젝트를 찾는다</a:t>
+            </a:r>
+            <a:endParaRPr lang="en-US" sz="1200" dirty="0"/>
+          </a:p>
+        </p:txBody>
+      </p:sp>
+      <p:sp>
+        <p:nvSpPr>
+          <p:cNvPr id="8" name="Shape 6"/>
+          <p:cNvSpPr/>
+          <p:nvPr/>
+        </p:nvSpPr>
+        <p:spPr>
+          <a:xfrm>
+            <a:off x="758952" y="3273552"/>
+            <a:ext cx="201168" cy="201168"/>
+          </a:xfrm>
+          <a:prstGeom prst="roundRect">
+            <a:avLst>
+              <a:gd name="adj" fmla="val 22727"/>
+            </a:avLst>
+          </a:prstGeom>
+          <a:solidFill>
+            <a:srgbClr val="FFFFFF"/>
+          </a:solidFill>
+          <a:ln w="12700">
+            <a:solidFill>
+              <a:srgbClr val="E0E0E0"/>
+            </a:solidFill>
+            <a:prstDash val="solid"/>
+          </a:ln>
+        </p:spPr>
+      </p:sp>
+      <p:sp>
+        <p:nvSpPr>
+          <p:cNvPr id="9" name="Text 7"/>
+          <p:cNvSpPr txBox="1"/>
+          <p:nvPr/>
+        </p:nvSpPr>
+        <p:spPr>
+          <a:xfrm>
+            <a:off x="1143000" y="3200400"/>
+            <a:ext cx="4754880" cy="365760"/>
+          </a:xfrm>
+          <a:prstGeom prst="rect">
+            <a:avLst/>
+          </a:prstGeom>
+          <a:noFill/>
+          <a:ln/>
+        </p:spPr>
+        <p:txBody>
+          <a:bodyPr wrap="square" lIns="0" tIns="0" rIns="0" bIns="0" rtlCol="0" anchor="ctr"/>
+          <a:lstStyle/>
+          <a:p>
+            <a:pPr indent="0" marL="0">
+              <a:buNone/>
+            </a:pPr>
+            <a:r>
+              <a:rPr lang="en-US" sz="1200" dirty="0">
+                <a:solidFill>
+                  <a:srgbClr val="141414"/>
+                </a:solidFill>
+                <a:latin typeface="Pretendard" pitchFamily="34" charset="0"/>
+                <a:ea typeface="Pretendard" pitchFamily="34" charset="-122"/>
+                <a:cs typeface="Pretendard" pitchFamily="34" charset="-120"/>
+              </a:rPr>
+              <a:t>Component 를 추가·제거한다</a:t>
+            </a:r>
+            <a:endParaRPr lang="en-US" sz="1200" dirty="0"/>
+          </a:p>
+        </p:txBody>
+      </p:sp>
+      <p:sp>
+        <p:nvSpPr>
+          <p:cNvPr id="10" name="Shape 8"/>
+          <p:cNvSpPr/>
+          <p:nvPr/>
+        </p:nvSpPr>
+        <p:spPr>
+          <a:xfrm>
+            <a:off x="758952" y="3822192"/>
+            <a:ext cx="201168" cy="201168"/>
+          </a:xfrm>
+          <a:prstGeom prst="roundRect">
+            <a:avLst>
+              <a:gd name="adj" fmla="val 22727"/>
+            </a:avLst>
+          </a:prstGeom>
+          <a:solidFill>
+            <a:srgbClr val="FFFFFF"/>
+          </a:solidFill>
+          <a:ln w="12700">
+            <a:solidFill>
+              <a:srgbClr val="E0E0E0"/>
+            </a:solidFill>
+            <a:prstDash val="solid"/>
+          </a:ln>
+        </p:spPr>
+      </p:sp>
+      <p:sp>
+        <p:nvSpPr>
+          <p:cNvPr id="11" name="Text 9"/>
+          <p:cNvSpPr txBox="1"/>
+          <p:nvPr/>
+        </p:nvSpPr>
+        <p:spPr>
+          <a:xfrm>
+            <a:off x="1143000" y="3749040"/>
+            <a:ext cx="4754880" cy="365760"/>
+          </a:xfrm>
+          <a:prstGeom prst="rect">
+            <a:avLst/>
+          </a:prstGeom>
+          <a:noFill/>
+          <a:ln/>
+        </p:spPr>
+        <p:txBody>
+          <a:bodyPr wrap="square" lIns="0" tIns="0" rIns="0" bIns="0" rtlCol="0" anchor="ctr"/>
+          <a:lstStyle/>
+          <a:p>
+            <a:pPr indent="0" marL="0">
+              <a:buNone/>
+            </a:pPr>
+            <a:r>
+              <a:rPr lang="en-US" sz="1200" dirty="0">
+                <a:solidFill>
+                  <a:srgbClr val="141414"/>
+                </a:solidFill>
+                <a:latin typeface="Pretendard" pitchFamily="34" charset="0"/>
+                <a:ea typeface="Pretendard" pitchFamily="34" charset="-122"/>
+                <a:cs typeface="Pretendard" pitchFamily="34" charset="-120"/>
+              </a:rPr>
+              <a:t>월드 좌표와 로컬 좌표를 구분한다</a:t>
+            </a:r>
+            <a:endParaRPr lang="en-US" sz="1200" dirty="0"/>
+          </a:p>
+        </p:txBody>
+      </p:sp>
+      <p:sp>
+        <p:nvSpPr>
+          <p:cNvPr id="12" name="Shape 10"/>
+          <p:cNvSpPr/>
+          <p:nvPr/>
+        </p:nvSpPr>
+        <p:spPr>
+          <a:xfrm>
+            <a:off x="758952" y="4370832"/>
+            <a:ext cx="201168" cy="201168"/>
+          </a:xfrm>
+          <a:prstGeom prst="roundRect">
+            <a:avLst>
+              <a:gd name="adj" fmla="val 22727"/>
+            </a:avLst>
+          </a:prstGeom>
+          <a:solidFill>
+            <a:srgbClr val="FFFFFF"/>
+          </a:solidFill>
+          <a:ln w="12700">
+            <a:solidFill>
+              <a:srgbClr val="E0E0E0"/>
+            </a:solidFill>
+            <a:prstDash val="solid"/>
+          </a:ln>
+        </p:spPr>
+      </p:sp>
+      <p:sp>
+        <p:nvSpPr>
+          <p:cNvPr id="13" name="Text 11"/>
+          <p:cNvSpPr txBox="1"/>
+          <p:nvPr/>
+        </p:nvSpPr>
+        <p:spPr>
+          <a:xfrm>
+            <a:off x="1143000" y="4297680"/>
+            <a:ext cx="4754880" cy="365760"/>
+          </a:xfrm>
+          <a:prstGeom prst="rect">
+            <a:avLst/>
+          </a:prstGeom>
+          <a:noFill/>
+          <a:ln/>
+        </p:spPr>
+        <p:txBody>
+          <a:bodyPr wrap="square" lIns="0" tIns="0" rIns="0" bIns="0" rtlCol="0" anchor="ctr"/>
+          <a:lstStyle/>
+          <a:p>
+            <a:pPr indent="0" marL="0">
+              <a:buNone/>
+            </a:pPr>
+            <a:r>
+              <a:rPr lang="en-US" sz="1200" dirty="0">
+                <a:solidFill>
+                  <a:srgbClr val="141414"/>
+                </a:solidFill>
+                <a:latin typeface="Pretendard" pitchFamily="34" charset="0"/>
+                <a:ea typeface="Pretendard" pitchFamily="34" charset="-122"/>
+                <a:cs typeface="Pretendard" pitchFamily="34" charset="-120"/>
+              </a:rPr>
+              <a:t>스크립트를 만들어 GameObject 에 붙인다</a:t>
+            </a:r>
+            <a:endParaRPr lang="en-US" sz="1200" dirty="0"/>
+          </a:p>
+        </p:txBody>
+      </p:sp>
+      <p:sp>
+        <p:nvSpPr>
+          <p:cNvPr id="14" name="Shape 12"/>
+          <p:cNvSpPr/>
+          <p:nvPr/>
+        </p:nvSpPr>
+        <p:spPr>
+          <a:xfrm>
+            <a:off x="6199632" y="2176272"/>
+            <a:ext cx="201168" cy="201168"/>
+          </a:xfrm>
+          <a:prstGeom prst="roundRect">
+            <a:avLst>
+              <a:gd name="adj" fmla="val 22727"/>
+            </a:avLst>
+          </a:prstGeom>
+          <a:solidFill>
+            <a:srgbClr val="FFFFFF"/>
+          </a:solidFill>
+          <a:ln w="12700">
+            <a:solidFill>
+              <a:srgbClr val="E0E0E0"/>
+            </a:solidFill>
+            <a:prstDash val="solid"/>
+          </a:ln>
+        </p:spPr>
+      </p:sp>
+      <p:sp>
+        <p:nvSpPr>
+          <p:cNvPr id="15" name="Text 13"/>
+          <p:cNvSpPr txBox="1"/>
+          <p:nvPr/>
+        </p:nvSpPr>
+        <p:spPr>
+          <a:xfrm>
+            <a:off x="6583680" y="2103120"/>
+            <a:ext cx="4754880" cy="365760"/>
+          </a:xfrm>
+          <a:prstGeom prst="rect">
+            <a:avLst/>
+          </a:prstGeom>
+          <a:noFill/>
+          <a:ln/>
+        </p:spPr>
+        <p:txBody>
+          <a:bodyPr wrap="square" lIns="0" tIns="0" rIns="0" bIns="0" rtlCol="0" anchor="ctr"/>
+          <a:lstStyle/>
+          <a:p>
+            <a:pPr indent="0" marL="0">
+              <a:buNone/>
+            </a:pPr>
+            <a:r>
+              <a:rPr lang="en-US" sz="1200" dirty="0">
+                <a:solidFill>
+                  <a:srgbClr val="141414"/>
+                </a:solidFill>
+                <a:latin typeface="Pretendard" pitchFamily="34" charset="0"/>
+                <a:ea typeface="Pretendard" pitchFamily="34" charset="-122"/>
+                <a:cs typeface="Pretendard" pitchFamily="34" charset="-120"/>
+              </a:rPr>
+              <a:t>Start / Update 차이를 한 문장으로 말한다</a:t>
+            </a:r>
+            <a:endParaRPr lang="en-US" sz="1200" dirty="0"/>
+          </a:p>
+        </p:txBody>
+      </p:sp>
+      <p:sp>
+        <p:nvSpPr>
+          <p:cNvPr id="16" name="Shape 14"/>
+          <p:cNvSpPr/>
+          <p:nvPr/>
+        </p:nvSpPr>
+        <p:spPr>
+          <a:xfrm>
+            <a:off x="6199632" y="2724912"/>
+            <a:ext cx="201168" cy="201168"/>
+          </a:xfrm>
+          <a:prstGeom prst="roundRect">
+            <a:avLst>
+              <a:gd name="adj" fmla="val 22727"/>
+            </a:avLst>
+          </a:prstGeom>
+          <a:solidFill>
+            <a:srgbClr val="FFFFFF"/>
+          </a:solidFill>
+          <a:ln w="12700">
+            <a:solidFill>
+              <a:srgbClr val="E0E0E0"/>
+            </a:solidFill>
+            <a:prstDash val="solid"/>
+          </a:ln>
+        </p:spPr>
+      </p:sp>
+      <p:sp>
+        <p:nvSpPr>
+          <p:cNvPr id="17" name="Text 15"/>
+          <p:cNvSpPr txBox="1"/>
+          <p:nvPr/>
+        </p:nvSpPr>
+        <p:spPr>
+          <a:xfrm>
+            <a:off x="6583680" y="2651760"/>
+            <a:ext cx="4754880" cy="365760"/>
+          </a:xfrm>
+          <a:prstGeom prst="rect">
+            <a:avLst/>
+          </a:prstGeom>
+          <a:noFill/>
+          <a:ln/>
+        </p:spPr>
+        <p:txBody>
+          <a:bodyPr wrap="square" lIns="0" tIns="0" rIns="0" bIns="0" rtlCol="0" anchor="ctr"/>
+          <a:lstStyle/>
+          <a:p>
+            <a:pPr indent="0" marL="0">
+              <a:buNone/>
+            </a:pPr>
+            <a:r>
+              <a:rPr lang="en-US" sz="1200" dirty="0">
+                <a:solidFill>
+                  <a:srgbClr val="141414"/>
+                </a:solidFill>
+                <a:latin typeface="Pretendard" pitchFamily="34" charset="0"/>
+                <a:ea typeface="Pretendard" pitchFamily="34" charset="-122"/>
+                <a:cs typeface="Pretendard" pitchFamily="34" charset="-120"/>
+              </a:rPr>
+              <a:t>[SerializeField] 를 Inspector 에서 조절한다</a:t>
+            </a:r>
+            <a:endParaRPr lang="en-US" sz="1200" dirty="0"/>
+          </a:p>
+        </p:txBody>
+      </p:sp>
+      <p:sp>
+        <p:nvSpPr>
+          <p:cNvPr id="18" name="Shape 16"/>
+          <p:cNvSpPr/>
+          <p:nvPr/>
+        </p:nvSpPr>
+        <p:spPr>
+          <a:xfrm>
+            <a:off x="6199632" y="3273552"/>
+            <a:ext cx="201168" cy="201168"/>
+          </a:xfrm>
+          <a:prstGeom prst="roundRect">
+            <a:avLst>
+              <a:gd name="adj" fmla="val 22727"/>
+            </a:avLst>
+          </a:prstGeom>
+          <a:solidFill>
+            <a:srgbClr val="FFFFFF"/>
+          </a:solidFill>
+          <a:ln w="12700">
+            <a:solidFill>
+              <a:srgbClr val="E0E0E0"/>
+            </a:solidFill>
+            <a:prstDash val="solid"/>
+          </a:ln>
+        </p:spPr>
+      </p:sp>
+      <p:sp>
+        <p:nvSpPr>
+          <p:cNvPr id="19" name="Text 17"/>
+          <p:cNvSpPr txBox="1"/>
+          <p:nvPr/>
+        </p:nvSpPr>
+        <p:spPr>
+          <a:xfrm>
+            <a:off x="6583680" y="3200400"/>
+            <a:ext cx="4754880" cy="365760"/>
+          </a:xfrm>
+          <a:prstGeom prst="rect">
+            <a:avLst/>
+          </a:prstGeom>
+          <a:noFill/>
+          <a:ln/>
+        </p:spPr>
+        <p:txBody>
+          <a:bodyPr wrap="square" lIns="0" tIns="0" rIns="0" bIns="0" rtlCol="0" anchor="ctr"/>
+          <a:lstStyle/>
+          <a:p>
+            <a:pPr indent="0" marL="0">
+              <a:buNone/>
+            </a:pPr>
+            <a:r>
+              <a:rPr lang="en-US" sz="1200" dirty="0">
+                <a:solidFill>
+                  <a:srgbClr val="141414"/>
+                </a:solidFill>
+                <a:latin typeface="Pretendard" pitchFamily="34" charset="0"/>
+                <a:ea typeface="Pretendard" pitchFamily="34" charset="-122"/>
+                <a:cs typeface="Pretendard" pitchFamily="34" charset="-120"/>
+              </a:rPr>
+              <a:t>Play 중 변경은 저장되지 않음을 안다</a:t>
+            </a:r>
+            <a:endParaRPr lang="en-US" sz="1200" dirty="0"/>
+          </a:p>
+        </p:txBody>
+      </p:sp>
+      <p:sp>
+        <p:nvSpPr>
+          <p:cNvPr id="20" name="Shape 18"/>
+          <p:cNvSpPr/>
+          <p:nvPr/>
+        </p:nvSpPr>
+        <p:spPr>
+          <a:xfrm>
+            <a:off x="6199632" y="3822192"/>
+            <a:ext cx="201168" cy="201168"/>
+          </a:xfrm>
+          <a:prstGeom prst="roundRect">
+            <a:avLst>
+              <a:gd name="adj" fmla="val 22727"/>
+            </a:avLst>
+          </a:prstGeom>
+          <a:solidFill>
+            <a:srgbClr val="FFFFFF"/>
+          </a:solidFill>
+          <a:ln w="12700">
+            <a:solidFill>
+              <a:srgbClr val="E0E0E0"/>
+            </a:solidFill>
+            <a:prstDash val="solid"/>
+          </a:ln>
+        </p:spPr>
+      </p:sp>
+      <p:sp>
+        <p:nvSpPr>
+          <p:cNvPr id="21" name="Text 19"/>
+          <p:cNvSpPr txBox="1"/>
+          <p:nvPr/>
+        </p:nvSpPr>
+        <p:spPr>
+          <a:xfrm>
+            <a:off x="6583680" y="3749040"/>
+            <a:ext cx="4754880" cy="365760"/>
+          </a:xfrm>
+          <a:prstGeom prst="rect">
+            <a:avLst/>
+          </a:prstGeom>
+          <a:noFill/>
+          <a:ln/>
+        </p:spPr>
+        <p:txBody>
+          <a:bodyPr wrap="square" lIns="0" tIns="0" rIns="0" bIns="0" rtlCol="0" anchor="ctr"/>
+          <a:lstStyle/>
+          <a:p>
+            <a:pPr indent="0" marL="0">
+              <a:buNone/>
+            </a:pPr>
+            <a:r>
+              <a:rPr lang="en-US" sz="1200" dirty="0">
+                <a:solidFill>
+                  <a:srgbClr val="141414"/>
+                </a:solidFill>
+                <a:latin typeface="Pretendard" pitchFamily="34" charset="0"/>
+                <a:ea typeface="Pretendard" pitchFamily="34" charset="-122"/>
+                <a:cs typeface="Pretendard" pitchFamily="34" charset="-120"/>
+              </a:rPr>
+              <a:t>움직이는 코드에 Time.deltaTime 을 곱한다</a:t>
+            </a:r>
+            <a:endParaRPr lang="en-US" sz="1200" dirty="0"/>
+          </a:p>
+        </p:txBody>
+      </p:sp>
+      <p:sp>
+        <p:nvSpPr>
+          <p:cNvPr id="22" name="Shape 20"/>
+          <p:cNvSpPr/>
+          <p:nvPr/>
+        </p:nvSpPr>
+        <p:spPr>
+          <a:xfrm>
+            <a:off x="6199632" y="4370832"/>
+            <a:ext cx="201168" cy="201168"/>
+          </a:xfrm>
+          <a:prstGeom prst="roundRect">
+            <a:avLst>
+              <a:gd name="adj" fmla="val 22727"/>
+            </a:avLst>
+          </a:prstGeom>
+          <a:solidFill>
+            <a:srgbClr val="FFFFFF"/>
+          </a:solidFill>
+          <a:ln w="19050">
+            <a:solidFill>
+              <a:srgbClr val="141414"/>
+            </a:solidFill>
+            <a:prstDash val="solid"/>
+          </a:ln>
+        </p:spPr>
+      </p:sp>
+      <p:sp>
+        <p:nvSpPr>
+          <p:cNvPr id="23" name="Text 21"/>
+          <p:cNvSpPr txBox="1"/>
+          <p:nvPr/>
+        </p:nvSpPr>
+        <p:spPr>
+          <a:xfrm>
+            <a:off x="6583680" y="4297680"/>
+            <a:ext cx="4754880" cy="365760"/>
+          </a:xfrm>
+          <a:prstGeom prst="rect">
+            <a:avLst/>
+          </a:prstGeom>
+          <a:noFill/>
+          <a:ln/>
+        </p:spPr>
+        <p:txBody>
+          <a:bodyPr wrap="square" lIns="0" tIns="0" rIns="0" bIns="0" rtlCol="0" anchor="ctr"/>
+          <a:lstStyle/>
+          <a:p>
+            <a:pPr indent="0" marL="0">
+              <a:buNone/>
+            </a:pPr>
+            <a:r>
+              <a:rPr lang="en-US" sz="1200" dirty="0">
+                <a:solidFill>
+                  <a:srgbClr val="141414"/>
+                </a:solidFill>
+                <a:latin typeface="Pretendard SemiBold" pitchFamily="34" charset="0"/>
+                <a:ea typeface="Pretendard SemiBold" pitchFamily="34" charset="-122"/>
+                <a:cs typeface="Pretendard SemiBold" pitchFamily="34" charset="-120"/>
+              </a:rPr>
+              <a:t>WASD 로 캐릭터를 움직인다</a:t>
+            </a:r>
+            <a:endParaRPr lang="en-US" sz="1200" dirty="0"/>
+          </a:p>
+        </p:txBody>
+      </p:sp>
+      <p:sp>
+        <p:nvSpPr>
+          <p:cNvPr id="24" name="Shape 22"/>
+          <p:cNvSpPr/>
+          <p:nvPr/>
+        </p:nvSpPr>
+        <p:spPr>
+          <a:xfrm>
+            <a:off x="758952" y="5029200"/>
+            <a:ext cx="10673791" cy="1188720"/>
+          </a:xfrm>
+          <a:prstGeom prst="roundRect">
+            <a:avLst>
+              <a:gd name="adj" fmla="val 19231"/>
+            </a:avLst>
+          </a:prstGeom>
+          <a:solidFill>
+            <a:srgbClr val="141414"/>
+          </a:solidFill>
+          <a:ln w="12700">
+            <a:solidFill>
+              <a:srgbClr val="333333"/>
+            </a:solidFill>
+            <a:prstDash val="solid"/>
+          </a:ln>
+        </p:spPr>
+      </p:sp>
+      <p:sp>
+        <p:nvSpPr>
+          <p:cNvPr id="25" name="Text 23"/>
+          <p:cNvSpPr txBox="1"/>
+          <p:nvPr/>
+        </p:nvSpPr>
+        <p:spPr>
+          <a:xfrm>
+            <a:off x="1124712" y="5285232"/>
+            <a:ext cx="10332720" cy="402336"/>
+          </a:xfrm>
+          <a:prstGeom prst="rect">
+            <a:avLst/>
+          </a:prstGeom>
+          <a:noFill/>
+          <a:ln/>
+        </p:spPr>
+        <p:txBody>
+          <a:bodyPr wrap="square" lIns="0" tIns="0" rIns="0" bIns="0" rtlCol="0" anchor="ctr"/>
+          <a:lstStyle/>
+          <a:p>
+            <a:pPr indent="0" marL="0">
+              <a:buNone/>
+            </a:pPr>
+            <a:r>
+              <a:rPr lang="en-US" sz="1900" dirty="0">
+                <a:solidFill>
+                  <a:srgbClr val="FFFFFF"/>
+                </a:solidFill>
+                <a:latin typeface="Pretendard SemiBold" pitchFamily="34" charset="0"/>
+                <a:ea typeface="Pretendard SemiBold" pitchFamily="34" charset="-122"/>
+                <a:cs typeface="Pretendard SemiBold" pitchFamily="34" charset="-120"/>
+              </a:rPr>
+              <a:t>하나라도 안 되는 학생이 있으면 이번 주 안에 개별 시간을 잡는다.</a:t>
+            </a:r>
+            <a:endParaRPr lang="en-US" sz="1900" dirty="0"/>
+          </a:p>
+        </p:txBody>
+      </p:sp>
+      <p:sp>
+        <p:nvSpPr>
+          <p:cNvPr id="26" name="Text 24"/>
+          <p:cNvSpPr txBox="1"/>
+          <p:nvPr/>
+        </p:nvSpPr>
+        <p:spPr>
+          <a:xfrm>
+            <a:off x="1124712" y="5760720"/>
+            <a:ext cx="10332720" cy="365760"/>
+          </a:xfrm>
+          <a:prstGeom prst="rect">
+            <a:avLst/>
+          </a:prstGeom>
+          <a:noFill/>
+          <a:ln/>
+        </p:spPr>
+        <p:txBody>
+          <a:bodyPr wrap="square" lIns="0" tIns="0" rIns="0" bIns="0" rtlCol="0" anchor="ctr"/>
+          <a:lstStyle/>
+          <a:p>
+            <a:pPr indent="0" marL="0">
+              <a:buNone/>
+            </a:pPr>
+            <a:r>
+              <a:rPr lang="en-US" sz="1200" dirty="0">
+                <a:solidFill>
+                  <a:srgbClr val="ADADAD"/>
+                </a:solidFill>
+                <a:latin typeface="Pretendard Light" pitchFamily="34" charset="0"/>
+                <a:ea typeface="Pretendard Light" pitchFamily="34" charset="-122"/>
+                <a:cs typeface="Pretendard Light" pitchFamily="34" charset="-120"/>
+              </a:rPr>
+              <a:t>Snapshot_P2.zip 을 전원에게 배포한다. 못 따라온 학생은 다음 주에 이걸 열고 시작한다.</a:t>
+            </a:r>
+            <a:endParaRPr lang="en-US" sz="1200" dirty="0"/>
+          </a:p>
+        </p:txBody>
+      </p:sp>
+    </p:spTree>
+  </p:cSld>
+  <p:clrMapOvr>
+    <a:masterClrMapping/>
+  </p:clrMapOvr>
+</p:sld>
+</file>
+
+<file path=ppt/slides/slide15.xml><?xml version="1.0" encoding="utf-8"?>
+<p:sld xmlns:a="http://schemas.openxmlformats.org/drawingml/2006/main" xmlns:r="http://schemas.openxmlformats.org/officeDocument/2006/relationships" xmlns:p="http://schemas.openxmlformats.org/presentationml/2006/main">
+  <p:cSld name="Slide 15">
+    <p:bg>
+      <p:bgPr>
+        <a:solidFill>
+          <a:srgbClr val="FFFFFF"/>
+        </a:solidFill>
+      </p:bgPr>
+    </p:bg>
+    <p:spTree>
+      <p:nvGrpSpPr>
+        <p:cNvPr id="1" name=""/>
+        <p:cNvGrpSpPr/>
+        <p:nvPr/>
+      </p:nvGrpSpPr>
+      <p:grpSpPr>
+        <a:xfrm>
+          <a:off x="0" y="0"/>
+          <a:ext cx="0" cy="0"/>
+          <a:chOff x="0" y="0"/>
+          <a:chExt cx="0" cy="0"/>
+        </a:xfrm>
+      </p:grpSpPr>
+      <p:sp>
+        <p:nvSpPr>
+          <p:cNvPr id="2" name="Text 0"/>
+          <p:cNvSpPr txBox="1"/>
+          <p:nvPr/>
+        </p:nvSpPr>
+        <p:spPr>
+          <a:xfrm>
+            <a:off x="758952" y="566928"/>
+            <a:ext cx="10673791" cy="457200"/>
+          </a:xfrm>
+          <a:prstGeom prst="rect">
+            <a:avLst/>
+          </a:prstGeom>
+          <a:noFill/>
+          <a:ln/>
+        </p:spPr>
+        <p:txBody>
+          <a:bodyPr wrap="square" lIns="0" tIns="0" rIns="0" bIns="0" rtlCol="0" anchor="ctr"/>
+          <a:lstStyle/>
+          <a:p>
+            <a:pPr indent="0" marL="0">
+              <a:buNone/>
+            </a:pPr>
+            <a:r>
+              <a:rPr lang="en-US" sz="2600" dirty="0">
+                <a:solidFill>
+                  <a:srgbClr val="141414"/>
+                </a:solidFill>
+                <a:latin typeface="Pretendard SemiBold" pitchFamily="34" charset="0"/>
+                <a:ea typeface="Pretendard SemiBold" pitchFamily="34" charset="-122"/>
+                <a:cs typeface="Pretendard SemiBold" pitchFamily="34" charset="-120"/>
+              </a:rPr>
               <a:t>다음 주부터 Phase 3.</a:t>
             </a:r>
             <a:endParaRPr lang="en-US" sz="2600" dirty="0"/>
@@ -13259,7 +14536,7 @@
                 <a:ea typeface="Pretendard Light" pitchFamily="34" charset="-122"/>
                 <a:cs typeface="Pretendard Light" pitchFamily="34" charset="-120"/>
               </a:rPr>
-              <a:t>Time.deltaTime 은 직전 한 장을 그리는 데 걸린 시간(초)이다. 빠른 컴퓨터일수록 이 값이 작아서, 곱하면 상쇄된다.</a:t>
+              <a:t>Time.deltaTime 은 직전 한 장을 그리는 데 걸린 시간(초)이다. 1초에 60장이면 한 장에 1/60초.</a:t>
             </a:r>
             <a:endParaRPr lang="en-US" sz="1200" dirty="0"/>
           </a:p>
@@ -13396,7 +14673,7 @@
                 <a:ea typeface="Pretendard SemiBold" pitchFamily="34" charset="-122"/>
                 <a:cs typeface="Pretendard SemiBold" pitchFamily="34" charset="-120"/>
               </a:rPr>
-              <a:t>곱하면 값의 의미가 바뀐다.</a:t>
+              <a:t>1초 동안 더하면 항상 1이다.</a:t>
             </a:r>
             <a:endParaRPr lang="en-US" sz="2600" dirty="0"/>
           </a:p>
@@ -13435,7 +14712,7 @@
                 <a:ea typeface="Pretendard Light" pitchFamily="34" charset="-122"/>
                 <a:cs typeface="Pretendard Light" pitchFamily="34" charset="-120"/>
               </a:rPr>
-              <a:t>값이 갑자기 커져 놀라는데 단위가 바뀐 것이다. 0.05를 60번 하면 3이다.</a:t>
+              <a:t>이게 곱하는 이유다. 곱하라고만 하고 넘어가면 문법 암기가 된다.</a:t>
             </a:r>
             <a:endParaRPr lang="en-US" sz="1500" dirty="0"/>
           </a:p>
@@ -13450,31 +14727,70 @@
         <p:spPr>
           <a:xfrm>
             <a:off x="758952" y="1965960"/>
-            <a:ext cx="3657600" cy="274320"/>
-          </a:xfrm>
-          <a:prstGeom prst="rect">
-            <a:avLst/>
-          </a:prstGeom>
-          <a:noFill/>
-          <a:ln/>
-        </p:spPr>
-        <p:txBody>
-          <a:bodyPr wrap="square" lIns="0" tIns="0" rIns="0" bIns="0" rtlCol="0" anchor="ctr"/>
-          <a:lstStyle/>
-          <a:p>
-            <a:pPr indent="0" marL="0">
-              <a:buNone/>
-            </a:pPr>
-            <a:r>
-              <a:rPr lang="en-US" sz="950" dirty="0">
-                <a:solidFill>
-                  <a:srgbClr val="707070"/>
+            <a:ext cx="10058400" cy="365760"/>
+          </a:xfrm>
+          <a:prstGeom prst="rect">
+            <a:avLst/>
+          </a:prstGeom>
+          <a:noFill/>
+          <a:ln/>
+        </p:spPr>
+        <p:txBody>
+          <a:bodyPr wrap="square" lIns="0" tIns="0" rIns="0" bIns="0" rtlCol="0" anchor="ctr"/>
+          <a:lstStyle/>
+          <a:p>
+            <a:pPr indent="0" marL="0">
+              <a:buNone/>
+            </a:pPr>
+            <a:r>
+              <a:rPr lang="en-US" sz="1900" dirty="0">
+                <a:solidFill>
+                  <a:srgbClr val="141414"/>
                 </a:solidFill>
                 <a:latin typeface="Pretendard SemiBold" pitchFamily="34" charset="0"/>
                 <a:ea typeface="Pretendard SemiBold" pitchFamily="34" charset="-122"/>
                 <a:cs typeface="Pretendard SemiBold" pitchFamily="34" charset="-120"/>
               </a:rPr>
-              <a:t>고치기 전</a:t>
+              <a:t>deltaTime 을 1초 동안 전부 더하면 얼마가 될까?</a:t>
+            </a:r>
+            <a:endParaRPr lang="en-US" sz="1900" dirty="0"/>
+          </a:p>
+        </p:txBody>
+      </p:sp>
+      <p:sp>
+        <p:nvSpPr>
+          <p:cNvPr id="7" name="Text 5"/>
+          <p:cNvSpPr txBox="1"/>
+          <p:nvPr/>
+        </p:nvSpPr>
+        <p:spPr>
+          <a:xfrm>
+            <a:off x="758952" y="2560320"/>
+            <a:ext cx="1371600" cy="274320"/>
+          </a:xfrm>
+          <a:prstGeom prst="rect">
+            <a:avLst/>
+          </a:prstGeom>
+          <a:noFill/>
+          <a:ln/>
+        </p:spPr>
+        <p:txBody>
+          <a:bodyPr wrap="square" lIns="0" tIns="0" rIns="0" bIns="0" rtlCol="0" anchor="ctr"/>
+          <a:lstStyle/>
+          <a:p>
+            <a:pPr indent="0" marL="0">
+              <a:buNone/>
+            </a:pPr>
+            <a:r>
+              <a:rPr lang="en-US" sz="950" dirty="0">
+                <a:solidFill>
+                  <a:srgbClr val="707070"/>
+                </a:solidFill>
+                <a:latin typeface="Pretendard SemiBold" pitchFamily="34" charset="0"/>
+                <a:ea typeface="Pretendard SemiBold" pitchFamily="34" charset="-122"/>
+                <a:cs typeface="Pretendard SemiBold" pitchFamily="34" charset="-120"/>
+              </a:rPr>
+              <a:t>컴퓨터</a:t>
             </a:r>
             <a:endParaRPr lang="en-US" sz="950" dirty="0"/>
           </a:p>
@@ -13482,18 +14798,594 @@
       </p:sp>
       <p:sp>
         <p:nvSpPr>
-          <p:cNvPr id="7" name="Shape 5"/>
+          <p:cNvPr id="8" name="Text 6"/>
+          <p:cNvSpPr txBox="1"/>
+          <p:nvPr/>
+        </p:nvSpPr>
+        <p:spPr>
+          <a:xfrm>
+            <a:off x="2130552" y="2560320"/>
+            <a:ext cx="2011680" cy="274320"/>
+          </a:xfrm>
+          <a:prstGeom prst="rect">
+            <a:avLst/>
+          </a:prstGeom>
+          <a:noFill/>
+          <a:ln/>
+        </p:spPr>
+        <p:txBody>
+          <a:bodyPr wrap="square" lIns="0" tIns="0" rIns="0" bIns="0" rtlCol="0" anchor="ctr"/>
+          <a:lstStyle/>
+          <a:p>
+            <a:pPr indent="0" marL="0">
+              <a:buNone/>
+            </a:pPr>
+            <a:r>
+              <a:rPr lang="en-US" sz="950" dirty="0">
+                <a:solidFill>
+                  <a:srgbClr val="707070"/>
+                </a:solidFill>
+                <a:latin typeface="Pretendard SemiBold" pitchFamily="34" charset="0"/>
+                <a:ea typeface="Pretendard SemiBold" pitchFamily="34" charset="-122"/>
+                <a:cs typeface="Pretendard SemiBold" pitchFamily="34" charset="-120"/>
+              </a:rPr>
+              <a:t>1초 동안 프레임</a:t>
+            </a:r>
+            <a:endParaRPr lang="en-US" sz="950" dirty="0"/>
+          </a:p>
+        </p:txBody>
+      </p:sp>
+      <p:sp>
+        <p:nvSpPr>
+          <p:cNvPr id="9" name="Text 7"/>
+          <p:cNvSpPr txBox="1"/>
+          <p:nvPr/>
+        </p:nvSpPr>
+        <p:spPr>
+          <a:xfrm>
+            <a:off x="4142232" y="2560320"/>
+            <a:ext cx="1554480" cy="274320"/>
+          </a:xfrm>
+          <a:prstGeom prst="rect">
+            <a:avLst/>
+          </a:prstGeom>
+          <a:noFill/>
+          <a:ln/>
+        </p:spPr>
+        <p:txBody>
+          <a:bodyPr wrap="square" lIns="0" tIns="0" rIns="0" bIns="0" rtlCol="0" anchor="ctr"/>
+          <a:lstStyle/>
+          <a:p>
+            <a:pPr indent="0" marL="0">
+              <a:buNone/>
+            </a:pPr>
+            <a:r>
+              <a:rPr lang="en-US" sz="950" dirty="0">
+                <a:solidFill>
+                  <a:srgbClr val="707070"/>
+                </a:solidFill>
+                <a:latin typeface="Pretendard SemiBold" pitchFamily="34" charset="0"/>
+                <a:ea typeface="Pretendard SemiBold" pitchFamily="34" charset="-122"/>
+                <a:cs typeface="Pretendard SemiBold" pitchFamily="34" charset="-120"/>
+              </a:rPr>
+              <a:t>deltaTime</a:t>
+            </a:r>
+            <a:endParaRPr lang="en-US" sz="950" dirty="0"/>
+          </a:p>
+        </p:txBody>
+      </p:sp>
+      <p:sp>
+        <p:nvSpPr>
+          <p:cNvPr id="10" name="Text 8"/>
+          <p:cNvSpPr txBox="1"/>
+          <p:nvPr/>
+        </p:nvSpPr>
+        <p:spPr>
+          <a:xfrm>
+            <a:off x="5696712" y="2560320"/>
+            <a:ext cx="1554480" cy="274320"/>
+          </a:xfrm>
+          <a:prstGeom prst="rect">
+            <a:avLst/>
+          </a:prstGeom>
+          <a:noFill/>
+          <a:ln/>
+        </p:spPr>
+        <p:txBody>
+          <a:bodyPr wrap="square" lIns="0" tIns="0" rIns="0" bIns="0" rtlCol="0" anchor="ctr"/>
+          <a:lstStyle/>
+          <a:p>
+            <a:pPr indent="0" marL="0">
+              <a:buNone/>
+            </a:pPr>
+            <a:r>
+              <a:rPr lang="en-US" sz="950" dirty="0">
+                <a:solidFill>
+                  <a:srgbClr val="707070"/>
+                </a:solidFill>
+                <a:latin typeface="Pretendard SemiBold" pitchFamily="34" charset="0"/>
+                <a:ea typeface="Pretendard SemiBold" pitchFamily="34" charset="-122"/>
+                <a:cs typeface="Pretendard SemiBold" pitchFamily="34" charset="-120"/>
+              </a:rPr>
+              <a:t>전부 더하면</a:t>
+            </a:r>
+            <a:endParaRPr lang="en-US" sz="950" dirty="0"/>
+          </a:p>
+        </p:txBody>
+      </p:sp>
+      <p:sp>
+        <p:nvSpPr>
+          <p:cNvPr id="11" name="Shape 9"/>
           <p:cNvSpPr/>
           <p:nvPr/>
         </p:nvSpPr>
         <p:spPr>
           <a:xfrm>
-            <a:off x="758952" y="2331720"/>
-            <a:ext cx="5486400" cy="1463040"/>
+            <a:off x="758952" y="2962656"/>
+            <a:ext cx="6492240" cy="0"/>
+          </a:xfrm>
+          <a:prstGeom prst="line">
+            <a:avLst/>
+          </a:prstGeom>
+          <a:noFill/>
+          <a:ln w="12700">
+            <a:solidFill>
+              <a:srgbClr val="E0E0E0"/>
+            </a:solidFill>
+            <a:prstDash val="solid"/>
+          </a:ln>
+        </p:spPr>
+      </p:sp>
+      <p:sp>
+        <p:nvSpPr>
+          <p:cNvPr id="12" name="Text 10"/>
+          <p:cNvSpPr txBox="1"/>
+          <p:nvPr/>
+        </p:nvSpPr>
+        <p:spPr>
+          <a:xfrm>
+            <a:off x="758952" y="3127248"/>
+            <a:ext cx="1371600" cy="365760"/>
+          </a:xfrm>
+          <a:prstGeom prst="rect">
+            <a:avLst/>
+          </a:prstGeom>
+          <a:noFill/>
+          <a:ln/>
+        </p:spPr>
+        <p:txBody>
+          <a:bodyPr wrap="square" lIns="0" tIns="0" rIns="0" bIns="0" rtlCol="0" anchor="ctr"/>
+          <a:lstStyle/>
+          <a:p>
+            <a:pPr indent="0" marL="0">
+              <a:buNone/>
+            </a:pPr>
+            <a:r>
+              <a:rPr lang="en-US" sz="1200" dirty="0">
+                <a:solidFill>
+                  <a:srgbClr val="141414"/>
+                </a:solidFill>
+                <a:latin typeface="Pretendard" pitchFamily="34" charset="0"/>
+                <a:ea typeface="Pretendard" pitchFamily="34" charset="-122"/>
+                <a:cs typeface="Pretendard" pitchFamily="34" charset="-120"/>
+              </a:rPr>
+              <a:t>A</a:t>
+            </a:r>
+            <a:endParaRPr lang="en-US" sz="1200" dirty="0"/>
+          </a:p>
+        </p:txBody>
+      </p:sp>
+      <p:sp>
+        <p:nvSpPr>
+          <p:cNvPr id="13" name="Text 11"/>
+          <p:cNvSpPr txBox="1"/>
+          <p:nvPr/>
+        </p:nvSpPr>
+        <p:spPr>
+          <a:xfrm>
+            <a:off x="2130552" y="3127248"/>
+            <a:ext cx="2011680" cy="365760"/>
+          </a:xfrm>
+          <a:prstGeom prst="rect">
+            <a:avLst/>
+          </a:prstGeom>
+          <a:noFill/>
+          <a:ln/>
+        </p:spPr>
+        <p:txBody>
+          <a:bodyPr wrap="square" lIns="0" tIns="0" rIns="0" bIns="0" rtlCol="0" anchor="ctr"/>
+          <a:lstStyle/>
+          <a:p>
+            <a:pPr indent="0" marL="0">
+              <a:buNone/>
+            </a:pPr>
+            <a:r>
+              <a:rPr lang="en-US" sz="1200" dirty="0">
+                <a:solidFill>
+                  <a:srgbClr val="707070"/>
+                </a:solidFill>
+                <a:latin typeface="Pretendard" pitchFamily="34" charset="0"/>
+                <a:ea typeface="Pretendard" pitchFamily="34" charset="-122"/>
+                <a:cs typeface="Pretendard" pitchFamily="34" charset="-120"/>
+              </a:rPr>
+              <a:t>60번</a:t>
+            </a:r>
+            <a:endParaRPr lang="en-US" sz="1200" dirty="0"/>
+          </a:p>
+        </p:txBody>
+      </p:sp>
+      <p:sp>
+        <p:nvSpPr>
+          <p:cNvPr id="14" name="Text 12"/>
+          <p:cNvSpPr txBox="1"/>
+          <p:nvPr/>
+        </p:nvSpPr>
+        <p:spPr>
+          <a:xfrm>
+            <a:off x="4142232" y="3127248"/>
+            <a:ext cx="1554480" cy="365760"/>
+          </a:xfrm>
+          <a:prstGeom prst="rect">
+            <a:avLst/>
+          </a:prstGeom>
+          <a:noFill/>
+          <a:ln/>
+        </p:spPr>
+        <p:txBody>
+          <a:bodyPr wrap="square" lIns="0" tIns="0" rIns="0" bIns="0" rtlCol="0" anchor="ctr"/>
+          <a:lstStyle/>
+          <a:p>
+            <a:pPr indent="0" marL="0">
+              <a:buNone/>
+            </a:pPr>
+            <a:r>
+              <a:rPr lang="en-US" sz="1200" dirty="0">
+                <a:solidFill>
+                  <a:srgbClr val="707070"/>
+                </a:solidFill>
+                <a:latin typeface="Consolas" pitchFamily="34" charset="0"/>
+                <a:ea typeface="Consolas" pitchFamily="34" charset="-122"/>
+                <a:cs typeface="Consolas" pitchFamily="34" charset="-120"/>
+              </a:rPr>
+              <a:t>0.0167</a:t>
+            </a:r>
+            <a:endParaRPr lang="en-US" sz="1200" dirty="0"/>
+          </a:p>
+        </p:txBody>
+      </p:sp>
+      <p:sp>
+        <p:nvSpPr>
+          <p:cNvPr id="15" name="Text 13"/>
+          <p:cNvSpPr txBox="1"/>
+          <p:nvPr/>
+        </p:nvSpPr>
+        <p:spPr>
+          <a:xfrm>
+            <a:off x="5696712" y="3127248"/>
+            <a:ext cx="1554480" cy="365760"/>
+          </a:xfrm>
+          <a:prstGeom prst="rect">
+            <a:avLst/>
+          </a:prstGeom>
+          <a:noFill/>
+          <a:ln/>
+        </p:spPr>
+        <p:txBody>
+          <a:bodyPr wrap="square" lIns="0" tIns="0" rIns="0" bIns="0" rtlCol="0" anchor="ctr"/>
+          <a:lstStyle/>
+          <a:p>
+            <a:pPr indent="0" marL="0">
+              <a:buNone/>
+            </a:pPr>
+            <a:r>
+              <a:rPr lang="en-US" sz="1550" dirty="0">
+                <a:solidFill>
+                  <a:srgbClr val="141414"/>
+                </a:solidFill>
+                <a:latin typeface="Pretendard SemiBold" pitchFamily="34" charset="0"/>
+                <a:ea typeface="Pretendard SemiBold" pitchFamily="34" charset="-122"/>
+                <a:cs typeface="Pretendard SemiBold" pitchFamily="34" charset="-120"/>
+              </a:rPr>
+              <a:t>1초</a:t>
+            </a:r>
+            <a:endParaRPr lang="en-US" sz="1550" dirty="0"/>
+          </a:p>
+        </p:txBody>
+      </p:sp>
+      <p:sp>
+        <p:nvSpPr>
+          <p:cNvPr id="16" name="Shape 14"/>
+          <p:cNvSpPr/>
+          <p:nvPr/>
+        </p:nvSpPr>
+        <p:spPr>
+          <a:xfrm>
+            <a:off x="758952" y="3566160"/>
+            <a:ext cx="6492240" cy="0"/>
+          </a:xfrm>
+          <a:prstGeom prst="line">
+            <a:avLst/>
+          </a:prstGeom>
+          <a:noFill/>
+          <a:ln w="12700">
+            <a:solidFill>
+              <a:srgbClr val="F0F0F0"/>
+            </a:solidFill>
+            <a:prstDash val="solid"/>
+          </a:ln>
+        </p:spPr>
+      </p:sp>
+      <p:sp>
+        <p:nvSpPr>
+          <p:cNvPr id="17" name="Text 15"/>
+          <p:cNvSpPr txBox="1"/>
+          <p:nvPr/>
+        </p:nvSpPr>
+        <p:spPr>
+          <a:xfrm>
+            <a:off x="758952" y="3675888"/>
+            <a:ext cx="1371600" cy="365760"/>
+          </a:xfrm>
+          <a:prstGeom prst="rect">
+            <a:avLst/>
+          </a:prstGeom>
+          <a:noFill/>
+          <a:ln/>
+        </p:spPr>
+        <p:txBody>
+          <a:bodyPr wrap="square" lIns="0" tIns="0" rIns="0" bIns="0" rtlCol="0" anchor="ctr"/>
+          <a:lstStyle/>
+          <a:p>
+            <a:pPr indent="0" marL="0">
+              <a:buNone/>
+            </a:pPr>
+            <a:r>
+              <a:rPr lang="en-US" sz="1200" dirty="0">
+                <a:solidFill>
+                  <a:srgbClr val="141414"/>
+                </a:solidFill>
+                <a:latin typeface="Pretendard" pitchFamily="34" charset="0"/>
+                <a:ea typeface="Pretendard" pitchFamily="34" charset="-122"/>
+                <a:cs typeface="Pretendard" pitchFamily="34" charset="-120"/>
+              </a:rPr>
+              <a:t>B</a:t>
+            </a:r>
+            <a:endParaRPr lang="en-US" sz="1200" dirty="0"/>
+          </a:p>
+        </p:txBody>
+      </p:sp>
+      <p:sp>
+        <p:nvSpPr>
+          <p:cNvPr id="18" name="Text 16"/>
+          <p:cNvSpPr txBox="1"/>
+          <p:nvPr/>
+        </p:nvSpPr>
+        <p:spPr>
+          <a:xfrm>
+            <a:off x="2130552" y="3675888"/>
+            <a:ext cx="2011680" cy="365760"/>
+          </a:xfrm>
+          <a:prstGeom prst="rect">
+            <a:avLst/>
+          </a:prstGeom>
+          <a:noFill/>
+          <a:ln/>
+        </p:spPr>
+        <p:txBody>
+          <a:bodyPr wrap="square" lIns="0" tIns="0" rIns="0" bIns="0" rtlCol="0" anchor="ctr"/>
+          <a:lstStyle/>
+          <a:p>
+            <a:pPr indent="0" marL="0">
+              <a:buNone/>
+            </a:pPr>
+            <a:r>
+              <a:rPr lang="en-US" sz="1200" dirty="0">
+                <a:solidFill>
+                  <a:srgbClr val="707070"/>
+                </a:solidFill>
+                <a:latin typeface="Pretendard" pitchFamily="34" charset="0"/>
+                <a:ea typeface="Pretendard" pitchFamily="34" charset="-122"/>
+                <a:cs typeface="Pretendard" pitchFamily="34" charset="-120"/>
+              </a:rPr>
+              <a:t>144번</a:t>
+            </a:r>
+            <a:endParaRPr lang="en-US" sz="1200" dirty="0"/>
+          </a:p>
+        </p:txBody>
+      </p:sp>
+      <p:sp>
+        <p:nvSpPr>
+          <p:cNvPr id="19" name="Text 17"/>
+          <p:cNvSpPr txBox="1"/>
+          <p:nvPr/>
+        </p:nvSpPr>
+        <p:spPr>
+          <a:xfrm>
+            <a:off x="4142232" y="3675888"/>
+            <a:ext cx="1554480" cy="365760"/>
+          </a:xfrm>
+          <a:prstGeom prst="rect">
+            <a:avLst/>
+          </a:prstGeom>
+          <a:noFill/>
+          <a:ln/>
+        </p:spPr>
+        <p:txBody>
+          <a:bodyPr wrap="square" lIns="0" tIns="0" rIns="0" bIns="0" rtlCol="0" anchor="ctr"/>
+          <a:lstStyle/>
+          <a:p>
+            <a:pPr indent="0" marL="0">
+              <a:buNone/>
+            </a:pPr>
+            <a:r>
+              <a:rPr lang="en-US" sz="1200" dirty="0">
+                <a:solidFill>
+                  <a:srgbClr val="707070"/>
+                </a:solidFill>
+                <a:latin typeface="Consolas" pitchFamily="34" charset="0"/>
+                <a:ea typeface="Consolas" pitchFamily="34" charset="-122"/>
+                <a:cs typeface="Consolas" pitchFamily="34" charset="-120"/>
+              </a:rPr>
+              <a:t>0.0069</a:t>
+            </a:r>
+            <a:endParaRPr lang="en-US" sz="1200" dirty="0"/>
+          </a:p>
+        </p:txBody>
+      </p:sp>
+      <p:sp>
+        <p:nvSpPr>
+          <p:cNvPr id="20" name="Text 18"/>
+          <p:cNvSpPr txBox="1"/>
+          <p:nvPr/>
+        </p:nvSpPr>
+        <p:spPr>
+          <a:xfrm>
+            <a:off x="5696712" y="3675888"/>
+            <a:ext cx="1554480" cy="365760"/>
+          </a:xfrm>
+          <a:prstGeom prst="rect">
+            <a:avLst/>
+          </a:prstGeom>
+          <a:noFill/>
+          <a:ln/>
+        </p:spPr>
+        <p:txBody>
+          <a:bodyPr wrap="square" lIns="0" tIns="0" rIns="0" bIns="0" rtlCol="0" anchor="ctr"/>
+          <a:lstStyle/>
+          <a:p>
+            <a:pPr indent="0" marL="0">
+              <a:buNone/>
+            </a:pPr>
+            <a:r>
+              <a:rPr lang="en-US" sz="1550" dirty="0">
+                <a:solidFill>
+                  <a:srgbClr val="141414"/>
+                </a:solidFill>
+                <a:latin typeface="Pretendard SemiBold" pitchFamily="34" charset="0"/>
+                <a:ea typeface="Pretendard SemiBold" pitchFamily="34" charset="-122"/>
+                <a:cs typeface="Pretendard SemiBold" pitchFamily="34" charset="-120"/>
+              </a:rPr>
+              <a:t>1초</a:t>
+            </a:r>
+            <a:endParaRPr lang="en-US" sz="1550" dirty="0"/>
+          </a:p>
+        </p:txBody>
+      </p:sp>
+      <p:sp>
+        <p:nvSpPr>
+          <p:cNvPr id="21" name="Shape 19"/>
+          <p:cNvSpPr/>
+          <p:nvPr/>
+        </p:nvSpPr>
+        <p:spPr>
+          <a:xfrm>
+            <a:off x="758952" y="4114800"/>
+            <a:ext cx="6492240" cy="0"/>
+          </a:xfrm>
+          <a:prstGeom prst="line">
+            <a:avLst/>
+          </a:prstGeom>
+          <a:noFill/>
+          <a:ln w="12700">
+            <a:solidFill>
+              <a:srgbClr val="F0F0F0"/>
+            </a:solidFill>
+            <a:prstDash val="solid"/>
+          </a:ln>
+        </p:spPr>
+      </p:sp>
+      <p:sp>
+        <p:nvSpPr>
+          <p:cNvPr id="22" name="Text 20"/>
+          <p:cNvSpPr txBox="1"/>
+          <p:nvPr/>
+        </p:nvSpPr>
+        <p:spPr>
+          <a:xfrm>
+            <a:off x="758952" y="4206240"/>
+            <a:ext cx="6492240" cy="365760"/>
+          </a:xfrm>
+          <a:prstGeom prst="rect">
+            <a:avLst/>
+          </a:prstGeom>
+          <a:noFill/>
+          <a:ln/>
+        </p:spPr>
+        <p:txBody>
+          <a:bodyPr wrap="square" lIns="0" tIns="0" rIns="0" bIns="0" rtlCol="0" anchor="ctr"/>
+          <a:lstStyle/>
+          <a:p>
+            <a:pPr indent="0" marL="0">
+              <a:buNone/>
+            </a:pPr>
+            <a:r>
+              <a:rPr lang="en-US" sz="1200" dirty="0">
+                <a:solidFill>
+                  <a:srgbClr val="707070"/>
+                </a:solidFill>
+                <a:latin typeface="Pretendard Light" pitchFamily="34" charset="0"/>
+                <a:ea typeface="Pretendard Light" pitchFamily="34" charset="-122"/>
+                <a:cs typeface="Pretendard Light" pitchFamily="34" charset="-120"/>
+              </a:rPr>
+              <a:t>한 장 그리는 데 걸린 시간을 다 더하면 그게 총 걸린 시간이다. 당연하다.</a:t>
+            </a:r>
+            <a:endParaRPr lang="en-US" sz="1200" dirty="0"/>
+          </a:p>
+        </p:txBody>
+      </p:sp>
+      <p:sp>
+        <p:nvSpPr>
+          <p:cNvPr id="23" name="Text 21"/>
+          <p:cNvSpPr txBox="1"/>
+          <p:nvPr/>
+        </p:nvSpPr>
+        <p:spPr>
+          <a:xfrm>
+            <a:off x="7589520" y="1965960"/>
+            <a:ext cx="3843223" cy="274320"/>
+          </a:xfrm>
+          <a:prstGeom prst="rect">
+            <a:avLst/>
+          </a:prstGeom>
+          <a:noFill/>
+          <a:ln/>
+        </p:spPr>
+        <p:txBody>
+          <a:bodyPr wrap="square" lIns="0" tIns="0" rIns="0" bIns="0" rtlCol="0" anchor="ctr"/>
+          <a:lstStyle/>
+          <a:p>
+            <a:pPr indent="0" marL="0">
+              <a:buNone/>
+            </a:pPr>
+            <a:r>
+              <a:rPr lang="en-US" sz="950" dirty="0">
+                <a:solidFill>
+                  <a:srgbClr val="707070"/>
+                </a:solidFill>
+                <a:latin typeface="Pretendard SemiBold" pitchFamily="34" charset="0"/>
+                <a:ea typeface="Pretendard SemiBold" pitchFamily="34" charset="-122"/>
+                <a:cs typeface="Pretendard SemiBold" pitchFamily="34" charset="-120"/>
+              </a:rPr>
+              <a:t>그래서 곱한다</a:t>
+            </a:r>
+            <a:endParaRPr lang="en-US" sz="950" dirty="0"/>
+          </a:p>
+        </p:txBody>
+      </p:sp>
+      <p:sp>
+        <p:nvSpPr>
+          <p:cNvPr id="24" name="Shape 22"/>
+          <p:cNvSpPr/>
+          <p:nvPr/>
+        </p:nvSpPr>
+        <p:spPr>
+          <a:xfrm>
+            <a:off x="7589520" y="2331720"/>
+            <a:ext cx="3843223" cy="2011680"/>
           </a:xfrm>
           <a:prstGeom prst="roundRect">
             <a:avLst>
-              <a:gd name="adj" fmla="val 10438"/>
+              <a:gd name="adj" fmla="val 7591"/>
             </a:avLst>
           </a:prstGeom>
           <a:solidFill>
@@ -13509,14 +15401,14 @@
       </p:sp>
       <p:sp>
         <p:nvSpPr>
-          <p:cNvPr id="8" name="Text 6"/>
-          <p:cNvSpPr txBox="1"/>
-          <p:nvPr/>
-        </p:nvSpPr>
-        <p:spPr>
-          <a:xfrm>
-            <a:off x="1014984" y="2532888"/>
-            <a:ext cx="4974336" cy="1060704"/>
+          <p:cNvPr id="25" name="Text 23"/>
+          <p:cNvSpPr txBox="1"/>
+          <p:nvPr/>
+        </p:nvSpPr>
+        <p:spPr>
+          <a:xfrm>
+            <a:off x="7845552" y="2532888"/>
+            <a:ext cx="3331159" cy="1609344"/>
           </a:xfrm>
           <a:prstGeom prst="rect">
             <a:avLst/>
@@ -13537,13 +15429,13 @@
             <a:r>
               <a:rPr lang="en-US" sz="1150" dirty="0">
                 <a:solidFill>
-                  <a:srgbClr val="141414"/>
+                  <a:srgbClr val="707070"/>
                 </a:solidFill>
                 <a:latin typeface="Consolas" pitchFamily="34" charset="0"/>
                 <a:ea typeface="Consolas" pitchFamily="34" charset="-122"/>
                 <a:cs typeface="Consolas" pitchFamily="34" charset="-120"/>
               </a:rPr>
-              <a:t>[SerializeField] float moveStep = 0.05f;</a:t>
+              <a:t>매 프레임</a:t>
             </a:r>
             <a:endParaRPr lang="en-US" sz="1150" dirty="0"/>
           </a:p>
@@ -13563,7 +15455,7 @@
                 <a:ea typeface="Consolas" pitchFamily="34" charset="-122"/>
                 <a:cs typeface="Consolas" pitchFamily="34" charset="-120"/>
               </a:rPr>
-              <a:t> </a:t>
+              <a:t>  moveSpeed * deltaTime</a:t>
             </a:r>
             <a:endParaRPr lang="en-US" sz="1150" dirty="0"/>
           </a:p>
@@ -13583,38 +15475,98 @@
                 <a:ea typeface="Consolas" pitchFamily="34" charset="-122"/>
                 <a:cs typeface="Consolas" pitchFamily="34" charset="-120"/>
               </a:rPr>
-              <a:t>position + moveDir * moveStep;</a:t>
+              <a:t> </a:t>
             </a:r>
             <a:endParaRPr lang="en-US" sz="1150" dirty="0"/>
           </a:p>
-        </p:txBody>
-      </p:sp>
-      <p:sp>
-        <p:nvSpPr>
-          <p:cNvPr id="9" name="Text 7"/>
-          <p:cNvSpPr txBox="1"/>
-          <p:nvPr/>
-        </p:nvSpPr>
-        <p:spPr>
-          <a:xfrm>
-            <a:off x="6537960" y="1965960"/>
-            <a:ext cx="3657600" cy="274320"/>
-          </a:xfrm>
-          <a:prstGeom prst="rect">
-            <a:avLst/>
-          </a:prstGeom>
-          <a:noFill/>
-          <a:ln/>
-        </p:spPr>
-        <p:txBody>
-          <a:bodyPr wrap="square" lIns="0" tIns="0" rIns="0" bIns="0" rtlCol="0" anchor="ctr"/>
-          <a:lstStyle/>
-          <a:p>
-            <a:pPr indent="0" marL="0">
-              <a:buNone/>
-            </a:pPr>
-            <a:r>
-              <a:rPr lang="en-US" sz="950" dirty="0">
+          <a:p>
+            <a:pPr indent="0" marL="0">
+              <a:lnSpc>
+                <a:spcPct val="132000"/>
+              </a:lnSpc>
+              <a:buNone/>
+            </a:pPr>
+            <a:r>
+              <a:rPr lang="en-US" sz="1150" dirty="0">
+                <a:solidFill>
+                  <a:srgbClr val="707070"/>
+                </a:solidFill>
+                <a:latin typeface="Consolas" pitchFamily="34" charset="0"/>
+                <a:ea typeface="Consolas" pitchFamily="34" charset="-122"/>
+                <a:cs typeface="Consolas" pitchFamily="34" charset="-120"/>
+              </a:rPr>
+              <a:t>1초 동안 다 더하면</a:t>
+            </a:r>
+            <a:endParaRPr lang="en-US" sz="1150" dirty="0"/>
+          </a:p>
+          <a:p>
+            <a:pPr indent="0" marL="0">
+              <a:lnSpc>
+                <a:spcPct val="132000"/>
+              </a:lnSpc>
+              <a:buNone/>
+            </a:pPr>
+            <a:r>
+              <a:rPr lang="en-US" sz="1150" b="1" dirty="0">
+                <a:solidFill>
+                  <a:srgbClr val="141414"/>
+                </a:solidFill>
+                <a:latin typeface="Consolas" pitchFamily="34" charset="0"/>
+                <a:ea typeface="Consolas" pitchFamily="34" charset="-122"/>
+                <a:cs typeface="Consolas" pitchFamily="34" charset="-120"/>
+              </a:rPr>
+              <a:t>  moveSpeed * 1</a:t>
+            </a:r>
+            <a:endParaRPr lang="en-US" sz="1150" dirty="0"/>
+          </a:p>
+          <a:p>
+            <a:pPr indent="0" marL="0">
+              <a:lnSpc>
+                <a:spcPct val="132000"/>
+              </a:lnSpc>
+              <a:buNone/>
+            </a:pPr>
+            <a:r>
+              <a:rPr lang="en-US" sz="1150" b="1" dirty="0">
+                <a:solidFill>
+                  <a:srgbClr val="141414"/>
+                </a:solidFill>
+                <a:latin typeface="Consolas" pitchFamily="34" charset="0"/>
+                <a:ea typeface="Consolas" pitchFamily="34" charset="-122"/>
+                <a:cs typeface="Consolas" pitchFamily="34" charset="-120"/>
+              </a:rPr>
+              <a:t>  = moveSpeed</a:t>
+            </a:r>
+            <a:endParaRPr lang="en-US" sz="1150" dirty="0"/>
+          </a:p>
+        </p:txBody>
+      </p:sp>
+      <p:sp>
+        <p:nvSpPr>
+          <p:cNvPr id="26" name="Text 24"/>
+          <p:cNvSpPr txBox="1"/>
+          <p:nvPr/>
+        </p:nvSpPr>
+        <p:spPr>
+          <a:xfrm>
+            <a:off x="7589520" y="4526280"/>
+            <a:ext cx="3843223" cy="365760"/>
+          </a:xfrm>
+          <a:prstGeom prst="rect">
+            <a:avLst/>
+          </a:prstGeom>
+          <a:noFill/>
+          <a:ln/>
+        </p:spPr>
+        <p:txBody>
+          <a:bodyPr wrap="square" lIns="0" tIns="0" rIns="0" bIns="0" rtlCol="0" anchor="ctr"/>
+          <a:lstStyle/>
+          <a:p>
+            <a:pPr indent="0" marL="0">
+              <a:buNone/>
+            </a:pPr>
+            <a:r>
+              <a:rPr lang="en-US" sz="1400" dirty="0">
                 <a:solidFill>
                   <a:srgbClr val="141414"/>
                 </a:solidFill>
@@ -13622,131 +15574,22 @@
                 <a:ea typeface="Pretendard SemiBold" pitchFamily="34" charset="-122"/>
                 <a:cs typeface="Pretendard SemiBold" pitchFamily="34" charset="-120"/>
               </a:rPr>
-              <a:t>고친 뒤</a:t>
-            </a:r>
-            <a:endParaRPr lang="en-US" sz="950" dirty="0"/>
-          </a:p>
-        </p:txBody>
-      </p:sp>
-      <p:sp>
-        <p:nvSpPr>
-          <p:cNvPr id="10" name="Shape 8"/>
-          <p:cNvSpPr/>
-          <p:nvPr/>
-        </p:nvSpPr>
-        <p:spPr>
-          <a:xfrm>
-            <a:off x="6537960" y="2331720"/>
-            <a:ext cx="4894783" cy="1463040"/>
-          </a:xfrm>
-          <a:prstGeom prst="roundRect">
-            <a:avLst>
-              <a:gd name="adj" fmla="val 10438"/>
-            </a:avLst>
-          </a:prstGeom>
-          <a:solidFill>
-            <a:srgbClr val="F3F3F3"/>
-          </a:solidFill>
-          <a:ln w="12700">
-            <a:solidFill>
-              <a:srgbClr val="333333"/>
-            </a:solidFill>
-            <a:prstDash val="solid"/>
-          </a:ln>
-        </p:spPr>
-      </p:sp>
-      <p:sp>
-        <p:nvSpPr>
-          <p:cNvPr id="11" name="Text 9"/>
-          <p:cNvSpPr txBox="1"/>
-          <p:nvPr/>
-        </p:nvSpPr>
-        <p:spPr>
-          <a:xfrm>
-            <a:off x="6793992" y="2532888"/>
-            <a:ext cx="4382719" cy="1060704"/>
-          </a:xfrm>
-          <a:prstGeom prst="rect">
-            <a:avLst/>
-          </a:prstGeom>
-          <a:noFill/>
-          <a:ln/>
-        </p:spPr>
-        <p:txBody>
-          <a:bodyPr wrap="square" lIns="0" tIns="0" rIns="0" bIns="0" rtlCol="0" anchor="t"/>
-          <a:lstStyle/>
-          <a:p>
-            <a:pPr indent="0" marL="0">
-              <a:lnSpc>
-                <a:spcPct val="132000"/>
-              </a:lnSpc>
-              <a:buNone/>
-            </a:pPr>
-            <a:r>
-              <a:rPr lang="en-US" sz="1150" b="1" dirty="0">
-                <a:solidFill>
-                  <a:srgbClr val="141414"/>
-                </a:solidFill>
-                <a:latin typeface="Consolas" pitchFamily="34" charset="0"/>
-                <a:ea typeface="Consolas" pitchFamily="34" charset="-122"/>
-                <a:cs typeface="Consolas" pitchFamily="34" charset="-120"/>
-              </a:rPr>
-              <a:t>[SerializeField] float moveSpeed = 3f;</a:t>
-            </a:r>
-            <a:endParaRPr lang="en-US" sz="1150" dirty="0"/>
-          </a:p>
-          <a:p>
-            <a:pPr indent="0" marL="0">
-              <a:lnSpc>
-                <a:spcPct val="132000"/>
-              </a:lnSpc>
-              <a:buNone/>
-            </a:pPr>
-            <a:r>
-              <a:rPr lang="en-US" sz="1150" dirty="0">
-                <a:solidFill>
-                  <a:srgbClr val="141414"/>
-                </a:solidFill>
-                <a:latin typeface="Consolas" pitchFamily="34" charset="0"/>
-                <a:ea typeface="Consolas" pitchFamily="34" charset="-122"/>
-                <a:cs typeface="Consolas" pitchFamily="34" charset="-120"/>
-              </a:rPr>
-              <a:t> </a:t>
-            </a:r>
-            <a:endParaRPr lang="en-US" sz="1150" dirty="0"/>
-          </a:p>
-          <a:p>
-            <a:pPr indent="0" marL="0">
-              <a:lnSpc>
-                <a:spcPct val="132000"/>
-              </a:lnSpc>
-              <a:buNone/>
-            </a:pPr>
-            <a:r>
-              <a:rPr lang="en-US" sz="1150" b="1" dirty="0">
-                <a:solidFill>
-                  <a:srgbClr val="141414"/>
-                </a:solidFill>
-                <a:latin typeface="Consolas" pitchFamily="34" charset="0"/>
-                <a:ea typeface="Consolas" pitchFamily="34" charset="-122"/>
-                <a:cs typeface="Consolas" pitchFamily="34" charset="-120"/>
-              </a:rPr>
-              <a:t>position + moveDir * moveSpeed * Time.deltaTime;</a:t>
-            </a:r>
-            <a:endParaRPr lang="en-US" sz="1150" dirty="0"/>
-          </a:p>
-        </p:txBody>
-      </p:sp>
-      <p:sp>
-        <p:nvSpPr>
-          <p:cNvPr id="12" name="Text 10"/>
-          <p:cNvSpPr txBox="1"/>
-          <p:nvPr/>
-        </p:nvSpPr>
-        <p:spPr>
-          <a:xfrm>
-            <a:off x="758952" y="4160520"/>
-            <a:ext cx="2743200" cy="274320"/>
+              <a:t>프레임 수가 몇이든 상관없어진다.</a:t>
+            </a:r>
+            <a:endParaRPr lang="en-US" sz="1400" dirty="0"/>
+          </a:p>
+        </p:txBody>
+      </p:sp>
+      <p:sp>
+        <p:nvSpPr>
+          <p:cNvPr id="27" name="Text 25"/>
+          <p:cNvSpPr txBox="1"/>
+          <p:nvPr/>
+        </p:nvSpPr>
+        <p:spPr>
+          <a:xfrm>
+            <a:off x="758952" y="4892040"/>
+            <a:ext cx="1371600" cy="274320"/>
           </a:xfrm>
           <a:prstGeom prst="rect">
             <a:avLst/>
@@ -13770,7 +15613,7 @@
                 <a:ea typeface="Pretendard SemiBold" pitchFamily="34" charset="-122"/>
                 <a:cs typeface="Pretendard SemiBold" pitchFamily="34" charset="-120"/>
               </a:rPr>
-              <a:t>스크립트</a:t>
+              <a:t>컴퓨터</a:t>
             </a:r>
             <a:endParaRPr lang="en-US" sz="950" dirty="0"/>
           </a:p>
@@ -13778,14 +15621,14 @@
       </p:sp>
       <p:sp>
         <p:nvSpPr>
-          <p:cNvPr id="13" name="Text 11"/>
-          <p:cNvSpPr txBox="1"/>
-          <p:nvPr/>
-        </p:nvSpPr>
-        <p:spPr>
-          <a:xfrm>
-            <a:off x="3502152" y="4160520"/>
-            <a:ext cx="3108960" cy="274320"/>
+          <p:cNvPr id="28" name="Text 26"/>
+          <p:cNvSpPr txBox="1"/>
+          <p:nvPr/>
+        </p:nvSpPr>
+        <p:spPr>
+          <a:xfrm>
+            <a:off x="2130552" y="4892040"/>
+            <a:ext cx="2377440" cy="274320"/>
           </a:xfrm>
           <a:prstGeom prst="rect">
             <a:avLst/>
@@ -13809,7 +15652,7 @@
                 <a:ea typeface="Pretendard SemiBold" pitchFamily="34" charset="-122"/>
                 <a:cs typeface="Pretendard SemiBold" pitchFamily="34" charset="-120"/>
               </a:rPr>
-              <a:t>이전</a:t>
+              <a:t>한 장당 이동</a:t>
             </a:r>
             <a:endParaRPr lang="en-US" sz="950" dirty="0"/>
           </a:p>
@@ -13817,14 +15660,14 @@
       </p:sp>
       <p:sp>
         <p:nvSpPr>
-          <p:cNvPr id="14" name="Text 12"/>
-          <p:cNvSpPr txBox="1"/>
-          <p:nvPr/>
-        </p:nvSpPr>
-        <p:spPr>
-          <a:xfrm>
-            <a:off x="6611112" y="4160520"/>
-            <a:ext cx="3108960" cy="274320"/>
+          <p:cNvPr id="29" name="Text 27"/>
+          <p:cNvSpPr txBox="1"/>
+          <p:nvPr/>
+        </p:nvSpPr>
+        <p:spPr>
+          <a:xfrm>
+            <a:off x="4507992" y="4892040"/>
+            <a:ext cx="2743200" cy="274320"/>
           </a:xfrm>
           <a:prstGeom prst="rect">
             <a:avLst/>
@@ -13848,7 +15691,7 @@
                 <a:ea typeface="Pretendard SemiBold" pitchFamily="34" charset="-122"/>
                 <a:cs typeface="Pretendard SemiBold" pitchFamily="34" charset="-120"/>
               </a:rPr>
-              <a:t>이후</a:t>
+              <a:t>1초 동안</a:t>
             </a:r>
             <a:endParaRPr lang="en-US" sz="950" dirty="0"/>
           </a:p>
@@ -13856,53 +15699,14 @@
       </p:sp>
       <p:sp>
         <p:nvSpPr>
-          <p:cNvPr id="15" name="Text 13"/>
-          <p:cNvSpPr txBox="1"/>
-          <p:nvPr/>
-        </p:nvSpPr>
-        <p:spPr>
-          <a:xfrm>
-            <a:off x="9720072" y="4160520"/>
-            <a:ext cx="2606040" cy="274320"/>
-          </a:xfrm>
-          <a:prstGeom prst="rect">
-            <a:avLst/>
-          </a:prstGeom>
-          <a:noFill/>
-          <a:ln/>
-        </p:spPr>
-        <p:txBody>
-          <a:bodyPr wrap="square" lIns="0" tIns="0" rIns="0" bIns="0" rtlCol="0" anchor="ctr"/>
-          <a:lstStyle/>
-          <a:p>
-            <a:pPr indent="0" marL="0">
-              <a:buNone/>
-            </a:pPr>
-            <a:r>
-              <a:rPr lang="en-US" sz="950" dirty="0">
-                <a:solidFill>
-                  <a:srgbClr val="707070"/>
-                </a:solidFill>
-                <a:latin typeface="Pretendard SemiBold" pitchFamily="34" charset="0"/>
-                <a:ea typeface="Pretendard SemiBold" pitchFamily="34" charset="-122"/>
-                <a:cs typeface="Pretendard SemiBold" pitchFamily="34" charset="-120"/>
-              </a:rPr>
-              <a:t>뜻</a:t>
-            </a:r>
-            <a:endParaRPr lang="en-US" sz="950" dirty="0"/>
-          </a:p>
-        </p:txBody>
-      </p:sp>
-      <p:sp>
-        <p:nvSpPr>
-          <p:cNvPr id="16" name="Shape 14"/>
+          <p:cNvPr id="30" name="Shape 28"/>
           <p:cNvSpPr/>
           <p:nvPr/>
         </p:nvSpPr>
         <p:spPr>
           <a:xfrm>
-            <a:off x="758952" y="4562856"/>
-            <a:ext cx="10673791" cy="0"/>
+            <a:off x="758952" y="5294376"/>
+            <a:ext cx="6492240" cy="0"/>
           </a:xfrm>
           <a:prstGeom prst="line">
             <a:avLst/>
@@ -13918,14 +15722,14 @@
       </p:sp>
       <p:sp>
         <p:nvSpPr>
-          <p:cNvPr id="17" name="Text 15"/>
-          <p:cNvSpPr txBox="1"/>
-          <p:nvPr/>
-        </p:nvSpPr>
-        <p:spPr>
-          <a:xfrm>
-            <a:off x="758952" y="4727448"/>
-            <a:ext cx="2743200" cy="365760"/>
+          <p:cNvPr id="31" name="Text 29"/>
+          <p:cNvSpPr txBox="1"/>
+          <p:nvPr/>
+        </p:nvSpPr>
+        <p:spPr>
+          <a:xfrm>
+            <a:off x="758952" y="5458968"/>
+            <a:ext cx="1371600" cy="365760"/>
           </a:xfrm>
           <a:prstGeom prst="rect">
             <a:avLst/>
@@ -13944,12 +15748,51 @@
               <a:rPr lang="en-US" sz="1200" dirty="0">
                 <a:solidFill>
                   <a:srgbClr val="141414"/>
+                </a:solidFill>
+                <a:latin typeface="Pretendard" pitchFamily="34" charset="0"/>
+                <a:ea typeface="Pretendard" pitchFamily="34" charset="-122"/>
+                <a:cs typeface="Pretendard" pitchFamily="34" charset="-120"/>
+              </a:rPr>
+              <a:t>A</a:t>
+            </a:r>
+            <a:endParaRPr lang="en-US" sz="1200" dirty="0"/>
+          </a:p>
+        </p:txBody>
+      </p:sp>
+      <p:sp>
+        <p:nvSpPr>
+          <p:cNvPr id="32" name="Text 30"/>
+          <p:cNvSpPr txBox="1"/>
+          <p:nvPr/>
+        </p:nvSpPr>
+        <p:spPr>
+          <a:xfrm>
+            <a:off x="2130552" y="5458968"/>
+            <a:ext cx="2377440" cy="365760"/>
+          </a:xfrm>
+          <a:prstGeom prst="rect">
+            <a:avLst/>
+          </a:prstGeom>
+          <a:noFill/>
+          <a:ln/>
+        </p:spPr>
+        <p:txBody>
+          <a:bodyPr wrap="square" lIns="0" tIns="0" rIns="0" bIns="0" rtlCol="0" anchor="ctr"/>
+          <a:lstStyle/>
+          <a:p>
+            <a:pPr indent="0" marL="0">
+              <a:buNone/>
+            </a:pPr>
+            <a:r>
+              <a:rPr lang="en-US" sz="1200" dirty="0">
+                <a:solidFill>
+                  <a:srgbClr val="707070"/>
                 </a:solidFill>
                 <a:latin typeface="Consolas" pitchFamily="34" charset="0"/>
                 <a:ea typeface="Consolas" pitchFamily="34" charset="-122"/>
                 <a:cs typeface="Consolas" pitchFamily="34" charset="-120"/>
               </a:rPr>
-              <a:t>Spinner</a:t>
+              <a:t>3 x 0.0167 = 0.05</a:t>
             </a:r>
             <a:endParaRPr lang="en-US" sz="1200" dirty="0"/>
           </a:p>
@@ -13957,131 +15800,53 @@
       </p:sp>
       <p:sp>
         <p:nvSpPr>
-          <p:cNvPr id="18" name="Text 16"/>
-          <p:cNvSpPr txBox="1"/>
-          <p:nvPr/>
-        </p:nvSpPr>
-        <p:spPr>
-          <a:xfrm>
-            <a:off x="3502152" y="4727448"/>
-            <a:ext cx="3108960" cy="365760"/>
-          </a:xfrm>
-          <a:prstGeom prst="rect">
-            <a:avLst/>
-          </a:prstGeom>
-          <a:noFill/>
-          <a:ln/>
-        </p:spPr>
-        <p:txBody>
-          <a:bodyPr wrap="square" lIns="0" tIns="0" rIns="0" bIns="0" rtlCol="0" anchor="ctr"/>
-          <a:lstStyle/>
-          <a:p>
-            <a:pPr indent="0" marL="0">
-              <a:buNone/>
-            </a:pPr>
-            <a:r>
-              <a:rPr lang="en-US" sz="1200" dirty="0">
-                <a:solidFill>
-                  <a:srgbClr val="707070"/>
-                </a:solidFill>
-                <a:latin typeface="Consolas" pitchFamily="34" charset="0"/>
-                <a:ea typeface="Consolas" pitchFamily="34" charset="-122"/>
-                <a:cs typeface="Consolas" pitchFamily="34" charset="-120"/>
-              </a:rPr>
-              <a:t>rotateStep 1.5</a:t>
-            </a:r>
-            <a:endParaRPr lang="en-US" sz="1200" dirty="0"/>
-          </a:p>
-        </p:txBody>
-      </p:sp>
-      <p:sp>
-        <p:nvSpPr>
-          <p:cNvPr id="19" name="Text 17"/>
-          <p:cNvSpPr txBox="1"/>
-          <p:nvPr/>
-        </p:nvSpPr>
-        <p:spPr>
-          <a:xfrm>
-            <a:off x="6611112" y="4727448"/>
-            <a:ext cx="3108960" cy="365760"/>
-          </a:xfrm>
-          <a:prstGeom prst="rect">
-            <a:avLst/>
-          </a:prstGeom>
-          <a:noFill/>
-          <a:ln/>
-        </p:spPr>
-        <p:txBody>
-          <a:bodyPr wrap="square" lIns="0" tIns="0" rIns="0" bIns="0" rtlCol="0" anchor="ctr"/>
-          <a:lstStyle/>
-          <a:p>
-            <a:pPr indent="0" marL="0">
-              <a:buNone/>
-            </a:pPr>
-            <a:r>
-              <a:rPr lang="en-US" sz="1200" dirty="0">
+          <p:cNvPr id="33" name="Text 31"/>
+          <p:cNvSpPr txBox="1"/>
+          <p:nvPr/>
+        </p:nvSpPr>
+        <p:spPr>
+          <a:xfrm>
+            <a:off x="4507992" y="5458968"/>
+            <a:ext cx="2743200" cy="365760"/>
+          </a:xfrm>
+          <a:prstGeom prst="rect">
+            <a:avLst/>
+          </a:prstGeom>
+          <a:noFill/>
+          <a:ln/>
+        </p:spPr>
+        <p:txBody>
+          <a:bodyPr wrap="square" lIns="0" tIns="0" rIns="0" bIns="0" rtlCol="0" anchor="ctr"/>
+          <a:lstStyle/>
+          <a:p>
+            <a:pPr indent="0" marL="0">
+              <a:buNone/>
+            </a:pPr>
+            <a:r>
+              <a:rPr lang="en-US" sz="1550" dirty="0">
                 <a:solidFill>
                   <a:srgbClr val="141414"/>
                 </a:solidFill>
-                <a:latin typeface="Consolas" pitchFamily="34" charset="0"/>
-                <a:ea typeface="Consolas" pitchFamily="34" charset="-122"/>
-                <a:cs typeface="Consolas" pitchFamily="34" charset="-120"/>
-              </a:rPr>
-              <a:t>rotateSpeed 90</a:t>
-            </a:r>
-            <a:endParaRPr lang="en-US" sz="1200" dirty="0"/>
-          </a:p>
-        </p:txBody>
-      </p:sp>
-      <p:sp>
-        <p:nvSpPr>
-          <p:cNvPr id="20" name="Text 18"/>
-          <p:cNvSpPr txBox="1"/>
-          <p:nvPr/>
-        </p:nvSpPr>
-        <p:spPr>
-          <a:xfrm>
-            <a:off x="9720072" y="4727448"/>
-            <a:ext cx="2606040" cy="365760"/>
-          </a:xfrm>
-          <a:prstGeom prst="rect">
-            <a:avLst/>
-          </a:prstGeom>
-          <a:noFill/>
-          <a:ln/>
-        </p:spPr>
-        <p:txBody>
-          <a:bodyPr wrap="square" lIns="0" tIns="0" rIns="0" bIns="0" rtlCol="0" anchor="ctr"/>
-          <a:lstStyle/>
-          <a:p>
-            <a:pPr indent="0" marL="0">
-              <a:buNone/>
-            </a:pPr>
-            <a:r>
-              <a:rPr lang="en-US" sz="1200" dirty="0">
-                <a:solidFill>
-                  <a:srgbClr val="707070"/>
-                </a:solidFill>
-                <a:latin typeface="Pretendard" pitchFamily="34" charset="0"/>
-                <a:ea typeface="Pretendard" pitchFamily="34" charset="-122"/>
-                <a:cs typeface="Pretendard" pitchFamily="34" charset="-120"/>
-              </a:rPr>
-              <a:t>4초에 한 바퀴</a:t>
-            </a:r>
-            <a:endParaRPr lang="en-US" sz="1200" dirty="0"/>
-          </a:p>
-        </p:txBody>
-      </p:sp>
-      <p:sp>
-        <p:nvSpPr>
-          <p:cNvPr id="21" name="Shape 19"/>
+                <a:latin typeface="Pretendard SemiBold" pitchFamily="34" charset="0"/>
+                <a:ea typeface="Pretendard SemiBold" pitchFamily="34" charset="-122"/>
+                <a:cs typeface="Pretendard SemiBold" pitchFamily="34" charset="-120"/>
+              </a:rPr>
+              <a:t>0.05 x 60 = 3</a:t>
+            </a:r>
+            <a:endParaRPr lang="en-US" sz="1550" dirty="0"/>
+          </a:p>
+        </p:txBody>
+      </p:sp>
+      <p:sp>
+        <p:nvSpPr>
+          <p:cNvPr id="34" name="Shape 32"/>
           <p:cNvSpPr/>
           <p:nvPr/>
         </p:nvSpPr>
         <p:spPr>
           <a:xfrm>
-            <a:off x="758952" y="5202936"/>
-            <a:ext cx="10673791" cy="0"/>
+            <a:off x="758952" y="5879592"/>
+            <a:ext cx="6492240" cy="0"/>
           </a:xfrm>
           <a:prstGeom prst="line">
             <a:avLst/>
@@ -14097,14 +15862,14 @@
       </p:sp>
       <p:sp>
         <p:nvSpPr>
-          <p:cNvPr id="22" name="Text 20"/>
-          <p:cNvSpPr txBox="1"/>
-          <p:nvPr/>
-        </p:nvSpPr>
-        <p:spPr>
-          <a:xfrm>
-            <a:off x="758952" y="5312664"/>
-            <a:ext cx="2743200" cy="365760"/>
+          <p:cNvPr id="35" name="Text 33"/>
+          <p:cNvSpPr txBox="1"/>
+          <p:nvPr/>
+        </p:nvSpPr>
+        <p:spPr>
+          <a:xfrm>
+            <a:off x="758952" y="5989320"/>
+            <a:ext cx="1371600" cy="365760"/>
           </a:xfrm>
           <a:prstGeom prst="rect">
             <a:avLst/>
@@ -14123,12 +15888,51 @@
               <a:rPr lang="en-US" sz="1200" dirty="0">
                 <a:solidFill>
                   <a:srgbClr val="141414"/>
+                </a:solidFill>
+                <a:latin typeface="Pretendard" pitchFamily="34" charset="0"/>
+                <a:ea typeface="Pretendard" pitchFamily="34" charset="-122"/>
+                <a:cs typeface="Pretendard" pitchFamily="34" charset="-120"/>
+              </a:rPr>
+              <a:t>B</a:t>
+            </a:r>
+            <a:endParaRPr lang="en-US" sz="1200" dirty="0"/>
+          </a:p>
+        </p:txBody>
+      </p:sp>
+      <p:sp>
+        <p:nvSpPr>
+          <p:cNvPr id="36" name="Text 34"/>
+          <p:cNvSpPr txBox="1"/>
+          <p:nvPr/>
+        </p:nvSpPr>
+        <p:spPr>
+          <a:xfrm>
+            <a:off x="2130552" y="5989320"/>
+            <a:ext cx="2377440" cy="365760"/>
+          </a:xfrm>
+          <a:prstGeom prst="rect">
+            <a:avLst/>
+          </a:prstGeom>
+          <a:noFill/>
+          <a:ln/>
+        </p:spPr>
+        <p:txBody>
+          <a:bodyPr wrap="square" lIns="0" tIns="0" rIns="0" bIns="0" rtlCol="0" anchor="ctr"/>
+          <a:lstStyle/>
+          <a:p>
+            <a:pPr indent="0" marL="0">
+              <a:buNone/>
+            </a:pPr>
+            <a:r>
+              <a:rPr lang="en-US" sz="1200" dirty="0">
+                <a:solidFill>
+                  <a:srgbClr val="707070"/>
                 </a:solidFill>
                 <a:latin typeface="Consolas" pitchFamily="34" charset="0"/>
                 <a:ea typeface="Consolas" pitchFamily="34" charset="-122"/>
                 <a:cs typeface="Consolas" pitchFamily="34" charset="-120"/>
               </a:rPr>
-              <a:t>Bouncer</a:t>
+              <a:t>3 x 0.0069 = 0.0207</a:t>
             </a:r>
             <a:endParaRPr lang="en-US" sz="1200" dirty="0"/>
           </a:p>
@@ -14136,131 +15940,53 @@
       </p:sp>
       <p:sp>
         <p:nvSpPr>
-          <p:cNvPr id="23" name="Text 21"/>
-          <p:cNvSpPr txBox="1"/>
-          <p:nvPr/>
-        </p:nvSpPr>
-        <p:spPr>
-          <a:xfrm>
-            <a:off x="3502152" y="5312664"/>
-            <a:ext cx="3108960" cy="365760"/>
-          </a:xfrm>
-          <a:prstGeom prst="rect">
-            <a:avLst/>
-          </a:prstGeom>
-          <a:noFill/>
-          <a:ln/>
-        </p:spPr>
-        <p:txBody>
-          <a:bodyPr wrap="square" lIns="0" tIns="0" rIns="0" bIns="0" rtlCol="0" anchor="ctr"/>
-          <a:lstStyle/>
-          <a:p>
-            <a:pPr indent="0" marL="0">
-              <a:buNone/>
-            </a:pPr>
-            <a:r>
-              <a:rPr lang="en-US" sz="1200" dirty="0">
-                <a:solidFill>
-                  <a:srgbClr val="707070"/>
-                </a:solidFill>
-                <a:latin typeface="Consolas" pitchFamily="34" charset="0"/>
-                <a:ea typeface="Consolas" pitchFamily="34" charset="-122"/>
-                <a:cs typeface="Consolas" pitchFamily="34" charset="-120"/>
-              </a:rPr>
-              <a:t>scaleStep 0.01</a:t>
-            </a:r>
-            <a:endParaRPr lang="en-US" sz="1200" dirty="0"/>
-          </a:p>
-        </p:txBody>
-      </p:sp>
-      <p:sp>
-        <p:nvSpPr>
-          <p:cNvPr id="24" name="Text 22"/>
-          <p:cNvSpPr txBox="1"/>
-          <p:nvPr/>
-        </p:nvSpPr>
-        <p:spPr>
-          <a:xfrm>
-            <a:off x="6611112" y="5312664"/>
-            <a:ext cx="3108960" cy="365760"/>
-          </a:xfrm>
-          <a:prstGeom prst="rect">
-            <a:avLst/>
-          </a:prstGeom>
-          <a:noFill/>
-          <a:ln/>
-        </p:spPr>
-        <p:txBody>
-          <a:bodyPr wrap="square" lIns="0" tIns="0" rIns="0" bIns="0" rtlCol="0" anchor="ctr"/>
-          <a:lstStyle/>
-          <a:p>
-            <a:pPr indent="0" marL="0">
-              <a:buNone/>
-            </a:pPr>
-            <a:r>
-              <a:rPr lang="en-US" sz="1200" dirty="0">
+          <p:cNvPr id="37" name="Text 35"/>
+          <p:cNvSpPr txBox="1"/>
+          <p:nvPr/>
+        </p:nvSpPr>
+        <p:spPr>
+          <a:xfrm>
+            <a:off x="4507992" y="5989320"/>
+            <a:ext cx="2743200" cy="365760"/>
+          </a:xfrm>
+          <a:prstGeom prst="rect">
+            <a:avLst/>
+          </a:prstGeom>
+          <a:noFill/>
+          <a:ln/>
+        </p:spPr>
+        <p:txBody>
+          <a:bodyPr wrap="square" lIns="0" tIns="0" rIns="0" bIns="0" rtlCol="0" anchor="ctr"/>
+          <a:lstStyle/>
+          <a:p>
+            <a:pPr indent="0" marL="0">
+              <a:buNone/>
+            </a:pPr>
+            <a:r>
+              <a:rPr lang="en-US" sz="1550" dirty="0">
                 <a:solidFill>
                   <a:srgbClr val="141414"/>
                 </a:solidFill>
-                <a:latin typeface="Consolas" pitchFamily="34" charset="0"/>
-                <a:ea typeface="Consolas" pitchFamily="34" charset="-122"/>
-                <a:cs typeface="Consolas" pitchFamily="34" charset="-120"/>
-              </a:rPr>
-              <a:t>scaleSpeed 0.5</a:t>
-            </a:r>
-            <a:endParaRPr lang="en-US" sz="1200" dirty="0"/>
-          </a:p>
-        </p:txBody>
-      </p:sp>
-      <p:sp>
-        <p:nvSpPr>
-          <p:cNvPr id="25" name="Text 23"/>
-          <p:cNvSpPr txBox="1"/>
-          <p:nvPr/>
-        </p:nvSpPr>
-        <p:spPr>
-          <a:xfrm>
-            <a:off x="9720072" y="5312664"/>
-            <a:ext cx="2606040" cy="365760"/>
-          </a:xfrm>
-          <a:prstGeom prst="rect">
-            <a:avLst/>
-          </a:prstGeom>
-          <a:noFill/>
-          <a:ln/>
-        </p:spPr>
-        <p:txBody>
-          <a:bodyPr wrap="square" lIns="0" tIns="0" rIns="0" bIns="0" rtlCol="0" anchor="ctr"/>
-          <a:lstStyle/>
-          <a:p>
-            <a:pPr indent="0" marL="0">
-              <a:buNone/>
-            </a:pPr>
-            <a:r>
-              <a:rPr lang="en-US" sz="1200" dirty="0">
-                <a:solidFill>
-                  <a:srgbClr val="707070"/>
-                </a:solidFill>
-                <a:latin typeface="Pretendard" pitchFamily="34" charset="0"/>
-                <a:ea typeface="Pretendard" pitchFamily="34" charset="-122"/>
-                <a:cs typeface="Pretendard" pitchFamily="34" charset="-120"/>
-              </a:rPr>
-              <a:t>1초에 0.5씩</a:t>
-            </a:r>
-            <a:endParaRPr lang="en-US" sz="1200" dirty="0"/>
-          </a:p>
-        </p:txBody>
-      </p:sp>
-      <p:sp>
-        <p:nvSpPr>
-          <p:cNvPr id="26" name="Shape 24"/>
+                <a:latin typeface="Pretendard SemiBold" pitchFamily="34" charset="0"/>
+                <a:ea typeface="Pretendard SemiBold" pitchFamily="34" charset="-122"/>
+                <a:cs typeface="Pretendard SemiBold" pitchFamily="34" charset="-120"/>
+              </a:rPr>
+              <a:t>0.0207 x 144 = 3</a:t>
+            </a:r>
+            <a:endParaRPr lang="en-US" sz="1550" dirty="0"/>
+          </a:p>
+        </p:txBody>
+      </p:sp>
+      <p:sp>
+        <p:nvSpPr>
+          <p:cNvPr id="38" name="Shape 36"/>
           <p:cNvSpPr/>
           <p:nvPr/>
         </p:nvSpPr>
         <p:spPr>
           <a:xfrm>
-            <a:off x="758952" y="5788152"/>
-            <a:ext cx="10673791" cy="0"/>
+            <a:off x="758952" y="6409944"/>
+            <a:ext cx="6492240" cy="0"/>
           </a:xfrm>
           <a:prstGeom prst="line">
             <a:avLst/>
@@ -14276,182 +16002,45 @@
       </p:sp>
       <p:sp>
         <p:nvSpPr>
-          <p:cNvPr id="27" name="Text 25"/>
-          <p:cNvSpPr txBox="1"/>
-          <p:nvPr/>
-        </p:nvSpPr>
-        <p:spPr>
-          <a:xfrm>
-            <a:off x="758952" y="5897880"/>
-            <a:ext cx="2743200" cy="365760"/>
-          </a:xfrm>
-          <a:prstGeom prst="rect">
-            <a:avLst/>
-          </a:prstGeom>
-          <a:noFill/>
-          <a:ln/>
-        </p:spPr>
-        <p:txBody>
-          <a:bodyPr wrap="square" lIns="0" tIns="0" rIns="0" bIns="0" rtlCol="0" anchor="ctr"/>
-          <a:lstStyle/>
-          <a:p>
-            <a:pPr indent="0" marL="0">
+          <p:cNvPr id="39" name="Text 37"/>
+          <p:cNvSpPr txBox="1"/>
+          <p:nvPr/>
+        </p:nvSpPr>
+        <p:spPr>
+          <a:xfrm>
+            <a:off x="7589520" y="5074920"/>
+            <a:ext cx="3843223" cy="822960"/>
+          </a:xfrm>
+          <a:prstGeom prst="rect">
+            <a:avLst/>
+          </a:prstGeom>
+          <a:noFill/>
+          <a:ln/>
+        </p:spPr>
+        <p:txBody>
+          <a:bodyPr wrap="square" lIns="0" tIns="0" rIns="0" bIns="0" rtlCol="0" anchor="ctr"/>
+          <a:lstStyle/>
+          <a:p>
+            <a:pPr indent="0" marL="0">
+              <a:lnSpc>
+                <a:spcPct val="138000"/>
+              </a:lnSpc>
               <a:buNone/>
             </a:pPr>
             <a:r>
               <a:rPr lang="en-US" sz="1200" dirty="0">
                 <a:solidFill>
-                  <a:srgbClr val="141414"/>
-                </a:solidFill>
-                <a:latin typeface="Consolas" pitchFamily="34" charset="0"/>
-                <a:ea typeface="Consolas" pitchFamily="34" charset="-122"/>
-                <a:cs typeface="Consolas" pitchFamily="34" charset="-120"/>
-              </a:rPr>
-              <a:t>Mover</a:t>
+                  <a:srgbClr val="707070"/>
+                </a:solidFill>
+                <a:latin typeface="Pretendard Light" pitchFamily="34" charset="0"/>
+                <a:ea typeface="Pretendard Light" pitchFamily="34" charset="-122"/>
+                <a:cs typeface="Pretendard Light" pitchFamily="34" charset="-120"/>
+              </a:rPr>
+              <a:t>빠른 컴퓨터는 더 자주 움직이는 대신 한 번에 조금씩 간다. 결국 같은 거리다.</a:t>
             </a:r>
             <a:endParaRPr lang="en-US" sz="1200" dirty="0"/>
           </a:p>
         </p:txBody>
-      </p:sp>
-      <p:sp>
-        <p:nvSpPr>
-          <p:cNvPr id="28" name="Text 26"/>
-          <p:cNvSpPr txBox="1"/>
-          <p:nvPr/>
-        </p:nvSpPr>
-        <p:spPr>
-          <a:xfrm>
-            <a:off x="3502152" y="5897880"/>
-            <a:ext cx="3108960" cy="365760"/>
-          </a:xfrm>
-          <a:prstGeom prst="rect">
-            <a:avLst/>
-          </a:prstGeom>
-          <a:noFill/>
-          <a:ln/>
-        </p:spPr>
-        <p:txBody>
-          <a:bodyPr wrap="square" lIns="0" tIns="0" rIns="0" bIns="0" rtlCol="0" anchor="ctr"/>
-          <a:lstStyle/>
-          <a:p>
-            <a:pPr indent="0" marL="0">
-              <a:buNone/>
-            </a:pPr>
-            <a:r>
-              <a:rPr lang="en-US" sz="1200" dirty="0">
-                <a:solidFill>
-                  <a:srgbClr val="707070"/>
-                </a:solidFill>
-                <a:latin typeface="Consolas" pitchFamily="34" charset="0"/>
-                <a:ea typeface="Consolas" pitchFamily="34" charset="-122"/>
-                <a:cs typeface="Consolas" pitchFamily="34" charset="-120"/>
-              </a:rPr>
-              <a:t>moveStep 0.05</a:t>
-            </a:r>
-            <a:endParaRPr lang="en-US" sz="1200" dirty="0"/>
-          </a:p>
-        </p:txBody>
-      </p:sp>
-      <p:sp>
-        <p:nvSpPr>
-          <p:cNvPr id="29" name="Text 27"/>
-          <p:cNvSpPr txBox="1"/>
-          <p:nvPr/>
-        </p:nvSpPr>
-        <p:spPr>
-          <a:xfrm>
-            <a:off x="6611112" y="5897880"/>
-            <a:ext cx="3108960" cy="365760"/>
-          </a:xfrm>
-          <a:prstGeom prst="rect">
-            <a:avLst/>
-          </a:prstGeom>
-          <a:noFill/>
-          <a:ln/>
-        </p:spPr>
-        <p:txBody>
-          <a:bodyPr wrap="square" lIns="0" tIns="0" rIns="0" bIns="0" rtlCol="0" anchor="ctr"/>
-          <a:lstStyle/>
-          <a:p>
-            <a:pPr indent="0" marL="0">
-              <a:buNone/>
-            </a:pPr>
-            <a:r>
-              <a:rPr lang="en-US" sz="1200" dirty="0">
-                <a:solidFill>
-                  <a:srgbClr val="141414"/>
-                </a:solidFill>
-                <a:latin typeface="Consolas" pitchFamily="34" charset="0"/>
-                <a:ea typeface="Consolas" pitchFamily="34" charset="-122"/>
-                <a:cs typeface="Consolas" pitchFamily="34" charset="-120"/>
-              </a:rPr>
-              <a:t>moveSpeed 3</a:t>
-            </a:r>
-            <a:endParaRPr lang="en-US" sz="1200" dirty="0"/>
-          </a:p>
-        </p:txBody>
-      </p:sp>
-      <p:sp>
-        <p:nvSpPr>
-          <p:cNvPr id="30" name="Text 28"/>
-          <p:cNvSpPr txBox="1"/>
-          <p:nvPr/>
-        </p:nvSpPr>
-        <p:spPr>
-          <a:xfrm>
-            <a:off x="9720072" y="5897880"/>
-            <a:ext cx="2606040" cy="365760"/>
-          </a:xfrm>
-          <a:prstGeom prst="rect">
-            <a:avLst/>
-          </a:prstGeom>
-          <a:noFill/>
-          <a:ln/>
-        </p:spPr>
-        <p:txBody>
-          <a:bodyPr wrap="square" lIns="0" tIns="0" rIns="0" bIns="0" rtlCol="0" anchor="ctr"/>
-          <a:lstStyle/>
-          <a:p>
-            <a:pPr indent="0" marL="0">
-              <a:buNone/>
-            </a:pPr>
-            <a:r>
-              <a:rPr lang="en-US" sz="1200" dirty="0">
-                <a:solidFill>
-                  <a:srgbClr val="707070"/>
-                </a:solidFill>
-                <a:latin typeface="Pretendard" pitchFamily="34" charset="0"/>
-                <a:ea typeface="Pretendard" pitchFamily="34" charset="-122"/>
-                <a:cs typeface="Pretendard" pitchFamily="34" charset="-120"/>
-              </a:rPr>
-              <a:t>1초에 3만큼</a:t>
-            </a:r>
-            <a:endParaRPr lang="en-US" sz="1200" dirty="0"/>
-          </a:p>
-        </p:txBody>
-      </p:sp>
-      <p:sp>
-        <p:nvSpPr>
-          <p:cNvPr id="31" name="Shape 29"/>
-          <p:cNvSpPr/>
-          <p:nvPr/>
-        </p:nvSpPr>
-        <p:spPr>
-          <a:xfrm>
-            <a:off x="758952" y="6373368"/>
-            <a:ext cx="10673791" cy="0"/>
-          </a:xfrm>
-          <a:prstGeom prst="line">
-            <a:avLst/>
-          </a:prstGeom>
-          <a:noFill/>
-          <a:ln w="12700">
-            <a:solidFill>
-              <a:srgbClr val="F0F0F0"/>
-            </a:solidFill>
-            <a:prstDash val="solid"/>
-          </a:ln>
-        </p:spPr>
       </p:sp>
     </p:spTree>
   </p:cSld>

--- a/docs/04_배포자료/슬라이드/8주차-코드로움직이기.pptx
+++ b/docs/04_배포자료/슬라이드/8주차-코드로움직이기.pptx
@@ -20,9 +20,10 @@
     <p:sldId id="268" r:id="rId14"/>
     <p:sldId id="269" r:id="rId15"/>
     <p:sldId id="270" r:id="rId16"/>
+    <p:sldId id="271" r:id="rId17"/>
   </p:sldIdLst>
   <p:notesMasterIdLst>
-    <p:notesMasterId r:id="rId17"/>
+    <p:notesMasterId r:id="rId18"/>
   </p:notesMasterIdLst>
   <p:sldSz cx="12192000" cy="6858000"/>
   <p:notesSz cx="6858000" cy="12192000"/>
@@ -604,7 +605,7 @@
           <a:p>
             <a:r>
               <a:rPr lang="en-US" dirty="0"/>
-              <a:t>이름도 같이 바꾼다. 안 바꾸면 나중에 moveSpeed = 3 을 보고 왜 이렇게 큰지 모른다. / 곱했는데 거의 안 움직인다는 학생이 오늘 1등이다. 값을 안 바꿔서 그렇다. 단위가 바뀌었다고 말해준다.</a:t>
+              <a:t>038 에서 잰 값이 이걸 뒷받침한다. moveSpeed=3 으로 1.74초 뒤 x=-0.71, 공식값 -6 + 3x1.74 = -0.77, 오차 0.060. 프레임률이 208~228fps 로 흔들렸는데도 위치는 시간 공식대로 나왔다.</a:t>
             </a:r>
             <a:endParaRPr lang="en-US" dirty="0"/>
           </a:p>
@@ -692,7 +693,7 @@
           <a:p>
             <a:r>
               <a:rPr lang="en-US" dirty="0"/>
-              <a:t>Play 후 Game 창을 한 번 클릭해야 키가 먹는다. 한/영도 영문이어야 한다. 안 움직인다는 질문의 대부분이 이 둘이다.</a:t>
+              <a:t>이름도 같이 바꾼다. 안 바꾸면 나중에 moveSpeed = 3 을 보고 왜 이렇게 큰지 모른다. / 곱했는데 거의 안 움직인다는 학생이 오늘 1등이다. 값을 안 바꿔서 그렇다. 단위가 바뀌었다고 말해준다.</a:t>
             </a:r>
             <a:endParaRPr lang="en-US" dirty="0"/>
           </a:p>
@@ -780,7 +781,7 @@
           <a:p>
             <a:r>
               <a:rPr lang="en-US" dirty="0"/>
-              <a:t>WASD 가 되면 3분쯤 그냥 놀게 둔다. 이 순간이 Phase 2 의 목표다. 대각선이 빠른 건 눈치챈 학생에게만 normalized 를 개별로 알려준다.</a:t>
+              <a:t>Play 후 Game 창을 한 번 클릭해야 키가 먹는다. 한/영도 영문이어야 한다. 안 움직인다는 질문의 대부분이 이 둘이다.</a:t>
             </a:r>
             <a:endParaRPr lang="en-US" dirty="0"/>
           </a:p>
@@ -868,7 +869,7 @@
           <a:p>
             <a:r>
               <a:rPr lang="en-US" dirty="0"/>
-              <a:t>Active Input Handling 은 Project Settings &gt; Player &gt; Other Settings 에 있다. 바꾸면 에디터 재시작이 필요하다.</a:t>
+              <a:t>WASD 가 되면 3분쯤 그냥 놀게 둔다. 이 순간이 Phase 2 의 목표다. 대각선이 빠른 건 눈치챈 학생에게만 normalized 를 개별로 알려준다.</a:t>
             </a:r>
             <a:endParaRPr lang="en-US" dirty="0"/>
           </a:p>
@@ -956,7 +957,7 @@
           <a:p>
             <a:r>
               <a:rPr lang="en-US" dirty="0"/>
-              <a:t>Phase 3(물리·충돌)는 오늘 것 위에 그대로 쌓인다. 여기서 못 따라온 학생은 9주차에 더 못 따라온다.</a:t>
+              <a:t>Active Input Handling 은 Project Settings &gt; Player &gt; Other Settings 에 있다. 바꾸면 에디터 재시작이 필요하다.</a:t>
             </a:r>
             <a:endParaRPr lang="en-US" dirty="0"/>
           </a:p>
@@ -1044,7 +1045,7 @@
           <a:p>
             <a:r>
               <a:rPr lang="en-US" dirty="0"/>
-              <a:t>034 에서 Rigidbody 를 맛만 보여준 이유가 여기 있다. 조작이 먼저고 물리가 나중이다.</a:t>
+              <a:t>Phase 3(물리·충돌)는 오늘 것 위에 그대로 쌓인다. 여기서 못 따라온 학생은 9주차에 더 못 따라온다.</a:t>
             </a:r>
             <a:endParaRPr lang="en-US" dirty="0"/>
           </a:p>
@@ -1068,6 +1069,94 @@
             <a:fld id="{F7021451-1387-4CA6-816F-3879F97B5CBC}" type="slidenum">
               <a:rPr lang="en-US"/>
               <a:t>15</a:t>
+            </a:fld>
+            <a:endParaRPr lang="en-US"/>
+          </a:p>
+        </p:txBody>
+      </p:sp>
+    </p:spTree>
+    <p:extLst>
+      <p:ext uri="{BB962C8B-B14F-4D97-AF65-F5344CB8AC3E}">
+        <p14:creationId xmlns:p14="http://schemas.microsoft.com/office/powerpoint/2010/main" val="1024086991"/>
+      </p:ext>
+    </p:extLst>
+  </p:cSld>
+  <p:clrMapOvr>
+    <a:masterClrMapping/>
+  </p:clrMapOvr>
+</p:notes>
+</file>
+
+<file path=ppt/notesSlides/notesSlide16.xml><?xml version="1.0" encoding="utf-8"?>
+<p:notes xmlns:a="http://schemas.openxmlformats.org/drawingml/2006/main" xmlns:r="http://schemas.openxmlformats.org/officeDocument/2006/relationships" xmlns:p="http://schemas.openxmlformats.org/presentationml/2006/main">
+  <p:cSld>
+    <p:spTree>
+      <p:nvGrpSpPr>
+        <p:cNvPr id="1" name=""/>
+        <p:cNvGrpSpPr/>
+        <p:nvPr/>
+      </p:nvGrpSpPr>
+      <p:grpSpPr>
+        <a:xfrm>
+          <a:off x="0" y="0"/>
+          <a:ext cx="0" cy="0"/>
+          <a:chOff x="0" y="0"/>
+          <a:chExt cx="0" cy="0"/>
+        </a:xfrm>
+      </p:grpSpPr>
+      <p:sp>
+        <p:nvSpPr>
+          <p:cNvPr id="2" name="Slide Image Placeholder 1"/>
+          <p:cNvSpPr>
+            <a:spLocks noGrp="1" noRot="1" noChangeAspect="1"/>
+          </p:cNvSpPr>
+          <p:nvPr>
+            <p:ph type="sldImg"/>
+          </p:nvPr>
+        </p:nvSpPr>
+        <p:spPr/>
+      </p:sp>
+      <p:sp>
+        <p:nvSpPr>
+          <p:cNvPr id="3" name="Notes Placeholder 2"/>
+          <p:cNvSpPr>
+            <a:spLocks noGrp="1"/>
+          </p:cNvSpPr>
+          <p:nvPr>
+            <p:ph type="body" idx="1"/>
+          </p:nvPr>
+        </p:nvSpPr>
+        <p:spPr/>
+        <p:txBody>
+          <a:bodyPr/>
+          <a:lstStyle/>
+          <a:p>
+            <a:r>
+              <a:rPr lang="en-US" dirty="0"/>
+              <a:t>034 에서 Rigidbody 를 맛만 보여준 이유가 여기 있다. 조작이 먼저고 물리가 나중이다.</a:t>
+            </a:r>
+            <a:endParaRPr lang="en-US" dirty="0"/>
+          </a:p>
+        </p:txBody>
+      </p:sp>
+      <p:sp>
+        <p:nvSpPr>
+          <p:cNvPr id="4" name="Slide Number Placeholder 3"/>
+          <p:cNvSpPr>
+            <a:spLocks noGrp="1"/>
+          </p:cNvSpPr>
+          <p:nvPr>
+            <p:ph type="sldNum" sz="quarter" idx="10"/>
+          </p:nvPr>
+        </p:nvSpPr>
+        <p:spPr/>
+        <p:txBody>
+          <a:bodyPr/>
+          <a:lstStyle/>
+          <a:p>
+            <a:fld id="{F7021451-1387-4CA6-816F-3879F97B5CBC}" type="slidenum">
+              <a:rPr lang="en-US"/>
+              <a:t>16</a:t>
             </a:fld>
             <a:endParaRPr lang="en-US"/>
           </a:p>
@@ -2575,7 +2664,7 @@
                 <a:ea typeface="Pretendard SemiBold" pitchFamily="34" charset="-122"/>
                 <a:cs typeface="Pretendard SemiBold" pitchFamily="34" charset="-120"/>
               </a:rPr>
-              <a:t>곱하면 값의 의미가 바뀐다.</a:t>
+              <a:t>deltaTime 은 고정값이 아니다.</a:t>
             </a:r>
             <a:endParaRPr lang="en-US" sz="2600" dirty="0"/>
           </a:p>
@@ -2614,7 +2703,7 @@
                 <a:ea typeface="Pretendard Light" pitchFamily="34" charset="-122"/>
                 <a:cs typeface="Pretendard Light" pitchFamily="34" charset="-120"/>
               </a:rPr>
-              <a:t>값이 갑자기 커져 놀라는데 단위가 바뀐 것이다. 0.05를 60번 하면 3이다.</a:t>
+              <a:t>1/60 은 프레임이 일정하다는 가정이다. 실제로는 매 프레임 다르다.</a:t>
             </a:r>
             <a:endParaRPr lang="en-US" sz="1500" dirty="0"/>
           </a:p>
@@ -2629,7 +2718,7 @@
         <p:spPr>
           <a:xfrm>
             <a:off x="758952" y="1965960"/>
-            <a:ext cx="3657600" cy="274320"/>
+            <a:ext cx="6400800" cy="274320"/>
           </a:xfrm>
           <a:prstGeom prst="rect">
             <a:avLst/>
@@ -2653,7 +2742,7 @@
                 <a:ea typeface="Pretendard SemiBold" pitchFamily="34" charset="-122"/>
                 <a:cs typeface="Pretendard SemiBold" pitchFamily="34" charset="-120"/>
               </a:rPr>
-              <a:t>고치기 전</a:t>
+              <a:t>같은 컴퓨터에서 연속으로 잰 값</a:t>
             </a:r>
             <a:endParaRPr lang="en-US" sz="950" dirty="0"/>
           </a:p>
@@ -2667,12 +2756,455 @@
         </p:nvSpPr>
         <p:spPr>
           <a:xfrm>
-            <a:off x="758952" y="2331720"/>
-            <a:ext cx="5486400" cy="1463040"/>
+            <a:off x="758952" y="2377440"/>
+            <a:ext cx="6400800" cy="0"/>
+          </a:xfrm>
+          <a:prstGeom prst="line">
+            <a:avLst/>
+          </a:prstGeom>
+          <a:noFill/>
+          <a:ln w="12700">
+            <a:solidFill>
+              <a:srgbClr val="E0E0E0"/>
+            </a:solidFill>
+            <a:prstDash val="solid"/>
+          </a:ln>
+        </p:spPr>
+      </p:sp>
+      <p:sp>
+        <p:nvSpPr>
+          <p:cNvPr id="8" name="Text 6"/>
+          <p:cNvSpPr txBox="1"/>
+          <p:nvPr/>
+        </p:nvSpPr>
+        <p:spPr>
+          <a:xfrm>
+            <a:off x="758952" y="2542032"/>
+            <a:ext cx="1188720" cy="402336"/>
+          </a:xfrm>
+          <a:prstGeom prst="rect">
+            <a:avLst/>
+          </a:prstGeom>
+          <a:noFill/>
+          <a:ln/>
+        </p:spPr>
+        <p:txBody>
+          <a:bodyPr wrap="square" lIns="0" tIns="0" rIns="0" bIns="0" rtlCol="0" anchor="ctr"/>
+          <a:lstStyle/>
+          <a:p>
+            <a:pPr indent="0" marL="0">
+              <a:buNone/>
+            </a:pPr>
+            <a:r>
+              <a:rPr lang="en-US" sz="1200" dirty="0">
+                <a:solidFill>
+                  <a:srgbClr val="707070"/>
+                </a:solidFill>
+                <a:latin typeface="Consolas" pitchFamily="34" charset="0"/>
+                <a:ea typeface="Consolas" pitchFamily="34" charset="-122"/>
+                <a:cs typeface="Consolas" pitchFamily="34" charset="-120"/>
+              </a:rPr>
+              <a:t>241</a:t>
+            </a:r>
+            <a:endParaRPr lang="en-US" sz="1200" dirty="0"/>
+          </a:p>
+        </p:txBody>
+      </p:sp>
+      <p:sp>
+        <p:nvSpPr>
+          <p:cNvPr id="9" name="Text 7"/>
+          <p:cNvSpPr txBox="1"/>
+          <p:nvPr/>
+        </p:nvSpPr>
+        <p:spPr>
+          <a:xfrm>
+            <a:off x="2130552" y="2542032"/>
+            <a:ext cx="1828800" cy="402336"/>
+          </a:xfrm>
+          <a:prstGeom prst="rect">
+            <a:avLst/>
+          </a:prstGeom>
+          <a:noFill/>
+          <a:ln/>
+        </p:spPr>
+        <p:txBody>
+          <a:bodyPr wrap="square" lIns="0" tIns="0" rIns="0" bIns="0" rtlCol="0" anchor="ctr"/>
+          <a:lstStyle/>
+          <a:p>
+            <a:pPr indent="0" marL="0">
+              <a:buNone/>
+            </a:pPr>
+            <a:r>
+              <a:rPr lang="en-US" sz="1550" dirty="0">
+                <a:solidFill>
+                  <a:srgbClr val="141414"/>
+                </a:solidFill>
+                <a:latin typeface="Consolas" pitchFamily="34" charset="0"/>
+                <a:ea typeface="Consolas" pitchFamily="34" charset="-122"/>
+                <a:cs typeface="Consolas" pitchFamily="34" charset="-120"/>
+              </a:rPr>
+              <a:t>0.00480</a:t>
+            </a:r>
+            <a:endParaRPr lang="en-US" sz="1550" dirty="0"/>
+          </a:p>
+        </p:txBody>
+      </p:sp>
+      <p:sp>
+        <p:nvSpPr>
+          <p:cNvPr id="10" name="Text 8"/>
+          <p:cNvSpPr txBox="1"/>
+          <p:nvPr/>
+        </p:nvSpPr>
+        <p:spPr>
+          <a:xfrm>
+            <a:off x="4233672" y="2542032"/>
+            <a:ext cx="1554480" cy="402336"/>
+          </a:xfrm>
+          <a:prstGeom prst="rect">
+            <a:avLst/>
+          </a:prstGeom>
+          <a:noFill/>
+          <a:ln/>
+        </p:spPr>
+        <p:txBody>
+          <a:bodyPr wrap="square" lIns="0" tIns="0" rIns="0" bIns="0" rtlCol="0" anchor="ctr"/>
+          <a:lstStyle/>
+          <a:p>
+            <a:pPr indent="0" marL="0">
+              <a:buNone/>
+            </a:pPr>
+            <a:r>
+              <a:rPr lang="en-US" sz="1200" dirty="0">
+                <a:solidFill>
+                  <a:srgbClr val="707070"/>
+                </a:solidFill>
+                <a:latin typeface="Pretendard" pitchFamily="34" charset="0"/>
+                <a:ea typeface="Pretendard" pitchFamily="34" charset="-122"/>
+                <a:cs typeface="Pretendard" pitchFamily="34" charset="-120"/>
+              </a:rPr>
+              <a:t>208 fps</a:t>
+            </a:r>
+            <a:endParaRPr lang="en-US" sz="1200" dirty="0"/>
+          </a:p>
+        </p:txBody>
+      </p:sp>
+      <p:sp>
+        <p:nvSpPr>
+          <p:cNvPr id="11" name="Shape 9"/>
+          <p:cNvSpPr/>
+          <p:nvPr/>
+        </p:nvSpPr>
+        <p:spPr>
+          <a:xfrm>
+            <a:off x="758952" y="3017520"/>
+            <a:ext cx="6400800" cy="0"/>
+          </a:xfrm>
+          <a:prstGeom prst="line">
+            <a:avLst/>
+          </a:prstGeom>
+          <a:noFill/>
+          <a:ln w="12700">
+            <a:solidFill>
+              <a:srgbClr val="F0F0F0"/>
+            </a:solidFill>
+            <a:prstDash val="solid"/>
+          </a:ln>
+        </p:spPr>
+      </p:sp>
+      <p:sp>
+        <p:nvSpPr>
+          <p:cNvPr id="12" name="Text 10"/>
+          <p:cNvSpPr txBox="1"/>
+          <p:nvPr/>
+        </p:nvSpPr>
+        <p:spPr>
+          <a:xfrm>
+            <a:off x="758952" y="3090672"/>
+            <a:ext cx="1188720" cy="402336"/>
+          </a:xfrm>
+          <a:prstGeom prst="rect">
+            <a:avLst/>
+          </a:prstGeom>
+          <a:noFill/>
+          <a:ln/>
+        </p:spPr>
+        <p:txBody>
+          <a:bodyPr wrap="square" lIns="0" tIns="0" rIns="0" bIns="0" rtlCol="0" anchor="ctr"/>
+          <a:lstStyle/>
+          <a:p>
+            <a:pPr indent="0" marL="0">
+              <a:buNone/>
+            </a:pPr>
+            <a:r>
+              <a:rPr lang="en-US" sz="1200" dirty="0">
+                <a:solidFill>
+                  <a:srgbClr val="707070"/>
+                </a:solidFill>
+                <a:latin typeface="Consolas" pitchFamily="34" charset="0"/>
+                <a:ea typeface="Consolas" pitchFamily="34" charset="-122"/>
+                <a:cs typeface="Consolas" pitchFamily="34" charset="-120"/>
+              </a:rPr>
+              <a:t>271</a:t>
+            </a:r>
+            <a:endParaRPr lang="en-US" sz="1200" dirty="0"/>
+          </a:p>
+        </p:txBody>
+      </p:sp>
+      <p:sp>
+        <p:nvSpPr>
+          <p:cNvPr id="13" name="Text 11"/>
+          <p:cNvSpPr txBox="1"/>
+          <p:nvPr/>
+        </p:nvSpPr>
+        <p:spPr>
+          <a:xfrm>
+            <a:off x="2130552" y="3090672"/>
+            <a:ext cx="1828800" cy="402336"/>
+          </a:xfrm>
+          <a:prstGeom prst="rect">
+            <a:avLst/>
+          </a:prstGeom>
+          <a:noFill/>
+          <a:ln/>
+        </p:spPr>
+        <p:txBody>
+          <a:bodyPr wrap="square" lIns="0" tIns="0" rIns="0" bIns="0" rtlCol="0" anchor="ctr"/>
+          <a:lstStyle/>
+          <a:p>
+            <a:pPr indent="0" marL="0">
+              <a:buNone/>
+            </a:pPr>
+            <a:r>
+              <a:rPr lang="en-US" sz="1550" dirty="0">
+                <a:solidFill>
+                  <a:srgbClr val="141414"/>
+                </a:solidFill>
+                <a:latin typeface="Consolas" pitchFamily="34" charset="0"/>
+                <a:ea typeface="Consolas" pitchFamily="34" charset="-122"/>
+                <a:cs typeface="Consolas" pitchFamily="34" charset="-120"/>
+              </a:rPr>
+              <a:t>0.00473</a:t>
+            </a:r>
+            <a:endParaRPr lang="en-US" sz="1550" dirty="0"/>
+          </a:p>
+        </p:txBody>
+      </p:sp>
+      <p:sp>
+        <p:nvSpPr>
+          <p:cNvPr id="14" name="Text 12"/>
+          <p:cNvSpPr txBox="1"/>
+          <p:nvPr/>
+        </p:nvSpPr>
+        <p:spPr>
+          <a:xfrm>
+            <a:off x="4233672" y="3090672"/>
+            <a:ext cx="1554480" cy="402336"/>
+          </a:xfrm>
+          <a:prstGeom prst="rect">
+            <a:avLst/>
+          </a:prstGeom>
+          <a:noFill/>
+          <a:ln/>
+        </p:spPr>
+        <p:txBody>
+          <a:bodyPr wrap="square" lIns="0" tIns="0" rIns="0" bIns="0" rtlCol="0" anchor="ctr"/>
+          <a:lstStyle/>
+          <a:p>
+            <a:pPr indent="0" marL="0">
+              <a:buNone/>
+            </a:pPr>
+            <a:r>
+              <a:rPr lang="en-US" sz="1200" dirty="0">
+                <a:solidFill>
+                  <a:srgbClr val="707070"/>
+                </a:solidFill>
+                <a:latin typeface="Pretendard" pitchFamily="34" charset="0"/>
+                <a:ea typeface="Pretendard" pitchFamily="34" charset="-122"/>
+                <a:cs typeface="Pretendard" pitchFamily="34" charset="-120"/>
+              </a:rPr>
+              <a:t>211 fps</a:t>
+            </a:r>
+            <a:endParaRPr lang="en-US" sz="1200" dirty="0"/>
+          </a:p>
+        </p:txBody>
+      </p:sp>
+      <p:sp>
+        <p:nvSpPr>
+          <p:cNvPr id="15" name="Shape 13"/>
+          <p:cNvSpPr/>
+          <p:nvPr/>
+        </p:nvSpPr>
+        <p:spPr>
+          <a:xfrm>
+            <a:off x="758952" y="3566160"/>
+            <a:ext cx="6400800" cy="0"/>
+          </a:xfrm>
+          <a:prstGeom prst="line">
+            <a:avLst/>
+          </a:prstGeom>
+          <a:noFill/>
+          <a:ln w="12700">
+            <a:solidFill>
+              <a:srgbClr val="F0F0F0"/>
+            </a:solidFill>
+            <a:prstDash val="solid"/>
+          </a:ln>
+        </p:spPr>
+      </p:sp>
+      <p:sp>
+        <p:nvSpPr>
+          <p:cNvPr id="16" name="Text 14"/>
+          <p:cNvSpPr txBox="1"/>
+          <p:nvPr/>
+        </p:nvSpPr>
+        <p:spPr>
+          <a:xfrm>
+            <a:off x="758952" y="3639312"/>
+            <a:ext cx="1188720" cy="402336"/>
+          </a:xfrm>
+          <a:prstGeom prst="rect">
+            <a:avLst/>
+          </a:prstGeom>
+          <a:noFill/>
+          <a:ln/>
+        </p:spPr>
+        <p:txBody>
+          <a:bodyPr wrap="square" lIns="0" tIns="0" rIns="0" bIns="0" rtlCol="0" anchor="ctr"/>
+          <a:lstStyle/>
+          <a:p>
+            <a:pPr indent="0" marL="0">
+              <a:buNone/>
+            </a:pPr>
+            <a:r>
+              <a:rPr lang="en-US" sz="1200" dirty="0">
+                <a:solidFill>
+                  <a:srgbClr val="707070"/>
+                </a:solidFill>
+                <a:latin typeface="Consolas" pitchFamily="34" charset="0"/>
+                <a:ea typeface="Consolas" pitchFamily="34" charset="-122"/>
+                <a:cs typeface="Consolas" pitchFamily="34" charset="-120"/>
+              </a:rPr>
+              <a:t>289</a:t>
+            </a:r>
+            <a:endParaRPr lang="en-US" sz="1200" dirty="0"/>
+          </a:p>
+        </p:txBody>
+      </p:sp>
+      <p:sp>
+        <p:nvSpPr>
+          <p:cNvPr id="17" name="Text 15"/>
+          <p:cNvSpPr txBox="1"/>
+          <p:nvPr/>
+        </p:nvSpPr>
+        <p:spPr>
+          <a:xfrm>
+            <a:off x="2130552" y="3639312"/>
+            <a:ext cx="1828800" cy="402336"/>
+          </a:xfrm>
+          <a:prstGeom prst="rect">
+            <a:avLst/>
+          </a:prstGeom>
+          <a:noFill/>
+          <a:ln/>
+        </p:spPr>
+        <p:txBody>
+          <a:bodyPr wrap="square" lIns="0" tIns="0" rIns="0" bIns="0" rtlCol="0" anchor="ctr"/>
+          <a:lstStyle/>
+          <a:p>
+            <a:pPr indent="0" marL="0">
+              <a:buNone/>
+            </a:pPr>
+            <a:r>
+              <a:rPr lang="en-US" sz="1550" dirty="0">
+                <a:solidFill>
+                  <a:srgbClr val="141414"/>
+                </a:solidFill>
+                <a:latin typeface="Consolas" pitchFamily="34" charset="0"/>
+                <a:ea typeface="Consolas" pitchFamily="34" charset="-122"/>
+                <a:cs typeface="Consolas" pitchFamily="34" charset="-120"/>
+              </a:rPr>
+              <a:t>0.00469</a:t>
+            </a:r>
+            <a:endParaRPr lang="en-US" sz="1550" dirty="0"/>
+          </a:p>
+        </p:txBody>
+      </p:sp>
+      <p:sp>
+        <p:nvSpPr>
+          <p:cNvPr id="18" name="Text 16"/>
+          <p:cNvSpPr txBox="1"/>
+          <p:nvPr/>
+        </p:nvSpPr>
+        <p:spPr>
+          <a:xfrm>
+            <a:off x="4233672" y="3639312"/>
+            <a:ext cx="1554480" cy="402336"/>
+          </a:xfrm>
+          <a:prstGeom prst="rect">
+            <a:avLst/>
+          </a:prstGeom>
+          <a:noFill/>
+          <a:ln/>
+        </p:spPr>
+        <p:txBody>
+          <a:bodyPr wrap="square" lIns="0" tIns="0" rIns="0" bIns="0" rtlCol="0" anchor="ctr"/>
+          <a:lstStyle/>
+          <a:p>
+            <a:pPr indent="0" marL="0">
+              <a:buNone/>
+            </a:pPr>
+            <a:r>
+              <a:rPr lang="en-US" sz="1200" dirty="0">
+                <a:solidFill>
+                  <a:srgbClr val="707070"/>
+                </a:solidFill>
+                <a:latin typeface="Pretendard" pitchFamily="34" charset="0"/>
+                <a:ea typeface="Pretendard" pitchFamily="34" charset="-122"/>
+                <a:cs typeface="Pretendard" pitchFamily="34" charset="-120"/>
+              </a:rPr>
+              <a:t>213 fps</a:t>
+            </a:r>
+            <a:endParaRPr lang="en-US" sz="1200" dirty="0"/>
+          </a:p>
+        </p:txBody>
+      </p:sp>
+      <p:sp>
+        <p:nvSpPr>
+          <p:cNvPr id="19" name="Shape 17"/>
+          <p:cNvSpPr/>
+          <p:nvPr/>
+        </p:nvSpPr>
+        <p:spPr>
+          <a:xfrm>
+            <a:off x="758952" y="4114800"/>
+            <a:ext cx="6400800" cy="0"/>
+          </a:xfrm>
+          <a:prstGeom prst="line">
+            <a:avLst/>
+          </a:prstGeom>
+          <a:noFill/>
+          <a:ln w="12700">
+            <a:solidFill>
+              <a:srgbClr val="F0F0F0"/>
+            </a:solidFill>
+            <a:prstDash val="solid"/>
+          </a:ln>
+        </p:spPr>
+      </p:sp>
+      <p:sp>
+        <p:nvSpPr>
+          <p:cNvPr id="20" name="Shape 18"/>
+          <p:cNvSpPr/>
+          <p:nvPr/>
+        </p:nvSpPr>
+        <p:spPr>
+          <a:xfrm>
+            <a:off x="557784" y="4114800"/>
+            <a:ext cx="6803136" cy="548640"/>
           </a:xfrm>
           <a:prstGeom prst="roundRect">
             <a:avLst>
-              <a:gd name="adj" fmla="val 10438"/>
+              <a:gd name="adj" fmla="val 27833"/>
             </a:avLst>
           </a:prstGeom>
           <a:solidFill>
@@ -2688,33 +3220,30 @@
       </p:sp>
       <p:sp>
         <p:nvSpPr>
-          <p:cNvPr id="8" name="Text 6"/>
-          <p:cNvSpPr txBox="1"/>
-          <p:nvPr/>
-        </p:nvSpPr>
-        <p:spPr>
-          <a:xfrm>
-            <a:off x="1014984" y="2532888"/>
-            <a:ext cx="4974336" cy="1060704"/>
-          </a:xfrm>
-          <a:prstGeom prst="rect">
-            <a:avLst/>
-          </a:prstGeom>
-          <a:noFill/>
-          <a:ln/>
-        </p:spPr>
-        <p:txBody>
-          <a:bodyPr wrap="square" lIns="0" tIns="0" rIns="0" bIns="0" rtlCol="0" anchor="t"/>
-          <a:lstStyle/>
-          <a:p>
-            <a:pPr indent="0" marL="0">
-              <a:lnSpc>
-                <a:spcPct val="132000"/>
-              </a:lnSpc>
-              <a:buNone/>
-            </a:pPr>
-            <a:r>
-              <a:rPr lang="en-US" sz="1150" dirty="0">
+          <p:cNvPr id="21" name="Text 19"/>
+          <p:cNvSpPr txBox="1"/>
+          <p:nvPr/>
+        </p:nvSpPr>
+        <p:spPr>
+          <a:xfrm>
+            <a:off x="758952" y="4187952"/>
+            <a:ext cx="1188720" cy="402336"/>
+          </a:xfrm>
+          <a:prstGeom prst="rect">
+            <a:avLst/>
+          </a:prstGeom>
+          <a:noFill/>
+          <a:ln/>
+        </p:spPr>
+        <p:txBody>
+          <a:bodyPr wrap="square" lIns="0" tIns="0" rIns="0" bIns="0" rtlCol="0" anchor="ctr"/>
+          <a:lstStyle/>
+          <a:p>
+            <a:pPr indent="0" marL="0">
+              <a:buNone/>
+            </a:pPr>
+            <a:r>
+              <a:rPr lang="en-US" sz="1200" dirty="0">
                 <a:solidFill>
                   <a:srgbClr val="141414"/>
                 </a:solidFill>
@@ -2722,19 +3251,38 @@
                 <a:ea typeface="Consolas" pitchFamily="34" charset="-122"/>
                 <a:cs typeface="Consolas" pitchFamily="34" charset="-120"/>
               </a:rPr>
-              <a:t>[SerializeField] float moveStep = 0.05f;</a:t>
-            </a:r>
-            <a:endParaRPr lang="en-US" sz="1150" dirty="0"/>
-          </a:p>
-          <a:p>
-            <a:pPr indent="0" marL="0">
-              <a:lnSpc>
-                <a:spcPct val="132000"/>
-              </a:lnSpc>
-              <a:buNone/>
-            </a:pPr>
-            <a:r>
-              <a:rPr lang="en-US" sz="1150" dirty="0">
+              <a:t>309</a:t>
+            </a:r>
+            <a:endParaRPr lang="en-US" sz="1200" dirty="0"/>
+          </a:p>
+        </p:txBody>
+      </p:sp>
+      <p:sp>
+        <p:nvSpPr>
+          <p:cNvPr id="22" name="Text 20"/>
+          <p:cNvSpPr txBox="1"/>
+          <p:nvPr/>
+        </p:nvSpPr>
+        <p:spPr>
+          <a:xfrm>
+            <a:off x="2130552" y="4187952"/>
+            <a:ext cx="1828800" cy="402336"/>
+          </a:xfrm>
+          <a:prstGeom prst="rect">
+            <a:avLst/>
+          </a:prstGeom>
+          <a:noFill/>
+          <a:ln/>
+        </p:spPr>
+        <p:txBody>
+          <a:bodyPr wrap="square" lIns="0" tIns="0" rIns="0" bIns="0" rtlCol="0" anchor="ctr"/>
+          <a:lstStyle/>
+          <a:p>
+            <a:pPr indent="0" marL="0">
+              <a:buNone/>
+            </a:pPr>
+            <a:r>
+              <a:rPr lang="en-US" sz="1550" b="1" dirty="0">
                 <a:solidFill>
                   <a:srgbClr val="141414"/>
                 </a:solidFill>
@@ -2742,89 +3290,310 @@
                 <a:ea typeface="Consolas" pitchFamily="34" charset="-122"/>
                 <a:cs typeface="Consolas" pitchFamily="34" charset="-120"/>
               </a:rPr>
-              <a:t> </a:t>
-            </a:r>
-            <a:endParaRPr lang="en-US" sz="1150" dirty="0"/>
-          </a:p>
-          <a:p>
-            <a:pPr indent="0" marL="0">
-              <a:lnSpc>
-                <a:spcPct val="132000"/>
-              </a:lnSpc>
-              <a:buNone/>
-            </a:pPr>
-            <a:r>
-              <a:rPr lang="en-US" sz="1150" dirty="0">
+              <a:t>0.00877</a:t>
+            </a:r>
+            <a:endParaRPr lang="en-US" sz="1550" dirty="0"/>
+          </a:p>
+        </p:txBody>
+      </p:sp>
+      <p:sp>
+        <p:nvSpPr>
+          <p:cNvPr id="23" name="Text 21"/>
+          <p:cNvSpPr txBox="1"/>
+          <p:nvPr/>
+        </p:nvSpPr>
+        <p:spPr>
+          <a:xfrm>
+            <a:off x="4233672" y="4187952"/>
+            <a:ext cx="1554480" cy="402336"/>
+          </a:xfrm>
+          <a:prstGeom prst="rect">
+            <a:avLst/>
+          </a:prstGeom>
+          <a:noFill/>
+          <a:ln/>
+        </p:spPr>
+        <p:txBody>
+          <a:bodyPr wrap="square" lIns="0" tIns="0" rIns="0" bIns="0" rtlCol="0" anchor="ctr"/>
+          <a:lstStyle/>
+          <a:p>
+            <a:pPr indent="0" marL="0">
+              <a:buNone/>
+            </a:pPr>
+            <a:r>
+              <a:rPr lang="en-US" sz="1200" dirty="0">
                 <a:solidFill>
                   <a:srgbClr val="141414"/>
+                </a:solidFill>
+                <a:latin typeface="Pretendard" pitchFamily="34" charset="0"/>
+                <a:ea typeface="Pretendard" pitchFamily="34" charset="-122"/>
+                <a:cs typeface="Pretendard" pitchFamily="34" charset="-120"/>
+              </a:rPr>
+              <a:t>114 fps</a:t>
+            </a:r>
+            <a:endParaRPr lang="en-US" sz="1200" dirty="0"/>
+          </a:p>
+        </p:txBody>
+      </p:sp>
+      <p:sp>
+        <p:nvSpPr>
+          <p:cNvPr id="24" name="Text 22"/>
+          <p:cNvSpPr txBox="1"/>
+          <p:nvPr/>
+        </p:nvSpPr>
+        <p:spPr>
+          <a:xfrm>
+            <a:off x="5788152" y="4187952"/>
+            <a:ext cx="2103120" cy="402336"/>
+          </a:xfrm>
+          <a:prstGeom prst="rect">
+            <a:avLst/>
+          </a:prstGeom>
+          <a:noFill/>
+          <a:ln/>
+        </p:spPr>
+        <p:txBody>
+          <a:bodyPr wrap="square" lIns="0" tIns="0" rIns="0" bIns="0" rtlCol="0" anchor="ctr"/>
+          <a:lstStyle/>
+          <a:p>
+            <a:pPr indent="0" marL="0">
+              <a:buNone/>
+            </a:pPr>
+            <a:r>
+              <a:rPr lang="en-US" sz="1100" dirty="0">
+                <a:solidFill>
+                  <a:srgbClr val="141414"/>
+                </a:solidFill>
+                <a:latin typeface="Pretendard SemiBold" pitchFamily="34" charset="0"/>
+                <a:ea typeface="Pretendard SemiBold" pitchFamily="34" charset="-122"/>
+                <a:cs typeface="Pretendard SemiBold" pitchFamily="34" charset="-120"/>
+              </a:rPr>
+              <a:t>이 프레임만 두 배 느림</a:t>
+            </a:r>
+            <a:endParaRPr lang="en-US" sz="1100" dirty="0"/>
+          </a:p>
+        </p:txBody>
+      </p:sp>
+      <p:sp>
+        <p:nvSpPr>
+          <p:cNvPr id="25" name="Shape 23"/>
+          <p:cNvSpPr/>
+          <p:nvPr/>
+        </p:nvSpPr>
+        <p:spPr>
+          <a:xfrm>
+            <a:off x="758952" y="4663440"/>
+            <a:ext cx="6400800" cy="0"/>
+          </a:xfrm>
+          <a:prstGeom prst="line">
+            <a:avLst/>
+          </a:prstGeom>
+          <a:noFill/>
+          <a:ln w="12700">
+            <a:solidFill>
+              <a:srgbClr val="F0F0F0"/>
+            </a:solidFill>
+            <a:prstDash val="solid"/>
+          </a:ln>
+        </p:spPr>
+      </p:sp>
+      <p:sp>
+        <p:nvSpPr>
+          <p:cNvPr id="26" name="Text 24"/>
+          <p:cNvSpPr txBox="1"/>
+          <p:nvPr/>
+        </p:nvSpPr>
+        <p:spPr>
+          <a:xfrm>
+            <a:off x="758952" y="4736592"/>
+            <a:ext cx="1188720" cy="402336"/>
+          </a:xfrm>
+          <a:prstGeom prst="rect">
+            <a:avLst/>
+          </a:prstGeom>
+          <a:noFill/>
+          <a:ln/>
+        </p:spPr>
+        <p:txBody>
+          <a:bodyPr wrap="square" lIns="0" tIns="0" rIns="0" bIns="0" rtlCol="0" anchor="ctr"/>
+          <a:lstStyle/>
+          <a:p>
+            <a:pPr indent="0" marL="0">
+              <a:buNone/>
+            </a:pPr>
+            <a:r>
+              <a:rPr lang="en-US" sz="1200" dirty="0">
+                <a:solidFill>
+                  <a:srgbClr val="707070"/>
                 </a:solidFill>
                 <a:latin typeface="Consolas" pitchFamily="34" charset="0"/>
                 <a:ea typeface="Consolas" pitchFamily="34" charset="-122"/>
                 <a:cs typeface="Consolas" pitchFamily="34" charset="-120"/>
               </a:rPr>
-              <a:t>position + moveDir * moveStep;</a:t>
-            </a:r>
-            <a:endParaRPr lang="en-US" sz="1150" dirty="0"/>
-          </a:p>
-        </p:txBody>
-      </p:sp>
-      <p:sp>
-        <p:nvSpPr>
-          <p:cNvPr id="9" name="Text 7"/>
-          <p:cNvSpPr txBox="1"/>
-          <p:nvPr/>
-        </p:nvSpPr>
-        <p:spPr>
-          <a:xfrm>
-            <a:off x="6537960" y="1965960"/>
-            <a:ext cx="3657600" cy="274320"/>
-          </a:xfrm>
-          <a:prstGeom prst="rect">
-            <a:avLst/>
-          </a:prstGeom>
-          <a:noFill/>
-          <a:ln/>
-        </p:spPr>
-        <p:txBody>
-          <a:bodyPr wrap="square" lIns="0" tIns="0" rIns="0" bIns="0" rtlCol="0" anchor="ctr"/>
-          <a:lstStyle/>
-          <a:p>
-            <a:pPr indent="0" marL="0">
-              <a:buNone/>
-            </a:pPr>
-            <a:r>
-              <a:rPr lang="en-US" sz="950" dirty="0">
+              <a:t>329</a:t>
+            </a:r>
+            <a:endParaRPr lang="en-US" sz="1200" dirty="0"/>
+          </a:p>
+        </p:txBody>
+      </p:sp>
+      <p:sp>
+        <p:nvSpPr>
+          <p:cNvPr id="27" name="Text 25"/>
+          <p:cNvSpPr txBox="1"/>
+          <p:nvPr/>
+        </p:nvSpPr>
+        <p:spPr>
+          <a:xfrm>
+            <a:off x="2130552" y="4736592"/>
+            <a:ext cx="1828800" cy="402336"/>
+          </a:xfrm>
+          <a:prstGeom prst="rect">
+            <a:avLst/>
+          </a:prstGeom>
+          <a:noFill/>
+          <a:ln/>
+        </p:spPr>
+        <p:txBody>
+          <a:bodyPr wrap="square" lIns="0" tIns="0" rIns="0" bIns="0" rtlCol="0" anchor="ctr"/>
+          <a:lstStyle/>
+          <a:p>
+            <a:pPr indent="0" marL="0">
+              <a:buNone/>
+            </a:pPr>
+            <a:r>
+              <a:rPr lang="en-US" sz="1550" dirty="0">
                 <a:solidFill>
                   <a:srgbClr val="141414"/>
                 </a:solidFill>
-                <a:latin typeface="Pretendard SemiBold" pitchFamily="34" charset="0"/>
-                <a:ea typeface="Pretendard SemiBold" pitchFamily="34" charset="-122"/>
-                <a:cs typeface="Pretendard SemiBold" pitchFamily="34" charset="-120"/>
-              </a:rPr>
-              <a:t>고친 뒤</a:t>
-            </a:r>
-            <a:endParaRPr lang="en-US" sz="950" dirty="0"/>
-          </a:p>
-        </p:txBody>
-      </p:sp>
-      <p:sp>
-        <p:nvSpPr>
-          <p:cNvPr id="10" name="Shape 8"/>
+                <a:latin typeface="Consolas" pitchFamily="34" charset="0"/>
+                <a:ea typeface="Consolas" pitchFamily="34" charset="-122"/>
+                <a:cs typeface="Consolas" pitchFamily="34" charset="-120"/>
+              </a:rPr>
+              <a:t>0.00438</a:t>
+            </a:r>
+            <a:endParaRPr lang="en-US" sz="1550" dirty="0"/>
+          </a:p>
+        </p:txBody>
+      </p:sp>
+      <p:sp>
+        <p:nvSpPr>
+          <p:cNvPr id="28" name="Text 26"/>
+          <p:cNvSpPr txBox="1"/>
+          <p:nvPr/>
+        </p:nvSpPr>
+        <p:spPr>
+          <a:xfrm>
+            <a:off x="4233672" y="4736592"/>
+            <a:ext cx="1554480" cy="402336"/>
+          </a:xfrm>
+          <a:prstGeom prst="rect">
+            <a:avLst/>
+          </a:prstGeom>
+          <a:noFill/>
+          <a:ln/>
+        </p:spPr>
+        <p:txBody>
+          <a:bodyPr wrap="square" lIns="0" tIns="0" rIns="0" bIns="0" rtlCol="0" anchor="ctr"/>
+          <a:lstStyle/>
+          <a:p>
+            <a:pPr indent="0" marL="0">
+              <a:buNone/>
+            </a:pPr>
+            <a:r>
+              <a:rPr lang="en-US" sz="1200" dirty="0">
+                <a:solidFill>
+                  <a:srgbClr val="707070"/>
+                </a:solidFill>
+                <a:latin typeface="Pretendard" pitchFamily="34" charset="0"/>
+                <a:ea typeface="Pretendard" pitchFamily="34" charset="-122"/>
+                <a:cs typeface="Pretendard" pitchFamily="34" charset="-120"/>
+              </a:rPr>
+              <a:t>228 fps</a:t>
+            </a:r>
+            <a:endParaRPr lang="en-US" sz="1200" dirty="0"/>
+          </a:p>
+        </p:txBody>
+      </p:sp>
+      <p:sp>
+        <p:nvSpPr>
+          <p:cNvPr id="29" name="Shape 27"/>
           <p:cNvSpPr/>
           <p:nvPr/>
         </p:nvSpPr>
         <p:spPr>
           <a:xfrm>
-            <a:off x="6537960" y="2331720"/>
-            <a:ext cx="4894783" cy="1463040"/>
+            <a:off x="758952" y="5212080"/>
+            <a:ext cx="6400800" cy="0"/>
+          </a:xfrm>
+          <a:prstGeom prst="line">
+            <a:avLst/>
+          </a:prstGeom>
+          <a:noFill/>
+          <a:ln w="12700">
+            <a:solidFill>
+              <a:srgbClr val="F0F0F0"/>
+            </a:solidFill>
+            <a:prstDash val="solid"/>
+          </a:ln>
+        </p:spPr>
+      </p:sp>
+      <p:sp>
+        <p:nvSpPr>
+          <p:cNvPr id="30" name="Text 28"/>
+          <p:cNvSpPr txBox="1"/>
+          <p:nvPr/>
+        </p:nvSpPr>
+        <p:spPr>
+          <a:xfrm>
+            <a:off x="758952" y="5440680"/>
+            <a:ext cx="6400800" cy="365760"/>
+          </a:xfrm>
+          <a:prstGeom prst="rect">
+            <a:avLst/>
+          </a:prstGeom>
+          <a:noFill/>
+          <a:ln/>
+        </p:spPr>
+        <p:txBody>
+          <a:bodyPr wrap="square" lIns="0" tIns="0" rIns="0" bIns="0" rtlCol="0" anchor="ctr"/>
+          <a:lstStyle/>
+          <a:p>
+            <a:pPr indent="0" marL="0">
+              <a:buNone/>
+            </a:pPr>
+            <a:r>
+              <a:rPr lang="en-US" sz="1200" dirty="0">
+                <a:solidFill>
+                  <a:srgbClr val="707070"/>
+                </a:solidFill>
+                <a:latin typeface="Pretendard Light" pitchFamily="34" charset="0"/>
+                <a:ea typeface="Pretendard Light" pitchFamily="34" charset="-122"/>
+                <a:cs typeface="Pretendard Light" pitchFamily="34" charset="-120"/>
+              </a:rPr>
+              <a:t>매 프레임 직전 한 장이 실제로 걸린 시간을 잰 값이 들어온다.</a:t>
+            </a:r>
+            <a:endParaRPr lang="en-US" sz="1200" dirty="0"/>
+          </a:p>
+        </p:txBody>
+      </p:sp>
+      <p:sp>
+        <p:nvSpPr>
+          <p:cNvPr id="31" name="Shape 29"/>
+          <p:cNvSpPr/>
+          <p:nvPr/>
+        </p:nvSpPr>
+        <p:spPr>
+          <a:xfrm>
+            <a:off x="7635240" y="1965960"/>
+            <a:ext cx="3797503" cy="2514600"/>
           </a:xfrm>
           <a:prstGeom prst="roundRect">
             <a:avLst>
-              <a:gd name="adj" fmla="val 10438"/>
+              <a:gd name="adj" fmla="val 9091"/>
             </a:avLst>
           </a:prstGeom>
           <a:solidFill>
-            <a:srgbClr val="F3F3F3"/>
+            <a:srgbClr val="141414"/>
           </a:solidFill>
           <a:ln w="12700">
             <a:solidFill>
@@ -2836,801 +3605,227 @@
       </p:sp>
       <p:sp>
         <p:nvSpPr>
-          <p:cNvPr id="11" name="Text 9"/>
-          <p:cNvSpPr txBox="1"/>
-          <p:nvPr/>
-        </p:nvSpPr>
-        <p:spPr>
-          <a:xfrm>
-            <a:off x="6793992" y="2532888"/>
-            <a:ext cx="4382719" cy="1060704"/>
-          </a:xfrm>
-          <a:prstGeom prst="rect">
-            <a:avLst/>
-          </a:prstGeom>
-          <a:noFill/>
-          <a:ln/>
-        </p:spPr>
-        <p:txBody>
-          <a:bodyPr wrap="square" lIns="0" tIns="0" rIns="0" bIns="0" rtlCol="0" anchor="t"/>
-          <a:lstStyle/>
-          <a:p>
-            <a:pPr indent="0" marL="0">
-              <a:lnSpc>
-                <a:spcPct val="132000"/>
-              </a:lnSpc>
-              <a:buNone/>
-            </a:pPr>
-            <a:r>
-              <a:rPr lang="en-US" sz="1150" b="1" dirty="0">
-                <a:solidFill>
-                  <a:srgbClr val="141414"/>
-                </a:solidFill>
-                <a:latin typeface="Consolas" pitchFamily="34" charset="0"/>
-                <a:ea typeface="Consolas" pitchFamily="34" charset="-122"/>
-                <a:cs typeface="Consolas" pitchFamily="34" charset="-120"/>
-              </a:rPr>
-              <a:t>[SerializeField] float moveSpeed = 3f;</a:t>
-            </a:r>
-            <a:endParaRPr lang="en-US" sz="1150" dirty="0"/>
-          </a:p>
-          <a:p>
-            <a:pPr indent="0" marL="0">
-              <a:lnSpc>
-                <a:spcPct val="132000"/>
-              </a:lnSpc>
-              <a:buNone/>
-            </a:pPr>
-            <a:r>
-              <a:rPr lang="en-US" sz="1150" dirty="0">
-                <a:solidFill>
-                  <a:srgbClr val="141414"/>
-                </a:solidFill>
-                <a:latin typeface="Consolas" pitchFamily="34" charset="0"/>
-                <a:ea typeface="Consolas" pitchFamily="34" charset="-122"/>
-                <a:cs typeface="Consolas" pitchFamily="34" charset="-120"/>
-              </a:rPr>
-              <a:t> </a:t>
-            </a:r>
-            <a:endParaRPr lang="en-US" sz="1150" dirty="0"/>
-          </a:p>
-          <a:p>
-            <a:pPr indent="0" marL="0">
-              <a:lnSpc>
-                <a:spcPct val="132000"/>
-              </a:lnSpc>
-              <a:buNone/>
-            </a:pPr>
-            <a:r>
-              <a:rPr lang="en-US" sz="1150" b="1" dirty="0">
-                <a:solidFill>
-                  <a:srgbClr val="141414"/>
-                </a:solidFill>
-                <a:latin typeface="Consolas" pitchFamily="34" charset="0"/>
-                <a:ea typeface="Consolas" pitchFamily="34" charset="-122"/>
-                <a:cs typeface="Consolas" pitchFamily="34" charset="-120"/>
-              </a:rPr>
-              <a:t>position + moveDir * moveSpeed * Time.deltaTime;</a:t>
-            </a:r>
-            <a:endParaRPr lang="en-US" sz="1150" dirty="0"/>
-          </a:p>
-        </p:txBody>
-      </p:sp>
-      <p:sp>
-        <p:nvSpPr>
-          <p:cNvPr id="12" name="Text 10"/>
-          <p:cNvSpPr txBox="1"/>
-          <p:nvPr/>
-        </p:nvSpPr>
-        <p:spPr>
-          <a:xfrm>
-            <a:off x="758952" y="4160520"/>
-            <a:ext cx="2743200" cy="274320"/>
-          </a:xfrm>
-          <a:prstGeom prst="rect">
-            <a:avLst/>
-          </a:prstGeom>
-          <a:noFill/>
-          <a:ln/>
-        </p:spPr>
-        <p:txBody>
-          <a:bodyPr wrap="square" lIns="0" tIns="0" rIns="0" bIns="0" rtlCol="0" anchor="ctr"/>
-          <a:lstStyle/>
-          <a:p>
-            <a:pPr indent="0" marL="0">
-              <a:buNone/>
-            </a:pPr>
-            <a:r>
-              <a:rPr lang="en-US" sz="950" dirty="0">
-                <a:solidFill>
-                  <a:srgbClr val="707070"/>
+          <p:cNvPr id="32" name="Text 30"/>
+          <p:cNvSpPr txBox="1"/>
+          <p:nvPr/>
+        </p:nvSpPr>
+        <p:spPr>
+          <a:xfrm>
+            <a:off x="8001000" y="2286000"/>
+            <a:ext cx="3065983" cy="402336"/>
+          </a:xfrm>
+          <a:prstGeom prst="rect">
+            <a:avLst/>
+          </a:prstGeom>
+          <a:noFill/>
+          <a:ln/>
+        </p:spPr>
+        <p:txBody>
+          <a:bodyPr wrap="square" lIns="0" tIns="0" rIns="0" bIns="0" rtlCol="0" anchor="ctr"/>
+          <a:lstStyle/>
+          <a:p>
+            <a:pPr indent="0" marL="0">
+              <a:buNone/>
+            </a:pPr>
+            <a:r>
+              <a:rPr lang="en-US" sz="1900" dirty="0">
+                <a:solidFill>
+                  <a:srgbClr val="FFFFFF"/>
                 </a:solidFill>
                 <a:latin typeface="Pretendard SemiBold" pitchFamily="34" charset="0"/>
                 <a:ea typeface="Pretendard SemiBold" pitchFamily="34" charset="-122"/>
                 <a:cs typeface="Pretendard SemiBold" pitchFamily="34" charset="-120"/>
               </a:rPr>
-              <a:t>스크립트</a:t>
-            </a:r>
-            <a:endParaRPr lang="en-US" sz="950" dirty="0"/>
-          </a:p>
-        </p:txBody>
-      </p:sp>
-      <p:sp>
-        <p:nvSpPr>
-          <p:cNvPr id="13" name="Text 11"/>
-          <p:cNvSpPr txBox="1"/>
-          <p:nvPr/>
-        </p:nvSpPr>
-        <p:spPr>
-          <a:xfrm>
-            <a:off x="3502152" y="4160520"/>
-            <a:ext cx="3108960" cy="274320"/>
-          </a:xfrm>
-          <a:prstGeom prst="rect">
-            <a:avLst/>
-          </a:prstGeom>
-          <a:noFill/>
-          <a:ln/>
-        </p:spPr>
-        <p:txBody>
-          <a:bodyPr wrap="square" lIns="0" tIns="0" rIns="0" bIns="0" rtlCol="0" anchor="ctr"/>
-          <a:lstStyle/>
-          <a:p>
-            <a:pPr indent="0" marL="0">
-              <a:buNone/>
-            </a:pPr>
-            <a:r>
-              <a:rPr lang="en-US" sz="950" dirty="0">
-                <a:solidFill>
-                  <a:srgbClr val="707070"/>
+              <a:t>렉이 걸려도 보정된다.</a:t>
+            </a:r>
+            <a:endParaRPr lang="en-US" sz="1900" dirty="0"/>
+          </a:p>
+        </p:txBody>
+      </p:sp>
+      <p:sp>
+        <p:nvSpPr>
+          <p:cNvPr id="33" name="Text 31"/>
+          <p:cNvSpPr txBox="1"/>
+          <p:nvPr/>
+        </p:nvSpPr>
+        <p:spPr>
+          <a:xfrm>
+            <a:off x="8001000" y="2788920"/>
+            <a:ext cx="3065983" cy="822960"/>
+          </a:xfrm>
+          <a:prstGeom prst="rect">
+            <a:avLst/>
+          </a:prstGeom>
+          <a:noFill/>
+          <a:ln/>
+        </p:spPr>
+        <p:txBody>
+          <a:bodyPr wrap="square" lIns="0" tIns="0" rIns="0" bIns="0" rtlCol="0" anchor="ctr"/>
+          <a:lstStyle/>
+          <a:p>
+            <a:pPr indent="0" marL="0">
+              <a:lnSpc>
+                <a:spcPct val="138000"/>
+              </a:lnSpc>
+              <a:buNone/>
+            </a:pPr>
+            <a:r>
+              <a:rPr lang="en-US" sz="1200" dirty="0">
+                <a:solidFill>
+                  <a:srgbClr val="FFFFFF"/>
+                </a:solidFill>
+                <a:latin typeface="Pretendard" pitchFamily="34" charset="0"/>
+                <a:ea typeface="Pretendard" pitchFamily="34" charset="-122"/>
+                <a:cs typeface="Pretendard" pitchFamily="34" charset="-120"/>
+              </a:rPr>
+              <a:t>두 배 느린 프레임에는 deltaTime 도 두 배로 들어온다. 그러니 그만큼 멀리 움직인다.</a:t>
+            </a:r>
+            <a:endParaRPr lang="en-US" sz="1200" dirty="0"/>
+          </a:p>
+        </p:txBody>
+      </p:sp>
+      <p:sp>
+        <p:nvSpPr>
+          <p:cNvPr id="34" name="Shape 32"/>
+          <p:cNvSpPr/>
+          <p:nvPr/>
+        </p:nvSpPr>
+        <p:spPr>
+          <a:xfrm>
+            <a:off x="8001000" y="3749040"/>
+            <a:ext cx="3065983" cy="0"/>
+          </a:xfrm>
+          <a:prstGeom prst="line">
+            <a:avLst/>
+          </a:prstGeom>
+          <a:noFill/>
+          <a:ln w="12700">
+            <a:solidFill>
+              <a:srgbClr val="262626"/>
+            </a:solidFill>
+            <a:prstDash val="solid"/>
+          </a:ln>
+        </p:spPr>
+      </p:sp>
+      <p:sp>
+        <p:nvSpPr>
+          <p:cNvPr id="35" name="Text 33"/>
+          <p:cNvSpPr txBox="1"/>
+          <p:nvPr/>
+        </p:nvSpPr>
+        <p:spPr>
+          <a:xfrm>
+            <a:off x="8001000" y="3913632"/>
+            <a:ext cx="3065983" cy="402336"/>
+          </a:xfrm>
+          <a:prstGeom prst="rect">
+            <a:avLst/>
+          </a:prstGeom>
+          <a:noFill/>
+          <a:ln/>
+        </p:spPr>
+        <p:txBody>
+          <a:bodyPr wrap="square" lIns="0" tIns="0" rIns="0" bIns="0" rtlCol="0" anchor="ctr"/>
+          <a:lstStyle/>
+          <a:p>
+            <a:pPr indent="0" marL="0">
+              <a:buNone/>
+            </a:pPr>
+            <a:r>
+              <a:rPr lang="en-US" sz="1200" dirty="0">
+                <a:solidFill>
+                  <a:srgbClr val="ADADAD"/>
+                </a:solidFill>
+                <a:latin typeface="Pretendard Light" pitchFamily="34" charset="0"/>
+                <a:ea typeface="Pretendard Light" pitchFamily="34" charset="-122"/>
+                <a:cs typeface="Pretendard Light" pitchFamily="34" charset="-120"/>
+              </a:rPr>
+              <a:t>프레임이 균일할 필요가 없다.</a:t>
+            </a:r>
+            <a:endParaRPr lang="en-US" sz="1200" dirty="0"/>
+          </a:p>
+        </p:txBody>
+      </p:sp>
+      <p:sp>
+        <p:nvSpPr>
+          <p:cNvPr id="36" name="Text 34"/>
+          <p:cNvSpPr txBox="1"/>
+          <p:nvPr/>
+        </p:nvSpPr>
+        <p:spPr>
+          <a:xfrm>
+            <a:off x="7635240" y="4754880"/>
+            <a:ext cx="3797503" cy="402336"/>
+          </a:xfrm>
+          <a:prstGeom prst="rect">
+            <a:avLst/>
+          </a:prstGeom>
+          <a:noFill/>
+          <a:ln/>
+        </p:spPr>
+        <p:txBody>
+          <a:bodyPr wrap="square" lIns="0" tIns="0" rIns="0" bIns="0" rtlCol="0" anchor="ctr"/>
+          <a:lstStyle/>
+          <a:p>
+            <a:pPr indent="0" marL="0">
+              <a:buNone/>
+            </a:pPr>
+            <a:r>
+              <a:rPr lang="en-US" sz="1400" dirty="0">
+                <a:solidFill>
+                  <a:srgbClr val="141414"/>
                 </a:solidFill>
                 <a:latin typeface="Pretendard SemiBold" pitchFamily="34" charset="0"/>
                 <a:ea typeface="Pretendard SemiBold" pitchFamily="34" charset="-122"/>
                 <a:cs typeface="Pretendard SemiBold" pitchFamily="34" charset="-120"/>
               </a:rPr>
-              <a:t>이전</a:t>
-            </a:r>
-            <a:endParaRPr lang="en-US" sz="950" dirty="0"/>
-          </a:p>
-        </p:txBody>
-      </p:sp>
-      <p:sp>
-        <p:nvSpPr>
-          <p:cNvPr id="14" name="Text 12"/>
-          <p:cNvSpPr txBox="1"/>
-          <p:nvPr/>
-        </p:nvSpPr>
-        <p:spPr>
-          <a:xfrm>
-            <a:off x="6611112" y="4160520"/>
-            <a:ext cx="3108960" cy="274320"/>
-          </a:xfrm>
-          <a:prstGeom prst="rect">
-            <a:avLst/>
-          </a:prstGeom>
-          <a:noFill/>
-          <a:ln/>
-        </p:spPr>
-        <p:txBody>
-          <a:bodyPr wrap="square" lIns="0" tIns="0" rIns="0" bIns="0" rtlCol="0" anchor="ctr"/>
-          <a:lstStyle/>
-          <a:p>
-            <a:pPr indent="0" marL="0">
-              <a:buNone/>
-            </a:pPr>
-            <a:r>
-              <a:rPr lang="en-US" sz="950" dirty="0">
+              <a:t>안 곱하면 렉 걸린 만큼 손해를 본다.</a:t>
+            </a:r>
+            <a:endParaRPr lang="en-US" sz="1400" dirty="0"/>
+          </a:p>
+        </p:txBody>
+      </p:sp>
+      <p:sp>
+        <p:nvSpPr>
+          <p:cNvPr id="37" name="Text 35"/>
+          <p:cNvSpPr txBox="1"/>
+          <p:nvPr/>
+        </p:nvSpPr>
+        <p:spPr>
+          <a:xfrm>
+            <a:off x="7635240" y="5193792"/>
+            <a:ext cx="3797503" cy="822960"/>
+          </a:xfrm>
+          <a:prstGeom prst="rect">
+            <a:avLst/>
+          </a:prstGeom>
+          <a:noFill/>
+          <a:ln/>
+        </p:spPr>
+        <p:txBody>
+          <a:bodyPr wrap="square" lIns="0" tIns="0" rIns="0" bIns="0" rtlCol="0" anchor="ctr"/>
+          <a:lstStyle/>
+          <a:p>
+            <a:pPr indent="0" marL="0">
+              <a:lnSpc>
+                <a:spcPct val="138000"/>
+              </a:lnSpc>
+              <a:buNone/>
+            </a:pPr>
+            <a:r>
+              <a:rPr lang="en-US" sz="1200" dirty="0">
                 <a:solidFill>
                   <a:srgbClr val="707070"/>
                 </a:solidFill>
-                <a:latin typeface="Pretendard SemiBold" pitchFamily="34" charset="0"/>
-                <a:ea typeface="Pretendard SemiBold" pitchFamily="34" charset="-122"/>
-                <a:cs typeface="Pretendard SemiBold" pitchFamily="34" charset="-120"/>
-              </a:rPr>
-              <a:t>이후</a:t>
-            </a:r>
-            <a:endParaRPr lang="en-US" sz="950" dirty="0"/>
-          </a:p>
-        </p:txBody>
-      </p:sp>
-      <p:sp>
-        <p:nvSpPr>
-          <p:cNvPr id="15" name="Text 13"/>
-          <p:cNvSpPr txBox="1"/>
-          <p:nvPr/>
-        </p:nvSpPr>
-        <p:spPr>
-          <a:xfrm>
-            <a:off x="9720072" y="4160520"/>
-            <a:ext cx="2606040" cy="274320"/>
-          </a:xfrm>
-          <a:prstGeom prst="rect">
-            <a:avLst/>
-          </a:prstGeom>
-          <a:noFill/>
-          <a:ln/>
-        </p:spPr>
-        <p:txBody>
-          <a:bodyPr wrap="square" lIns="0" tIns="0" rIns="0" bIns="0" rtlCol="0" anchor="ctr"/>
-          <a:lstStyle/>
-          <a:p>
-            <a:pPr indent="0" marL="0">
-              <a:buNone/>
-            </a:pPr>
-            <a:r>
-              <a:rPr lang="en-US" sz="950" dirty="0">
-                <a:solidFill>
-                  <a:srgbClr val="707070"/>
-                </a:solidFill>
-                <a:latin typeface="Pretendard SemiBold" pitchFamily="34" charset="0"/>
-                <a:ea typeface="Pretendard SemiBold" pitchFamily="34" charset="-122"/>
-                <a:cs typeface="Pretendard SemiBold" pitchFamily="34" charset="-120"/>
-              </a:rPr>
-              <a:t>뜻</a:t>
-            </a:r>
-            <a:endParaRPr lang="en-US" sz="950" dirty="0"/>
-          </a:p>
-        </p:txBody>
-      </p:sp>
-      <p:sp>
-        <p:nvSpPr>
-          <p:cNvPr id="16" name="Shape 14"/>
-          <p:cNvSpPr/>
-          <p:nvPr/>
-        </p:nvSpPr>
-        <p:spPr>
-          <a:xfrm>
-            <a:off x="758952" y="4562856"/>
-            <a:ext cx="10673791" cy="0"/>
-          </a:xfrm>
-          <a:prstGeom prst="line">
-            <a:avLst/>
-          </a:prstGeom>
-          <a:noFill/>
-          <a:ln w="12700">
-            <a:solidFill>
-              <a:srgbClr val="E0E0E0"/>
-            </a:solidFill>
-            <a:prstDash val="solid"/>
-          </a:ln>
-        </p:spPr>
-      </p:sp>
-      <p:sp>
-        <p:nvSpPr>
-          <p:cNvPr id="17" name="Text 15"/>
-          <p:cNvSpPr txBox="1"/>
-          <p:nvPr/>
-        </p:nvSpPr>
-        <p:spPr>
-          <a:xfrm>
-            <a:off x="758952" y="4727448"/>
-            <a:ext cx="2743200" cy="365760"/>
-          </a:xfrm>
-          <a:prstGeom prst="rect">
-            <a:avLst/>
-          </a:prstGeom>
-          <a:noFill/>
-          <a:ln/>
-        </p:spPr>
-        <p:txBody>
-          <a:bodyPr wrap="square" lIns="0" tIns="0" rIns="0" bIns="0" rtlCol="0" anchor="ctr"/>
-          <a:lstStyle/>
-          <a:p>
-            <a:pPr indent="0" marL="0">
-              <a:buNone/>
-            </a:pPr>
-            <a:r>
-              <a:rPr lang="en-US" sz="1200" dirty="0">
-                <a:solidFill>
-                  <a:srgbClr val="141414"/>
-                </a:solidFill>
-                <a:latin typeface="Consolas" pitchFamily="34" charset="0"/>
-                <a:ea typeface="Consolas" pitchFamily="34" charset="-122"/>
-                <a:cs typeface="Consolas" pitchFamily="34" charset="-120"/>
-              </a:rPr>
-              <a:t>Spinner</a:t>
+                <a:latin typeface="Pretendard Light" pitchFamily="34" charset="0"/>
+                <a:ea typeface="Pretendard Light" pitchFamily="34" charset="-122"/>
+                <a:cs typeface="Pretendard Light" pitchFamily="34" charset="-120"/>
+              </a:rPr>
+              <a:t>곱하면 저절로 보정된다. 1초 뒤 위치는 렉이 있든 없든 똑같다.</a:t>
             </a:r>
             <a:endParaRPr lang="en-US" sz="1200" dirty="0"/>
           </a:p>
         </p:txBody>
-      </p:sp>
-      <p:sp>
-        <p:nvSpPr>
-          <p:cNvPr id="18" name="Text 16"/>
-          <p:cNvSpPr txBox="1"/>
-          <p:nvPr/>
-        </p:nvSpPr>
-        <p:spPr>
-          <a:xfrm>
-            <a:off x="3502152" y="4727448"/>
-            <a:ext cx="3108960" cy="365760"/>
-          </a:xfrm>
-          <a:prstGeom prst="rect">
-            <a:avLst/>
-          </a:prstGeom>
-          <a:noFill/>
-          <a:ln/>
-        </p:spPr>
-        <p:txBody>
-          <a:bodyPr wrap="square" lIns="0" tIns="0" rIns="0" bIns="0" rtlCol="0" anchor="ctr"/>
-          <a:lstStyle/>
-          <a:p>
-            <a:pPr indent="0" marL="0">
-              <a:buNone/>
-            </a:pPr>
-            <a:r>
-              <a:rPr lang="en-US" sz="1200" dirty="0">
-                <a:solidFill>
-                  <a:srgbClr val="707070"/>
-                </a:solidFill>
-                <a:latin typeface="Consolas" pitchFamily="34" charset="0"/>
-                <a:ea typeface="Consolas" pitchFamily="34" charset="-122"/>
-                <a:cs typeface="Consolas" pitchFamily="34" charset="-120"/>
-              </a:rPr>
-              <a:t>rotateStep 1.5</a:t>
-            </a:r>
-            <a:endParaRPr lang="en-US" sz="1200" dirty="0"/>
-          </a:p>
-        </p:txBody>
-      </p:sp>
-      <p:sp>
-        <p:nvSpPr>
-          <p:cNvPr id="19" name="Text 17"/>
-          <p:cNvSpPr txBox="1"/>
-          <p:nvPr/>
-        </p:nvSpPr>
-        <p:spPr>
-          <a:xfrm>
-            <a:off x="6611112" y="4727448"/>
-            <a:ext cx="3108960" cy="365760"/>
-          </a:xfrm>
-          <a:prstGeom prst="rect">
-            <a:avLst/>
-          </a:prstGeom>
-          <a:noFill/>
-          <a:ln/>
-        </p:spPr>
-        <p:txBody>
-          <a:bodyPr wrap="square" lIns="0" tIns="0" rIns="0" bIns="0" rtlCol="0" anchor="ctr"/>
-          <a:lstStyle/>
-          <a:p>
-            <a:pPr indent="0" marL="0">
-              <a:buNone/>
-            </a:pPr>
-            <a:r>
-              <a:rPr lang="en-US" sz="1200" dirty="0">
-                <a:solidFill>
-                  <a:srgbClr val="141414"/>
-                </a:solidFill>
-                <a:latin typeface="Consolas" pitchFamily="34" charset="0"/>
-                <a:ea typeface="Consolas" pitchFamily="34" charset="-122"/>
-                <a:cs typeface="Consolas" pitchFamily="34" charset="-120"/>
-              </a:rPr>
-              <a:t>rotateSpeed 90</a:t>
-            </a:r>
-            <a:endParaRPr lang="en-US" sz="1200" dirty="0"/>
-          </a:p>
-        </p:txBody>
-      </p:sp>
-      <p:sp>
-        <p:nvSpPr>
-          <p:cNvPr id="20" name="Text 18"/>
-          <p:cNvSpPr txBox="1"/>
-          <p:nvPr/>
-        </p:nvSpPr>
-        <p:spPr>
-          <a:xfrm>
-            <a:off x="9720072" y="4727448"/>
-            <a:ext cx="2606040" cy="365760"/>
-          </a:xfrm>
-          <a:prstGeom prst="rect">
-            <a:avLst/>
-          </a:prstGeom>
-          <a:noFill/>
-          <a:ln/>
-        </p:spPr>
-        <p:txBody>
-          <a:bodyPr wrap="square" lIns="0" tIns="0" rIns="0" bIns="0" rtlCol="0" anchor="ctr"/>
-          <a:lstStyle/>
-          <a:p>
-            <a:pPr indent="0" marL="0">
-              <a:buNone/>
-            </a:pPr>
-            <a:r>
-              <a:rPr lang="en-US" sz="1200" dirty="0">
-                <a:solidFill>
-                  <a:srgbClr val="707070"/>
-                </a:solidFill>
-                <a:latin typeface="Pretendard" pitchFamily="34" charset="0"/>
-                <a:ea typeface="Pretendard" pitchFamily="34" charset="-122"/>
-                <a:cs typeface="Pretendard" pitchFamily="34" charset="-120"/>
-              </a:rPr>
-              <a:t>4초에 한 바퀴</a:t>
-            </a:r>
-            <a:endParaRPr lang="en-US" sz="1200" dirty="0"/>
-          </a:p>
-        </p:txBody>
-      </p:sp>
-      <p:sp>
-        <p:nvSpPr>
-          <p:cNvPr id="21" name="Shape 19"/>
-          <p:cNvSpPr/>
-          <p:nvPr/>
-        </p:nvSpPr>
-        <p:spPr>
-          <a:xfrm>
-            <a:off x="758952" y="5202936"/>
-            <a:ext cx="10673791" cy="0"/>
-          </a:xfrm>
-          <a:prstGeom prst="line">
-            <a:avLst/>
-          </a:prstGeom>
-          <a:noFill/>
-          <a:ln w="12700">
-            <a:solidFill>
-              <a:srgbClr val="F0F0F0"/>
-            </a:solidFill>
-            <a:prstDash val="solid"/>
-          </a:ln>
-        </p:spPr>
-      </p:sp>
-      <p:sp>
-        <p:nvSpPr>
-          <p:cNvPr id="22" name="Text 20"/>
-          <p:cNvSpPr txBox="1"/>
-          <p:nvPr/>
-        </p:nvSpPr>
-        <p:spPr>
-          <a:xfrm>
-            <a:off x="758952" y="5312664"/>
-            <a:ext cx="2743200" cy="365760"/>
-          </a:xfrm>
-          <a:prstGeom prst="rect">
-            <a:avLst/>
-          </a:prstGeom>
-          <a:noFill/>
-          <a:ln/>
-        </p:spPr>
-        <p:txBody>
-          <a:bodyPr wrap="square" lIns="0" tIns="0" rIns="0" bIns="0" rtlCol="0" anchor="ctr"/>
-          <a:lstStyle/>
-          <a:p>
-            <a:pPr indent="0" marL="0">
-              <a:buNone/>
-            </a:pPr>
-            <a:r>
-              <a:rPr lang="en-US" sz="1200" dirty="0">
-                <a:solidFill>
-                  <a:srgbClr val="141414"/>
-                </a:solidFill>
-                <a:latin typeface="Consolas" pitchFamily="34" charset="0"/>
-                <a:ea typeface="Consolas" pitchFamily="34" charset="-122"/>
-                <a:cs typeface="Consolas" pitchFamily="34" charset="-120"/>
-              </a:rPr>
-              <a:t>Bouncer</a:t>
-            </a:r>
-            <a:endParaRPr lang="en-US" sz="1200" dirty="0"/>
-          </a:p>
-        </p:txBody>
-      </p:sp>
-      <p:sp>
-        <p:nvSpPr>
-          <p:cNvPr id="23" name="Text 21"/>
-          <p:cNvSpPr txBox="1"/>
-          <p:nvPr/>
-        </p:nvSpPr>
-        <p:spPr>
-          <a:xfrm>
-            <a:off x="3502152" y="5312664"/>
-            <a:ext cx="3108960" cy="365760"/>
-          </a:xfrm>
-          <a:prstGeom prst="rect">
-            <a:avLst/>
-          </a:prstGeom>
-          <a:noFill/>
-          <a:ln/>
-        </p:spPr>
-        <p:txBody>
-          <a:bodyPr wrap="square" lIns="0" tIns="0" rIns="0" bIns="0" rtlCol="0" anchor="ctr"/>
-          <a:lstStyle/>
-          <a:p>
-            <a:pPr indent="0" marL="0">
-              <a:buNone/>
-            </a:pPr>
-            <a:r>
-              <a:rPr lang="en-US" sz="1200" dirty="0">
-                <a:solidFill>
-                  <a:srgbClr val="707070"/>
-                </a:solidFill>
-                <a:latin typeface="Consolas" pitchFamily="34" charset="0"/>
-                <a:ea typeface="Consolas" pitchFamily="34" charset="-122"/>
-                <a:cs typeface="Consolas" pitchFamily="34" charset="-120"/>
-              </a:rPr>
-              <a:t>scaleStep 0.01</a:t>
-            </a:r>
-            <a:endParaRPr lang="en-US" sz="1200" dirty="0"/>
-          </a:p>
-        </p:txBody>
-      </p:sp>
-      <p:sp>
-        <p:nvSpPr>
-          <p:cNvPr id="24" name="Text 22"/>
-          <p:cNvSpPr txBox="1"/>
-          <p:nvPr/>
-        </p:nvSpPr>
-        <p:spPr>
-          <a:xfrm>
-            <a:off x="6611112" y="5312664"/>
-            <a:ext cx="3108960" cy="365760"/>
-          </a:xfrm>
-          <a:prstGeom prst="rect">
-            <a:avLst/>
-          </a:prstGeom>
-          <a:noFill/>
-          <a:ln/>
-        </p:spPr>
-        <p:txBody>
-          <a:bodyPr wrap="square" lIns="0" tIns="0" rIns="0" bIns="0" rtlCol="0" anchor="ctr"/>
-          <a:lstStyle/>
-          <a:p>
-            <a:pPr indent="0" marL="0">
-              <a:buNone/>
-            </a:pPr>
-            <a:r>
-              <a:rPr lang="en-US" sz="1200" dirty="0">
-                <a:solidFill>
-                  <a:srgbClr val="141414"/>
-                </a:solidFill>
-                <a:latin typeface="Consolas" pitchFamily="34" charset="0"/>
-                <a:ea typeface="Consolas" pitchFamily="34" charset="-122"/>
-                <a:cs typeface="Consolas" pitchFamily="34" charset="-120"/>
-              </a:rPr>
-              <a:t>scaleSpeed 0.5</a:t>
-            </a:r>
-            <a:endParaRPr lang="en-US" sz="1200" dirty="0"/>
-          </a:p>
-        </p:txBody>
-      </p:sp>
-      <p:sp>
-        <p:nvSpPr>
-          <p:cNvPr id="25" name="Text 23"/>
-          <p:cNvSpPr txBox="1"/>
-          <p:nvPr/>
-        </p:nvSpPr>
-        <p:spPr>
-          <a:xfrm>
-            <a:off x="9720072" y="5312664"/>
-            <a:ext cx="2606040" cy="365760"/>
-          </a:xfrm>
-          <a:prstGeom prst="rect">
-            <a:avLst/>
-          </a:prstGeom>
-          <a:noFill/>
-          <a:ln/>
-        </p:spPr>
-        <p:txBody>
-          <a:bodyPr wrap="square" lIns="0" tIns="0" rIns="0" bIns="0" rtlCol="0" anchor="ctr"/>
-          <a:lstStyle/>
-          <a:p>
-            <a:pPr indent="0" marL="0">
-              <a:buNone/>
-            </a:pPr>
-            <a:r>
-              <a:rPr lang="en-US" sz="1200" dirty="0">
-                <a:solidFill>
-                  <a:srgbClr val="707070"/>
-                </a:solidFill>
-                <a:latin typeface="Pretendard" pitchFamily="34" charset="0"/>
-                <a:ea typeface="Pretendard" pitchFamily="34" charset="-122"/>
-                <a:cs typeface="Pretendard" pitchFamily="34" charset="-120"/>
-              </a:rPr>
-              <a:t>1초에 0.5씩</a:t>
-            </a:r>
-            <a:endParaRPr lang="en-US" sz="1200" dirty="0"/>
-          </a:p>
-        </p:txBody>
-      </p:sp>
-      <p:sp>
-        <p:nvSpPr>
-          <p:cNvPr id="26" name="Shape 24"/>
-          <p:cNvSpPr/>
-          <p:nvPr/>
-        </p:nvSpPr>
-        <p:spPr>
-          <a:xfrm>
-            <a:off x="758952" y="5788152"/>
-            <a:ext cx="10673791" cy="0"/>
-          </a:xfrm>
-          <a:prstGeom prst="line">
-            <a:avLst/>
-          </a:prstGeom>
-          <a:noFill/>
-          <a:ln w="12700">
-            <a:solidFill>
-              <a:srgbClr val="F0F0F0"/>
-            </a:solidFill>
-            <a:prstDash val="solid"/>
-          </a:ln>
-        </p:spPr>
-      </p:sp>
-      <p:sp>
-        <p:nvSpPr>
-          <p:cNvPr id="27" name="Text 25"/>
-          <p:cNvSpPr txBox="1"/>
-          <p:nvPr/>
-        </p:nvSpPr>
-        <p:spPr>
-          <a:xfrm>
-            <a:off x="758952" y="5897880"/>
-            <a:ext cx="2743200" cy="365760"/>
-          </a:xfrm>
-          <a:prstGeom prst="rect">
-            <a:avLst/>
-          </a:prstGeom>
-          <a:noFill/>
-          <a:ln/>
-        </p:spPr>
-        <p:txBody>
-          <a:bodyPr wrap="square" lIns="0" tIns="0" rIns="0" bIns="0" rtlCol="0" anchor="ctr"/>
-          <a:lstStyle/>
-          <a:p>
-            <a:pPr indent="0" marL="0">
-              <a:buNone/>
-            </a:pPr>
-            <a:r>
-              <a:rPr lang="en-US" sz="1200" dirty="0">
-                <a:solidFill>
-                  <a:srgbClr val="141414"/>
-                </a:solidFill>
-                <a:latin typeface="Consolas" pitchFamily="34" charset="0"/>
-                <a:ea typeface="Consolas" pitchFamily="34" charset="-122"/>
-                <a:cs typeface="Consolas" pitchFamily="34" charset="-120"/>
-              </a:rPr>
-              <a:t>Mover</a:t>
-            </a:r>
-            <a:endParaRPr lang="en-US" sz="1200" dirty="0"/>
-          </a:p>
-        </p:txBody>
-      </p:sp>
-      <p:sp>
-        <p:nvSpPr>
-          <p:cNvPr id="28" name="Text 26"/>
-          <p:cNvSpPr txBox="1"/>
-          <p:nvPr/>
-        </p:nvSpPr>
-        <p:spPr>
-          <a:xfrm>
-            <a:off x="3502152" y="5897880"/>
-            <a:ext cx="3108960" cy="365760"/>
-          </a:xfrm>
-          <a:prstGeom prst="rect">
-            <a:avLst/>
-          </a:prstGeom>
-          <a:noFill/>
-          <a:ln/>
-        </p:spPr>
-        <p:txBody>
-          <a:bodyPr wrap="square" lIns="0" tIns="0" rIns="0" bIns="0" rtlCol="0" anchor="ctr"/>
-          <a:lstStyle/>
-          <a:p>
-            <a:pPr indent="0" marL="0">
-              <a:buNone/>
-            </a:pPr>
-            <a:r>
-              <a:rPr lang="en-US" sz="1200" dirty="0">
-                <a:solidFill>
-                  <a:srgbClr val="707070"/>
-                </a:solidFill>
-                <a:latin typeface="Consolas" pitchFamily="34" charset="0"/>
-                <a:ea typeface="Consolas" pitchFamily="34" charset="-122"/>
-                <a:cs typeface="Consolas" pitchFamily="34" charset="-120"/>
-              </a:rPr>
-              <a:t>moveStep 0.05</a:t>
-            </a:r>
-            <a:endParaRPr lang="en-US" sz="1200" dirty="0"/>
-          </a:p>
-        </p:txBody>
-      </p:sp>
-      <p:sp>
-        <p:nvSpPr>
-          <p:cNvPr id="29" name="Text 27"/>
-          <p:cNvSpPr txBox="1"/>
-          <p:nvPr/>
-        </p:nvSpPr>
-        <p:spPr>
-          <a:xfrm>
-            <a:off x="6611112" y="5897880"/>
-            <a:ext cx="3108960" cy="365760"/>
-          </a:xfrm>
-          <a:prstGeom prst="rect">
-            <a:avLst/>
-          </a:prstGeom>
-          <a:noFill/>
-          <a:ln/>
-        </p:spPr>
-        <p:txBody>
-          <a:bodyPr wrap="square" lIns="0" tIns="0" rIns="0" bIns="0" rtlCol="0" anchor="ctr"/>
-          <a:lstStyle/>
-          <a:p>
-            <a:pPr indent="0" marL="0">
-              <a:buNone/>
-            </a:pPr>
-            <a:r>
-              <a:rPr lang="en-US" sz="1200" dirty="0">
-                <a:solidFill>
-                  <a:srgbClr val="141414"/>
-                </a:solidFill>
-                <a:latin typeface="Consolas" pitchFamily="34" charset="0"/>
-                <a:ea typeface="Consolas" pitchFamily="34" charset="-122"/>
-                <a:cs typeface="Consolas" pitchFamily="34" charset="-120"/>
-              </a:rPr>
-              <a:t>moveSpeed 3</a:t>
-            </a:r>
-            <a:endParaRPr lang="en-US" sz="1200" dirty="0"/>
-          </a:p>
-        </p:txBody>
-      </p:sp>
-      <p:sp>
-        <p:nvSpPr>
-          <p:cNvPr id="30" name="Text 28"/>
-          <p:cNvSpPr txBox="1"/>
-          <p:nvPr/>
-        </p:nvSpPr>
-        <p:spPr>
-          <a:xfrm>
-            <a:off x="9720072" y="5897880"/>
-            <a:ext cx="2606040" cy="365760"/>
-          </a:xfrm>
-          <a:prstGeom prst="rect">
-            <a:avLst/>
-          </a:prstGeom>
-          <a:noFill/>
-          <a:ln/>
-        </p:spPr>
-        <p:txBody>
-          <a:bodyPr wrap="square" lIns="0" tIns="0" rIns="0" bIns="0" rtlCol="0" anchor="ctr"/>
-          <a:lstStyle/>
-          <a:p>
-            <a:pPr indent="0" marL="0">
-              <a:buNone/>
-            </a:pPr>
-            <a:r>
-              <a:rPr lang="en-US" sz="1200" dirty="0">
-                <a:solidFill>
-                  <a:srgbClr val="707070"/>
-                </a:solidFill>
-                <a:latin typeface="Pretendard" pitchFamily="34" charset="0"/>
-                <a:ea typeface="Pretendard" pitchFamily="34" charset="-122"/>
-                <a:cs typeface="Pretendard" pitchFamily="34" charset="-120"/>
-              </a:rPr>
-              <a:t>1초에 3만큼</a:t>
-            </a:r>
-            <a:endParaRPr lang="en-US" sz="1200" dirty="0"/>
-          </a:p>
-        </p:txBody>
-      </p:sp>
-      <p:sp>
-        <p:nvSpPr>
-          <p:cNvPr id="31" name="Shape 29"/>
-          <p:cNvSpPr/>
-          <p:nvPr/>
-        </p:nvSpPr>
-        <p:spPr>
-          <a:xfrm>
-            <a:off x="758952" y="6373368"/>
-            <a:ext cx="10673791" cy="0"/>
-          </a:xfrm>
-          <a:prstGeom prst="line">
-            <a:avLst/>
-          </a:prstGeom>
-          <a:noFill/>
-          <a:ln w="12700">
-            <a:solidFill>
-              <a:srgbClr val="F0F0F0"/>
-            </a:solidFill>
-            <a:prstDash val="solid"/>
-          </a:ln>
-        </p:spPr>
       </p:sp>
     </p:spTree>
   </p:cSld>
@@ -3724,7 +3919,7 @@
                 <a:ea typeface="Pretendard SemiBold" pitchFamily="34" charset="-122"/>
                 <a:cs typeface="Pretendard SemiBold" pitchFamily="34" charset="-120"/>
               </a:rPr>
-              <a:t>040</a:t>
+              <a:t>039</a:t>
             </a:r>
             <a:endParaRPr lang="en-US" sz="950" dirty="0"/>
           </a:p>
@@ -3763,7 +3958,7 @@
                 <a:ea typeface="Pretendard SemiBold" pitchFamily="34" charset="-122"/>
                 <a:cs typeface="Pretendard SemiBold" pitchFamily="34" charset="-120"/>
               </a:rPr>
-              <a:t>키를 누르면 숫자가 나온다.</a:t>
+              <a:t>곱하면 값의 의미가 바뀐다.</a:t>
             </a:r>
             <a:endParaRPr lang="en-US" sz="2600" dirty="0"/>
           </a:p>
@@ -3802,7 +3997,7 @@
                 <a:ea typeface="Pretendard Light" pitchFamily="34" charset="-122"/>
                 <a:cs typeface="Pretendard Light" pitchFamily="34" charset="-120"/>
               </a:rPr>
-              <a:t>032에서 배운 그대로다. 양수면 오른쪽, 음수면 왼쪽.</a:t>
+              <a:t>값이 갑자기 커져 놀라는데 단위가 바뀐 것이다. 0.05를 60번 하면 3이다.</a:t>
             </a:r>
             <a:endParaRPr lang="en-US" sz="1500" dirty="0"/>
           </a:p>
@@ -3810,18 +4005,57 @@
       </p:sp>
       <p:sp>
         <p:nvSpPr>
-          <p:cNvPr id="6" name="Shape 4"/>
+          <p:cNvPr id="6" name="Text 4"/>
+          <p:cNvSpPr txBox="1"/>
+          <p:nvPr/>
+        </p:nvSpPr>
+        <p:spPr>
+          <a:xfrm>
+            <a:off x="758952" y="1965960"/>
+            <a:ext cx="3657600" cy="274320"/>
+          </a:xfrm>
+          <a:prstGeom prst="rect">
+            <a:avLst/>
+          </a:prstGeom>
+          <a:noFill/>
+          <a:ln/>
+        </p:spPr>
+        <p:txBody>
+          <a:bodyPr wrap="square" lIns="0" tIns="0" rIns="0" bIns="0" rtlCol="0" anchor="ctr"/>
+          <a:lstStyle/>
+          <a:p>
+            <a:pPr indent="0" marL="0">
+              <a:buNone/>
+            </a:pPr>
+            <a:r>
+              <a:rPr lang="en-US" sz="950" dirty="0">
+                <a:solidFill>
+                  <a:srgbClr val="707070"/>
+                </a:solidFill>
+                <a:latin typeface="Pretendard SemiBold" pitchFamily="34" charset="0"/>
+                <a:ea typeface="Pretendard SemiBold" pitchFamily="34" charset="-122"/>
+                <a:cs typeface="Pretendard SemiBold" pitchFamily="34" charset="-120"/>
+              </a:rPr>
+              <a:t>고치기 전</a:t>
+            </a:r>
+            <a:endParaRPr lang="en-US" sz="950" dirty="0"/>
+          </a:p>
+        </p:txBody>
+      </p:sp>
+      <p:sp>
+        <p:nvSpPr>
+          <p:cNvPr id="7" name="Shape 5"/>
           <p:cNvSpPr/>
           <p:nvPr/>
         </p:nvSpPr>
         <p:spPr>
           <a:xfrm>
-            <a:off x="758952" y="1965960"/>
-            <a:ext cx="5486400" cy="1280160"/>
+            <a:off x="758952" y="2331720"/>
+            <a:ext cx="5486400" cy="1463040"/>
           </a:xfrm>
           <a:prstGeom prst="roundRect">
             <a:avLst>
-              <a:gd name="adj" fmla="val 11929"/>
+              <a:gd name="adj" fmla="val 10438"/>
             </a:avLst>
           </a:prstGeom>
           <a:solidFill>
@@ -3837,14 +4071,14 @@
       </p:sp>
       <p:sp>
         <p:nvSpPr>
-          <p:cNvPr id="7" name="Text 5"/>
-          <p:cNvSpPr txBox="1"/>
-          <p:nvPr/>
-        </p:nvSpPr>
-        <p:spPr>
-          <a:xfrm>
-            <a:off x="1014984" y="2167128"/>
-            <a:ext cx="4974336" cy="877824"/>
+          <p:cNvPr id="8" name="Text 6"/>
+          <p:cNvSpPr txBox="1"/>
+          <p:nvPr/>
+        </p:nvSpPr>
+        <p:spPr>
+          <a:xfrm>
+            <a:off x="1014984" y="2532888"/>
+            <a:ext cx="4974336" cy="1060704"/>
           </a:xfrm>
           <a:prstGeom prst="rect">
             <a:avLst/>
@@ -3863,7 +4097,7 @@
               <a:buNone/>
             </a:pPr>
             <a:r>
-              <a:rPr lang="en-US" sz="1150" b="1" dirty="0">
+              <a:rPr lang="en-US" sz="1150" dirty="0">
                 <a:solidFill>
                   <a:srgbClr val="141414"/>
                 </a:solidFill>
@@ -3871,7 +4105,7 @@
                 <a:ea typeface="Consolas" pitchFamily="34" charset="-122"/>
                 <a:cs typeface="Consolas" pitchFamily="34" charset="-120"/>
               </a:rPr>
-              <a:t>float h = Input.GetAxisRaw("Horizontal");</a:t>
+              <a:t>[SerializeField] float moveStep = 0.05f;</a:t>
             </a:r>
             <a:endParaRPr lang="en-US" sz="1150" dirty="0"/>
           </a:p>
@@ -3883,7 +4117,7 @@
               <a:buNone/>
             </a:pPr>
             <a:r>
-              <a:rPr lang="en-US" sz="1150" b="1" dirty="0">
+              <a:rPr lang="en-US" sz="1150" dirty="0">
                 <a:solidFill>
                   <a:srgbClr val="141414"/>
                 </a:solidFill>
@@ -3891,22 +4125,42 @@
                 <a:ea typeface="Consolas" pitchFamily="34" charset="-122"/>
                 <a:cs typeface="Consolas" pitchFamily="34" charset="-120"/>
               </a:rPr>
-              <a:t>float v = Input.GetAxisRaw("Vertical");</a:t>
+              <a:t> </a:t>
             </a:r>
             <a:endParaRPr lang="en-US" sz="1150" dirty="0"/>
           </a:p>
-        </p:txBody>
-      </p:sp>
-      <p:sp>
-        <p:nvSpPr>
-          <p:cNvPr id="8" name="Text 6"/>
-          <p:cNvSpPr txBox="1"/>
-          <p:nvPr/>
-        </p:nvSpPr>
-        <p:spPr>
-          <a:xfrm>
-            <a:off x="758952" y="3520440"/>
-            <a:ext cx="2194560" cy="274320"/>
+          <a:p>
+            <a:pPr indent="0" marL="0">
+              <a:lnSpc>
+                <a:spcPct val="132000"/>
+              </a:lnSpc>
+              <a:buNone/>
+            </a:pPr>
+            <a:r>
+              <a:rPr lang="en-US" sz="1150" dirty="0">
+                <a:solidFill>
+                  <a:srgbClr val="141414"/>
+                </a:solidFill>
+                <a:latin typeface="Consolas" pitchFamily="34" charset="0"/>
+                <a:ea typeface="Consolas" pitchFamily="34" charset="-122"/>
+                <a:cs typeface="Consolas" pitchFamily="34" charset="-120"/>
+              </a:rPr>
+              <a:t>position + moveDir * moveStep;</a:t>
+            </a:r>
+            <a:endParaRPr lang="en-US" sz="1150" dirty="0"/>
+          </a:p>
+        </p:txBody>
+      </p:sp>
+      <p:sp>
+        <p:nvSpPr>
+          <p:cNvPr id="9" name="Text 7"/>
+          <p:cNvSpPr txBox="1"/>
+          <p:nvPr/>
+        </p:nvSpPr>
+        <p:spPr>
+          <a:xfrm>
+            <a:off x="6537960" y="1965960"/>
+            <a:ext cx="3657600" cy="274320"/>
           </a:xfrm>
           <a:prstGeom prst="rect">
             <a:avLst/>
@@ -3924,13 +4178,13 @@
             <a:r>
               <a:rPr lang="en-US" sz="950" dirty="0">
                 <a:solidFill>
-                  <a:srgbClr val="707070"/>
+                  <a:srgbClr val="141414"/>
                 </a:solidFill>
                 <a:latin typeface="Pretendard SemiBold" pitchFamily="34" charset="0"/>
                 <a:ea typeface="Pretendard SemiBold" pitchFamily="34" charset="-122"/>
                 <a:cs typeface="Pretendard SemiBold" pitchFamily="34" charset="-120"/>
               </a:rPr>
-              <a:t>누르는 키</a:t>
+              <a:t>고친 뒤</a:t>
             </a:r>
             <a:endParaRPr lang="en-US" sz="950" dirty="0"/>
           </a:p>
@@ -3938,819 +4192,18 @@
       </p:sp>
       <p:sp>
         <p:nvSpPr>
-          <p:cNvPr id="9" name="Text 7"/>
-          <p:cNvSpPr txBox="1"/>
-          <p:nvPr/>
-        </p:nvSpPr>
-        <p:spPr>
-          <a:xfrm>
-            <a:off x="2953512" y="3520440"/>
-            <a:ext cx="1645920" cy="274320"/>
-          </a:xfrm>
-          <a:prstGeom prst="rect">
-            <a:avLst/>
-          </a:prstGeom>
-          <a:noFill/>
-          <a:ln/>
-        </p:spPr>
-        <p:txBody>
-          <a:bodyPr wrap="square" lIns="0" tIns="0" rIns="0" bIns="0" rtlCol="0" anchor="ctr"/>
-          <a:lstStyle/>
-          <a:p>
-            <a:pPr indent="0" marL="0">
-              <a:buNone/>
-            </a:pPr>
-            <a:r>
-              <a:rPr lang="en-US" sz="950" dirty="0">
-                <a:solidFill>
-                  <a:srgbClr val="707070"/>
-                </a:solidFill>
-                <a:latin typeface="Pretendard SemiBold" pitchFamily="34" charset="0"/>
-                <a:ea typeface="Pretendard SemiBold" pitchFamily="34" charset="-122"/>
-                <a:cs typeface="Pretendard SemiBold" pitchFamily="34" charset="-120"/>
-              </a:rPr>
-              <a:t>h</a:t>
-            </a:r>
-            <a:endParaRPr lang="en-US" sz="950" dirty="0"/>
-          </a:p>
-        </p:txBody>
-      </p:sp>
-      <p:sp>
-        <p:nvSpPr>
-          <p:cNvPr id="10" name="Text 8"/>
-          <p:cNvSpPr txBox="1"/>
-          <p:nvPr/>
-        </p:nvSpPr>
-        <p:spPr>
-          <a:xfrm>
-            <a:off x="4599432" y="3520440"/>
-            <a:ext cx="1645920" cy="274320"/>
-          </a:xfrm>
-          <a:prstGeom prst="rect">
-            <a:avLst/>
-          </a:prstGeom>
-          <a:noFill/>
-          <a:ln/>
-        </p:spPr>
-        <p:txBody>
-          <a:bodyPr wrap="square" lIns="0" tIns="0" rIns="0" bIns="0" rtlCol="0" anchor="ctr"/>
-          <a:lstStyle/>
-          <a:p>
-            <a:pPr indent="0" marL="0">
-              <a:buNone/>
-            </a:pPr>
-            <a:r>
-              <a:rPr lang="en-US" sz="950" dirty="0">
-                <a:solidFill>
-                  <a:srgbClr val="707070"/>
-                </a:solidFill>
-                <a:latin typeface="Pretendard SemiBold" pitchFamily="34" charset="0"/>
-                <a:ea typeface="Pretendard SemiBold" pitchFamily="34" charset="-122"/>
-                <a:cs typeface="Pretendard SemiBold" pitchFamily="34" charset="-120"/>
-              </a:rPr>
-              <a:t>v</a:t>
-            </a:r>
-            <a:endParaRPr lang="en-US" sz="950" dirty="0"/>
-          </a:p>
-        </p:txBody>
-      </p:sp>
-      <p:sp>
-        <p:nvSpPr>
-          <p:cNvPr id="11" name="Shape 9"/>
+          <p:cNvPr id="10" name="Shape 8"/>
           <p:cNvSpPr/>
           <p:nvPr/>
         </p:nvSpPr>
         <p:spPr>
           <a:xfrm>
-            <a:off x="758952" y="3922776"/>
-            <a:ext cx="5486400" cy="0"/>
-          </a:xfrm>
-          <a:prstGeom prst="line">
-            <a:avLst/>
-          </a:prstGeom>
-          <a:noFill/>
-          <a:ln w="12700">
-            <a:solidFill>
-              <a:srgbClr val="E0E0E0"/>
-            </a:solidFill>
-            <a:prstDash val="solid"/>
-          </a:ln>
-        </p:spPr>
-      </p:sp>
-      <p:sp>
-        <p:nvSpPr>
-          <p:cNvPr id="12" name="Text 10"/>
-          <p:cNvSpPr txBox="1"/>
-          <p:nvPr/>
-        </p:nvSpPr>
-        <p:spPr>
-          <a:xfrm>
-            <a:off x="758952" y="4087368"/>
-            <a:ext cx="2194560" cy="365760"/>
-          </a:xfrm>
-          <a:prstGeom prst="rect">
-            <a:avLst/>
-          </a:prstGeom>
-          <a:noFill/>
-          <a:ln/>
-        </p:spPr>
-        <p:txBody>
-          <a:bodyPr wrap="square" lIns="0" tIns="0" rIns="0" bIns="0" rtlCol="0" anchor="ctr"/>
-          <a:lstStyle/>
-          <a:p>
-            <a:pPr indent="0" marL="0">
-              <a:buNone/>
-            </a:pPr>
-            <a:r>
-              <a:rPr lang="en-US" sz="1200" dirty="0">
-                <a:solidFill>
-                  <a:srgbClr val="141414"/>
-                </a:solidFill>
-                <a:latin typeface="Pretendard" pitchFamily="34" charset="0"/>
-                <a:ea typeface="Pretendard" pitchFamily="34" charset="-122"/>
-                <a:cs typeface="Pretendard" pitchFamily="34" charset="-120"/>
-              </a:rPr>
-              <a:t>아무것도</a:t>
-            </a:r>
-            <a:endParaRPr lang="en-US" sz="1200" dirty="0"/>
-          </a:p>
-        </p:txBody>
-      </p:sp>
-      <p:sp>
-        <p:nvSpPr>
-          <p:cNvPr id="13" name="Text 11"/>
-          <p:cNvSpPr txBox="1"/>
-          <p:nvPr/>
-        </p:nvSpPr>
-        <p:spPr>
-          <a:xfrm>
-            <a:off x="2953512" y="4087368"/>
-            <a:ext cx="1645920" cy="365760"/>
-          </a:xfrm>
-          <a:prstGeom prst="rect">
-            <a:avLst/>
-          </a:prstGeom>
-          <a:noFill/>
-          <a:ln/>
-        </p:spPr>
-        <p:txBody>
-          <a:bodyPr wrap="square" lIns="0" tIns="0" rIns="0" bIns="0" rtlCol="0" anchor="ctr"/>
-          <a:lstStyle/>
-          <a:p>
-            <a:pPr indent="0" marL="0">
-              <a:buNone/>
-            </a:pPr>
-            <a:r>
-              <a:rPr lang="en-US" sz="1200" dirty="0">
-                <a:solidFill>
-                  <a:srgbClr val="707070"/>
-                </a:solidFill>
-                <a:latin typeface="Consolas" pitchFamily="34" charset="0"/>
-                <a:ea typeface="Consolas" pitchFamily="34" charset="-122"/>
-                <a:cs typeface="Consolas" pitchFamily="34" charset="-120"/>
-              </a:rPr>
-              <a:t>0</a:t>
-            </a:r>
-            <a:endParaRPr lang="en-US" sz="1200" dirty="0"/>
-          </a:p>
-        </p:txBody>
-      </p:sp>
-      <p:sp>
-        <p:nvSpPr>
-          <p:cNvPr id="14" name="Text 12"/>
-          <p:cNvSpPr txBox="1"/>
-          <p:nvPr/>
-        </p:nvSpPr>
-        <p:spPr>
-          <a:xfrm>
-            <a:off x="4599432" y="4087368"/>
-            <a:ext cx="1645920" cy="365760"/>
-          </a:xfrm>
-          <a:prstGeom prst="rect">
-            <a:avLst/>
-          </a:prstGeom>
-          <a:noFill/>
-          <a:ln/>
-        </p:spPr>
-        <p:txBody>
-          <a:bodyPr wrap="square" lIns="0" tIns="0" rIns="0" bIns="0" rtlCol="0" anchor="ctr"/>
-          <a:lstStyle/>
-          <a:p>
-            <a:pPr indent="0" marL="0">
-              <a:buNone/>
-            </a:pPr>
-            <a:r>
-              <a:rPr lang="en-US" sz="1200" dirty="0">
-                <a:solidFill>
-                  <a:srgbClr val="707070"/>
-                </a:solidFill>
-                <a:latin typeface="Consolas" pitchFamily="34" charset="0"/>
-                <a:ea typeface="Consolas" pitchFamily="34" charset="-122"/>
-                <a:cs typeface="Consolas" pitchFamily="34" charset="-120"/>
-              </a:rPr>
-              <a:t>0</a:t>
-            </a:r>
-            <a:endParaRPr lang="en-US" sz="1200" dirty="0"/>
-          </a:p>
-        </p:txBody>
-      </p:sp>
-      <p:sp>
-        <p:nvSpPr>
-          <p:cNvPr id="15" name="Shape 13"/>
-          <p:cNvSpPr/>
-          <p:nvPr/>
-        </p:nvSpPr>
-        <p:spPr>
-          <a:xfrm>
-            <a:off x="758952" y="4562856"/>
-            <a:ext cx="5486400" cy="0"/>
-          </a:xfrm>
-          <a:prstGeom prst="line">
-            <a:avLst/>
-          </a:prstGeom>
-          <a:noFill/>
-          <a:ln w="12700">
-            <a:solidFill>
-              <a:srgbClr val="F0F0F0"/>
-            </a:solidFill>
-            <a:prstDash val="solid"/>
-          </a:ln>
-        </p:spPr>
-      </p:sp>
-      <p:sp>
-        <p:nvSpPr>
-          <p:cNvPr id="16" name="Text 14"/>
-          <p:cNvSpPr txBox="1"/>
-          <p:nvPr/>
-        </p:nvSpPr>
-        <p:spPr>
-          <a:xfrm>
-            <a:off x="758952" y="4672584"/>
-            <a:ext cx="2194560" cy="365760"/>
-          </a:xfrm>
-          <a:prstGeom prst="rect">
-            <a:avLst/>
-          </a:prstGeom>
-          <a:noFill/>
-          <a:ln/>
-        </p:spPr>
-        <p:txBody>
-          <a:bodyPr wrap="square" lIns="0" tIns="0" rIns="0" bIns="0" rtlCol="0" anchor="ctr"/>
-          <a:lstStyle/>
-          <a:p>
-            <a:pPr indent="0" marL="0">
-              <a:buNone/>
-            </a:pPr>
-            <a:r>
-              <a:rPr lang="en-US" sz="1200" dirty="0">
-                <a:solidFill>
-                  <a:srgbClr val="141414"/>
-                </a:solidFill>
-                <a:latin typeface="Pretendard" pitchFamily="34" charset="0"/>
-                <a:ea typeface="Pretendard" pitchFamily="34" charset="-122"/>
-                <a:cs typeface="Pretendard" pitchFamily="34" charset="-120"/>
-              </a:rPr>
-              <a:t>D 또는 →</a:t>
-            </a:r>
-            <a:endParaRPr lang="en-US" sz="1200" dirty="0"/>
-          </a:p>
-        </p:txBody>
-      </p:sp>
-      <p:sp>
-        <p:nvSpPr>
-          <p:cNvPr id="17" name="Text 15"/>
-          <p:cNvSpPr txBox="1"/>
-          <p:nvPr/>
-        </p:nvSpPr>
-        <p:spPr>
-          <a:xfrm>
-            <a:off x="2953512" y="4672584"/>
-            <a:ext cx="1645920" cy="365760"/>
-          </a:xfrm>
-          <a:prstGeom prst="rect">
-            <a:avLst/>
-          </a:prstGeom>
-          <a:noFill/>
-          <a:ln/>
-        </p:spPr>
-        <p:txBody>
-          <a:bodyPr wrap="square" lIns="0" tIns="0" rIns="0" bIns="0" rtlCol="0" anchor="ctr"/>
-          <a:lstStyle/>
-          <a:p>
-            <a:pPr indent="0" marL="0">
-              <a:buNone/>
-            </a:pPr>
-            <a:r>
-              <a:rPr lang="en-US" sz="1200" dirty="0">
-                <a:solidFill>
-                  <a:srgbClr val="707070"/>
-                </a:solidFill>
-                <a:latin typeface="Consolas" pitchFamily="34" charset="0"/>
-                <a:ea typeface="Consolas" pitchFamily="34" charset="-122"/>
-                <a:cs typeface="Consolas" pitchFamily="34" charset="-120"/>
-              </a:rPr>
-              <a:t>1</a:t>
-            </a:r>
-            <a:endParaRPr lang="en-US" sz="1200" dirty="0"/>
-          </a:p>
-        </p:txBody>
-      </p:sp>
-      <p:sp>
-        <p:nvSpPr>
-          <p:cNvPr id="18" name="Text 16"/>
-          <p:cNvSpPr txBox="1"/>
-          <p:nvPr/>
-        </p:nvSpPr>
-        <p:spPr>
-          <a:xfrm>
-            <a:off x="4599432" y="4672584"/>
-            <a:ext cx="1645920" cy="365760"/>
-          </a:xfrm>
-          <a:prstGeom prst="rect">
-            <a:avLst/>
-          </a:prstGeom>
-          <a:noFill/>
-          <a:ln/>
-        </p:spPr>
-        <p:txBody>
-          <a:bodyPr wrap="square" lIns="0" tIns="0" rIns="0" bIns="0" rtlCol="0" anchor="ctr"/>
-          <a:lstStyle/>
-          <a:p>
-            <a:pPr indent="0" marL="0">
-              <a:buNone/>
-            </a:pPr>
-            <a:r>
-              <a:rPr lang="en-US" sz="1200" dirty="0">
-                <a:solidFill>
-                  <a:srgbClr val="707070"/>
-                </a:solidFill>
-                <a:latin typeface="Consolas" pitchFamily="34" charset="0"/>
-                <a:ea typeface="Consolas" pitchFamily="34" charset="-122"/>
-                <a:cs typeface="Consolas" pitchFamily="34" charset="-120"/>
-              </a:rPr>
-              <a:t>0</a:t>
-            </a:r>
-            <a:endParaRPr lang="en-US" sz="1200" dirty="0"/>
-          </a:p>
-        </p:txBody>
-      </p:sp>
-      <p:sp>
-        <p:nvSpPr>
-          <p:cNvPr id="19" name="Shape 17"/>
-          <p:cNvSpPr/>
-          <p:nvPr/>
-        </p:nvSpPr>
-        <p:spPr>
-          <a:xfrm>
-            <a:off x="758952" y="5148072"/>
-            <a:ext cx="5486400" cy="0"/>
-          </a:xfrm>
-          <a:prstGeom prst="line">
-            <a:avLst/>
-          </a:prstGeom>
-          <a:noFill/>
-          <a:ln w="12700">
-            <a:solidFill>
-              <a:srgbClr val="F0F0F0"/>
-            </a:solidFill>
-            <a:prstDash val="solid"/>
-          </a:ln>
-        </p:spPr>
-      </p:sp>
-      <p:sp>
-        <p:nvSpPr>
-          <p:cNvPr id="20" name="Text 18"/>
-          <p:cNvSpPr txBox="1"/>
-          <p:nvPr/>
-        </p:nvSpPr>
-        <p:spPr>
-          <a:xfrm>
-            <a:off x="758952" y="5257800"/>
-            <a:ext cx="2194560" cy="365760"/>
-          </a:xfrm>
-          <a:prstGeom prst="rect">
-            <a:avLst/>
-          </a:prstGeom>
-          <a:noFill/>
-          <a:ln/>
-        </p:spPr>
-        <p:txBody>
-          <a:bodyPr wrap="square" lIns="0" tIns="0" rIns="0" bIns="0" rtlCol="0" anchor="ctr"/>
-          <a:lstStyle/>
-          <a:p>
-            <a:pPr indent="0" marL="0">
-              <a:buNone/>
-            </a:pPr>
-            <a:r>
-              <a:rPr lang="en-US" sz="1200" dirty="0">
-                <a:solidFill>
-                  <a:srgbClr val="141414"/>
-                </a:solidFill>
-                <a:latin typeface="Pretendard" pitchFamily="34" charset="0"/>
-                <a:ea typeface="Pretendard" pitchFamily="34" charset="-122"/>
-                <a:cs typeface="Pretendard" pitchFamily="34" charset="-120"/>
-              </a:rPr>
-              <a:t>A 또는 ←</a:t>
-            </a:r>
-            <a:endParaRPr lang="en-US" sz="1200" dirty="0"/>
-          </a:p>
-        </p:txBody>
-      </p:sp>
-      <p:sp>
-        <p:nvSpPr>
-          <p:cNvPr id="21" name="Text 19"/>
-          <p:cNvSpPr txBox="1"/>
-          <p:nvPr/>
-        </p:nvSpPr>
-        <p:spPr>
-          <a:xfrm>
-            <a:off x="2953512" y="5257800"/>
-            <a:ext cx="1645920" cy="365760"/>
-          </a:xfrm>
-          <a:prstGeom prst="rect">
-            <a:avLst/>
-          </a:prstGeom>
-          <a:noFill/>
-          <a:ln/>
-        </p:spPr>
-        <p:txBody>
-          <a:bodyPr wrap="square" lIns="0" tIns="0" rIns="0" bIns="0" rtlCol="0" anchor="ctr"/>
-          <a:lstStyle/>
-          <a:p>
-            <a:pPr indent="0" marL="0">
-              <a:buNone/>
-            </a:pPr>
-            <a:r>
-              <a:rPr lang="en-US" sz="1200" dirty="0">
-                <a:solidFill>
-                  <a:srgbClr val="707070"/>
-                </a:solidFill>
-                <a:latin typeface="Consolas" pitchFamily="34" charset="0"/>
-                <a:ea typeface="Consolas" pitchFamily="34" charset="-122"/>
-                <a:cs typeface="Consolas" pitchFamily="34" charset="-120"/>
-              </a:rPr>
-              <a:t>-1</a:t>
-            </a:r>
-            <a:endParaRPr lang="en-US" sz="1200" dirty="0"/>
-          </a:p>
-        </p:txBody>
-      </p:sp>
-      <p:sp>
-        <p:nvSpPr>
-          <p:cNvPr id="22" name="Text 20"/>
-          <p:cNvSpPr txBox="1"/>
-          <p:nvPr/>
-        </p:nvSpPr>
-        <p:spPr>
-          <a:xfrm>
-            <a:off x="4599432" y="5257800"/>
-            <a:ext cx="1645920" cy="365760"/>
-          </a:xfrm>
-          <a:prstGeom prst="rect">
-            <a:avLst/>
-          </a:prstGeom>
-          <a:noFill/>
-          <a:ln/>
-        </p:spPr>
-        <p:txBody>
-          <a:bodyPr wrap="square" lIns="0" tIns="0" rIns="0" bIns="0" rtlCol="0" anchor="ctr"/>
-          <a:lstStyle/>
-          <a:p>
-            <a:pPr indent="0" marL="0">
-              <a:buNone/>
-            </a:pPr>
-            <a:r>
-              <a:rPr lang="en-US" sz="1200" dirty="0">
-                <a:solidFill>
-                  <a:srgbClr val="707070"/>
-                </a:solidFill>
-                <a:latin typeface="Consolas" pitchFamily="34" charset="0"/>
-                <a:ea typeface="Consolas" pitchFamily="34" charset="-122"/>
-                <a:cs typeface="Consolas" pitchFamily="34" charset="-120"/>
-              </a:rPr>
-              <a:t>0</a:t>
-            </a:r>
-            <a:endParaRPr lang="en-US" sz="1200" dirty="0"/>
-          </a:p>
-        </p:txBody>
-      </p:sp>
-      <p:sp>
-        <p:nvSpPr>
-          <p:cNvPr id="23" name="Shape 21"/>
-          <p:cNvSpPr/>
-          <p:nvPr/>
-        </p:nvSpPr>
-        <p:spPr>
-          <a:xfrm>
-            <a:off x="758952" y="5733288"/>
-            <a:ext cx="5486400" cy="0"/>
-          </a:xfrm>
-          <a:prstGeom prst="line">
-            <a:avLst/>
-          </a:prstGeom>
-          <a:noFill/>
-          <a:ln w="12700">
-            <a:solidFill>
-              <a:srgbClr val="F0F0F0"/>
-            </a:solidFill>
-            <a:prstDash val="solid"/>
-          </a:ln>
-        </p:spPr>
-      </p:sp>
-      <p:sp>
-        <p:nvSpPr>
-          <p:cNvPr id="24" name="Text 22"/>
-          <p:cNvSpPr txBox="1"/>
-          <p:nvPr/>
-        </p:nvSpPr>
-        <p:spPr>
-          <a:xfrm>
-            <a:off x="758952" y="5843016"/>
-            <a:ext cx="2194560" cy="365760"/>
-          </a:xfrm>
-          <a:prstGeom prst="rect">
-            <a:avLst/>
-          </a:prstGeom>
-          <a:noFill/>
-          <a:ln/>
-        </p:spPr>
-        <p:txBody>
-          <a:bodyPr wrap="square" lIns="0" tIns="0" rIns="0" bIns="0" rtlCol="0" anchor="ctr"/>
-          <a:lstStyle/>
-          <a:p>
-            <a:pPr indent="0" marL="0">
-              <a:buNone/>
-            </a:pPr>
-            <a:r>
-              <a:rPr lang="en-US" sz="1200" dirty="0">
-                <a:solidFill>
-                  <a:srgbClr val="141414"/>
-                </a:solidFill>
-                <a:latin typeface="Pretendard" pitchFamily="34" charset="0"/>
-                <a:ea typeface="Pretendard" pitchFamily="34" charset="-122"/>
-                <a:cs typeface="Pretendard" pitchFamily="34" charset="-120"/>
-              </a:rPr>
-              <a:t>W 또는 ↑</a:t>
-            </a:r>
-            <a:endParaRPr lang="en-US" sz="1200" dirty="0"/>
-          </a:p>
-        </p:txBody>
-      </p:sp>
-      <p:sp>
-        <p:nvSpPr>
-          <p:cNvPr id="25" name="Text 23"/>
-          <p:cNvSpPr txBox="1"/>
-          <p:nvPr/>
-        </p:nvSpPr>
-        <p:spPr>
-          <a:xfrm>
-            <a:off x="2953512" y="5843016"/>
-            <a:ext cx="1645920" cy="365760"/>
-          </a:xfrm>
-          <a:prstGeom prst="rect">
-            <a:avLst/>
-          </a:prstGeom>
-          <a:noFill/>
-          <a:ln/>
-        </p:spPr>
-        <p:txBody>
-          <a:bodyPr wrap="square" lIns="0" tIns="0" rIns="0" bIns="0" rtlCol="0" anchor="ctr"/>
-          <a:lstStyle/>
-          <a:p>
-            <a:pPr indent="0" marL="0">
-              <a:buNone/>
-            </a:pPr>
-            <a:r>
-              <a:rPr lang="en-US" sz="1200" dirty="0">
-                <a:solidFill>
-                  <a:srgbClr val="707070"/>
-                </a:solidFill>
-                <a:latin typeface="Consolas" pitchFamily="34" charset="0"/>
-                <a:ea typeface="Consolas" pitchFamily="34" charset="-122"/>
-                <a:cs typeface="Consolas" pitchFamily="34" charset="-120"/>
-              </a:rPr>
-              <a:t>0</a:t>
-            </a:r>
-            <a:endParaRPr lang="en-US" sz="1200" dirty="0"/>
-          </a:p>
-        </p:txBody>
-      </p:sp>
-      <p:sp>
-        <p:nvSpPr>
-          <p:cNvPr id="26" name="Text 24"/>
-          <p:cNvSpPr txBox="1"/>
-          <p:nvPr/>
-        </p:nvSpPr>
-        <p:spPr>
-          <a:xfrm>
-            <a:off x="4599432" y="5843016"/>
-            <a:ext cx="1645920" cy="365760"/>
-          </a:xfrm>
-          <a:prstGeom prst="rect">
-            <a:avLst/>
-          </a:prstGeom>
-          <a:noFill/>
-          <a:ln/>
-        </p:spPr>
-        <p:txBody>
-          <a:bodyPr wrap="square" lIns="0" tIns="0" rIns="0" bIns="0" rtlCol="0" anchor="ctr"/>
-          <a:lstStyle/>
-          <a:p>
-            <a:pPr indent="0" marL="0">
-              <a:buNone/>
-            </a:pPr>
-            <a:r>
-              <a:rPr lang="en-US" sz="1200" dirty="0">
-                <a:solidFill>
-                  <a:srgbClr val="707070"/>
-                </a:solidFill>
-                <a:latin typeface="Consolas" pitchFamily="34" charset="0"/>
-                <a:ea typeface="Consolas" pitchFamily="34" charset="-122"/>
-                <a:cs typeface="Consolas" pitchFamily="34" charset="-120"/>
-              </a:rPr>
-              <a:t>1</a:t>
-            </a:r>
-            <a:endParaRPr lang="en-US" sz="1200" dirty="0"/>
-          </a:p>
-        </p:txBody>
-      </p:sp>
-      <p:sp>
-        <p:nvSpPr>
-          <p:cNvPr id="27" name="Shape 25"/>
-          <p:cNvSpPr/>
-          <p:nvPr/>
-        </p:nvSpPr>
-        <p:spPr>
-          <a:xfrm>
-            <a:off x="758952" y="6318504"/>
-            <a:ext cx="5486400" cy="0"/>
-          </a:xfrm>
-          <a:prstGeom prst="line">
-            <a:avLst/>
-          </a:prstGeom>
-          <a:noFill/>
-          <a:ln w="12700">
-            <a:solidFill>
-              <a:srgbClr val="F0F0F0"/>
-            </a:solidFill>
-            <a:prstDash val="solid"/>
-          </a:ln>
-        </p:spPr>
-      </p:sp>
-      <p:sp>
-        <p:nvSpPr>
-          <p:cNvPr id="28" name="Text 26"/>
-          <p:cNvSpPr txBox="1"/>
-          <p:nvPr/>
-        </p:nvSpPr>
-        <p:spPr>
-          <a:xfrm>
-            <a:off x="758952" y="6428232"/>
-            <a:ext cx="2194560" cy="365760"/>
-          </a:xfrm>
-          <a:prstGeom prst="rect">
-            <a:avLst/>
-          </a:prstGeom>
-          <a:noFill/>
-          <a:ln/>
-        </p:spPr>
-        <p:txBody>
-          <a:bodyPr wrap="square" lIns="0" tIns="0" rIns="0" bIns="0" rtlCol="0" anchor="ctr"/>
-          <a:lstStyle/>
-          <a:p>
-            <a:pPr indent="0" marL="0">
-              <a:buNone/>
-            </a:pPr>
-            <a:r>
-              <a:rPr lang="en-US" sz="1200" dirty="0">
-                <a:solidFill>
-                  <a:srgbClr val="141414"/>
-                </a:solidFill>
-                <a:latin typeface="Pretendard" pitchFamily="34" charset="0"/>
-                <a:ea typeface="Pretendard" pitchFamily="34" charset="-122"/>
-                <a:cs typeface="Pretendard" pitchFamily="34" charset="-120"/>
-              </a:rPr>
-              <a:t>S 또는 ↓</a:t>
-            </a:r>
-            <a:endParaRPr lang="en-US" sz="1200" dirty="0"/>
-          </a:p>
-        </p:txBody>
-      </p:sp>
-      <p:sp>
-        <p:nvSpPr>
-          <p:cNvPr id="29" name="Text 27"/>
-          <p:cNvSpPr txBox="1"/>
-          <p:nvPr/>
-        </p:nvSpPr>
-        <p:spPr>
-          <a:xfrm>
-            <a:off x="2953512" y="6428232"/>
-            <a:ext cx="1645920" cy="365760"/>
-          </a:xfrm>
-          <a:prstGeom prst="rect">
-            <a:avLst/>
-          </a:prstGeom>
-          <a:noFill/>
-          <a:ln/>
-        </p:spPr>
-        <p:txBody>
-          <a:bodyPr wrap="square" lIns="0" tIns="0" rIns="0" bIns="0" rtlCol="0" anchor="ctr"/>
-          <a:lstStyle/>
-          <a:p>
-            <a:pPr indent="0" marL="0">
-              <a:buNone/>
-            </a:pPr>
-            <a:r>
-              <a:rPr lang="en-US" sz="1200" dirty="0">
-                <a:solidFill>
-                  <a:srgbClr val="707070"/>
-                </a:solidFill>
-                <a:latin typeface="Consolas" pitchFamily="34" charset="0"/>
-                <a:ea typeface="Consolas" pitchFamily="34" charset="-122"/>
-                <a:cs typeface="Consolas" pitchFamily="34" charset="-120"/>
-              </a:rPr>
-              <a:t>0</a:t>
-            </a:r>
-            <a:endParaRPr lang="en-US" sz="1200" dirty="0"/>
-          </a:p>
-        </p:txBody>
-      </p:sp>
-      <p:sp>
-        <p:nvSpPr>
-          <p:cNvPr id="30" name="Text 28"/>
-          <p:cNvSpPr txBox="1"/>
-          <p:nvPr/>
-        </p:nvSpPr>
-        <p:spPr>
-          <a:xfrm>
-            <a:off x="4599432" y="6428232"/>
-            <a:ext cx="1645920" cy="365760"/>
-          </a:xfrm>
-          <a:prstGeom prst="rect">
-            <a:avLst/>
-          </a:prstGeom>
-          <a:noFill/>
-          <a:ln/>
-        </p:spPr>
-        <p:txBody>
-          <a:bodyPr wrap="square" lIns="0" tIns="0" rIns="0" bIns="0" rtlCol="0" anchor="ctr"/>
-          <a:lstStyle/>
-          <a:p>
-            <a:pPr indent="0" marL="0">
-              <a:buNone/>
-            </a:pPr>
-            <a:r>
-              <a:rPr lang="en-US" sz="1200" dirty="0">
-                <a:solidFill>
-                  <a:srgbClr val="707070"/>
-                </a:solidFill>
-                <a:latin typeface="Consolas" pitchFamily="34" charset="0"/>
-                <a:ea typeface="Consolas" pitchFamily="34" charset="-122"/>
-                <a:cs typeface="Consolas" pitchFamily="34" charset="-120"/>
-              </a:rPr>
-              <a:t>-1</a:t>
-            </a:r>
-            <a:endParaRPr lang="en-US" sz="1200" dirty="0"/>
-          </a:p>
-        </p:txBody>
-      </p:sp>
-      <p:sp>
-        <p:nvSpPr>
-          <p:cNvPr id="31" name="Shape 29"/>
-          <p:cNvSpPr/>
-          <p:nvPr/>
-        </p:nvSpPr>
-        <p:spPr>
-          <a:xfrm>
-            <a:off x="758952" y="6903720"/>
-            <a:ext cx="5486400" cy="0"/>
-          </a:xfrm>
-          <a:prstGeom prst="line">
-            <a:avLst/>
-          </a:prstGeom>
-          <a:noFill/>
-          <a:ln w="12700">
-            <a:solidFill>
-              <a:srgbClr val="F0F0F0"/>
-            </a:solidFill>
-            <a:prstDash val="solid"/>
-          </a:ln>
-        </p:spPr>
-      </p:sp>
-      <p:sp>
-        <p:nvSpPr>
-          <p:cNvPr id="32" name="Shape 30"/>
-          <p:cNvSpPr/>
-          <p:nvPr/>
-        </p:nvSpPr>
-        <p:spPr>
-          <a:xfrm>
-            <a:off x="6720840" y="1965960"/>
-            <a:ext cx="4711903" cy="2103120"/>
+            <a:off x="6537960" y="2331720"/>
+            <a:ext cx="4894783" cy="1463040"/>
           </a:xfrm>
           <a:prstGeom prst="roundRect">
             <a:avLst>
-              <a:gd name="adj" fmla="val 7261"/>
+              <a:gd name="adj" fmla="val 10438"/>
             </a:avLst>
           </a:prstGeom>
           <a:solidFill>
@@ -4766,14 +4219,14 @@
       </p:sp>
       <p:sp>
         <p:nvSpPr>
-          <p:cNvPr id="33" name="Text 31"/>
-          <p:cNvSpPr txBox="1"/>
-          <p:nvPr/>
-        </p:nvSpPr>
-        <p:spPr>
-          <a:xfrm>
-            <a:off x="6976872" y="2167128"/>
-            <a:ext cx="4199839" cy="1700784"/>
+          <p:cNvPr id="11" name="Text 9"/>
+          <p:cNvSpPr txBox="1"/>
+          <p:nvPr/>
+        </p:nvSpPr>
+        <p:spPr>
+          <a:xfrm>
+            <a:off x="6793992" y="2532888"/>
+            <a:ext cx="4382719" cy="1060704"/>
           </a:xfrm>
           <a:prstGeom prst="rect">
             <a:avLst/>
@@ -4800,7 +4253,7 @@
                 <a:ea typeface="Consolas" pitchFamily="34" charset="-122"/>
                 <a:cs typeface="Consolas" pitchFamily="34" charset="-120"/>
               </a:rPr>
-              <a:t>Vector3 dir = new Vector3(h, v, 0f);</a:t>
+              <a:t>[SerializeField] float moveSpeed = 3f;</a:t>
             </a:r>
             <a:endParaRPr lang="en-US" sz="1150" dirty="0"/>
           </a:p>
@@ -4832,7 +4285,7 @@
               <a:buNone/>
             </a:pPr>
             <a:r>
-              <a:rPr lang="en-US" sz="1150" dirty="0">
+              <a:rPr lang="en-US" sz="1150" b="1" dirty="0">
                 <a:solidFill>
                   <a:srgbClr val="141414"/>
                 </a:solidFill>
@@ -4840,19 +4293,217 @@
                 <a:ea typeface="Consolas" pitchFamily="34" charset="-122"/>
                 <a:cs typeface="Consolas" pitchFamily="34" charset="-120"/>
               </a:rPr>
-              <a:t>transform.position =</a:t>
+              <a:t>position + moveDir * moveSpeed * Time.deltaTime;</a:t>
             </a:r>
             <a:endParaRPr lang="en-US" sz="1150" dirty="0"/>
           </a:p>
-          <a:p>
-            <a:pPr indent="0" marL="0">
-              <a:lnSpc>
-                <a:spcPct val="132000"/>
-              </a:lnSpc>
-              <a:buNone/>
-            </a:pPr>
-            <a:r>
-              <a:rPr lang="en-US" sz="1150" dirty="0">
+        </p:txBody>
+      </p:sp>
+      <p:sp>
+        <p:nvSpPr>
+          <p:cNvPr id="12" name="Text 10"/>
+          <p:cNvSpPr txBox="1"/>
+          <p:nvPr/>
+        </p:nvSpPr>
+        <p:spPr>
+          <a:xfrm>
+            <a:off x="758952" y="4160520"/>
+            <a:ext cx="2743200" cy="274320"/>
+          </a:xfrm>
+          <a:prstGeom prst="rect">
+            <a:avLst/>
+          </a:prstGeom>
+          <a:noFill/>
+          <a:ln/>
+        </p:spPr>
+        <p:txBody>
+          <a:bodyPr wrap="square" lIns="0" tIns="0" rIns="0" bIns="0" rtlCol="0" anchor="ctr"/>
+          <a:lstStyle/>
+          <a:p>
+            <a:pPr indent="0" marL="0">
+              <a:buNone/>
+            </a:pPr>
+            <a:r>
+              <a:rPr lang="en-US" sz="950" dirty="0">
+                <a:solidFill>
+                  <a:srgbClr val="707070"/>
+                </a:solidFill>
+                <a:latin typeface="Pretendard SemiBold" pitchFamily="34" charset="0"/>
+                <a:ea typeface="Pretendard SemiBold" pitchFamily="34" charset="-122"/>
+                <a:cs typeface="Pretendard SemiBold" pitchFamily="34" charset="-120"/>
+              </a:rPr>
+              <a:t>스크립트</a:t>
+            </a:r>
+            <a:endParaRPr lang="en-US" sz="950" dirty="0"/>
+          </a:p>
+        </p:txBody>
+      </p:sp>
+      <p:sp>
+        <p:nvSpPr>
+          <p:cNvPr id="13" name="Text 11"/>
+          <p:cNvSpPr txBox="1"/>
+          <p:nvPr/>
+        </p:nvSpPr>
+        <p:spPr>
+          <a:xfrm>
+            <a:off x="3502152" y="4160520"/>
+            <a:ext cx="3108960" cy="274320"/>
+          </a:xfrm>
+          <a:prstGeom prst="rect">
+            <a:avLst/>
+          </a:prstGeom>
+          <a:noFill/>
+          <a:ln/>
+        </p:spPr>
+        <p:txBody>
+          <a:bodyPr wrap="square" lIns="0" tIns="0" rIns="0" bIns="0" rtlCol="0" anchor="ctr"/>
+          <a:lstStyle/>
+          <a:p>
+            <a:pPr indent="0" marL="0">
+              <a:buNone/>
+            </a:pPr>
+            <a:r>
+              <a:rPr lang="en-US" sz="950" dirty="0">
+                <a:solidFill>
+                  <a:srgbClr val="707070"/>
+                </a:solidFill>
+                <a:latin typeface="Pretendard SemiBold" pitchFamily="34" charset="0"/>
+                <a:ea typeface="Pretendard SemiBold" pitchFamily="34" charset="-122"/>
+                <a:cs typeface="Pretendard SemiBold" pitchFamily="34" charset="-120"/>
+              </a:rPr>
+              <a:t>이전</a:t>
+            </a:r>
+            <a:endParaRPr lang="en-US" sz="950" dirty="0"/>
+          </a:p>
+        </p:txBody>
+      </p:sp>
+      <p:sp>
+        <p:nvSpPr>
+          <p:cNvPr id="14" name="Text 12"/>
+          <p:cNvSpPr txBox="1"/>
+          <p:nvPr/>
+        </p:nvSpPr>
+        <p:spPr>
+          <a:xfrm>
+            <a:off x="6611112" y="4160520"/>
+            <a:ext cx="3108960" cy="274320"/>
+          </a:xfrm>
+          <a:prstGeom prst="rect">
+            <a:avLst/>
+          </a:prstGeom>
+          <a:noFill/>
+          <a:ln/>
+        </p:spPr>
+        <p:txBody>
+          <a:bodyPr wrap="square" lIns="0" tIns="0" rIns="0" bIns="0" rtlCol="0" anchor="ctr"/>
+          <a:lstStyle/>
+          <a:p>
+            <a:pPr indent="0" marL="0">
+              <a:buNone/>
+            </a:pPr>
+            <a:r>
+              <a:rPr lang="en-US" sz="950" dirty="0">
+                <a:solidFill>
+                  <a:srgbClr val="707070"/>
+                </a:solidFill>
+                <a:latin typeface="Pretendard SemiBold" pitchFamily="34" charset="0"/>
+                <a:ea typeface="Pretendard SemiBold" pitchFamily="34" charset="-122"/>
+                <a:cs typeface="Pretendard SemiBold" pitchFamily="34" charset="-120"/>
+              </a:rPr>
+              <a:t>이후</a:t>
+            </a:r>
+            <a:endParaRPr lang="en-US" sz="950" dirty="0"/>
+          </a:p>
+        </p:txBody>
+      </p:sp>
+      <p:sp>
+        <p:nvSpPr>
+          <p:cNvPr id="15" name="Text 13"/>
+          <p:cNvSpPr txBox="1"/>
+          <p:nvPr/>
+        </p:nvSpPr>
+        <p:spPr>
+          <a:xfrm>
+            <a:off x="9720072" y="4160520"/>
+            <a:ext cx="2606040" cy="274320"/>
+          </a:xfrm>
+          <a:prstGeom prst="rect">
+            <a:avLst/>
+          </a:prstGeom>
+          <a:noFill/>
+          <a:ln/>
+        </p:spPr>
+        <p:txBody>
+          <a:bodyPr wrap="square" lIns="0" tIns="0" rIns="0" bIns="0" rtlCol="0" anchor="ctr"/>
+          <a:lstStyle/>
+          <a:p>
+            <a:pPr indent="0" marL="0">
+              <a:buNone/>
+            </a:pPr>
+            <a:r>
+              <a:rPr lang="en-US" sz="950" dirty="0">
+                <a:solidFill>
+                  <a:srgbClr val="707070"/>
+                </a:solidFill>
+                <a:latin typeface="Pretendard SemiBold" pitchFamily="34" charset="0"/>
+                <a:ea typeface="Pretendard SemiBold" pitchFamily="34" charset="-122"/>
+                <a:cs typeface="Pretendard SemiBold" pitchFamily="34" charset="-120"/>
+              </a:rPr>
+              <a:t>뜻</a:t>
+            </a:r>
+            <a:endParaRPr lang="en-US" sz="950" dirty="0"/>
+          </a:p>
+        </p:txBody>
+      </p:sp>
+      <p:sp>
+        <p:nvSpPr>
+          <p:cNvPr id="16" name="Shape 14"/>
+          <p:cNvSpPr/>
+          <p:nvPr/>
+        </p:nvSpPr>
+        <p:spPr>
+          <a:xfrm>
+            <a:off x="758952" y="4562856"/>
+            <a:ext cx="10673791" cy="0"/>
+          </a:xfrm>
+          <a:prstGeom prst="line">
+            <a:avLst/>
+          </a:prstGeom>
+          <a:noFill/>
+          <a:ln w="12700">
+            <a:solidFill>
+              <a:srgbClr val="E0E0E0"/>
+            </a:solidFill>
+            <a:prstDash val="solid"/>
+          </a:ln>
+        </p:spPr>
+      </p:sp>
+      <p:sp>
+        <p:nvSpPr>
+          <p:cNvPr id="17" name="Text 15"/>
+          <p:cNvSpPr txBox="1"/>
+          <p:nvPr/>
+        </p:nvSpPr>
+        <p:spPr>
+          <a:xfrm>
+            <a:off x="758952" y="4727448"/>
+            <a:ext cx="2743200" cy="365760"/>
+          </a:xfrm>
+          <a:prstGeom prst="rect">
+            <a:avLst/>
+          </a:prstGeom>
+          <a:noFill/>
+          <a:ln/>
+        </p:spPr>
+        <p:txBody>
+          <a:bodyPr wrap="square" lIns="0" tIns="0" rIns="0" bIns="0" rtlCol="0" anchor="ctr"/>
+          <a:lstStyle/>
+          <a:p>
+            <a:pPr indent="0" marL="0">
+              <a:buNone/>
+            </a:pPr>
+            <a:r>
+              <a:rPr lang="en-US" sz="1200" dirty="0">
                 <a:solidFill>
                   <a:srgbClr val="141414"/>
                 </a:solidFill>
@@ -4860,96 +4511,112 @@
                 <a:ea typeface="Consolas" pitchFamily="34" charset="-122"/>
                 <a:cs typeface="Consolas" pitchFamily="34" charset="-120"/>
               </a:rPr>
-              <a:t>    transform.position</a:t>
-            </a:r>
-            <a:endParaRPr lang="en-US" sz="1150" dirty="0"/>
-          </a:p>
-          <a:p>
-            <a:pPr indent="0" marL="0">
-              <a:lnSpc>
-                <a:spcPct val="132000"/>
-              </a:lnSpc>
-              <a:buNone/>
-            </a:pPr>
-            <a:r>
-              <a:rPr lang="en-US" sz="1150" b="1" dirty="0">
-                <a:solidFill>
-                  <a:srgbClr val="141414"/>
+              <a:t>Spinner</a:t>
+            </a:r>
+            <a:endParaRPr lang="en-US" sz="1200" dirty="0"/>
+          </a:p>
+        </p:txBody>
+      </p:sp>
+      <p:sp>
+        <p:nvSpPr>
+          <p:cNvPr id="18" name="Text 16"/>
+          <p:cNvSpPr txBox="1"/>
+          <p:nvPr/>
+        </p:nvSpPr>
+        <p:spPr>
+          <a:xfrm>
+            <a:off x="3502152" y="4727448"/>
+            <a:ext cx="3108960" cy="365760"/>
+          </a:xfrm>
+          <a:prstGeom prst="rect">
+            <a:avLst/>
+          </a:prstGeom>
+          <a:noFill/>
+          <a:ln/>
+        </p:spPr>
+        <p:txBody>
+          <a:bodyPr wrap="square" lIns="0" tIns="0" rIns="0" bIns="0" rtlCol="0" anchor="ctr"/>
+          <a:lstStyle/>
+          <a:p>
+            <a:pPr indent="0" marL="0">
+              <a:buNone/>
+            </a:pPr>
+            <a:r>
+              <a:rPr lang="en-US" sz="1200" dirty="0">
+                <a:solidFill>
+                  <a:srgbClr val="707070"/>
                 </a:solidFill>
                 <a:latin typeface="Consolas" pitchFamily="34" charset="0"/>
                 <a:ea typeface="Consolas" pitchFamily="34" charset="-122"/>
                 <a:cs typeface="Consolas" pitchFamily="34" charset="-120"/>
               </a:rPr>
-              <a:t>    + dir * moveSpeed * Time.deltaTime;</a:t>
-            </a:r>
-            <a:endParaRPr lang="en-US" sz="1150" dirty="0"/>
-          </a:p>
-        </p:txBody>
-      </p:sp>
-      <p:sp>
-        <p:nvSpPr>
-          <p:cNvPr id="34" name="Text 32"/>
-          <p:cNvSpPr txBox="1"/>
-          <p:nvPr/>
-        </p:nvSpPr>
-        <p:spPr>
-          <a:xfrm>
-            <a:off x="6720840" y="4343400"/>
-            <a:ext cx="4711903" cy="402336"/>
-          </a:xfrm>
-          <a:prstGeom prst="rect">
-            <a:avLst/>
-          </a:prstGeom>
-          <a:noFill/>
-          <a:ln/>
-        </p:spPr>
-        <p:txBody>
-          <a:bodyPr wrap="square" lIns="0" tIns="0" rIns="0" bIns="0" rtlCol="0" anchor="ctr"/>
-          <a:lstStyle/>
-          <a:p>
-            <a:pPr indent="0" marL="0">
-              <a:buNone/>
-            </a:pPr>
-            <a:r>
-              <a:rPr lang="en-US" sz="1900" dirty="0">
+              <a:t>rotateStep 1.5</a:t>
+            </a:r>
+            <a:endParaRPr lang="en-US" sz="1200" dirty="0"/>
+          </a:p>
+        </p:txBody>
+      </p:sp>
+      <p:sp>
+        <p:nvSpPr>
+          <p:cNvPr id="19" name="Text 17"/>
+          <p:cNvSpPr txBox="1"/>
+          <p:nvPr/>
+        </p:nvSpPr>
+        <p:spPr>
+          <a:xfrm>
+            <a:off x="6611112" y="4727448"/>
+            <a:ext cx="3108960" cy="365760"/>
+          </a:xfrm>
+          <a:prstGeom prst="rect">
+            <a:avLst/>
+          </a:prstGeom>
+          <a:noFill/>
+          <a:ln/>
+        </p:spPr>
+        <p:txBody>
+          <a:bodyPr wrap="square" lIns="0" tIns="0" rIns="0" bIns="0" rtlCol="0" anchor="ctr"/>
+          <a:lstStyle/>
+          <a:p>
+            <a:pPr indent="0" marL="0">
+              <a:buNone/>
+            </a:pPr>
+            <a:r>
+              <a:rPr lang="en-US" sz="1200" dirty="0">
                 <a:solidFill>
                   <a:srgbClr val="141414"/>
                 </a:solidFill>
-                <a:latin typeface="Pretendard SemiBold" pitchFamily="34" charset="0"/>
-                <a:ea typeface="Pretendard SemiBold" pitchFamily="34" charset="-122"/>
-                <a:cs typeface="Pretendard SemiBold" pitchFamily="34" charset="-120"/>
-              </a:rPr>
-              <a:t>새로 배운 건 첫 두 줄뿐이다.</a:t>
-            </a:r>
-            <a:endParaRPr lang="en-US" sz="1900" dirty="0"/>
-          </a:p>
-        </p:txBody>
-      </p:sp>
-      <p:sp>
-        <p:nvSpPr>
-          <p:cNvPr id="35" name="Text 33"/>
-          <p:cNvSpPr txBox="1"/>
-          <p:nvPr/>
-        </p:nvSpPr>
-        <p:spPr>
-          <a:xfrm>
-            <a:off x="6720840" y="4800600"/>
-            <a:ext cx="4711903" cy="914400"/>
-          </a:xfrm>
-          <a:prstGeom prst="rect">
-            <a:avLst/>
-          </a:prstGeom>
-          <a:noFill/>
-          <a:ln/>
-        </p:spPr>
-        <p:txBody>
-          <a:bodyPr wrap="square" lIns="0" tIns="0" rIns="0" bIns="0" rtlCol="0" anchor="ctr"/>
-          <a:lstStyle/>
-          <a:p>
-            <a:pPr indent="0" marL="0">
-              <a:lnSpc>
-                <a:spcPct val="138000"/>
-              </a:lnSpc>
+                <a:latin typeface="Consolas" pitchFamily="34" charset="0"/>
+                <a:ea typeface="Consolas" pitchFamily="34" charset="-122"/>
+                <a:cs typeface="Consolas" pitchFamily="34" charset="-120"/>
+              </a:rPr>
+              <a:t>rotateSpeed 90</a:t>
+            </a:r>
+            <a:endParaRPr lang="en-US" sz="1200" dirty="0"/>
+          </a:p>
+        </p:txBody>
+      </p:sp>
+      <p:sp>
+        <p:nvSpPr>
+          <p:cNvPr id="20" name="Text 18"/>
+          <p:cNvSpPr txBox="1"/>
+          <p:nvPr/>
+        </p:nvSpPr>
+        <p:spPr>
+          <a:xfrm>
+            <a:off x="9720072" y="4727448"/>
+            <a:ext cx="2606040" cy="365760"/>
+          </a:xfrm>
+          <a:prstGeom prst="rect">
+            <a:avLst/>
+          </a:prstGeom>
+          <a:noFill/>
+          <a:ln/>
+        </p:spPr>
+        <p:txBody>
+          <a:bodyPr wrap="square" lIns="0" tIns="0" rIns="0" bIns="0" rtlCol="0" anchor="ctr"/>
+          <a:lstStyle/>
+          <a:p>
+            <a:pPr indent="0" marL="0">
               <a:buNone/>
             </a:pPr>
             <a:r>
@@ -4957,15 +4624,396 @@
                 <a:solidFill>
                   <a:srgbClr val="707070"/>
                 </a:solidFill>
-                <a:latin typeface="Pretendard Light" pitchFamily="34" charset="0"/>
-                <a:ea typeface="Pretendard Light" pitchFamily="34" charset="-122"/>
-                <a:cs typeface="Pretendard Light" pitchFamily="34" charset="-120"/>
-              </a:rPr>
-              <a:t>나머지는 038·039에서 한 그대로다. 키를 안 누르면 dir이 (0,0,0)이라 안 움직인다 — 조건문이 필요 없다.</a:t>
+                <a:latin typeface="Pretendard" pitchFamily="34" charset="0"/>
+                <a:ea typeface="Pretendard" pitchFamily="34" charset="-122"/>
+                <a:cs typeface="Pretendard" pitchFamily="34" charset="-120"/>
+              </a:rPr>
+              <a:t>4초에 한 바퀴</a:t>
             </a:r>
             <a:endParaRPr lang="en-US" sz="1200" dirty="0"/>
           </a:p>
         </p:txBody>
+      </p:sp>
+      <p:sp>
+        <p:nvSpPr>
+          <p:cNvPr id="21" name="Shape 19"/>
+          <p:cNvSpPr/>
+          <p:nvPr/>
+        </p:nvSpPr>
+        <p:spPr>
+          <a:xfrm>
+            <a:off x="758952" y="5202936"/>
+            <a:ext cx="10673791" cy="0"/>
+          </a:xfrm>
+          <a:prstGeom prst="line">
+            <a:avLst/>
+          </a:prstGeom>
+          <a:noFill/>
+          <a:ln w="12700">
+            <a:solidFill>
+              <a:srgbClr val="F0F0F0"/>
+            </a:solidFill>
+            <a:prstDash val="solid"/>
+          </a:ln>
+        </p:spPr>
+      </p:sp>
+      <p:sp>
+        <p:nvSpPr>
+          <p:cNvPr id="22" name="Text 20"/>
+          <p:cNvSpPr txBox="1"/>
+          <p:nvPr/>
+        </p:nvSpPr>
+        <p:spPr>
+          <a:xfrm>
+            <a:off x="758952" y="5312664"/>
+            <a:ext cx="2743200" cy="365760"/>
+          </a:xfrm>
+          <a:prstGeom prst="rect">
+            <a:avLst/>
+          </a:prstGeom>
+          <a:noFill/>
+          <a:ln/>
+        </p:spPr>
+        <p:txBody>
+          <a:bodyPr wrap="square" lIns="0" tIns="0" rIns="0" bIns="0" rtlCol="0" anchor="ctr"/>
+          <a:lstStyle/>
+          <a:p>
+            <a:pPr indent="0" marL="0">
+              <a:buNone/>
+            </a:pPr>
+            <a:r>
+              <a:rPr lang="en-US" sz="1200" dirty="0">
+                <a:solidFill>
+                  <a:srgbClr val="141414"/>
+                </a:solidFill>
+                <a:latin typeface="Consolas" pitchFamily="34" charset="0"/>
+                <a:ea typeface="Consolas" pitchFamily="34" charset="-122"/>
+                <a:cs typeface="Consolas" pitchFamily="34" charset="-120"/>
+              </a:rPr>
+              <a:t>Bouncer</a:t>
+            </a:r>
+            <a:endParaRPr lang="en-US" sz="1200" dirty="0"/>
+          </a:p>
+        </p:txBody>
+      </p:sp>
+      <p:sp>
+        <p:nvSpPr>
+          <p:cNvPr id="23" name="Text 21"/>
+          <p:cNvSpPr txBox="1"/>
+          <p:nvPr/>
+        </p:nvSpPr>
+        <p:spPr>
+          <a:xfrm>
+            <a:off x="3502152" y="5312664"/>
+            <a:ext cx="3108960" cy="365760"/>
+          </a:xfrm>
+          <a:prstGeom prst="rect">
+            <a:avLst/>
+          </a:prstGeom>
+          <a:noFill/>
+          <a:ln/>
+        </p:spPr>
+        <p:txBody>
+          <a:bodyPr wrap="square" lIns="0" tIns="0" rIns="0" bIns="0" rtlCol="0" anchor="ctr"/>
+          <a:lstStyle/>
+          <a:p>
+            <a:pPr indent="0" marL="0">
+              <a:buNone/>
+            </a:pPr>
+            <a:r>
+              <a:rPr lang="en-US" sz="1200" dirty="0">
+                <a:solidFill>
+                  <a:srgbClr val="707070"/>
+                </a:solidFill>
+                <a:latin typeface="Consolas" pitchFamily="34" charset="0"/>
+                <a:ea typeface="Consolas" pitchFamily="34" charset="-122"/>
+                <a:cs typeface="Consolas" pitchFamily="34" charset="-120"/>
+              </a:rPr>
+              <a:t>scaleStep 0.01</a:t>
+            </a:r>
+            <a:endParaRPr lang="en-US" sz="1200" dirty="0"/>
+          </a:p>
+        </p:txBody>
+      </p:sp>
+      <p:sp>
+        <p:nvSpPr>
+          <p:cNvPr id="24" name="Text 22"/>
+          <p:cNvSpPr txBox="1"/>
+          <p:nvPr/>
+        </p:nvSpPr>
+        <p:spPr>
+          <a:xfrm>
+            <a:off x="6611112" y="5312664"/>
+            <a:ext cx="3108960" cy="365760"/>
+          </a:xfrm>
+          <a:prstGeom prst="rect">
+            <a:avLst/>
+          </a:prstGeom>
+          <a:noFill/>
+          <a:ln/>
+        </p:spPr>
+        <p:txBody>
+          <a:bodyPr wrap="square" lIns="0" tIns="0" rIns="0" bIns="0" rtlCol="0" anchor="ctr"/>
+          <a:lstStyle/>
+          <a:p>
+            <a:pPr indent="0" marL="0">
+              <a:buNone/>
+            </a:pPr>
+            <a:r>
+              <a:rPr lang="en-US" sz="1200" dirty="0">
+                <a:solidFill>
+                  <a:srgbClr val="141414"/>
+                </a:solidFill>
+                <a:latin typeface="Consolas" pitchFamily="34" charset="0"/>
+                <a:ea typeface="Consolas" pitchFamily="34" charset="-122"/>
+                <a:cs typeface="Consolas" pitchFamily="34" charset="-120"/>
+              </a:rPr>
+              <a:t>scaleSpeed 0.5</a:t>
+            </a:r>
+            <a:endParaRPr lang="en-US" sz="1200" dirty="0"/>
+          </a:p>
+        </p:txBody>
+      </p:sp>
+      <p:sp>
+        <p:nvSpPr>
+          <p:cNvPr id="25" name="Text 23"/>
+          <p:cNvSpPr txBox="1"/>
+          <p:nvPr/>
+        </p:nvSpPr>
+        <p:spPr>
+          <a:xfrm>
+            <a:off x="9720072" y="5312664"/>
+            <a:ext cx="2606040" cy="365760"/>
+          </a:xfrm>
+          <a:prstGeom prst="rect">
+            <a:avLst/>
+          </a:prstGeom>
+          <a:noFill/>
+          <a:ln/>
+        </p:spPr>
+        <p:txBody>
+          <a:bodyPr wrap="square" lIns="0" tIns="0" rIns="0" bIns="0" rtlCol="0" anchor="ctr"/>
+          <a:lstStyle/>
+          <a:p>
+            <a:pPr indent="0" marL="0">
+              <a:buNone/>
+            </a:pPr>
+            <a:r>
+              <a:rPr lang="en-US" sz="1200" dirty="0">
+                <a:solidFill>
+                  <a:srgbClr val="707070"/>
+                </a:solidFill>
+                <a:latin typeface="Pretendard" pitchFamily="34" charset="0"/>
+                <a:ea typeface="Pretendard" pitchFamily="34" charset="-122"/>
+                <a:cs typeface="Pretendard" pitchFamily="34" charset="-120"/>
+              </a:rPr>
+              <a:t>1초에 0.5씩</a:t>
+            </a:r>
+            <a:endParaRPr lang="en-US" sz="1200" dirty="0"/>
+          </a:p>
+        </p:txBody>
+      </p:sp>
+      <p:sp>
+        <p:nvSpPr>
+          <p:cNvPr id="26" name="Shape 24"/>
+          <p:cNvSpPr/>
+          <p:nvPr/>
+        </p:nvSpPr>
+        <p:spPr>
+          <a:xfrm>
+            <a:off x="758952" y="5788152"/>
+            <a:ext cx="10673791" cy="0"/>
+          </a:xfrm>
+          <a:prstGeom prst="line">
+            <a:avLst/>
+          </a:prstGeom>
+          <a:noFill/>
+          <a:ln w="12700">
+            <a:solidFill>
+              <a:srgbClr val="F0F0F0"/>
+            </a:solidFill>
+            <a:prstDash val="solid"/>
+          </a:ln>
+        </p:spPr>
+      </p:sp>
+      <p:sp>
+        <p:nvSpPr>
+          <p:cNvPr id="27" name="Text 25"/>
+          <p:cNvSpPr txBox="1"/>
+          <p:nvPr/>
+        </p:nvSpPr>
+        <p:spPr>
+          <a:xfrm>
+            <a:off x="758952" y="5897880"/>
+            <a:ext cx="2743200" cy="365760"/>
+          </a:xfrm>
+          <a:prstGeom prst="rect">
+            <a:avLst/>
+          </a:prstGeom>
+          <a:noFill/>
+          <a:ln/>
+        </p:spPr>
+        <p:txBody>
+          <a:bodyPr wrap="square" lIns="0" tIns="0" rIns="0" bIns="0" rtlCol="0" anchor="ctr"/>
+          <a:lstStyle/>
+          <a:p>
+            <a:pPr indent="0" marL="0">
+              <a:buNone/>
+            </a:pPr>
+            <a:r>
+              <a:rPr lang="en-US" sz="1200" dirty="0">
+                <a:solidFill>
+                  <a:srgbClr val="141414"/>
+                </a:solidFill>
+                <a:latin typeface="Consolas" pitchFamily="34" charset="0"/>
+                <a:ea typeface="Consolas" pitchFamily="34" charset="-122"/>
+                <a:cs typeface="Consolas" pitchFamily="34" charset="-120"/>
+              </a:rPr>
+              <a:t>Mover</a:t>
+            </a:r>
+            <a:endParaRPr lang="en-US" sz="1200" dirty="0"/>
+          </a:p>
+        </p:txBody>
+      </p:sp>
+      <p:sp>
+        <p:nvSpPr>
+          <p:cNvPr id="28" name="Text 26"/>
+          <p:cNvSpPr txBox="1"/>
+          <p:nvPr/>
+        </p:nvSpPr>
+        <p:spPr>
+          <a:xfrm>
+            <a:off x="3502152" y="5897880"/>
+            <a:ext cx="3108960" cy="365760"/>
+          </a:xfrm>
+          <a:prstGeom prst="rect">
+            <a:avLst/>
+          </a:prstGeom>
+          <a:noFill/>
+          <a:ln/>
+        </p:spPr>
+        <p:txBody>
+          <a:bodyPr wrap="square" lIns="0" tIns="0" rIns="0" bIns="0" rtlCol="0" anchor="ctr"/>
+          <a:lstStyle/>
+          <a:p>
+            <a:pPr indent="0" marL="0">
+              <a:buNone/>
+            </a:pPr>
+            <a:r>
+              <a:rPr lang="en-US" sz="1200" dirty="0">
+                <a:solidFill>
+                  <a:srgbClr val="707070"/>
+                </a:solidFill>
+                <a:latin typeface="Consolas" pitchFamily="34" charset="0"/>
+                <a:ea typeface="Consolas" pitchFamily="34" charset="-122"/>
+                <a:cs typeface="Consolas" pitchFamily="34" charset="-120"/>
+              </a:rPr>
+              <a:t>moveStep 0.05</a:t>
+            </a:r>
+            <a:endParaRPr lang="en-US" sz="1200" dirty="0"/>
+          </a:p>
+        </p:txBody>
+      </p:sp>
+      <p:sp>
+        <p:nvSpPr>
+          <p:cNvPr id="29" name="Text 27"/>
+          <p:cNvSpPr txBox="1"/>
+          <p:nvPr/>
+        </p:nvSpPr>
+        <p:spPr>
+          <a:xfrm>
+            <a:off x="6611112" y="5897880"/>
+            <a:ext cx="3108960" cy="365760"/>
+          </a:xfrm>
+          <a:prstGeom prst="rect">
+            <a:avLst/>
+          </a:prstGeom>
+          <a:noFill/>
+          <a:ln/>
+        </p:spPr>
+        <p:txBody>
+          <a:bodyPr wrap="square" lIns="0" tIns="0" rIns="0" bIns="0" rtlCol="0" anchor="ctr"/>
+          <a:lstStyle/>
+          <a:p>
+            <a:pPr indent="0" marL="0">
+              <a:buNone/>
+            </a:pPr>
+            <a:r>
+              <a:rPr lang="en-US" sz="1200" dirty="0">
+                <a:solidFill>
+                  <a:srgbClr val="141414"/>
+                </a:solidFill>
+                <a:latin typeface="Consolas" pitchFamily="34" charset="0"/>
+                <a:ea typeface="Consolas" pitchFamily="34" charset="-122"/>
+                <a:cs typeface="Consolas" pitchFamily="34" charset="-120"/>
+              </a:rPr>
+              <a:t>moveSpeed 3</a:t>
+            </a:r>
+            <a:endParaRPr lang="en-US" sz="1200" dirty="0"/>
+          </a:p>
+        </p:txBody>
+      </p:sp>
+      <p:sp>
+        <p:nvSpPr>
+          <p:cNvPr id="30" name="Text 28"/>
+          <p:cNvSpPr txBox="1"/>
+          <p:nvPr/>
+        </p:nvSpPr>
+        <p:spPr>
+          <a:xfrm>
+            <a:off x="9720072" y="5897880"/>
+            <a:ext cx="2606040" cy="365760"/>
+          </a:xfrm>
+          <a:prstGeom prst="rect">
+            <a:avLst/>
+          </a:prstGeom>
+          <a:noFill/>
+          <a:ln/>
+        </p:spPr>
+        <p:txBody>
+          <a:bodyPr wrap="square" lIns="0" tIns="0" rIns="0" bIns="0" rtlCol="0" anchor="ctr"/>
+          <a:lstStyle/>
+          <a:p>
+            <a:pPr indent="0" marL="0">
+              <a:buNone/>
+            </a:pPr>
+            <a:r>
+              <a:rPr lang="en-US" sz="1200" dirty="0">
+                <a:solidFill>
+                  <a:srgbClr val="707070"/>
+                </a:solidFill>
+                <a:latin typeface="Pretendard" pitchFamily="34" charset="0"/>
+                <a:ea typeface="Pretendard" pitchFamily="34" charset="-122"/>
+                <a:cs typeface="Pretendard" pitchFamily="34" charset="-120"/>
+              </a:rPr>
+              <a:t>1초에 3만큼</a:t>
+            </a:r>
+            <a:endParaRPr lang="en-US" sz="1200" dirty="0"/>
+          </a:p>
+        </p:txBody>
+      </p:sp>
+      <p:sp>
+        <p:nvSpPr>
+          <p:cNvPr id="31" name="Shape 29"/>
+          <p:cNvSpPr/>
+          <p:nvPr/>
+        </p:nvSpPr>
+        <p:spPr>
+          <a:xfrm>
+            <a:off x="758952" y="6373368"/>
+            <a:ext cx="10673791" cy="0"/>
+          </a:xfrm>
+          <a:prstGeom prst="line">
+            <a:avLst/>
+          </a:prstGeom>
+          <a:noFill/>
+          <a:ln w="12700">
+            <a:solidFill>
+              <a:srgbClr val="F0F0F0"/>
+            </a:solidFill>
+            <a:prstDash val="solid"/>
+          </a:ln>
+        </p:spPr>
       </p:sp>
     </p:spTree>
   </p:cSld>
@@ -5098,7 +5146,7 @@
                 <a:ea typeface="Pretendard SemiBold" pitchFamily="34" charset="-122"/>
                 <a:cs typeface="Pretendard SemiBold" pitchFamily="34" charset="-120"/>
               </a:rPr>
-              <a:t>실습 — WASD로 움직이는 캐릭터.</a:t>
+              <a:t>키를 누르면 숫자가 나온다.</a:t>
             </a:r>
             <a:endParaRPr lang="en-US" sz="2600" dirty="0"/>
           </a:p>
@@ -5137,7 +5185,7 @@
                 <a:ea typeface="Pretendard Light" pitchFamily="34" charset="-122"/>
                 <a:cs typeface="Pretendard Light" pitchFamily="34" charset="-120"/>
               </a:rPr>
-              <a:t>8주를 기다린 결과물이다. 서두르지 않는다.</a:t>
+              <a:t>032에서 배운 그대로다. 양수면 오른쪽, 음수면 왼쪽.</a:t>
             </a:r>
             <a:endParaRPr lang="en-US" sz="1500" dirty="0"/>
           </a:p>
@@ -5152,11 +5200,11 @@
         <p:spPr>
           <a:xfrm>
             <a:off x="758952" y="1965960"/>
-            <a:ext cx="6035040" cy="3566160"/>
+            <a:ext cx="5486400" cy="1280160"/>
           </a:xfrm>
           <a:prstGeom prst="roundRect">
             <a:avLst>
-              <a:gd name="adj" fmla="val 4282"/>
+              <a:gd name="adj" fmla="val 11929"/>
             </a:avLst>
           </a:prstGeom>
           <a:solidFill>
@@ -5179,7 +5227,7 @@
         <p:spPr>
           <a:xfrm>
             <a:off x="1014984" y="2167128"/>
-            <a:ext cx="5522976" cy="3163824"/>
+            <a:ext cx="4974336" cy="877824"/>
           </a:xfrm>
           <a:prstGeom prst="rect">
             <a:avLst/>
@@ -5198,7 +5246,7 @@
               <a:buNone/>
             </a:pPr>
             <a:r>
-              <a:rPr lang="en-US" sz="1150" dirty="0">
+              <a:rPr lang="en-US" sz="1150" b="1" dirty="0">
                 <a:solidFill>
                   <a:srgbClr val="141414"/>
                 </a:solidFill>
@@ -5206,7 +5254,7 @@
                 <a:ea typeface="Consolas" pitchFamily="34" charset="-122"/>
                 <a:cs typeface="Consolas" pitchFamily="34" charset="-120"/>
               </a:rPr>
-              <a:t>public class PlayerMove : MonoBehaviour</a:t>
+              <a:t>float h = Input.GetAxisRaw("Horizontal");</a:t>
             </a:r>
             <a:endParaRPr lang="en-US" sz="1150" dirty="0"/>
           </a:p>
@@ -5218,7 +5266,7 @@
               <a:buNone/>
             </a:pPr>
             <a:r>
-              <a:rPr lang="en-US" sz="1150" dirty="0">
+              <a:rPr lang="en-US" sz="1150" b="1" dirty="0">
                 <a:solidFill>
                   <a:srgbClr val="141414"/>
                 </a:solidFill>
@@ -5226,119 +5274,536 @@
                 <a:ea typeface="Consolas" pitchFamily="34" charset="-122"/>
                 <a:cs typeface="Consolas" pitchFamily="34" charset="-120"/>
               </a:rPr>
-              <a:t>{</a:t>
+              <a:t>float v = Input.GetAxisRaw("Vertical");</a:t>
             </a:r>
             <a:endParaRPr lang="en-US" sz="1150" dirty="0"/>
           </a:p>
-          <a:p>
-            <a:pPr indent="0" marL="0">
-              <a:lnSpc>
-                <a:spcPct val="132000"/>
-              </a:lnSpc>
-              <a:buNone/>
-            </a:pPr>
-            <a:r>
-              <a:rPr lang="en-US" sz="1150" dirty="0">
+        </p:txBody>
+      </p:sp>
+      <p:sp>
+        <p:nvSpPr>
+          <p:cNvPr id="8" name="Text 6"/>
+          <p:cNvSpPr txBox="1"/>
+          <p:nvPr/>
+        </p:nvSpPr>
+        <p:spPr>
+          <a:xfrm>
+            <a:off x="758952" y="3520440"/>
+            <a:ext cx="2194560" cy="274320"/>
+          </a:xfrm>
+          <a:prstGeom prst="rect">
+            <a:avLst/>
+          </a:prstGeom>
+          <a:noFill/>
+          <a:ln/>
+        </p:spPr>
+        <p:txBody>
+          <a:bodyPr wrap="square" lIns="0" tIns="0" rIns="0" bIns="0" rtlCol="0" anchor="ctr"/>
+          <a:lstStyle/>
+          <a:p>
+            <a:pPr indent="0" marL="0">
+              <a:buNone/>
+            </a:pPr>
+            <a:r>
+              <a:rPr lang="en-US" sz="950" dirty="0">
+                <a:solidFill>
+                  <a:srgbClr val="707070"/>
+                </a:solidFill>
+                <a:latin typeface="Pretendard SemiBold" pitchFamily="34" charset="0"/>
+                <a:ea typeface="Pretendard SemiBold" pitchFamily="34" charset="-122"/>
+                <a:cs typeface="Pretendard SemiBold" pitchFamily="34" charset="-120"/>
+              </a:rPr>
+              <a:t>누르는 키</a:t>
+            </a:r>
+            <a:endParaRPr lang="en-US" sz="950" dirty="0"/>
+          </a:p>
+        </p:txBody>
+      </p:sp>
+      <p:sp>
+        <p:nvSpPr>
+          <p:cNvPr id="9" name="Text 7"/>
+          <p:cNvSpPr txBox="1"/>
+          <p:nvPr/>
+        </p:nvSpPr>
+        <p:spPr>
+          <a:xfrm>
+            <a:off x="2953512" y="3520440"/>
+            <a:ext cx="1645920" cy="274320"/>
+          </a:xfrm>
+          <a:prstGeom prst="rect">
+            <a:avLst/>
+          </a:prstGeom>
+          <a:noFill/>
+          <a:ln/>
+        </p:spPr>
+        <p:txBody>
+          <a:bodyPr wrap="square" lIns="0" tIns="0" rIns="0" bIns="0" rtlCol="0" anchor="ctr"/>
+          <a:lstStyle/>
+          <a:p>
+            <a:pPr indent="0" marL="0">
+              <a:buNone/>
+            </a:pPr>
+            <a:r>
+              <a:rPr lang="en-US" sz="950" dirty="0">
+                <a:solidFill>
+                  <a:srgbClr val="707070"/>
+                </a:solidFill>
+                <a:latin typeface="Pretendard SemiBold" pitchFamily="34" charset="0"/>
+                <a:ea typeface="Pretendard SemiBold" pitchFamily="34" charset="-122"/>
+                <a:cs typeface="Pretendard SemiBold" pitchFamily="34" charset="-120"/>
+              </a:rPr>
+              <a:t>h</a:t>
+            </a:r>
+            <a:endParaRPr lang="en-US" sz="950" dirty="0"/>
+          </a:p>
+        </p:txBody>
+      </p:sp>
+      <p:sp>
+        <p:nvSpPr>
+          <p:cNvPr id="10" name="Text 8"/>
+          <p:cNvSpPr txBox="1"/>
+          <p:nvPr/>
+        </p:nvSpPr>
+        <p:spPr>
+          <a:xfrm>
+            <a:off x="4599432" y="3520440"/>
+            <a:ext cx="1645920" cy="274320"/>
+          </a:xfrm>
+          <a:prstGeom prst="rect">
+            <a:avLst/>
+          </a:prstGeom>
+          <a:noFill/>
+          <a:ln/>
+        </p:spPr>
+        <p:txBody>
+          <a:bodyPr wrap="square" lIns="0" tIns="0" rIns="0" bIns="0" rtlCol="0" anchor="ctr"/>
+          <a:lstStyle/>
+          <a:p>
+            <a:pPr indent="0" marL="0">
+              <a:buNone/>
+            </a:pPr>
+            <a:r>
+              <a:rPr lang="en-US" sz="950" dirty="0">
+                <a:solidFill>
+                  <a:srgbClr val="707070"/>
+                </a:solidFill>
+                <a:latin typeface="Pretendard SemiBold" pitchFamily="34" charset="0"/>
+                <a:ea typeface="Pretendard SemiBold" pitchFamily="34" charset="-122"/>
+                <a:cs typeface="Pretendard SemiBold" pitchFamily="34" charset="-120"/>
+              </a:rPr>
+              <a:t>v</a:t>
+            </a:r>
+            <a:endParaRPr lang="en-US" sz="950" dirty="0"/>
+          </a:p>
+        </p:txBody>
+      </p:sp>
+      <p:sp>
+        <p:nvSpPr>
+          <p:cNvPr id="11" name="Shape 9"/>
+          <p:cNvSpPr/>
+          <p:nvPr/>
+        </p:nvSpPr>
+        <p:spPr>
+          <a:xfrm>
+            <a:off x="758952" y="3922776"/>
+            <a:ext cx="5486400" cy="0"/>
+          </a:xfrm>
+          <a:prstGeom prst="line">
+            <a:avLst/>
+          </a:prstGeom>
+          <a:noFill/>
+          <a:ln w="12700">
+            <a:solidFill>
+              <a:srgbClr val="E0E0E0"/>
+            </a:solidFill>
+            <a:prstDash val="solid"/>
+          </a:ln>
+        </p:spPr>
+      </p:sp>
+      <p:sp>
+        <p:nvSpPr>
+          <p:cNvPr id="12" name="Text 10"/>
+          <p:cNvSpPr txBox="1"/>
+          <p:nvPr/>
+        </p:nvSpPr>
+        <p:spPr>
+          <a:xfrm>
+            <a:off x="758952" y="4087368"/>
+            <a:ext cx="2194560" cy="365760"/>
+          </a:xfrm>
+          <a:prstGeom prst="rect">
+            <a:avLst/>
+          </a:prstGeom>
+          <a:noFill/>
+          <a:ln/>
+        </p:spPr>
+        <p:txBody>
+          <a:bodyPr wrap="square" lIns="0" tIns="0" rIns="0" bIns="0" rtlCol="0" anchor="ctr"/>
+          <a:lstStyle/>
+          <a:p>
+            <a:pPr indent="0" marL="0">
+              <a:buNone/>
+            </a:pPr>
+            <a:r>
+              <a:rPr lang="en-US" sz="1200" dirty="0">
                 <a:solidFill>
                   <a:srgbClr val="141414"/>
+                </a:solidFill>
+                <a:latin typeface="Pretendard" pitchFamily="34" charset="0"/>
+                <a:ea typeface="Pretendard" pitchFamily="34" charset="-122"/>
+                <a:cs typeface="Pretendard" pitchFamily="34" charset="-120"/>
+              </a:rPr>
+              <a:t>아무것도</a:t>
+            </a:r>
+            <a:endParaRPr lang="en-US" sz="1200" dirty="0"/>
+          </a:p>
+        </p:txBody>
+      </p:sp>
+      <p:sp>
+        <p:nvSpPr>
+          <p:cNvPr id="13" name="Text 11"/>
+          <p:cNvSpPr txBox="1"/>
+          <p:nvPr/>
+        </p:nvSpPr>
+        <p:spPr>
+          <a:xfrm>
+            <a:off x="2953512" y="4087368"/>
+            <a:ext cx="1645920" cy="365760"/>
+          </a:xfrm>
+          <a:prstGeom prst="rect">
+            <a:avLst/>
+          </a:prstGeom>
+          <a:noFill/>
+          <a:ln/>
+        </p:spPr>
+        <p:txBody>
+          <a:bodyPr wrap="square" lIns="0" tIns="0" rIns="0" bIns="0" rtlCol="0" anchor="ctr"/>
+          <a:lstStyle/>
+          <a:p>
+            <a:pPr indent="0" marL="0">
+              <a:buNone/>
+            </a:pPr>
+            <a:r>
+              <a:rPr lang="en-US" sz="1200" dirty="0">
+                <a:solidFill>
+                  <a:srgbClr val="707070"/>
                 </a:solidFill>
                 <a:latin typeface="Consolas" pitchFamily="34" charset="0"/>
                 <a:ea typeface="Consolas" pitchFamily="34" charset="-122"/>
                 <a:cs typeface="Consolas" pitchFamily="34" charset="-120"/>
               </a:rPr>
-              <a:t>    [SerializeField] float moveSpeed = 5f;</a:t>
-            </a:r>
-            <a:endParaRPr lang="en-US" sz="1150" dirty="0"/>
-          </a:p>
-          <a:p>
-            <a:pPr indent="0" marL="0">
-              <a:lnSpc>
-                <a:spcPct val="132000"/>
-              </a:lnSpc>
-              <a:buNone/>
-            </a:pPr>
-            <a:r>
-              <a:rPr lang="en-US" sz="1150" dirty="0">
-                <a:solidFill>
-                  <a:srgbClr val="141414"/>
+              <a:t>0</a:t>
+            </a:r>
+            <a:endParaRPr lang="en-US" sz="1200" dirty="0"/>
+          </a:p>
+        </p:txBody>
+      </p:sp>
+      <p:sp>
+        <p:nvSpPr>
+          <p:cNvPr id="14" name="Text 12"/>
+          <p:cNvSpPr txBox="1"/>
+          <p:nvPr/>
+        </p:nvSpPr>
+        <p:spPr>
+          <a:xfrm>
+            <a:off x="4599432" y="4087368"/>
+            <a:ext cx="1645920" cy="365760"/>
+          </a:xfrm>
+          <a:prstGeom prst="rect">
+            <a:avLst/>
+          </a:prstGeom>
+          <a:noFill/>
+          <a:ln/>
+        </p:spPr>
+        <p:txBody>
+          <a:bodyPr wrap="square" lIns="0" tIns="0" rIns="0" bIns="0" rtlCol="0" anchor="ctr"/>
+          <a:lstStyle/>
+          <a:p>
+            <a:pPr indent="0" marL="0">
+              <a:buNone/>
+            </a:pPr>
+            <a:r>
+              <a:rPr lang="en-US" sz="1200" dirty="0">
+                <a:solidFill>
+                  <a:srgbClr val="707070"/>
                 </a:solidFill>
                 <a:latin typeface="Consolas" pitchFamily="34" charset="0"/>
                 <a:ea typeface="Consolas" pitchFamily="34" charset="-122"/>
                 <a:cs typeface="Consolas" pitchFamily="34" charset="-120"/>
               </a:rPr>
-              <a:t>    [SerializeField] GameObject item;</a:t>
-            </a:r>
-            <a:endParaRPr lang="en-US" sz="1150" dirty="0"/>
-          </a:p>
-          <a:p>
-            <a:pPr indent="0" marL="0">
-              <a:lnSpc>
-                <a:spcPct val="132000"/>
-              </a:lnSpc>
-              <a:buNone/>
-            </a:pPr>
-            <a:r>
-              <a:rPr lang="en-US" sz="1150" dirty="0">
+              <a:t>0</a:t>
+            </a:r>
+            <a:endParaRPr lang="en-US" sz="1200" dirty="0"/>
+          </a:p>
+        </p:txBody>
+      </p:sp>
+      <p:sp>
+        <p:nvSpPr>
+          <p:cNvPr id="15" name="Shape 13"/>
+          <p:cNvSpPr/>
+          <p:nvPr/>
+        </p:nvSpPr>
+        <p:spPr>
+          <a:xfrm>
+            <a:off x="758952" y="4562856"/>
+            <a:ext cx="5486400" cy="0"/>
+          </a:xfrm>
+          <a:prstGeom prst="line">
+            <a:avLst/>
+          </a:prstGeom>
+          <a:noFill/>
+          <a:ln w="12700">
+            <a:solidFill>
+              <a:srgbClr val="F0F0F0"/>
+            </a:solidFill>
+            <a:prstDash val="solid"/>
+          </a:ln>
+        </p:spPr>
+      </p:sp>
+      <p:sp>
+        <p:nvSpPr>
+          <p:cNvPr id="16" name="Text 14"/>
+          <p:cNvSpPr txBox="1"/>
+          <p:nvPr/>
+        </p:nvSpPr>
+        <p:spPr>
+          <a:xfrm>
+            <a:off x="758952" y="4672584"/>
+            <a:ext cx="2194560" cy="365760"/>
+          </a:xfrm>
+          <a:prstGeom prst="rect">
+            <a:avLst/>
+          </a:prstGeom>
+          <a:noFill/>
+          <a:ln/>
+        </p:spPr>
+        <p:txBody>
+          <a:bodyPr wrap="square" lIns="0" tIns="0" rIns="0" bIns="0" rtlCol="0" anchor="ctr"/>
+          <a:lstStyle/>
+          <a:p>
+            <a:pPr indent="0" marL="0">
+              <a:buNone/>
+            </a:pPr>
+            <a:r>
+              <a:rPr lang="en-US" sz="1200" dirty="0">
                 <a:solidFill>
                   <a:srgbClr val="141414"/>
+                </a:solidFill>
+                <a:latin typeface="Pretendard" pitchFamily="34" charset="0"/>
+                <a:ea typeface="Pretendard" pitchFamily="34" charset="-122"/>
+                <a:cs typeface="Pretendard" pitchFamily="34" charset="-120"/>
+              </a:rPr>
+              <a:t>D 또는 →</a:t>
+            </a:r>
+            <a:endParaRPr lang="en-US" sz="1200" dirty="0"/>
+          </a:p>
+        </p:txBody>
+      </p:sp>
+      <p:sp>
+        <p:nvSpPr>
+          <p:cNvPr id="17" name="Text 15"/>
+          <p:cNvSpPr txBox="1"/>
+          <p:nvPr/>
+        </p:nvSpPr>
+        <p:spPr>
+          <a:xfrm>
+            <a:off x="2953512" y="4672584"/>
+            <a:ext cx="1645920" cy="365760"/>
+          </a:xfrm>
+          <a:prstGeom prst="rect">
+            <a:avLst/>
+          </a:prstGeom>
+          <a:noFill/>
+          <a:ln/>
+        </p:spPr>
+        <p:txBody>
+          <a:bodyPr wrap="square" lIns="0" tIns="0" rIns="0" bIns="0" rtlCol="0" anchor="ctr"/>
+          <a:lstStyle/>
+          <a:p>
+            <a:pPr indent="0" marL="0">
+              <a:buNone/>
+            </a:pPr>
+            <a:r>
+              <a:rPr lang="en-US" sz="1200" dirty="0">
+                <a:solidFill>
+                  <a:srgbClr val="707070"/>
                 </a:solidFill>
                 <a:latin typeface="Consolas" pitchFamily="34" charset="0"/>
                 <a:ea typeface="Consolas" pitchFamily="34" charset="-122"/>
                 <a:cs typeface="Consolas" pitchFamily="34" charset="-120"/>
               </a:rPr>
-              <a:t> </a:t>
-            </a:r>
-            <a:endParaRPr lang="en-US" sz="1150" dirty="0"/>
-          </a:p>
-          <a:p>
-            <a:pPr indent="0" marL="0">
-              <a:lnSpc>
-                <a:spcPct val="132000"/>
-              </a:lnSpc>
-              <a:buNone/>
-            </a:pPr>
-            <a:r>
-              <a:rPr lang="en-US" sz="1150" dirty="0">
-                <a:solidFill>
-                  <a:srgbClr val="141414"/>
+              <a:t>1</a:t>
+            </a:r>
+            <a:endParaRPr lang="en-US" sz="1200" dirty="0"/>
+          </a:p>
+        </p:txBody>
+      </p:sp>
+      <p:sp>
+        <p:nvSpPr>
+          <p:cNvPr id="18" name="Text 16"/>
+          <p:cNvSpPr txBox="1"/>
+          <p:nvPr/>
+        </p:nvSpPr>
+        <p:spPr>
+          <a:xfrm>
+            <a:off x="4599432" y="4672584"/>
+            <a:ext cx="1645920" cy="365760"/>
+          </a:xfrm>
+          <a:prstGeom prst="rect">
+            <a:avLst/>
+          </a:prstGeom>
+          <a:noFill/>
+          <a:ln/>
+        </p:spPr>
+        <p:txBody>
+          <a:bodyPr wrap="square" lIns="0" tIns="0" rIns="0" bIns="0" rtlCol="0" anchor="ctr"/>
+          <a:lstStyle/>
+          <a:p>
+            <a:pPr indent="0" marL="0">
+              <a:buNone/>
+            </a:pPr>
+            <a:r>
+              <a:rPr lang="en-US" sz="1200" dirty="0">
+                <a:solidFill>
+                  <a:srgbClr val="707070"/>
                 </a:solidFill>
                 <a:latin typeface="Consolas" pitchFamily="34" charset="0"/>
                 <a:ea typeface="Consolas" pitchFamily="34" charset="-122"/>
                 <a:cs typeface="Consolas" pitchFamily="34" charset="-120"/>
               </a:rPr>
-              <a:t>    void Update()</a:t>
-            </a:r>
-            <a:endParaRPr lang="en-US" sz="1150" dirty="0"/>
-          </a:p>
-          <a:p>
-            <a:pPr indent="0" marL="0">
-              <a:lnSpc>
-                <a:spcPct val="132000"/>
-              </a:lnSpc>
-              <a:buNone/>
-            </a:pPr>
-            <a:r>
-              <a:rPr lang="en-US" sz="1150" dirty="0">
+              <a:t>0</a:t>
+            </a:r>
+            <a:endParaRPr lang="en-US" sz="1200" dirty="0"/>
+          </a:p>
+        </p:txBody>
+      </p:sp>
+      <p:sp>
+        <p:nvSpPr>
+          <p:cNvPr id="19" name="Shape 17"/>
+          <p:cNvSpPr/>
+          <p:nvPr/>
+        </p:nvSpPr>
+        <p:spPr>
+          <a:xfrm>
+            <a:off x="758952" y="5148072"/>
+            <a:ext cx="5486400" cy="0"/>
+          </a:xfrm>
+          <a:prstGeom prst="line">
+            <a:avLst/>
+          </a:prstGeom>
+          <a:noFill/>
+          <a:ln w="12700">
+            <a:solidFill>
+              <a:srgbClr val="F0F0F0"/>
+            </a:solidFill>
+            <a:prstDash val="solid"/>
+          </a:ln>
+        </p:spPr>
+      </p:sp>
+      <p:sp>
+        <p:nvSpPr>
+          <p:cNvPr id="20" name="Text 18"/>
+          <p:cNvSpPr txBox="1"/>
+          <p:nvPr/>
+        </p:nvSpPr>
+        <p:spPr>
+          <a:xfrm>
+            <a:off x="758952" y="5257800"/>
+            <a:ext cx="2194560" cy="365760"/>
+          </a:xfrm>
+          <a:prstGeom prst="rect">
+            <a:avLst/>
+          </a:prstGeom>
+          <a:noFill/>
+          <a:ln/>
+        </p:spPr>
+        <p:txBody>
+          <a:bodyPr wrap="square" lIns="0" tIns="0" rIns="0" bIns="0" rtlCol="0" anchor="ctr"/>
+          <a:lstStyle/>
+          <a:p>
+            <a:pPr indent="0" marL="0">
+              <a:buNone/>
+            </a:pPr>
+            <a:r>
+              <a:rPr lang="en-US" sz="1200" dirty="0">
                 <a:solidFill>
                   <a:srgbClr val="141414"/>
+                </a:solidFill>
+                <a:latin typeface="Pretendard" pitchFamily="34" charset="0"/>
+                <a:ea typeface="Pretendard" pitchFamily="34" charset="-122"/>
+                <a:cs typeface="Pretendard" pitchFamily="34" charset="-120"/>
+              </a:rPr>
+              <a:t>A 또는 ←</a:t>
+            </a:r>
+            <a:endParaRPr lang="en-US" sz="1200" dirty="0"/>
+          </a:p>
+        </p:txBody>
+      </p:sp>
+      <p:sp>
+        <p:nvSpPr>
+          <p:cNvPr id="21" name="Text 19"/>
+          <p:cNvSpPr txBox="1"/>
+          <p:nvPr/>
+        </p:nvSpPr>
+        <p:spPr>
+          <a:xfrm>
+            <a:off x="2953512" y="5257800"/>
+            <a:ext cx="1645920" cy="365760"/>
+          </a:xfrm>
+          <a:prstGeom prst="rect">
+            <a:avLst/>
+          </a:prstGeom>
+          <a:noFill/>
+          <a:ln/>
+        </p:spPr>
+        <p:txBody>
+          <a:bodyPr wrap="square" lIns="0" tIns="0" rIns="0" bIns="0" rtlCol="0" anchor="ctr"/>
+          <a:lstStyle/>
+          <a:p>
+            <a:pPr indent="0" marL="0">
+              <a:buNone/>
+            </a:pPr>
+            <a:r>
+              <a:rPr lang="en-US" sz="1200" dirty="0">
+                <a:solidFill>
+                  <a:srgbClr val="707070"/>
                 </a:solidFill>
                 <a:latin typeface="Consolas" pitchFamily="34" charset="0"/>
                 <a:ea typeface="Consolas" pitchFamily="34" charset="-122"/>
                 <a:cs typeface="Consolas" pitchFamily="34" charset="-120"/>
               </a:rPr>
-              <a:t>    {</a:t>
-            </a:r>
-            <a:endParaRPr lang="en-US" sz="1150" dirty="0"/>
-          </a:p>
-          <a:p>
-            <a:pPr indent="0" marL="0">
-              <a:lnSpc>
-                <a:spcPct val="132000"/>
-              </a:lnSpc>
-              <a:buNone/>
-            </a:pPr>
-            <a:r>
-              <a:rPr lang="en-US" sz="1150" dirty="0">
+              <a:t>-1</a:t>
+            </a:r>
+            <a:endParaRPr lang="en-US" sz="1200" dirty="0"/>
+          </a:p>
+        </p:txBody>
+      </p:sp>
+      <p:sp>
+        <p:nvSpPr>
+          <p:cNvPr id="22" name="Text 20"/>
+          <p:cNvSpPr txBox="1"/>
+          <p:nvPr/>
+        </p:nvSpPr>
+        <p:spPr>
+          <a:xfrm>
+            <a:off x="4599432" y="5257800"/>
+            <a:ext cx="1645920" cy="365760"/>
+          </a:xfrm>
+          <a:prstGeom prst="rect">
+            <a:avLst/>
+          </a:prstGeom>
+          <a:noFill/>
+          <a:ln/>
+        </p:spPr>
+        <p:txBody>
+          <a:bodyPr wrap="square" lIns="0" tIns="0" rIns="0" bIns="0" rtlCol="0" anchor="ctr"/>
+          <a:lstStyle/>
+          <a:p>
+            <a:pPr indent="0" marL="0">
+              <a:buNone/>
+            </a:pPr>
+            <a:r>
+              <a:rPr lang="en-US" sz="1200" dirty="0">
                 <a:solidFill>
                   <a:srgbClr val="707070"/>
                 </a:solidFill>
@@ -5346,19 +5811,100 @@
                 <a:ea typeface="Consolas" pitchFamily="34" charset="-122"/>
                 <a:cs typeface="Consolas" pitchFamily="34" charset="-120"/>
               </a:rPr>
-              <a:t>        // TODO ①~③ 이동</a:t>
-            </a:r>
-            <a:endParaRPr lang="en-US" sz="1150" dirty="0"/>
-          </a:p>
-          <a:p>
-            <a:pPr indent="0" marL="0">
-              <a:lnSpc>
-                <a:spcPct val="132000"/>
-              </a:lnSpc>
-              <a:buNone/>
-            </a:pPr>
-            <a:r>
-              <a:rPr lang="en-US" sz="1150" dirty="0">
+              <a:t>0</a:t>
+            </a:r>
+            <a:endParaRPr lang="en-US" sz="1200" dirty="0"/>
+          </a:p>
+        </p:txBody>
+      </p:sp>
+      <p:sp>
+        <p:nvSpPr>
+          <p:cNvPr id="23" name="Shape 21"/>
+          <p:cNvSpPr/>
+          <p:nvPr/>
+        </p:nvSpPr>
+        <p:spPr>
+          <a:xfrm>
+            <a:off x="758952" y="5733288"/>
+            <a:ext cx="5486400" cy="0"/>
+          </a:xfrm>
+          <a:prstGeom prst="line">
+            <a:avLst/>
+          </a:prstGeom>
+          <a:noFill/>
+          <a:ln w="12700">
+            <a:solidFill>
+              <a:srgbClr val="F0F0F0"/>
+            </a:solidFill>
+            <a:prstDash val="solid"/>
+          </a:ln>
+        </p:spPr>
+      </p:sp>
+      <p:sp>
+        <p:nvSpPr>
+          <p:cNvPr id="24" name="Text 22"/>
+          <p:cNvSpPr txBox="1"/>
+          <p:nvPr/>
+        </p:nvSpPr>
+        <p:spPr>
+          <a:xfrm>
+            <a:off x="758952" y="5843016"/>
+            <a:ext cx="2194560" cy="365760"/>
+          </a:xfrm>
+          <a:prstGeom prst="rect">
+            <a:avLst/>
+          </a:prstGeom>
+          <a:noFill/>
+          <a:ln/>
+        </p:spPr>
+        <p:txBody>
+          <a:bodyPr wrap="square" lIns="0" tIns="0" rIns="0" bIns="0" rtlCol="0" anchor="ctr"/>
+          <a:lstStyle/>
+          <a:p>
+            <a:pPr indent="0" marL="0">
+              <a:buNone/>
+            </a:pPr>
+            <a:r>
+              <a:rPr lang="en-US" sz="1200" dirty="0">
+                <a:solidFill>
+                  <a:srgbClr val="141414"/>
+                </a:solidFill>
+                <a:latin typeface="Pretendard" pitchFamily="34" charset="0"/>
+                <a:ea typeface="Pretendard" pitchFamily="34" charset="-122"/>
+                <a:cs typeface="Pretendard" pitchFamily="34" charset="-120"/>
+              </a:rPr>
+              <a:t>W 또는 ↑</a:t>
+            </a:r>
+            <a:endParaRPr lang="en-US" sz="1200" dirty="0"/>
+          </a:p>
+        </p:txBody>
+      </p:sp>
+      <p:sp>
+        <p:nvSpPr>
+          <p:cNvPr id="25" name="Text 23"/>
+          <p:cNvSpPr txBox="1"/>
+          <p:nvPr/>
+        </p:nvSpPr>
+        <p:spPr>
+          <a:xfrm>
+            <a:off x="2953512" y="5843016"/>
+            <a:ext cx="1645920" cy="365760"/>
+          </a:xfrm>
+          <a:prstGeom prst="rect">
+            <a:avLst/>
+          </a:prstGeom>
+          <a:noFill/>
+          <a:ln/>
+        </p:spPr>
+        <p:txBody>
+          <a:bodyPr wrap="square" lIns="0" tIns="0" rIns="0" bIns="0" rtlCol="0" anchor="ctr"/>
+          <a:lstStyle/>
+          <a:p>
+            <a:pPr indent="0" marL="0">
+              <a:buNone/>
+            </a:pPr>
+            <a:r>
+              <a:rPr lang="en-US" sz="1200" dirty="0">
                 <a:solidFill>
                   <a:srgbClr val="707070"/>
                 </a:solidFill>
@@ -5366,59 +5912,178 @@
                 <a:ea typeface="Consolas" pitchFamily="34" charset="-122"/>
                 <a:cs typeface="Consolas" pitchFamily="34" charset="-120"/>
               </a:rPr>
-              <a:t>        // TODO ④ 스페이스로 item 토글</a:t>
-            </a:r>
-            <a:endParaRPr lang="en-US" sz="1150" dirty="0"/>
-          </a:p>
-          <a:p>
-            <a:pPr indent="0" marL="0">
-              <a:lnSpc>
-                <a:spcPct val="132000"/>
-              </a:lnSpc>
-              <a:buNone/>
-            </a:pPr>
-            <a:r>
-              <a:rPr lang="en-US" sz="1150" dirty="0">
-                <a:solidFill>
-                  <a:srgbClr val="141414"/>
+              <a:t>0</a:t>
+            </a:r>
+            <a:endParaRPr lang="en-US" sz="1200" dirty="0"/>
+          </a:p>
+        </p:txBody>
+      </p:sp>
+      <p:sp>
+        <p:nvSpPr>
+          <p:cNvPr id="26" name="Text 24"/>
+          <p:cNvSpPr txBox="1"/>
+          <p:nvPr/>
+        </p:nvSpPr>
+        <p:spPr>
+          <a:xfrm>
+            <a:off x="4599432" y="5843016"/>
+            <a:ext cx="1645920" cy="365760"/>
+          </a:xfrm>
+          <a:prstGeom prst="rect">
+            <a:avLst/>
+          </a:prstGeom>
+          <a:noFill/>
+          <a:ln/>
+        </p:spPr>
+        <p:txBody>
+          <a:bodyPr wrap="square" lIns="0" tIns="0" rIns="0" bIns="0" rtlCol="0" anchor="ctr"/>
+          <a:lstStyle/>
+          <a:p>
+            <a:pPr indent="0" marL="0">
+              <a:buNone/>
+            </a:pPr>
+            <a:r>
+              <a:rPr lang="en-US" sz="1200" dirty="0">
+                <a:solidFill>
+                  <a:srgbClr val="707070"/>
                 </a:solidFill>
                 <a:latin typeface="Consolas" pitchFamily="34" charset="0"/>
                 <a:ea typeface="Consolas" pitchFamily="34" charset="-122"/>
                 <a:cs typeface="Consolas" pitchFamily="34" charset="-120"/>
               </a:rPr>
-              <a:t>    }</a:t>
-            </a:r>
-            <a:endParaRPr lang="en-US" sz="1150" dirty="0"/>
-          </a:p>
-          <a:p>
-            <a:pPr indent="0" marL="0">
-              <a:lnSpc>
-                <a:spcPct val="132000"/>
-              </a:lnSpc>
-              <a:buNone/>
-            </a:pPr>
-            <a:r>
-              <a:rPr lang="en-US" sz="1150" dirty="0">
+              <a:t>1</a:t>
+            </a:r>
+            <a:endParaRPr lang="en-US" sz="1200" dirty="0"/>
+          </a:p>
+        </p:txBody>
+      </p:sp>
+      <p:sp>
+        <p:nvSpPr>
+          <p:cNvPr id="27" name="Shape 25"/>
+          <p:cNvSpPr/>
+          <p:nvPr/>
+        </p:nvSpPr>
+        <p:spPr>
+          <a:xfrm>
+            <a:off x="758952" y="6318504"/>
+            <a:ext cx="5486400" cy="0"/>
+          </a:xfrm>
+          <a:prstGeom prst="line">
+            <a:avLst/>
+          </a:prstGeom>
+          <a:noFill/>
+          <a:ln w="12700">
+            <a:solidFill>
+              <a:srgbClr val="F0F0F0"/>
+            </a:solidFill>
+            <a:prstDash val="solid"/>
+          </a:ln>
+        </p:spPr>
+      </p:sp>
+      <p:sp>
+        <p:nvSpPr>
+          <p:cNvPr id="28" name="Text 26"/>
+          <p:cNvSpPr txBox="1"/>
+          <p:nvPr/>
+        </p:nvSpPr>
+        <p:spPr>
+          <a:xfrm>
+            <a:off x="758952" y="6428232"/>
+            <a:ext cx="2194560" cy="365760"/>
+          </a:xfrm>
+          <a:prstGeom prst="rect">
+            <a:avLst/>
+          </a:prstGeom>
+          <a:noFill/>
+          <a:ln/>
+        </p:spPr>
+        <p:txBody>
+          <a:bodyPr wrap="square" lIns="0" tIns="0" rIns="0" bIns="0" rtlCol="0" anchor="ctr"/>
+          <a:lstStyle/>
+          <a:p>
+            <a:pPr indent="0" marL="0">
+              <a:buNone/>
+            </a:pPr>
+            <a:r>
+              <a:rPr lang="en-US" sz="1200" dirty="0">
                 <a:solidFill>
                   <a:srgbClr val="141414"/>
+                </a:solidFill>
+                <a:latin typeface="Pretendard" pitchFamily="34" charset="0"/>
+                <a:ea typeface="Pretendard" pitchFamily="34" charset="-122"/>
+                <a:cs typeface="Pretendard" pitchFamily="34" charset="-120"/>
+              </a:rPr>
+              <a:t>S 또는 ↓</a:t>
+            </a:r>
+            <a:endParaRPr lang="en-US" sz="1200" dirty="0"/>
+          </a:p>
+        </p:txBody>
+      </p:sp>
+      <p:sp>
+        <p:nvSpPr>
+          <p:cNvPr id="29" name="Text 27"/>
+          <p:cNvSpPr txBox="1"/>
+          <p:nvPr/>
+        </p:nvSpPr>
+        <p:spPr>
+          <a:xfrm>
+            <a:off x="2953512" y="6428232"/>
+            <a:ext cx="1645920" cy="365760"/>
+          </a:xfrm>
+          <a:prstGeom prst="rect">
+            <a:avLst/>
+          </a:prstGeom>
+          <a:noFill/>
+          <a:ln/>
+        </p:spPr>
+        <p:txBody>
+          <a:bodyPr wrap="square" lIns="0" tIns="0" rIns="0" bIns="0" rtlCol="0" anchor="ctr"/>
+          <a:lstStyle/>
+          <a:p>
+            <a:pPr indent="0" marL="0">
+              <a:buNone/>
+            </a:pPr>
+            <a:r>
+              <a:rPr lang="en-US" sz="1200" dirty="0">
+                <a:solidFill>
+                  <a:srgbClr val="707070"/>
                 </a:solidFill>
                 <a:latin typeface="Consolas" pitchFamily="34" charset="0"/>
                 <a:ea typeface="Consolas" pitchFamily="34" charset="-122"/>
                 <a:cs typeface="Consolas" pitchFamily="34" charset="-120"/>
               </a:rPr>
-              <a:t> </a:t>
-            </a:r>
-            <a:endParaRPr lang="en-US" sz="1150" dirty="0"/>
-          </a:p>
-          <a:p>
-            <a:pPr indent="0" marL="0">
-              <a:lnSpc>
-                <a:spcPct val="132000"/>
-              </a:lnSpc>
-              <a:buNone/>
-            </a:pPr>
-            <a:r>
-              <a:rPr lang="en-US" sz="1150" dirty="0">
+              <a:t>0</a:t>
+            </a:r>
+            <a:endParaRPr lang="en-US" sz="1200" dirty="0"/>
+          </a:p>
+        </p:txBody>
+      </p:sp>
+      <p:sp>
+        <p:nvSpPr>
+          <p:cNvPr id="30" name="Text 28"/>
+          <p:cNvSpPr txBox="1"/>
+          <p:nvPr/>
+        </p:nvSpPr>
+        <p:spPr>
+          <a:xfrm>
+            <a:off x="4599432" y="6428232"/>
+            <a:ext cx="1645920" cy="365760"/>
+          </a:xfrm>
+          <a:prstGeom prst="rect">
+            <a:avLst/>
+          </a:prstGeom>
+          <a:noFill/>
+          <a:ln/>
+        </p:spPr>
+        <p:txBody>
+          <a:bodyPr wrap="square" lIns="0" tIns="0" rIns="0" bIns="0" rtlCol="0" anchor="ctr"/>
+          <a:lstStyle/>
+          <a:p>
+            <a:pPr indent="0" marL="0">
+              <a:buNone/>
+            </a:pPr>
+            <a:r>
+              <a:rPr lang="en-US" sz="1200" dirty="0">
                 <a:solidFill>
                   <a:srgbClr val="707070"/>
                 </a:solidFill>
@@ -5426,46 +6091,49 @@
                 <a:ea typeface="Consolas" pitchFamily="34" charset="-122"/>
                 <a:cs typeface="Consolas" pitchFamily="34" charset="-120"/>
               </a:rPr>
-              <a:t>    // TODO ⑤ [ContextMenu] 원점으로</a:t>
-            </a:r>
-            <a:endParaRPr lang="en-US" sz="1150" dirty="0"/>
-          </a:p>
-          <a:p>
-            <a:pPr indent="0" marL="0">
-              <a:lnSpc>
-                <a:spcPct val="132000"/>
-              </a:lnSpc>
-              <a:buNone/>
-            </a:pPr>
-            <a:r>
-              <a:rPr lang="en-US" sz="1150" dirty="0">
-                <a:solidFill>
-                  <a:srgbClr val="141414"/>
-                </a:solidFill>
-                <a:latin typeface="Consolas" pitchFamily="34" charset="0"/>
-                <a:ea typeface="Consolas" pitchFamily="34" charset="-122"/>
-                <a:cs typeface="Consolas" pitchFamily="34" charset="-120"/>
-              </a:rPr>
-              <a:t>}</a:t>
-            </a:r>
-            <a:endParaRPr lang="en-US" sz="1150" dirty="0"/>
-          </a:p>
-        </p:txBody>
-      </p:sp>
-      <p:sp>
-        <p:nvSpPr>
-          <p:cNvPr id="8" name="Shape 6"/>
+              <a:t>-1</a:t>
+            </a:r>
+            <a:endParaRPr lang="en-US" sz="1200" dirty="0"/>
+          </a:p>
+        </p:txBody>
+      </p:sp>
+      <p:sp>
+        <p:nvSpPr>
+          <p:cNvPr id="31" name="Shape 29"/>
           <p:cNvSpPr/>
           <p:nvPr/>
         </p:nvSpPr>
         <p:spPr>
           <a:xfrm>
-            <a:off x="7086600" y="1965960"/>
-            <a:ext cx="4343400" cy="2944368"/>
+            <a:off x="758952" y="6903720"/>
+            <a:ext cx="5486400" cy="0"/>
+          </a:xfrm>
+          <a:prstGeom prst="line">
+            <a:avLst/>
+          </a:prstGeom>
+          <a:noFill/>
+          <a:ln w="12700">
+            <a:solidFill>
+              <a:srgbClr val="F0F0F0"/>
+            </a:solidFill>
+            <a:prstDash val="solid"/>
+          </a:ln>
+        </p:spPr>
+      </p:sp>
+      <p:sp>
+        <p:nvSpPr>
+          <p:cNvPr id="32" name="Shape 30"/>
+          <p:cNvSpPr/>
+          <p:nvPr/>
+        </p:nvSpPr>
+        <p:spPr>
+          <a:xfrm>
+            <a:off x="6720840" y="1965960"/>
+            <a:ext cx="4711903" cy="2103120"/>
           </a:xfrm>
           <a:prstGeom prst="roundRect">
             <a:avLst>
-              <a:gd name="adj" fmla="val 7764"/>
+              <a:gd name="adj" fmla="val 7261"/>
             </a:avLst>
           </a:prstGeom>
           <a:solidFill>
@@ -5479,95 +6147,154 @@
           </a:ln>
         </p:spPr>
       </p:sp>
-      <p:pic>
-        <p:nvPicPr>
-          <p:cNvPr id="9" name="Image 0" descr="C:\Users\user\AppData\Local\Temp\claude\C--Users-user-Github-WaveBreaker\fd97bec6-cef8-4bf5-a447-9a0fa572b36e\scratchpad\shots2\final\040_Input.png">    </p:cNvPr>
-          <p:cNvPicPr>
-            <a:picLocks noChangeAspect="1"/>
-          </p:cNvPicPr>
-          <p:nvPr/>
-        </p:nvPicPr>
-        <p:blipFill>
-          <a:blip r:embed="rId1"/>
-          <a:stretch>
-            <a:fillRect/>
-          </a:stretch>
-        </p:blipFill>
-        <p:spPr>
-          <a:xfrm>
-            <a:off x="7287768" y="2167128"/>
-            <a:ext cx="3941064" cy="2066544"/>
-          </a:xfrm>
-          <a:prstGeom prst="rect">
-            <a:avLst/>
-          </a:prstGeom>
-        </p:spPr>
-      </p:pic>
-      <p:sp>
-        <p:nvSpPr>
-          <p:cNvPr id="10" name="Text 7"/>
-          <p:cNvSpPr txBox="1"/>
-          <p:nvPr/>
-        </p:nvSpPr>
-        <p:spPr>
-          <a:xfrm>
-            <a:off x="7287768" y="4306824"/>
-            <a:ext cx="3941064" cy="310896"/>
-          </a:xfrm>
-          <a:prstGeom prst="rect">
-            <a:avLst/>
-          </a:prstGeom>
-          <a:noFill/>
-          <a:ln/>
-        </p:spPr>
-        <p:txBody>
-          <a:bodyPr wrap="square" lIns="0" tIns="0" rIns="0" bIns="0" rtlCol="0" anchor="ctr"/>
-          <a:lstStyle/>
-          <a:p>
-            <a:pPr algn="ctr" indent="0" marL="0">
-              <a:buNone/>
-            </a:pPr>
-            <a:r>
-              <a:rPr lang="en-US" sz="950" dirty="0">
-                <a:solidFill>
-                  <a:srgbClr val="ADADAD"/>
-                </a:solidFill>
-                <a:latin typeface="Pretendard" pitchFamily="34" charset="0"/>
-                <a:ea typeface="Pretendard" pitchFamily="34" charset="-122"/>
-                <a:cs typeface="Pretendard" pitchFamily="34" charset="-120"/>
-              </a:rPr>
-              <a:t>040_Input_Done — Player 와 Item</a:t>
-            </a:r>
-            <a:endParaRPr lang="en-US" sz="950" dirty="0"/>
-          </a:p>
-        </p:txBody>
-      </p:sp>
-      <p:sp>
-        <p:nvSpPr>
-          <p:cNvPr id="11" name="Text 8"/>
-          <p:cNvSpPr txBox="1"/>
-          <p:nvPr/>
-        </p:nvSpPr>
-        <p:spPr>
-          <a:xfrm>
-            <a:off x="7086600" y="4892040"/>
-            <a:ext cx="4343400" cy="329184"/>
-          </a:xfrm>
-          <a:prstGeom prst="rect">
-            <a:avLst/>
-          </a:prstGeom>
-          <a:noFill/>
-          <a:ln/>
-        </p:spPr>
-        <p:txBody>
-          <a:bodyPr wrap="square" lIns="0" tIns="0" rIns="0" bIns="0" rtlCol="0" anchor="ctr"/>
-          <a:lstStyle/>
-          <a:p>
-            <a:pPr indent="0" marL="0">
-              <a:buNone/>
-            </a:pPr>
-            <a:r>
-              <a:rPr lang="en-US" sz="1400" dirty="0">
+      <p:sp>
+        <p:nvSpPr>
+          <p:cNvPr id="33" name="Text 31"/>
+          <p:cNvSpPr txBox="1"/>
+          <p:nvPr/>
+        </p:nvSpPr>
+        <p:spPr>
+          <a:xfrm>
+            <a:off x="6976872" y="2167128"/>
+            <a:ext cx="4199839" cy="1700784"/>
+          </a:xfrm>
+          <a:prstGeom prst="rect">
+            <a:avLst/>
+          </a:prstGeom>
+          <a:noFill/>
+          <a:ln/>
+        </p:spPr>
+        <p:txBody>
+          <a:bodyPr wrap="square" lIns="0" tIns="0" rIns="0" bIns="0" rtlCol="0" anchor="t"/>
+          <a:lstStyle/>
+          <a:p>
+            <a:pPr indent="0" marL="0">
+              <a:lnSpc>
+                <a:spcPct val="132000"/>
+              </a:lnSpc>
+              <a:buNone/>
+            </a:pPr>
+            <a:r>
+              <a:rPr lang="en-US" sz="1150" b="1" dirty="0">
+                <a:solidFill>
+                  <a:srgbClr val="141414"/>
+                </a:solidFill>
+                <a:latin typeface="Consolas" pitchFamily="34" charset="0"/>
+                <a:ea typeface="Consolas" pitchFamily="34" charset="-122"/>
+                <a:cs typeface="Consolas" pitchFamily="34" charset="-120"/>
+              </a:rPr>
+              <a:t>Vector3 dir = new Vector3(h, v, 0f);</a:t>
+            </a:r>
+            <a:endParaRPr lang="en-US" sz="1150" dirty="0"/>
+          </a:p>
+          <a:p>
+            <a:pPr indent="0" marL="0">
+              <a:lnSpc>
+                <a:spcPct val="132000"/>
+              </a:lnSpc>
+              <a:buNone/>
+            </a:pPr>
+            <a:r>
+              <a:rPr lang="en-US" sz="1150" dirty="0">
+                <a:solidFill>
+                  <a:srgbClr val="141414"/>
+                </a:solidFill>
+                <a:latin typeface="Consolas" pitchFamily="34" charset="0"/>
+                <a:ea typeface="Consolas" pitchFamily="34" charset="-122"/>
+                <a:cs typeface="Consolas" pitchFamily="34" charset="-120"/>
+              </a:rPr>
+              <a:t> </a:t>
+            </a:r>
+            <a:endParaRPr lang="en-US" sz="1150" dirty="0"/>
+          </a:p>
+          <a:p>
+            <a:pPr indent="0" marL="0">
+              <a:lnSpc>
+                <a:spcPct val="132000"/>
+              </a:lnSpc>
+              <a:buNone/>
+            </a:pPr>
+            <a:r>
+              <a:rPr lang="en-US" sz="1150" dirty="0">
+                <a:solidFill>
+                  <a:srgbClr val="141414"/>
+                </a:solidFill>
+                <a:latin typeface="Consolas" pitchFamily="34" charset="0"/>
+                <a:ea typeface="Consolas" pitchFamily="34" charset="-122"/>
+                <a:cs typeface="Consolas" pitchFamily="34" charset="-120"/>
+              </a:rPr>
+              <a:t>transform.position =</a:t>
+            </a:r>
+            <a:endParaRPr lang="en-US" sz="1150" dirty="0"/>
+          </a:p>
+          <a:p>
+            <a:pPr indent="0" marL="0">
+              <a:lnSpc>
+                <a:spcPct val="132000"/>
+              </a:lnSpc>
+              <a:buNone/>
+            </a:pPr>
+            <a:r>
+              <a:rPr lang="en-US" sz="1150" dirty="0">
+                <a:solidFill>
+                  <a:srgbClr val="141414"/>
+                </a:solidFill>
+                <a:latin typeface="Consolas" pitchFamily="34" charset="0"/>
+                <a:ea typeface="Consolas" pitchFamily="34" charset="-122"/>
+                <a:cs typeface="Consolas" pitchFamily="34" charset="-120"/>
+              </a:rPr>
+              <a:t>    transform.position</a:t>
+            </a:r>
+            <a:endParaRPr lang="en-US" sz="1150" dirty="0"/>
+          </a:p>
+          <a:p>
+            <a:pPr indent="0" marL="0">
+              <a:lnSpc>
+                <a:spcPct val="132000"/>
+              </a:lnSpc>
+              <a:buNone/>
+            </a:pPr>
+            <a:r>
+              <a:rPr lang="en-US" sz="1150" b="1" dirty="0">
+                <a:solidFill>
+                  <a:srgbClr val="141414"/>
+                </a:solidFill>
+                <a:latin typeface="Consolas" pitchFamily="34" charset="0"/>
+                <a:ea typeface="Consolas" pitchFamily="34" charset="-122"/>
+                <a:cs typeface="Consolas" pitchFamily="34" charset="-120"/>
+              </a:rPr>
+              <a:t>    + dir * moveSpeed * Time.deltaTime;</a:t>
+            </a:r>
+            <a:endParaRPr lang="en-US" sz="1150" dirty="0"/>
+          </a:p>
+        </p:txBody>
+      </p:sp>
+      <p:sp>
+        <p:nvSpPr>
+          <p:cNvPr id="34" name="Text 32"/>
+          <p:cNvSpPr txBox="1"/>
+          <p:nvPr/>
+        </p:nvSpPr>
+        <p:spPr>
+          <a:xfrm>
+            <a:off x="6720840" y="4343400"/>
+            <a:ext cx="4711903" cy="402336"/>
+          </a:xfrm>
+          <a:prstGeom prst="rect">
+            <a:avLst/>
+          </a:prstGeom>
+          <a:noFill/>
+          <a:ln/>
+        </p:spPr>
+        <p:txBody>
+          <a:bodyPr wrap="square" lIns="0" tIns="0" rIns="0" bIns="0" rtlCol="0" anchor="ctr"/>
+          <a:lstStyle/>
+          <a:p>
+            <a:pPr indent="0" marL="0">
+              <a:buNone/>
+            </a:pPr>
+            <a:r>
+              <a:rPr lang="en-US" sz="1900" dirty="0">
                 <a:solidFill>
                   <a:srgbClr val="141414"/>
                 </a:solidFill>
@@ -5575,22 +6302,22 @@
                 <a:ea typeface="Pretendard SemiBold" pitchFamily="34" charset="-122"/>
                 <a:cs typeface="Pretendard SemiBold" pitchFamily="34" charset="-120"/>
               </a:rPr>
-              <a:t>Inspector의 Item 칸이 비어 있으면</a:t>
-            </a:r>
-            <a:endParaRPr lang="en-US" sz="1400" dirty="0"/>
-          </a:p>
-        </p:txBody>
-      </p:sp>
-      <p:sp>
-        <p:nvSpPr>
-          <p:cNvPr id="12" name="Text 9"/>
-          <p:cNvSpPr txBox="1"/>
-          <p:nvPr/>
-        </p:nvSpPr>
-        <p:spPr>
-          <a:xfrm>
-            <a:off x="7086600" y="5285232"/>
-            <a:ext cx="4343400" cy="731520"/>
+              <a:t>새로 배운 건 첫 두 줄뿐이다.</a:t>
+            </a:r>
+            <a:endParaRPr lang="en-US" sz="1900" dirty="0"/>
+          </a:p>
+        </p:txBody>
+      </p:sp>
+      <p:sp>
+        <p:nvSpPr>
+          <p:cNvPr id="35" name="Text 33"/>
+          <p:cNvSpPr txBox="1"/>
+          <p:nvPr/>
+        </p:nvSpPr>
+        <p:spPr>
+          <a:xfrm>
+            <a:off x="6720840" y="4800600"/>
+            <a:ext cx="4711903" cy="914400"/>
           </a:xfrm>
           <a:prstGeom prst="rect">
             <a:avLst/>
@@ -5617,7 +6344,7 @@
                 <a:ea typeface="Pretendard Light" pitchFamily="34" charset="-122"/>
                 <a:cs typeface="Pretendard Light" pitchFamily="34" charset="-120"/>
               </a:rPr>
-              <a:t>스페이스를 누르는 순간 NullReferenceException 이 난다. Hierarchy에서 드래그해 넣는다.</a:t>
+              <a:t>나머지는 038·039에서 한 그대로다. 키를 안 누르면 dir이 (0,0,0)이라 안 움직인다 — 조건문이 필요 없다.</a:t>
             </a:r>
             <a:endParaRPr lang="en-US" sz="1200" dirty="0"/>
           </a:p>
@@ -5657,679 +6384,18 @@
       </p:grpSpPr>
       <p:sp>
         <p:nvSpPr>
-          <p:cNvPr id="2" name="Text 0"/>
-          <p:cNvSpPr txBox="1"/>
-          <p:nvPr/>
-        </p:nvSpPr>
-        <p:spPr>
-          <a:xfrm>
-            <a:off x="758952" y="566928"/>
-            <a:ext cx="10673791" cy="457200"/>
-          </a:xfrm>
-          <a:prstGeom prst="rect">
-            <a:avLst/>
-          </a:prstGeom>
-          <a:noFill/>
-          <a:ln/>
-        </p:spPr>
-        <p:txBody>
-          <a:bodyPr wrap="square" lIns="0" tIns="0" rIns="0" bIns="0" rtlCol="0" anchor="ctr"/>
-          <a:lstStyle/>
-          <a:p>
-            <a:pPr indent="0" marL="0">
-              <a:buNone/>
-            </a:pPr>
-            <a:r>
-              <a:rPr lang="en-US" sz="2600" dirty="0">
-                <a:solidFill>
-                  <a:srgbClr val="141414"/>
-                </a:solidFill>
-                <a:latin typeface="Pretendard SemiBold" pitchFamily="34" charset="0"/>
-                <a:ea typeface="Pretendard SemiBold" pitchFamily="34" charset="-122"/>
-                <a:cs typeface="Pretendard SemiBold" pitchFamily="34" charset="-120"/>
-              </a:rPr>
-              <a:t>이번 주 흔한 사고.</a:t>
-            </a:r>
-            <a:endParaRPr lang="en-US" sz="2600" dirty="0"/>
-          </a:p>
-        </p:txBody>
-      </p:sp>
-      <p:sp>
-        <p:nvSpPr>
-          <p:cNvPr id="3" name="Text 1"/>
-          <p:cNvSpPr txBox="1"/>
-          <p:nvPr/>
-        </p:nvSpPr>
-        <p:spPr>
-          <a:xfrm>
-            <a:off x="758952" y="1060704"/>
-            <a:ext cx="10673791" cy="329184"/>
-          </a:xfrm>
-          <a:prstGeom prst="rect">
-            <a:avLst/>
-          </a:prstGeom>
-          <a:noFill/>
-          <a:ln/>
-        </p:spPr>
-        <p:txBody>
-          <a:bodyPr wrap="square" lIns="0" tIns="0" rIns="0" bIns="0" rtlCol="0" anchor="ctr"/>
-          <a:lstStyle/>
-          <a:p>
-            <a:pPr indent="0" marL="0">
-              <a:buNone/>
-            </a:pPr>
-            <a:r>
-              <a:rPr lang="en-US" sz="1500" dirty="0">
-                <a:solidFill>
-                  <a:srgbClr val="707070"/>
-                </a:solidFill>
-                <a:latin typeface="Pretendard Light" pitchFamily="34" charset="0"/>
-                <a:ea typeface="Pretendard Light" pitchFamily="34" charset="-122"/>
-                <a:cs typeface="Pretendard Light" pitchFamily="34" charset="-120"/>
-              </a:rPr>
-              <a:t>미리 알고 있으면 대응이 빨라진다. 강사용.</a:t>
-            </a:r>
-            <a:endParaRPr lang="en-US" sz="1500" dirty="0"/>
-          </a:p>
-        </p:txBody>
-      </p:sp>
-      <p:sp>
-        <p:nvSpPr>
-          <p:cNvPr id="4" name="Shape 2"/>
+          <p:cNvPr id="2" name="Shape 0"/>
           <p:cNvSpPr/>
           <p:nvPr/>
         </p:nvSpPr>
         <p:spPr>
           <a:xfrm>
-            <a:off x="758952" y="2011680"/>
-            <a:ext cx="10673791" cy="0"/>
-          </a:xfrm>
-          <a:prstGeom prst="line">
-            <a:avLst/>
-          </a:prstGeom>
-          <a:noFill/>
-          <a:ln w="12700">
-            <a:solidFill>
-              <a:srgbClr val="E0E0E0"/>
-            </a:solidFill>
-            <a:prstDash val="solid"/>
-          </a:ln>
-        </p:spPr>
-      </p:sp>
-      <p:sp>
-        <p:nvSpPr>
-          <p:cNvPr id="5" name="Text 3"/>
-          <p:cNvSpPr txBox="1"/>
-          <p:nvPr/>
-        </p:nvSpPr>
-        <p:spPr>
-          <a:xfrm>
-            <a:off x="758952" y="2194560"/>
-            <a:ext cx="3931920" cy="420624"/>
-          </a:xfrm>
-          <a:prstGeom prst="rect">
-            <a:avLst/>
-          </a:prstGeom>
-          <a:noFill/>
-          <a:ln/>
-        </p:spPr>
-        <p:txBody>
-          <a:bodyPr wrap="square" lIns="0" tIns="0" rIns="0" bIns="0" rtlCol="0" anchor="ctr"/>
-          <a:lstStyle/>
-          <a:p>
-            <a:pPr indent="0" marL="0">
-              <a:buNone/>
-            </a:pPr>
-            <a:r>
-              <a:rPr lang="en-US" sz="1550" dirty="0">
-                <a:solidFill>
-                  <a:srgbClr val="141414"/>
-                </a:solidFill>
-                <a:latin typeface="Pretendard SemiBold" pitchFamily="34" charset="0"/>
-                <a:ea typeface="Pretendard SemiBold" pitchFamily="34" charset="-122"/>
-                <a:cs typeface="Pretendard SemiBold" pitchFamily="34" charset="-120"/>
-              </a:rPr>
-              <a:t>Can't add script</a:t>
-            </a:r>
-            <a:endParaRPr lang="en-US" sz="1550" dirty="0"/>
-          </a:p>
-        </p:txBody>
-      </p:sp>
-      <p:sp>
-        <p:nvSpPr>
-          <p:cNvPr id="6" name="Text 4"/>
-          <p:cNvSpPr txBox="1"/>
-          <p:nvPr/>
-        </p:nvSpPr>
-        <p:spPr>
-          <a:xfrm>
-            <a:off x="4873752" y="2194560"/>
-            <a:ext cx="3291840" cy="420624"/>
-          </a:xfrm>
-          <a:prstGeom prst="rect">
-            <a:avLst/>
-          </a:prstGeom>
-          <a:noFill/>
-          <a:ln/>
-        </p:spPr>
-        <p:txBody>
-          <a:bodyPr wrap="square" lIns="0" tIns="0" rIns="0" bIns="0" rtlCol="0" anchor="ctr"/>
-          <a:lstStyle/>
-          <a:p>
-            <a:pPr indent="0" marL="0">
-              <a:buNone/>
-            </a:pPr>
-            <a:r>
-              <a:rPr lang="en-US" sz="1200" dirty="0">
-                <a:solidFill>
-                  <a:srgbClr val="ADADAD"/>
-                </a:solidFill>
-                <a:latin typeface="Pretendard" pitchFamily="34" charset="0"/>
-                <a:ea typeface="Pretendard" pitchFamily="34" charset="-122"/>
-                <a:cs typeface="Pretendard" pitchFamily="34" charset="-120"/>
-              </a:rPr>
-              <a:t>파일명 ≠ 클래스명</a:t>
-            </a:r>
-            <a:endParaRPr lang="en-US" sz="1200" dirty="0"/>
-          </a:p>
-        </p:txBody>
-      </p:sp>
-      <p:sp>
-        <p:nvSpPr>
-          <p:cNvPr id="7" name="Text 5"/>
-          <p:cNvSpPr txBox="1"/>
-          <p:nvPr/>
-        </p:nvSpPr>
-        <p:spPr>
-          <a:xfrm>
-            <a:off x="8257032" y="2194560"/>
-            <a:ext cx="2926080" cy="420624"/>
-          </a:xfrm>
-          <a:prstGeom prst="rect">
-            <a:avLst/>
-          </a:prstGeom>
-          <a:noFill/>
-          <a:ln/>
-        </p:spPr>
-        <p:txBody>
-          <a:bodyPr wrap="square" lIns="0" tIns="0" rIns="0" bIns="0" rtlCol="0" anchor="ctr"/>
-          <a:lstStyle/>
-          <a:p>
-            <a:pPr indent="0" marL="0">
-              <a:buNone/>
-            </a:pPr>
-            <a:r>
-              <a:rPr lang="en-US" sz="1200" dirty="0">
-                <a:solidFill>
-                  <a:srgbClr val="141414"/>
-                </a:solidFill>
-                <a:latin typeface="Pretendard" pitchFamily="34" charset="0"/>
-                <a:ea typeface="Pretendard" pitchFamily="34" charset="-122"/>
-                <a:cs typeface="Pretendard" pitchFamily="34" charset="-120"/>
-              </a:rPr>
-              <a:t>파일을 지우고 다시 만든다</a:t>
-            </a:r>
-            <a:endParaRPr lang="en-US" sz="1200" dirty="0"/>
-          </a:p>
-        </p:txBody>
-      </p:sp>
-      <p:sp>
-        <p:nvSpPr>
-          <p:cNvPr id="8" name="Shape 6"/>
-          <p:cNvSpPr/>
-          <p:nvPr/>
-        </p:nvSpPr>
-        <p:spPr>
-          <a:xfrm>
-            <a:off x="758952" y="2761488"/>
-            <a:ext cx="10673791" cy="0"/>
-          </a:xfrm>
-          <a:prstGeom prst="line">
-            <a:avLst/>
-          </a:prstGeom>
-          <a:noFill/>
-          <a:ln w="12700">
-            <a:solidFill>
-              <a:srgbClr val="F0F0F0"/>
-            </a:solidFill>
-            <a:prstDash val="solid"/>
-          </a:ln>
-        </p:spPr>
-      </p:sp>
-      <p:sp>
-        <p:nvSpPr>
-          <p:cNvPr id="9" name="Text 7"/>
-          <p:cNvSpPr txBox="1"/>
-          <p:nvPr/>
-        </p:nvSpPr>
-        <p:spPr>
-          <a:xfrm>
-            <a:off x="758952" y="2926080"/>
-            <a:ext cx="3931920" cy="420624"/>
-          </a:xfrm>
-          <a:prstGeom prst="rect">
-            <a:avLst/>
-          </a:prstGeom>
-          <a:noFill/>
-          <a:ln/>
-        </p:spPr>
-        <p:txBody>
-          <a:bodyPr wrap="square" lIns="0" tIns="0" rIns="0" bIns="0" rtlCol="0" anchor="ctr"/>
-          <a:lstStyle/>
-          <a:p>
-            <a:pPr indent="0" marL="0">
-              <a:buNone/>
-            </a:pPr>
-            <a:r>
-              <a:rPr lang="en-US" sz="1550" dirty="0">
-                <a:solidFill>
-                  <a:srgbClr val="141414"/>
-                </a:solidFill>
-                <a:latin typeface="Pretendard SemiBold" pitchFamily="34" charset="0"/>
-                <a:ea typeface="Pretendard SemiBold" pitchFamily="34" charset="-122"/>
-                <a:cs typeface="Pretendard SemiBold" pitchFamily="34" charset="-120"/>
-              </a:rPr>
-              <a:t>고쳤는데 반영이 안 됨</a:t>
-            </a:r>
-            <a:endParaRPr lang="en-US" sz="1550" dirty="0"/>
-          </a:p>
-        </p:txBody>
-      </p:sp>
-      <p:sp>
-        <p:nvSpPr>
-          <p:cNvPr id="10" name="Text 8"/>
-          <p:cNvSpPr txBox="1"/>
-          <p:nvPr/>
-        </p:nvSpPr>
-        <p:spPr>
-          <a:xfrm>
-            <a:off x="4873752" y="2926080"/>
-            <a:ext cx="3291840" cy="420624"/>
-          </a:xfrm>
-          <a:prstGeom prst="rect">
-            <a:avLst/>
-          </a:prstGeom>
-          <a:noFill/>
-          <a:ln/>
-        </p:spPr>
-        <p:txBody>
-          <a:bodyPr wrap="square" lIns="0" tIns="0" rIns="0" bIns="0" rtlCol="0" anchor="ctr"/>
-          <a:lstStyle/>
-          <a:p>
-            <a:pPr indent="0" marL="0">
-              <a:buNone/>
-            </a:pPr>
-            <a:r>
-              <a:rPr lang="en-US" sz="1200" dirty="0">
-                <a:solidFill>
-                  <a:srgbClr val="ADADAD"/>
-                </a:solidFill>
-                <a:latin typeface="Pretendard" pitchFamily="34" charset="0"/>
-                <a:ea typeface="Pretendard" pitchFamily="34" charset="-122"/>
-                <a:cs typeface="Pretendard" pitchFamily="34" charset="-120"/>
-              </a:rPr>
-              <a:t>저장 안 함 / 컴파일 대기</a:t>
-            </a:r>
-            <a:endParaRPr lang="en-US" sz="1200" dirty="0"/>
-          </a:p>
-        </p:txBody>
-      </p:sp>
-      <p:sp>
-        <p:nvSpPr>
-          <p:cNvPr id="11" name="Text 9"/>
-          <p:cNvSpPr txBox="1"/>
-          <p:nvPr/>
-        </p:nvSpPr>
-        <p:spPr>
-          <a:xfrm>
-            <a:off x="8257032" y="2926080"/>
-            <a:ext cx="2926080" cy="420624"/>
-          </a:xfrm>
-          <a:prstGeom prst="rect">
-            <a:avLst/>
-          </a:prstGeom>
-          <a:noFill/>
-          <a:ln/>
-        </p:spPr>
-        <p:txBody>
-          <a:bodyPr wrap="square" lIns="0" tIns="0" rIns="0" bIns="0" rtlCol="0" anchor="ctr"/>
-          <a:lstStyle/>
-          <a:p>
-            <a:pPr indent="0" marL="0">
-              <a:buNone/>
-            </a:pPr>
-            <a:r>
-              <a:rPr lang="en-US" sz="1200" dirty="0">
-                <a:solidFill>
-                  <a:srgbClr val="141414"/>
-                </a:solidFill>
-                <a:latin typeface="Pretendard" pitchFamily="34" charset="0"/>
-                <a:ea typeface="Pretendard" pitchFamily="34" charset="-122"/>
-                <a:cs typeface="Pretendard" pitchFamily="34" charset="-120"/>
-              </a:rPr>
-              <a:t>저장 → 전환 → 기다림</a:t>
-            </a:r>
-            <a:endParaRPr lang="en-US" sz="1200" dirty="0"/>
-          </a:p>
-        </p:txBody>
-      </p:sp>
-      <p:sp>
-        <p:nvSpPr>
-          <p:cNvPr id="12" name="Shape 10"/>
-          <p:cNvSpPr/>
-          <p:nvPr/>
-        </p:nvSpPr>
-        <p:spPr>
-          <a:xfrm>
-            <a:off x="758952" y="3493008"/>
-            <a:ext cx="10673791" cy="0"/>
-          </a:xfrm>
-          <a:prstGeom prst="line">
-            <a:avLst/>
-          </a:prstGeom>
-          <a:noFill/>
-          <a:ln w="12700">
-            <a:solidFill>
-              <a:srgbClr val="F0F0F0"/>
-            </a:solidFill>
-            <a:prstDash val="solid"/>
-          </a:ln>
-        </p:spPr>
-      </p:sp>
-      <p:sp>
-        <p:nvSpPr>
-          <p:cNvPr id="13" name="Text 11"/>
-          <p:cNvSpPr txBox="1"/>
-          <p:nvPr/>
-        </p:nvSpPr>
-        <p:spPr>
-          <a:xfrm>
-            <a:off x="758952" y="3657600"/>
-            <a:ext cx="3931920" cy="420624"/>
-          </a:xfrm>
-          <a:prstGeom prst="rect">
-            <a:avLst/>
-          </a:prstGeom>
-          <a:noFill/>
-          <a:ln/>
-        </p:spPr>
-        <p:txBody>
-          <a:bodyPr wrap="square" lIns="0" tIns="0" rIns="0" bIns="0" rtlCol="0" anchor="ctr"/>
-          <a:lstStyle/>
-          <a:p>
-            <a:pPr indent="0" marL="0">
-              <a:buNone/>
-            </a:pPr>
-            <a:r>
-              <a:rPr lang="en-US" sz="1550" dirty="0">
-                <a:solidFill>
-                  <a:srgbClr val="141414"/>
-                </a:solidFill>
-                <a:latin typeface="Pretendard SemiBold" pitchFamily="34" charset="0"/>
-                <a:ea typeface="Pretendard SemiBold" pitchFamily="34" charset="-122"/>
-                <a:cs typeface="Pretendard SemiBold" pitchFamily="34" charset="-120"/>
-              </a:rPr>
-              <a:t>곱했더니 거의 안 움직임</a:t>
-            </a:r>
-            <a:endParaRPr lang="en-US" sz="1550" dirty="0"/>
-          </a:p>
-        </p:txBody>
-      </p:sp>
-      <p:sp>
-        <p:nvSpPr>
-          <p:cNvPr id="14" name="Text 12"/>
-          <p:cNvSpPr txBox="1"/>
-          <p:nvPr/>
-        </p:nvSpPr>
-        <p:spPr>
-          <a:xfrm>
-            <a:off x="4873752" y="3657600"/>
-            <a:ext cx="3291840" cy="420624"/>
-          </a:xfrm>
-          <a:prstGeom prst="rect">
-            <a:avLst/>
-          </a:prstGeom>
-          <a:noFill/>
-          <a:ln/>
-        </p:spPr>
-        <p:txBody>
-          <a:bodyPr wrap="square" lIns="0" tIns="0" rIns="0" bIns="0" rtlCol="0" anchor="ctr"/>
-          <a:lstStyle/>
-          <a:p>
-            <a:pPr indent="0" marL="0">
-              <a:buNone/>
-            </a:pPr>
-            <a:r>
-              <a:rPr lang="en-US" sz="1200" dirty="0">
-                <a:solidFill>
-                  <a:srgbClr val="ADADAD"/>
-                </a:solidFill>
-                <a:latin typeface="Pretendard" pitchFamily="34" charset="0"/>
-                <a:ea typeface="Pretendard" pitchFamily="34" charset="-122"/>
-                <a:cs typeface="Pretendard" pitchFamily="34" charset="-120"/>
-              </a:rPr>
-              <a:t>값을 안 바꿈 (0.05 그대로)</a:t>
-            </a:r>
-            <a:endParaRPr lang="en-US" sz="1200" dirty="0"/>
-          </a:p>
-        </p:txBody>
-      </p:sp>
-      <p:sp>
-        <p:nvSpPr>
-          <p:cNvPr id="15" name="Text 13"/>
-          <p:cNvSpPr txBox="1"/>
-          <p:nvPr/>
-        </p:nvSpPr>
-        <p:spPr>
-          <a:xfrm>
-            <a:off x="8257032" y="3657600"/>
-            <a:ext cx="2926080" cy="420624"/>
-          </a:xfrm>
-          <a:prstGeom prst="rect">
-            <a:avLst/>
-          </a:prstGeom>
-          <a:noFill/>
-          <a:ln/>
-        </p:spPr>
-        <p:txBody>
-          <a:bodyPr wrap="square" lIns="0" tIns="0" rIns="0" bIns="0" rtlCol="0" anchor="ctr"/>
-          <a:lstStyle/>
-          <a:p>
-            <a:pPr indent="0" marL="0">
-              <a:buNone/>
-            </a:pPr>
-            <a:r>
-              <a:rPr lang="en-US" sz="1200" dirty="0">
-                <a:solidFill>
-                  <a:srgbClr val="141414"/>
-                </a:solidFill>
-                <a:latin typeface="Pretendard" pitchFamily="34" charset="0"/>
-                <a:ea typeface="Pretendard" pitchFamily="34" charset="-122"/>
-                <a:cs typeface="Pretendard" pitchFamily="34" charset="-120"/>
-              </a:rPr>
-              <a:t>단위가 바뀌었다. 3으로</a:t>
-            </a:r>
-            <a:endParaRPr lang="en-US" sz="1200" dirty="0"/>
-          </a:p>
-        </p:txBody>
-      </p:sp>
-      <p:sp>
-        <p:nvSpPr>
-          <p:cNvPr id="16" name="Shape 14"/>
-          <p:cNvSpPr/>
-          <p:nvPr/>
-        </p:nvSpPr>
-        <p:spPr>
-          <a:xfrm>
-            <a:off x="758952" y="4224528"/>
-            <a:ext cx="10673791" cy="0"/>
-          </a:xfrm>
-          <a:prstGeom prst="line">
-            <a:avLst/>
-          </a:prstGeom>
-          <a:noFill/>
-          <a:ln w="12700">
-            <a:solidFill>
-              <a:srgbClr val="F0F0F0"/>
-            </a:solidFill>
-            <a:prstDash val="solid"/>
-          </a:ln>
-        </p:spPr>
-      </p:sp>
-      <p:sp>
-        <p:nvSpPr>
-          <p:cNvPr id="17" name="Text 15"/>
-          <p:cNvSpPr txBox="1"/>
-          <p:nvPr/>
-        </p:nvSpPr>
-        <p:spPr>
-          <a:xfrm>
-            <a:off x="758952" y="4389120"/>
-            <a:ext cx="3931920" cy="420624"/>
-          </a:xfrm>
-          <a:prstGeom prst="rect">
-            <a:avLst/>
-          </a:prstGeom>
-          <a:noFill/>
-          <a:ln/>
-        </p:spPr>
-        <p:txBody>
-          <a:bodyPr wrap="square" lIns="0" tIns="0" rIns="0" bIns="0" rtlCol="0" anchor="ctr"/>
-          <a:lstStyle/>
-          <a:p>
-            <a:pPr indent="0" marL="0">
-              <a:buNone/>
-            </a:pPr>
-            <a:r>
-              <a:rPr lang="en-US" sz="1550" dirty="0">
-                <a:solidFill>
-                  <a:srgbClr val="141414"/>
-                </a:solidFill>
-                <a:latin typeface="Pretendard SemiBold" pitchFamily="34" charset="0"/>
-                <a:ea typeface="Pretendard SemiBold" pitchFamily="34" charset="-122"/>
-                <a:cs typeface="Pretendard SemiBold" pitchFamily="34" charset="-120"/>
-              </a:rPr>
-              <a:t>NullReferenceException</a:t>
-            </a:r>
-            <a:endParaRPr lang="en-US" sz="1550" dirty="0"/>
-          </a:p>
-        </p:txBody>
-      </p:sp>
-      <p:sp>
-        <p:nvSpPr>
-          <p:cNvPr id="18" name="Text 16"/>
-          <p:cNvSpPr txBox="1"/>
-          <p:nvPr/>
-        </p:nvSpPr>
-        <p:spPr>
-          <a:xfrm>
-            <a:off x="4873752" y="4389120"/>
-            <a:ext cx="3291840" cy="420624"/>
-          </a:xfrm>
-          <a:prstGeom prst="rect">
-            <a:avLst/>
-          </a:prstGeom>
-          <a:noFill/>
-          <a:ln/>
-        </p:spPr>
-        <p:txBody>
-          <a:bodyPr wrap="square" lIns="0" tIns="0" rIns="0" bIns="0" rtlCol="0" anchor="ctr"/>
-          <a:lstStyle/>
-          <a:p>
-            <a:pPr indent="0" marL="0">
-              <a:buNone/>
-            </a:pPr>
-            <a:r>
-              <a:rPr lang="en-US" sz="1200" dirty="0">
-                <a:solidFill>
-                  <a:srgbClr val="ADADAD"/>
-                </a:solidFill>
-                <a:latin typeface="Pretendard" pitchFamily="34" charset="0"/>
-                <a:ea typeface="Pretendard" pitchFamily="34" charset="-122"/>
-                <a:cs typeface="Pretendard" pitchFamily="34" charset="-120"/>
-              </a:rPr>
-              <a:t>Inspector 칸이 비어 있음</a:t>
-            </a:r>
-            <a:endParaRPr lang="en-US" sz="1200" dirty="0"/>
-          </a:p>
-        </p:txBody>
-      </p:sp>
-      <p:sp>
-        <p:nvSpPr>
-          <p:cNvPr id="19" name="Text 17"/>
-          <p:cNvSpPr txBox="1"/>
-          <p:nvPr/>
-        </p:nvSpPr>
-        <p:spPr>
-          <a:xfrm>
-            <a:off x="8257032" y="4389120"/>
-            <a:ext cx="2926080" cy="420624"/>
-          </a:xfrm>
-          <a:prstGeom prst="rect">
-            <a:avLst/>
-          </a:prstGeom>
-          <a:noFill/>
-          <a:ln/>
-        </p:spPr>
-        <p:txBody>
-          <a:bodyPr wrap="square" lIns="0" tIns="0" rIns="0" bIns="0" rtlCol="0" anchor="ctr"/>
-          <a:lstStyle/>
-          <a:p>
-            <a:pPr indent="0" marL="0">
-              <a:buNone/>
-            </a:pPr>
-            <a:r>
-              <a:rPr lang="en-US" sz="1200" dirty="0">
-                <a:solidFill>
-                  <a:srgbClr val="141414"/>
-                </a:solidFill>
-                <a:latin typeface="Pretendard" pitchFamily="34" charset="0"/>
-                <a:ea typeface="Pretendard" pitchFamily="34" charset="-122"/>
-                <a:cs typeface="Pretendard" pitchFamily="34" charset="-120"/>
-              </a:rPr>
-              <a:t>Hierarchy 에서 드래그</a:t>
-            </a:r>
-            <a:endParaRPr lang="en-US" sz="1200" dirty="0"/>
-          </a:p>
-        </p:txBody>
-      </p:sp>
-      <p:sp>
-        <p:nvSpPr>
-          <p:cNvPr id="20" name="Shape 18"/>
-          <p:cNvSpPr/>
-          <p:nvPr/>
-        </p:nvSpPr>
-        <p:spPr>
-          <a:xfrm>
-            <a:off x="758952" y="4956048"/>
-            <a:ext cx="10673791" cy="0"/>
-          </a:xfrm>
-          <a:prstGeom prst="line">
-            <a:avLst/>
-          </a:prstGeom>
-          <a:noFill/>
-          <a:ln w="12700">
-            <a:solidFill>
-              <a:srgbClr val="F0F0F0"/>
-            </a:solidFill>
-            <a:prstDash val="solid"/>
-          </a:ln>
-        </p:spPr>
-      </p:sp>
-      <p:sp>
-        <p:nvSpPr>
-          <p:cNvPr id="21" name="Shape 19"/>
-          <p:cNvSpPr/>
-          <p:nvPr/>
-        </p:nvSpPr>
-        <p:spPr>
-          <a:xfrm>
-            <a:off x="502920" y="5029200"/>
-            <a:ext cx="11185855" cy="640080"/>
+            <a:off x="758952" y="548640"/>
+            <a:ext cx="585216" cy="274320"/>
           </a:xfrm>
           <a:prstGeom prst="roundRect">
             <a:avLst>
-              <a:gd name="adj" fmla="val 23857"/>
+              <a:gd name="adj" fmla="val 50000"/>
             </a:avLst>
           </a:prstGeom>
           <a:solidFill>
@@ -6345,30 +6411,30 @@
       </p:sp>
       <p:sp>
         <p:nvSpPr>
-          <p:cNvPr id="22" name="Text 20"/>
-          <p:cNvSpPr txBox="1"/>
-          <p:nvPr/>
-        </p:nvSpPr>
-        <p:spPr>
-          <a:xfrm>
-            <a:off x="758952" y="5120640"/>
-            <a:ext cx="3931920" cy="420624"/>
-          </a:xfrm>
-          <a:prstGeom prst="rect">
-            <a:avLst/>
-          </a:prstGeom>
-          <a:noFill/>
-          <a:ln/>
-        </p:spPr>
-        <p:txBody>
-          <a:bodyPr wrap="square" lIns="0" tIns="0" rIns="0" bIns="0" rtlCol="0" anchor="ctr"/>
-          <a:lstStyle/>
-          <a:p>
-            <a:pPr indent="0" marL="0">
-              <a:buNone/>
-            </a:pPr>
-            <a:r>
-              <a:rPr lang="en-US" sz="1550" dirty="0">
+          <p:cNvPr id="3" name="Text 1"/>
+          <p:cNvSpPr txBox="1"/>
+          <p:nvPr/>
+        </p:nvSpPr>
+        <p:spPr>
+          <a:xfrm>
+            <a:off x="758952" y="548640"/>
+            <a:ext cx="585216" cy="274320"/>
+          </a:xfrm>
+          <a:prstGeom prst="rect">
+            <a:avLst/>
+          </a:prstGeom>
+          <a:noFill/>
+          <a:ln/>
+        </p:spPr>
+        <p:txBody>
+          <a:bodyPr wrap="square" lIns="0" tIns="0" rIns="0" bIns="0" rtlCol="0" anchor="ctr"/>
+          <a:lstStyle/>
+          <a:p>
+            <a:pPr algn="ctr" indent="0" marL="0">
+              <a:buNone/>
+            </a:pPr>
+            <a:r>
+              <a:rPr lang="en-US" sz="950" dirty="0">
                 <a:solidFill>
                   <a:srgbClr val="141414"/>
                 </a:solidFill>
@@ -6376,108 +6442,108 @@
                 <a:ea typeface="Pretendard SemiBold" pitchFamily="34" charset="-122"/>
                 <a:cs typeface="Pretendard SemiBold" pitchFamily="34" charset="-120"/>
               </a:rPr>
-              <a:t>키를 눌러도 안 움직임</a:t>
-            </a:r>
-            <a:endParaRPr lang="en-US" sz="1550" dirty="0"/>
-          </a:p>
-        </p:txBody>
-      </p:sp>
-      <p:sp>
-        <p:nvSpPr>
-          <p:cNvPr id="23" name="Text 21"/>
-          <p:cNvSpPr txBox="1"/>
-          <p:nvPr/>
-        </p:nvSpPr>
-        <p:spPr>
-          <a:xfrm>
-            <a:off x="4873752" y="5120640"/>
-            <a:ext cx="3291840" cy="420624"/>
-          </a:xfrm>
-          <a:prstGeom prst="rect">
-            <a:avLst/>
-          </a:prstGeom>
-          <a:noFill/>
-          <a:ln/>
-        </p:spPr>
-        <p:txBody>
-          <a:bodyPr wrap="square" lIns="0" tIns="0" rIns="0" bIns="0" rtlCol="0" anchor="ctr"/>
-          <a:lstStyle/>
-          <a:p>
-            <a:pPr indent="0" marL="0">
-              <a:buNone/>
-            </a:pPr>
-            <a:r>
-              <a:rPr lang="en-US" sz="1200" dirty="0">
-                <a:solidFill>
-                  <a:srgbClr val="ADADAD"/>
-                </a:solidFill>
-                <a:latin typeface="Pretendard" pitchFamily="34" charset="0"/>
-                <a:ea typeface="Pretendard" pitchFamily="34" charset="-122"/>
-                <a:cs typeface="Pretendard" pitchFamily="34" charset="-120"/>
-              </a:rPr>
-              <a:t>Active Input Handling</a:t>
-            </a:r>
-            <a:endParaRPr lang="en-US" sz="1200" dirty="0"/>
-          </a:p>
-        </p:txBody>
-      </p:sp>
-      <p:sp>
-        <p:nvSpPr>
-          <p:cNvPr id="24" name="Text 22"/>
-          <p:cNvSpPr txBox="1"/>
-          <p:nvPr/>
-        </p:nvSpPr>
-        <p:spPr>
-          <a:xfrm>
-            <a:off x="8257032" y="5120640"/>
-            <a:ext cx="2926080" cy="420624"/>
-          </a:xfrm>
-          <a:prstGeom prst="rect">
-            <a:avLst/>
-          </a:prstGeom>
-          <a:noFill/>
-          <a:ln/>
-        </p:spPr>
-        <p:txBody>
-          <a:bodyPr wrap="square" lIns="0" tIns="0" rIns="0" bIns="0" rtlCol="0" anchor="ctr"/>
-          <a:lstStyle/>
-          <a:p>
-            <a:pPr indent="0" marL="0">
-              <a:buNone/>
-            </a:pPr>
-            <a:r>
-              <a:rPr lang="en-US" sz="1200" dirty="0">
+              <a:t>040</a:t>
+            </a:r>
+            <a:endParaRPr lang="en-US" sz="950" dirty="0"/>
+          </a:p>
+        </p:txBody>
+      </p:sp>
+      <p:sp>
+        <p:nvSpPr>
+          <p:cNvPr id="4" name="Text 2"/>
+          <p:cNvSpPr txBox="1"/>
+          <p:nvPr/>
+        </p:nvSpPr>
+        <p:spPr>
+          <a:xfrm>
+            <a:off x="758952" y="914400"/>
+            <a:ext cx="10673791" cy="457200"/>
+          </a:xfrm>
+          <a:prstGeom prst="rect">
+            <a:avLst/>
+          </a:prstGeom>
+          <a:noFill/>
+          <a:ln/>
+        </p:spPr>
+        <p:txBody>
+          <a:bodyPr wrap="square" lIns="0" tIns="0" rIns="0" bIns="0" rtlCol="0" anchor="ctr"/>
+          <a:lstStyle/>
+          <a:p>
+            <a:pPr indent="0" marL="0">
+              <a:buNone/>
+            </a:pPr>
+            <a:r>
+              <a:rPr lang="en-US" sz="2600" dirty="0">
                 <a:solidFill>
                   <a:srgbClr val="141414"/>
                 </a:solidFill>
-                <a:latin typeface="Pretendard" pitchFamily="34" charset="0"/>
-                <a:ea typeface="Pretendard" pitchFamily="34" charset="-122"/>
-                <a:cs typeface="Pretendard" pitchFamily="34" charset="-120"/>
-              </a:rPr>
-              <a:t>Both 로. 에디터 재시작</a:t>
-            </a:r>
-            <a:endParaRPr lang="en-US" sz="1200" dirty="0"/>
-          </a:p>
-        </p:txBody>
-      </p:sp>
-      <p:sp>
-        <p:nvSpPr>
-          <p:cNvPr id="25" name="Shape 23"/>
+                <a:latin typeface="Pretendard SemiBold" pitchFamily="34" charset="0"/>
+                <a:ea typeface="Pretendard SemiBold" pitchFamily="34" charset="-122"/>
+                <a:cs typeface="Pretendard SemiBold" pitchFamily="34" charset="-120"/>
+              </a:rPr>
+              <a:t>실습 — WASD로 움직이는 캐릭터.</a:t>
+            </a:r>
+            <a:endParaRPr lang="en-US" sz="2600" dirty="0"/>
+          </a:p>
+        </p:txBody>
+      </p:sp>
+      <p:sp>
+        <p:nvSpPr>
+          <p:cNvPr id="5" name="Text 3"/>
+          <p:cNvSpPr txBox="1"/>
+          <p:nvPr/>
+        </p:nvSpPr>
+        <p:spPr>
+          <a:xfrm>
+            <a:off x="758952" y="1408176"/>
+            <a:ext cx="10673791" cy="329184"/>
+          </a:xfrm>
+          <a:prstGeom prst="rect">
+            <a:avLst/>
+          </a:prstGeom>
+          <a:noFill/>
+          <a:ln/>
+        </p:spPr>
+        <p:txBody>
+          <a:bodyPr wrap="square" lIns="0" tIns="0" rIns="0" bIns="0" rtlCol="0" anchor="ctr"/>
+          <a:lstStyle/>
+          <a:p>
+            <a:pPr indent="0" marL="0">
+              <a:buNone/>
+            </a:pPr>
+            <a:r>
+              <a:rPr lang="en-US" sz="1500" dirty="0">
+                <a:solidFill>
+                  <a:srgbClr val="707070"/>
+                </a:solidFill>
+                <a:latin typeface="Pretendard Light" pitchFamily="34" charset="0"/>
+                <a:ea typeface="Pretendard Light" pitchFamily="34" charset="-122"/>
+                <a:cs typeface="Pretendard Light" pitchFamily="34" charset="-120"/>
+              </a:rPr>
+              <a:t>8주를 기다린 결과물이다. 서두르지 않는다.</a:t>
+            </a:r>
+            <a:endParaRPr lang="en-US" sz="1500" dirty="0"/>
+          </a:p>
+        </p:txBody>
+      </p:sp>
+      <p:sp>
+        <p:nvSpPr>
+          <p:cNvPr id="6" name="Shape 4"/>
           <p:cNvSpPr/>
           <p:nvPr/>
         </p:nvSpPr>
         <p:spPr>
           <a:xfrm>
-            <a:off x="758952" y="6053328"/>
-            <a:ext cx="4480560" cy="329184"/>
+            <a:off x="758952" y="1965960"/>
+            <a:ext cx="6035040" cy="3566160"/>
           </a:xfrm>
           <a:prstGeom prst="roundRect">
             <a:avLst>
-              <a:gd name="adj" fmla="val 50000"/>
+              <a:gd name="adj" fmla="val 4282"/>
             </a:avLst>
           </a:prstGeom>
           <a:solidFill>
-            <a:srgbClr val="0066FF"/>
+            <a:srgbClr val="F3F3F3"/>
           </a:solidFill>
           <a:ln w="12700">
             <a:solidFill>
@@ -6489,14 +6555,347 @@
       </p:sp>
       <p:sp>
         <p:nvSpPr>
-          <p:cNvPr id="26" name="Text 24"/>
-          <p:cNvSpPr txBox="1"/>
-          <p:nvPr/>
-        </p:nvSpPr>
-        <p:spPr>
-          <a:xfrm>
-            <a:off x="758952" y="6053328"/>
-            <a:ext cx="4480560" cy="329184"/>
+          <p:cNvPr id="7" name="Text 5"/>
+          <p:cNvSpPr txBox="1"/>
+          <p:nvPr/>
+        </p:nvSpPr>
+        <p:spPr>
+          <a:xfrm>
+            <a:off x="1014984" y="2167128"/>
+            <a:ext cx="5522976" cy="3163824"/>
+          </a:xfrm>
+          <a:prstGeom prst="rect">
+            <a:avLst/>
+          </a:prstGeom>
+          <a:noFill/>
+          <a:ln/>
+        </p:spPr>
+        <p:txBody>
+          <a:bodyPr wrap="square" lIns="0" tIns="0" rIns="0" bIns="0" rtlCol="0" anchor="t"/>
+          <a:lstStyle/>
+          <a:p>
+            <a:pPr indent="0" marL="0">
+              <a:lnSpc>
+                <a:spcPct val="132000"/>
+              </a:lnSpc>
+              <a:buNone/>
+            </a:pPr>
+            <a:r>
+              <a:rPr lang="en-US" sz="1150" dirty="0">
+                <a:solidFill>
+                  <a:srgbClr val="141414"/>
+                </a:solidFill>
+                <a:latin typeface="Consolas" pitchFamily="34" charset="0"/>
+                <a:ea typeface="Consolas" pitchFamily="34" charset="-122"/>
+                <a:cs typeface="Consolas" pitchFamily="34" charset="-120"/>
+              </a:rPr>
+              <a:t>public class PlayerMove : MonoBehaviour</a:t>
+            </a:r>
+            <a:endParaRPr lang="en-US" sz="1150" dirty="0"/>
+          </a:p>
+          <a:p>
+            <a:pPr indent="0" marL="0">
+              <a:lnSpc>
+                <a:spcPct val="132000"/>
+              </a:lnSpc>
+              <a:buNone/>
+            </a:pPr>
+            <a:r>
+              <a:rPr lang="en-US" sz="1150" dirty="0">
+                <a:solidFill>
+                  <a:srgbClr val="141414"/>
+                </a:solidFill>
+                <a:latin typeface="Consolas" pitchFamily="34" charset="0"/>
+                <a:ea typeface="Consolas" pitchFamily="34" charset="-122"/>
+                <a:cs typeface="Consolas" pitchFamily="34" charset="-120"/>
+              </a:rPr>
+              <a:t>{</a:t>
+            </a:r>
+            <a:endParaRPr lang="en-US" sz="1150" dirty="0"/>
+          </a:p>
+          <a:p>
+            <a:pPr indent="0" marL="0">
+              <a:lnSpc>
+                <a:spcPct val="132000"/>
+              </a:lnSpc>
+              <a:buNone/>
+            </a:pPr>
+            <a:r>
+              <a:rPr lang="en-US" sz="1150" dirty="0">
+                <a:solidFill>
+                  <a:srgbClr val="141414"/>
+                </a:solidFill>
+                <a:latin typeface="Consolas" pitchFamily="34" charset="0"/>
+                <a:ea typeface="Consolas" pitchFamily="34" charset="-122"/>
+                <a:cs typeface="Consolas" pitchFamily="34" charset="-120"/>
+              </a:rPr>
+              <a:t>    [SerializeField] float moveSpeed = 5f;</a:t>
+            </a:r>
+            <a:endParaRPr lang="en-US" sz="1150" dirty="0"/>
+          </a:p>
+          <a:p>
+            <a:pPr indent="0" marL="0">
+              <a:lnSpc>
+                <a:spcPct val="132000"/>
+              </a:lnSpc>
+              <a:buNone/>
+            </a:pPr>
+            <a:r>
+              <a:rPr lang="en-US" sz="1150" dirty="0">
+                <a:solidFill>
+                  <a:srgbClr val="141414"/>
+                </a:solidFill>
+                <a:latin typeface="Consolas" pitchFamily="34" charset="0"/>
+                <a:ea typeface="Consolas" pitchFamily="34" charset="-122"/>
+                <a:cs typeface="Consolas" pitchFamily="34" charset="-120"/>
+              </a:rPr>
+              <a:t>    [SerializeField] GameObject item;</a:t>
+            </a:r>
+            <a:endParaRPr lang="en-US" sz="1150" dirty="0"/>
+          </a:p>
+          <a:p>
+            <a:pPr indent="0" marL="0">
+              <a:lnSpc>
+                <a:spcPct val="132000"/>
+              </a:lnSpc>
+              <a:buNone/>
+            </a:pPr>
+            <a:r>
+              <a:rPr lang="en-US" sz="1150" dirty="0">
+                <a:solidFill>
+                  <a:srgbClr val="141414"/>
+                </a:solidFill>
+                <a:latin typeface="Consolas" pitchFamily="34" charset="0"/>
+                <a:ea typeface="Consolas" pitchFamily="34" charset="-122"/>
+                <a:cs typeface="Consolas" pitchFamily="34" charset="-120"/>
+              </a:rPr>
+              <a:t> </a:t>
+            </a:r>
+            <a:endParaRPr lang="en-US" sz="1150" dirty="0"/>
+          </a:p>
+          <a:p>
+            <a:pPr indent="0" marL="0">
+              <a:lnSpc>
+                <a:spcPct val="132000"/>
+              </a:lnSpc>
+              <a:buNone/>
+            </a:pPr>
+            <a:r>
+              <a:rPr lang="en-US" sz="1150" dirty="0">
+                <a:solidFill>
+                  <a:srgbClr val="141414"/>
+                </a:solidFill>
+                <a:latin typeface="Consolas" pitchFamily="34" charset="0"/>
+                <a:ea typeface="Consolas" pitchFamily="34" charset="-122"/>
+                <a:cs typeface="Consolas" pitchFamily="34" charset="-120"/>
+              </a:rPr>
+              <a:t>    void Update()</a:t>
+            </a:r>
+            <a:endParaRPr lang="en-US" sz="1150" dirty="0"/>
+          </a:p>
+          <a:p>
+            <a:pPr indent="0" marL="0">
+              <a:lnSpc>
+                <a:spcPct val="132000"/>
+              </a:lnSpc>
+              <a:buNone/>
+            </a:pPr>
+            <a:r>
+              <a:rPr lang="en-US" sz="1150" dirty="0">
+                <a:solidFill>
+                  <a:srgbClr val="141414"/>
+                </a:solidFill>
+                <a:latin typeface="Consolas" pitchFamily="34" charset="0"/>
+                <a:ea typeface="Consolas" pitchFamily="34" charset="-122"/>
+                <a:cs typeface="Consolas" pitchFamily="34" charset="-120"/>
+              </a:rPr>
+              <a:t>    {</a:t>
+            </a:r>
+            <a:endParaRPr lang="en-US" sz="1150" dirty="0"/>
+          </a:p>
+          <a:p>
+            <a:pPr indent="0" marL="0">
+              <a:lnSpc>
+                <a:spcPct val="132000"/>
+              </a:lnSpc>
+              <a:buNone/>
+            </a:pPr>
+            <a:r>
+              <a:rPr lang="en-US" sz="1150" dirty="0">
+                <a:solidFill>
+                  <a:srgbClr val="707070"/>
+                </a:solidFill>
+                <a:latin typeface="Consolas" pitchFamily="34" charset="0"/>
+                <a:ea typeface="Consolas" pitchFamily="34" charset="-122"/>
+                <a:cs typeface="Consolas" pitchFamily="34" charset="-120"/>
+              </a:rPr>
+              <a:t>        // TODO ①~③ 이동</a:t>
+            </a:r>
+            <a:endParaRPr lang="en-US" sz="1150" dirty="0"/>
+          </a:p>
+          <a:p>
+            <a:pPr indent="0" marL="0">
+              <a:lnSpc>
+                <a:spcPct val="132000"/>
+              </a:lnSpc>
+              <a:buNone/>
+            </a:pPr>
+            <a:r>
+              <a:rPr lang="en-US" sz="1150" dirty="0">
+                <a:solidFill>
+                  <a:srgbClr val="707070"/>
+                </a:solidFill>
+                <a:latin typeface="Consolas" pitchFamily="34" charset="0"/>
+                <a:ea typeface="Consolas" pitchFamily="34" charset="-122"/>
+                <a:cs typeface="Consolas" pitchFamily="34" charset="-120"/>
+              </a:rPr>
+              <a:t>        // TODO ④ 스페이스로 item 토글</a:t>
+            </a:r>
+            <a:endParaRPr lang="en-US" sz="1150" dirty="0"/>
+          </a:p>
+          <a:p>
+            <a:pPr indent="0" marL="0">
+              <a:lnSpc>
+                <a:spcPct val="132000"/>
+              </a:lnSpc>
+              <a:buNone/>
+            </a:pPr>
+            <a:r>
+              <a:rPr lang="en-US" sz="1150" dirty="0">
+                <a:solidFill>
+                  <a:srgbClr val="141414"/>
+                </a:solidFill>
+                <a:latin typeface="Consolas" pitchFamily="34" charset="0"/>
+                <a:ea typeface="Consolas" pitchFamily="34" charset="-122"/>
+                <a:cs typeface="Consolas" pitchFamily="34" charset="-120"/>
+              </a:rPr>
+              <a:t>    }</a:t>
+            </a:r>
+            <a:endParaRPr lang="en-US" sz="1150" dirty="0"/>
+          </a:p>
+          <a:p>
+            <a:pPr indent="0" marL="0">
+              <a:lnSpc>
+                <a:spcPct val="132000"/>
+              </a:lnSpc>
+              <a:buNone/>
+            </a:pPr>
+            <a:r>
+              <a:rPr lang="en-US" sz="1150" dirty="0">
+                <a:solidFill>
+                  <a:srgbClr val="141414"/>
+                </a:solidFill>
+                <a:latin typeface="Consolas" pitchFamily="34" charset="0"/>
+                <a:ea typeface="Consolas" pitchFamily="34" charset="-122"/>
+                <a:cs typeface="Consolas" pitchFamily="34" charset="-120"/>
+              </a:rPr>
+              <a:t> </a:t>
+            </a:r>
+            <a:endParaRPr lang="en-US" sz="1150" dirty="0"/>
+          </a:p>
+          <a:p>
+            <a:pPr indent="0" marL="0">
+              <a:lnSpc>
+                <a:spcPct val="132000"/>
+              </a:lnSpc>
+              <a:buNone/>
+            </a:pPr>
+            <a:r>
+              <a:rPr lang="en-US" sz="1150" dirty="0">
+                <a:solidFill>
+                  <a:srgbClr val="707070"/>
+                </a:solidFill>
+                <a:latin typeface="Consolas" pitchFamily="34" charset="0"/>
+                <a:ea typeface="Consolas" pitchFamily="34" charset="-122"/>
+                <a:cs typeface="Consolas" pitchFamily="34" charset="-120"/>
+              </a:rPr>
+              <a:t>    // TODO ⑤ [ContextMenu] 원점으로</a:t>
+            </a:r>
+            <a:endParaRPr lang="en-US" sz="1150" dirty="0"/>
+          </a:p>
+          <a:p>
+            <a:pPr indent="0" marL="0">
+              <a:lnSpc>
+                <a:spcPct val="132000"/>
+              </a:lnSpc>
+              <a:buNone/>
+            </a:pPr>
+            <a:r>
+              <a:rPr lang="en-US" sz="1150" dirty="0">
+                <a:solidFill>
+                  <a:srgbClr val="141414"/>
+                </a:solidFill>
+                <a:latin typeface="Consolas" pitchFamily="34" charset="0"/>
+                <a:ea typeface="Consolas" pitchFamily="34" charset="-122"/>
+                <a:cs typeface="Consolas" pitchFamily="34" charset="-120"/>
+              </a:rPr>
+              <a:t>}</a:t>
+            </a:r>
+            <a:endParaRPr lang="en-US" sz="1150" dirty="0"/>
+          </a:p>
+        </p:txBody>
+      </p:sp>
+      <p:sp>
+        <p:nvSpPr>
+          <p:cNvPr id="8" name="Shape 6"/>
+          <p:cNvSpPr/>
+          <p:nvPr/>
+        </p:nvSpPr>
+        <p:spPr>
+          <a:xfrm>
+            <a:off x="7086600" y="1965960"/>
+            <a:ext cx="4343400" cy="2944368"/>
+          </a:xfrm>
+          <a:prstGeom prst="roundRect">
+            <a:avLst>
+              <a:gd name="adj" fmla="val 7764"/>
+            </a:avLst>
+          </a:prstGeom>
+          <a:solidFill>
+            <a:srgbClr val="F3F3F3"/>
+          </a:solidFill>
+          <a:ln w="12700">
+            <a:solidFill>
+              <a:srgbClr val="333333"/>
+            </a:solidFill>
+            <a:prstDash val="solid"/>
+          </a:ln>
+        </p:spPr>
+      </p:sp>
+      <p:pic>
+        <p:nvPicPr>
+          <p:cNvPr id="9" name="Image 0" descr="C:\Users\user\AppData\Local\Temp\claude\C--Users-user-Github-WaveBreaker\fd97bec6-cef8-4bf5-a447-9a0fa572b36e\scratchpad\shots2\final\040_Input.png">    </p:cNvPr>
+          <p:cNvPicPr>
+            <a:picLocks noChangeAspect="1"/>
+          </p:cNvPicPr>
+          <p:nvPr/>
+        </p:nvPicPr>
+        <p:blipFill>
+          <a:blip r:embed="rId1"/>
+          <a:stretch>
+            <a:fillRect/>
+          </a:stretch>
+        </p:blipFill>
+        <p:spPr>
+          <a:xfrm>
+            <a:off x="7287768" y="2167128"/>
+            <a:ext cx="3941064" cy="2066544"/>
+          </a:xfrm>
+          <a:prstGeom prst="rect">
+            <a:avLst/>
+          </a:prstGeom>
+        </p:spPr>
+      </p:pic>
+      <p:sp>
+        <p:nvSpPr>
+          <p:cNvPr id="10" name="Text 7"/>
+          <p:cNvSpPr txBox="1"/>
+          <p:nvPr/>
+        </p:nvSpPr>
+        <p:spPr>
+          <a:xfrm>
+            <a:off x="7287768" y="4306824"/>
+            <a:ext cx="3941064" cy="310896"/>
           </a:xfrm>
           <a:prstGeom prst="rect">
             <a:avLst/>
@@ -6514,40 +6913,82 @@
             <a:r>
               <a:rPr lang="en-US" sz="950" dirty="0">
                 <a:solidFill>
-                  <a:srgbClr val="FFFFFF"/>
+                  <a:srgbClr val="ADADAD"/>
+                </a:solidFill>
+                <a:latin typeface="Pretendard" pitchFamily="34" charset="0"/>
+                <a:ea typeface="Pretendard" pitchFamily="34" charset="-122"/>
+                <a:cs typeface="Pretendard" pitchFamily="34" charset="-120"/>
+              </a:rPr>
+              <a:t>040_Input_Done — Player 와 Item</a:t>
+            </a:r>
+            <a:endParaRPr lang="en-US" sz="950" dirty="0"/>
+          </a:p>
+        </p:txBody>
+      </p:sp>
+      <p:sp>
+        <p:nvSpPr>
+          <p:cNvPr id="11" name="Text 8"/>
+          <p:cNvSpPr txBox="1"/>
+          <p:nvPr/>
+        </p:nvSpPr>
+        <p:spPr>
+          <a:xfrm>
+            <a:off x="7086600" y="4892040"/>
+            <a:ext cx="4343400" cy="329184"/>
+          </a:xfrm>
+          <a:prstGeom prst="rect">
+            <a:avLst/>
+          </a:prstGeom>
+          <a:noFill/>
+          <a:ln/>
+        </p:spPr>
+        <p:txBody>
+          <a:bodyPr wrap="square" lIns="0" tIns="0" rIns="0" bIns="0" rtlCol="0" anchor="ctr"/>
+          <a:lstStyle/>
+          <a:p>
+            <a:pPr indent="0" marL="0">
+              <a:buNone/>
+            </a:pPr>
+            <a:r>
+              <a:rPr lang="en-US" sz="1400" dirty="0">
+                <a:solidFill>
+                  <a:srgbClr val="141414"/>
                 </a:solidFill>
                 <a:latin typeface="Pretendard SemiBold" pitchFamily="34" charset="0"/>
                 <a:ea typeface="Pretendard SemiBold" pitchFamily="34" charset="-122"/>
                 <a:cs typeface="Pretendard SemiBold" pitchFamily="34" charset="-120"/>
               </a:rPr>
-              <a:t>040 전에 강사가 반드시 확인할 것</a:t>
-            </a:r>
-            <a:endParaRPr lang="en-US" sz="950" dirty="0"/>
-          </a:p>
-        </p:txBody>
-      </p:sp>
-      <p:sp>
-        <p:nvSpPr>
-          <p:cNvPr id="27" name="Text 25"/>
-          <p:cNvSpPr txBox="1"/>
-          <p:nvPr/>
-        </p:nvSpPr>
-        <p:spPr>
-          <a:xfrm>
-            <a:off x="5559552" y="6053328"/>
-            <a:ext cx="5943600" cy="329184"/>
-          </a:xfrm>
-          <a:prstGeom prst="rect">
-            <a:avLst/>
-          </a:prstGeom>
-          <a:noFill/>
-          <a:ln/>
-        </p:spPr>
-        <p:txBody>
-          <a:bodyPr wrap="square" lIns="0" tIns="0" rIns="0" bIns="0" rtlCol="0" anchor="ctr"/>
-          <a:lstStyle/>
-          <a:p>
-            <a:pPr indent="0" marL="0">
+              <a:t>Inspector의 Item 칸이 비어 있으면</a:t>
+            </a:r>
+            <a:endParaRPr lang="en-US" sz="1400" dirty="0"/>
+          </a:p>
+        </p:txBody>
+      </p:sp>
+      <p:sp>
+        <p:nvSpPr>
+          <p:cNvPr id="12" name="Text 9"/>
+          <p:cNvSpPr txBox="1"/>
+          <p:nvPr/>
+        </p:nvSpPr>
+        <p:spPr>
+          <a:xfrm>
+            <a:off x="7086600" y="5285232"/>
+            <a:ext cx="4343400" cy="731520"/>
+          </a:xfrm>
+          <a:prstGeom prst="rect">
+            <a:avLst/>
+          </a:prstGeom>
+          <a:noFill/>
+          <a:ln/>
+        </p:spPr>
+        <p:txBody>
+          <a:bodyPr wrap="square" lIns="0" tIns="0" rIns="0" bIns="0" rtlCol="0" anchor="ctr"/>
+          <a:lstStyle/>
+          <a:p>
+            <a:pPr indent="0" marL="0">
+              <a:lnSpc>
+                <a:spcPct val="138000"/>
+              </a:lnSpc>
               <a:buNone/>
             </a:pPr>
             <a:r>
@@ -6559,7 +7000,7 @@
                 <a:ea typeface="Pretendard Light" pitchFamily="34" charset="-122"/>
                 <a:cs typeface="Pretendard Light" pitchFamily="34" charset="-120"/>
               </a:rPr>
-              <a:t>New 전용이면 Input.GetAxisRaw 가 런타임에 예외를 던진다. 반 전체가 동시에 막힌다.</a:t>
+              <a:t>스페이스를 누르는 순간 NullReferenceException 이 난다. Hierarchy에서 드래그해 넣는다.</a:t>
             </a:r>
             <a:endParaRPr lang="en-US" sz="1200" dirty="0"/>
           </a:p>
@@ -6630,7 +7071,7 @@
                 <a:ea typeface="Pretendard SemiBold" pitchFamily="34" charset="-122"/>
                 <a:cs typeface="Pretendard SemiBold" pitchFamily="34" charset="-120"/>
               </a:rPr>
-              <a:t>Phase 2 종료 조건.</a:t>
+              <a:t>이번 주 흔한 사고.</a:t>
             </a:r>
             <a:endParaRPr lang="en-US" sz="2600" dirty="0"/>
           </a:p>
@@ -6669,7 +7110,7 @@
                 <a:ea typeface="Pretendard Light" pitchFamily="34" charset="-122"/>
                 <a:cs typeface="Pretendard Light" pitchFamily="34" charset="-120"/>
               </a:rPr>
-              <a:t>040 데모에서 한 명씩 확인한다. Phase 3는 이 위에 그대로 쌓인다.</a:t>
+              <a:t>미리 알고 있으면 대응이 빨라진다. 강사용.</a:t>
             </a:r>
             <a:endParaRPr lang="en-US" sz="1500" dirty="0"/>
           </a:p>
@@ -6683,17 +7124,13 @@
         </p:nvSpPr>
         <p:spPr>
           <a:xfrm>
-            <a:off x="758952" y="2176272"/>
-            <a:ext cx="201168" cy="201168"/>
-          </a:xfrm>
-          <a:prstGeom prst="roundRect">
-            <a:avLst>
-              <a:gd name="adj" fmla="val 22727"/>
-            </a:avLst>
-          </a:prstGeom>
-          <a:solidFill>
-            <a:srgbClr val="FFFFFF"/>
-          </a:solidFill>
+            <a:off x="758952" y="2011680"/>
+            <a:ext cx="10673791" cy="0"/>
+          </a:xfrm>
+          <a:prstGeom prst="line">
+            <a:avLst/>
+          </a:prstGeom>
+          <a:noFill/>
           <a:ln w="12700">
             <a:solidFill>
               <a:srgbClr val="E0E0E0"/>
@@ -6710,8 +7147,47 @@
         </p:nvSpPr>
         <p:spPr>
           <a:xfrm>
-            <a:off x="1143000" y="2103120"/>
-            <a:ext cx="4754880" cy="365760"/>
+            <a:off x="758952" y="2194560"/>
+            <a:ext cx="3931920" cy="420624"/>
+          </a:xfrm>
+          <a:prstGeom prst="rect">
+            <a:avLst/>
+          </a:prstGeom>
+          <a:noFill/>
+          <a:ln/>
+        </p:spPr>
+        <p:txBody>
+          <a:bodyPr wrap="square" lIns="0" tIns="0" rIns="0" bIns="0" rtlCol="0" anchor="ctr"/>
+          <a:lstStyle/>
+          <a:p>
+            <a:pPr indent="0" marL="0">
+              <a:buNone/>
+            </a:pPr>
+            <a:r>
+              <a:rPr lang="en-US" sz="1550" dirty="0">
+                <a:solidFill>
+                  <a:srgbClr val="141414"/>
+                </a:solidFill>
+                <a:latin typeface="Pretendard SemiBold" pitchFamily="34" charset="0"/>
+                <a:ea typeface="Pretendard SemiBold" pitchFamily="34" charset="-122"/>
+                <a:cs typeface="Pretendard SemiBold" pitchFamily="34" charset="-120"/>
+              </a:rPr>
+              <a:t>Can't add script</a:t>
+            </a:r>
+            <a:endParaRPr lang="en-US" sz="1550" dirty="0"/>
+          </a:p>
+        </p:txBody>
+      </p:sp>
+      <p:sp>
+        <p:nvSpPr>
+          <p:cNvPr id="6" name="Text 4"/>
+          <p:cNvSpPr txBox="1"/>
+          <p:nvPr/>
+        </p:nvSpPr>
+        <p:spPr>
+          <a:xfrm>
+            <a:off x="4873752" y="2194560"/>
+            <a:ext cx="3291840" cy="420624"/>
           </a:xfrm>
           <a:prstGeom prst="rect">
             <a:avLst/>
@@ -6729,13 +7205,13 @@
             <a:r>
               <a:rPr lang="en-US" sz="1200" dirty="0">
                 <a:solidFill>
-                  <a:srgbClr val="141414"/>
+                  <a:srgbClr val="ADADAD"/>
                 </a:solidFill>
                 <a:latin typeface="Pretendard" pitchFamily="34" charset="0"/>
                 <a:ea typeface="Pretendard" pitchFamily="34" charset="-122"/>
                 <a:cs typeface="Pretendard" pitchFamily="34" charset="-120"/>
               </a:rPr>
-              <a:t>에디터 6개 창의 역할을 말한다</a:t>
+              <a:t>파일명 ≠ 클래스명</a:t>
             </a:r>
             <a:endParaRPr lang="en-US" sz="1200" dirty="0"/>
           </a:p>
@@ -6743,26 +7219,61 @@
       </p:sp>
       <p:sp>
         <p:nvSpPr>
-          <p:cNvPr id="6" name="Shape 4"/>
+          <p:cNvPr id="7" name="Text 5"/>
+          <p:cNvSpPr txBox="1"/>
+          <p:nvPr/>
+        </p:nvSpPr>
+        <p:spPr>
+          <a:xfrm>
+            <a:off x="8257032" y="2194560"/>
+            <a:ext cx="2926080" cy="420624"/>
+          </a:xfrm>
+          <a:prstGeom prst="rect">
+            <a:avLst/>
+          </a:prstGeom>
+          <a:noFill/>
+          <a:ln/>
+        </p:spPr>
+        <p:txBody>
+          <a:bodyPr wrap="square" lIns="0" tIns="0" rIns="0" bIns="0" rtlCol="0" anchor="ctr"/>
+          <a:lstStyle/>
+          <a:p>
+            <a:pPr indent="0" marL="0">
+              <a:buNone/>
+            </a:pPr>
+            <a:r>
+              <a:rPr lang="en-US" sz="1200" dirty="0">
+                <a:solidFill>
+                  <a:srgbClr val="141414"/>
+                </a:solidFill>
+                <a:latin typeface="Pretendard" pitchFamily="34" charset="0"/>
+                <a:ea typeface="Pretendard" pitchFamily="34" charset="-122"/>
+                <a:cs typeface="Pretendard" pitchFamily="34" charset="-120"/>
+              </a:rPr>
+              <a:t>파일을 지우고 다시 만든다</a:t>
+            </a:r>
+            <a:endParaRPr lang="en-US" sz="1200" dirty="0"/>
+          </a:p>
+        </p:txBody>
+      </p:sp>
+      <p:sp>
+        <p:nvSpPr>
+          <p:cNvPr id="8" name="Shape 6"/>
           <p:cNvSpPr/>
           <p:nvPr/>
         </p:nvSpPr>
         <p:spPr>
           <a:xfrm>
-            <a:off x="758952" y="2724912"/>
-            <a:ext cx="201168" cy="201168"/>
-          </a:xfrm>
-          <a:prstGeom prst="roundRect">
-            <a:avLst>
-              <a:gd name="adj" fmla="val 22727"/>
-            </a:avLst>
-          </a:prstGeom>
-          <a:solidFill>
-            <a:srgbClr val="FFFFFF"/>
-          </a:solidFill>
+            <a:off x="758952" y="2761488"/>
+            <a:ext cx="10673791" cy="0"/>
+          </a:xfrm>
+          <a:prstGeom prst="line">
+            <a:avLst/>
+          </a:prstGeom>
+          <a:noFill/>
           <a:ln w="12700">
             <a:solidFill>
-              <a:srgbClr val="E0E0E0"/>
+              <a:srgbClr val="F0F0F0"/>
             </a:solidFill>
             <a:prstDash val="solid"/>
           </a:ln>
@@ -6770,14 +7281,53 @@
       </p:sp>
       <p:sp>
         <p:nvSpPr>
-          <p:cNvPr id="7" name="Text 5"/>
-          <p:cNvSpPr txBox="1"/>
-          <p:nvPr/>
-        </p:nvSpPr>
-        <p:spPr>
-          <a:xfrm>
-            <a:off x="1143000" y="2651760"/>
-            <a:ext cx="4754880" cy="365760"/>
+          <p:cNvPr id="9" name="Text 7"/>
+          <p:cNvSpPr txBox="1"/>
+          <p:nvPr/>
+        </p:nvSpPr>
+        <p:spPr>
+          <a:xfrm>
+            <a:off x="758952" y="2926080"/>
+            <a:ext cx="3931920" cy="420624"/>
+          </a:xfrm>
+          <a:prstGeom prst="rect">
+            <a:avLst/>
+          </a:prstGeom>
+          <a:noFill/>
+          <a:ln/>
+        </p:spPr>
+        <p:txBody>
+          <a:bodyPr wrap="square" lIns="0" tIns="0" rIns="0" bIns="0" rtlCol="0" anchor="ctr"/>
+          <a:lstStyle/>
+          <a:p>
+            <a:pPr indent="0" marL="0">
+              <a:buNone/>
+            </a:pPr>
+            <a:r>
+              <a:rPr lang="en-US" sz="1550" dirty="0">
+                <a:solidFill>
+                  <a:srgbClr val="141414"/>
+                </a:solidFill>
+                <a:latin typeface="Pretendard SemiBold" pitchFamily="34" charset="0"/>
+                <a:ea typeface="Pretendard SemiBold" pitchFamily="34" charset="-122"/>
+                <a:cs typeface="Pretendard SemiBold" pitchFamily="34" charset="-120"/>
+              </a:rPr>
+              <a:t>고쳤는데 반영이 안 됨</a:t>
+            </a:r>
+            <a:endParaRPr lang="en-US" sz="1550" dirty="0"/>
+          </a:p>
+        </p:txBody>
+      </p:sp>
+      <p:sp>
+        <p:nvSpPr>
+          <p:cNvPr id="10" name="Text 8"/>
+          <p:cNvSpPr txBox="1"/>
+          <p:nvPr/>
+        </p:nvSpPr>
+        <p:spPr>
+          <a:xfrm>
+            <a:off x="4873752" y="2926080"/>
+            <a:ext cx="3291840" cy="420624"/>
           </a:xfrm>
           <a:prstGeom prst="rect">
             <a:avLst/>
@@ -6795,13 +7345,13 @@
             <a:r>
               <a:rPr lang="en-US" sz="1200" dirty="0">
                 <a:solidFill>
-                  <a:srgbClr val="141414"/>
+                  <a:srgbClr val="ADADAD"/>
                 </a:solidFill>
                 <a:latin typeface="Pretendard" pitchFamily="34" charset="0"/>
                 <a:ea typeface="Pretendard" pitchFamily="34" charset="-122"/>
                 <a:cs typeface="Pretendard" pitchFamily="34" charset="-120"/>
               </a:rPr>
-              <a:t>F 키로 오브젝트를 찾는다</a:t>
+              <a:t>저장 안 함 / 컴파일 대기</a:t>
             </a:r>
             <a:endParaRPr lang="en-US" sz="1200" dirty="0"/>
           </a:p>
@@ -6809,26 +7359,61 @@
       </p:sp>
       <p:sp>
         <p:nvSpPr>
-          <p:cNvPr id="8" name="Shape 6"/>
+          <p:cNvPr id="11" name="Text 9"/>
+          <p:cNvSpPr txBox="1"/>
+          <p:nvPr/>
+        </p:nvSpPr>
+        <p:spPr>
+          <a:xfrm>
+            <a:off x="8257032" y="2926080"/>
+            <a:ext cx="2926080" cy="420624"/>
+          </a:xfrm>
+          <a:prstGeom prst="rect">
+            <a:avLst/>
+          </a:prstGeom>
+          <a:noFill/>
+          <a:ln/>
+        </p:spPr>
+        <p:txBody>
+          <a:bodyPr wrap="square" lIns="0" tIns="0" rIns="0" bIns="0" rtlCol="0" anchor="ctr"/>
+          <a:lstStyle/>
+          <a:p>
+            <a:pPr indent="0" marL="0">
+              <a:buNone/>
+            </a:pPr>
+            <a:r>
+              <a:rPr lang="en-US" sz="1200" dirty="0">
+                <a:solidFill>
+                  <a:srgbClr val="141414"/>
+                </a:solidFill>
+                <a:latin typeface="Pretendard" pitchFamily="34" charset="0"/>
+                <a:ea typeface="Pretendard" pitchFamily="34" charset="-122"/>
+                <a:cs typeface="Pretendard" pitchFamily="34" charset="-120"/>
+              </a:rPr>
+              <a:t>저장 → 전환 → 기다림</a:t>
+            </a:r>
+            <a:endParaRPr lang="en-US" sz="1200" dirty="0"/>
+          </a:p>
+        </p:txBody>
+      </p:sp>
+      <p:sp>
+        <p:nvSpPr>
+          <p:cNvPr id="12" name="Shape 10"/>
           <p:cNvSpPr/>
           <p:nvPr/>
         </p:nvSpPr>
         <p:spPr>
           <a:xfrm>
-            <a:off x="758952" y="3273552"/>
-            <a:ext cx="201168" cy="201168"/>
-          </a:xfrm>
-          <a:prstGeom prst="roundRect">
-            <a:avLst>
-              <a:gd name="adj" fmla="val 22727"/>
-            </a:avLst>
-          </a:prstGeom>
-          <a:solidFill>
-            <a:srgbClr val="FFFFFF"/>
-          </a:solidFill>
+            <a:off x="758952" y="3493008"/>
+            <a:ext cx="10673791" cy="0"/>
+          </a:xfrm>
+          <a:prstGeom prst="line">
+            <a:avLst/>
+          </a:prstGeom>
+          <a:noFill/>
           <a:ln w="12700">
             <a:solidFill>
-              <a:srgbClr val="E0E0E0"/>
+              <a:srgbClr val="F0F0F0"/>
             </a:solidFill>
             <a:prstDash val="solid"/>
           </a:ln>
@@ -6836,14 +7421,53 @@
       </p:sp>
       <p:sp>
         <p:nvSpPr>
-          <p:cNvPr id="9" name="Text 7"/>
-          <p:cNvSpPr txBox="1"/>
-          <p:nvPr/>
-        </p:nvSpPr>
-        <p:spPr>
-          <a:xfrm>
-            <a:off x="1143000" y="3200400"/>
-            <a:ext cx="4754880" cy="365760"/>
+          <p:cNvPr id="13" name="Text 11"/>
+          <p:cNvSpPr txBox="1"/>
+          <p:nvPr/>
+        </p:nvSpPr>
+        <p:spPr>
+          <a:xfrm>
+            <a:off x="758952" y="3657600"/>
+            <a:ext cx="3931920" cy="420624"/>
+          </a:xfrm>
+          <a:prstGeom prst="rect">
+            <a:avLst/>
+          </a:prstGeom>
+          <a:noFill/>
+          <a:ln/>
+        </p:spPr>
+        <p:txBody>
+          <a:bodyPr wrap="square" lIns="0" tIns="0" rIns="0" bIns="0" rtlCol="0" anchor="ctr"/>
+          <a:lstStyle/>
+          <a:p>
+            <a:pPr indent="0" marL="0">
+              <a:buNone/>
+            </a:pPr>
+            <a:r>
+              <a:rPr lang="en-US" sz="1550" dirty="0">
+                <a:solidFill>
+                  <a:srgbClr val="141414"/>
+                </a:solidFill>
+                <a:latin typeface="Pretendard SemiBold" pitchFamily="34" charset="0"/>
+                <a:ea typeface="Pretendard SemiBold" pitchFamily="34" charset="-122"/>
+                <a:cs typeface="Pretendard SemiBold" pitchFamily="34" charset="-120"/>
+              </a:rPr>
+              <a:t>곱했더니 거의 안 움직임</a:t>
+            </a:r>
+            <a:endParaRPr lang="en-US" sz="1550" dirty="0"/>
+          </a:p>
+        </p:txBody>
+      </p:sp>
+      <p:sp>
+        <p:nvSpPr>
+          <p:cNvPr id="14" name="Text 12"/>
+          <p:cNvSpPr txBox="1"/>
+          <p:nvPr/>
+        </p:nvSpPr>
+        <p:spPr>
+          <a:xfrm>
+            <a:off x="4873752" y="3657600"/>
+            <a:ext cx="3291840" cy="420624"/>
           </a:xfrm>
           <a:prstGeom prst="rect">
             <a:avLst/>
@@ -6861,13 +7485,13 @@
             <a:r>
               <a:rPr lang="en-US" sz="1200" dirty="0">
                 <a:solidFill>
-                  <a:srgbClr val="141414"/>
+                  <a:srgbClr val="ADADAD"/>
                 </a:solidFill>
                 <a:latin typeface="Pretendard" pitchFamily="34" charset="0"/>
                 <a:ea typeface="Pretendard" pitchFamily="34" charset="-122"/>
                 <a:cs typeface="Pretendard" pitchFamily="34" charset="-120"/>
               </a:rPr>
-              <a:t>Component 를 추가·제거한다</a:t>
+              <a:t>값을 안 바꿈 (0.05 그대로)</a:t>
             </a:r>
             <a:endParaRPr lang="en-US" sz="1200" dirty="0"/>
           </a:p>
@@ -6875,26 +7499,61 @@
       </p:sp>
       <p:sp>
         <p:nvSpPr>
-          <p:cNvPr id="10" name="Shape 8"/>
+          <p:cNvPr id="15" name="Text 13"/>
+          <p:cNvSpPr txBox="1"/>
+          <p:nvPr/>
+        </p:nvSpPr>
+        <p:spPr>
+          <a:xfrm>
+            <a:off x="8257032" y="3657600"/>
+            <a:ext cx="2926080" cy="420624"/>
+          </a:xfrm>
+          <a:prstGeom prst="rect">
+            <a:avLst/>
+          </a:prstGeom>
+          <a:noFill/>
+          <a:ln/>
+        </p:spPr>
+        <p:txBody>
+          <a:bodyPr wrap="square" lIns="0" tIns="0" rIns="0" bIns="0" rtlCol="0" anchor="ctr"/>
+          <a:lstStyle/>
+          <a:p>
+            <a:pPr indent="0" marL="0">
+              <a:buNone/>
+            </a:pPr>
+            <a:r>
+              <a:rPr lang="en-US" sz="1200" dirty="0">
+                <a:solidFill>
+                  <a:srgbClr val="141414"/>
+                </a:solidFill>
+                <a:latin typeface="Pretendard" pitchFamily="34" charset="0"/>
+                <a:ea typeface="Pretendard" pitchFamily="34" charset="-122"/>
+                <a:cs typeface="Pretendard" pitchFamily="34" charset="-120"/>
+              </a:rPr>
+              <a:t>단위가 바뀌었다. 3으로</a:t>
+            </a:r>
+            <a:endParaRPr lang="en-US" sz="1200" dirty="0"/>
+          </a:p>
+        </p:txBody>
+      </p:sp>
+      <p:sp>
+        <p:nvSpPr>
+          <p:cNvPr id="16" name="Shape 14"/>
           <p:cNvSpPr/>
           <p:nvPr/>
         </p:nvSpPr>
         <p:spPr>
           <a:xfrm>
-            <a:off x="758952" y="3822192"/>
-            <a:ext cx="201168" cy="201168"/>
-          </a:xfrm>
-          <a:prstGeom prst="roundRect">
-            <a:avLst>
-              <a:gd name="adj" fmla="val 22727"/>
-            </a:avLst>
-          </a:prstGeom>
-          <a:solidFill>
-            <a:srgbClr val="FFFFFF"/>
-          </a:solidFill>
+            <a:off x="758952" y="4224528"/>
+            <a:ext cx="10673791" cy="0"/>
+          </a:xfrm>
+          <a:prstGeom prst="line">
+            <a:avLst/>
+          </a:prstGeom>
+          <a:noFill/>
           <a:ln w="12700">
             <a:solidFill>
-              <a:srgbClr val="E0E0E0"/>
+              <a:srgbClr val="F0F0F0"/>
             </a:solidFill>
             <a:prstDash val="solid"/>
           </a:ln>
@@ -6902,14 +7561,53 @@
       </p:sp>
       <p:sp>
         <p:nvSpPr>
-          <p:cNvPr id="11" name="Text 9"/>
-          <p:cNvSpPr txBox="1"/>
-          <p:nvPr/>
-        </p:nvSpPr>
-        <p:spPr>
-          <a:xfrm>
-            <a:off x="1143000" y="3749040"/>
-            <a:ext cx="4754880" cy="365760"/>
+          <p:cNvPr id="17" name="Text 15"/>
+          <p:cNvSpPr txBox="1"/>
+          <p:nvPr/>
+        </p:nvSpPr>
+        <p:spPr>
+          <a:xfrm>
+            <a:off x="758952" y="4389120"/>
+            <a:ext cx="3931920" cy="420624"/>
+          </a:xfrm>
+          <a:prstGeom prst="rect">
+            <a:avLst/>
+          </a:prstGeom>
+          <a:noFill/>
+          <a:ln/>
+        </p:spPr>
+        <p:txBody>
+          <a:bodyPr wrap="square" lIns="0" tIns="0" rIns="0" bIns="0" rtlCol="0" anchor="ctr"/>
+          <a:lstStyle/>
+          <a:p>
+            <a:pPr indent="0" marL="0">
+              <a:buNone/>
+            </a:pPr>
+            <a:r>
+              <a:rPr lang="en-US" sz="1550" dirty="0">
+                <a:solidFill>
+                  <a:srgbClr val="141414"/>
+                </a:solidFill>
+                <a:latin typeface="Pretendard SemiBold" pitchFamily="34" charset="0"/>
+                <a:ea typeface="Pretendard SemiBold" pitchFamily="34" charset="-122"/>
+                <a:cs typeface="Pretendard SemiBold" pitchFamily="34" charset="-120"/>
+              </a:rPr>
+              <a:t>NullReferenceException</a:t>
+            </a:r>
+            <a:endParaRPr lang="en-US" sz="1550" dirty="0"/>
+          </a:p>
+        </p:txBody>
+      </p:sp>
+      <p:sp>
+        <p:nvSpPr>
+          <p:cNvPr id="18" name="Text 16"/>
+          <p:cNvSpPr txBox="1"/>
+          <p:nvPr/>
+        </p:nvSpPr>
+        <p:spPr>
+          <a:xfrm>
+            <a:off x="4873752" y="4389120"/>
+            <a:ext cx="3291840" cy="420624"/>
           </a:xfrm>
           <a:prstGeom prst="rect">
             <a:avLst/>
@@ -6927,13 +7625,13 @@
             <a:r>
               <a:rPr lang="en-US" sz="1200" dirty="0">
                 <a:solidFill>
-                  <a:srgbClr val="141414"/>
+                  <a:srgbClr val="ADADAD"/>
                 </a:solidFill>
                 <a:latin typeface="Pretendard" pitchFamily="34" charset="0"/>
                 <a:ea typeface="Pretendard" pitchFamily="34" charset="-122"/>
                 <a:cs typeface="Pretendard" pitchFamily="34" charset="-120"/>
               </a:rPr>
-              <a:t>월드 좌표와 로컬 좌표를 구분한다</a:t>
+              <a:t>Inspector 칸이 비어 있음</a:t>
             </a:r>
             <a:endParaRPr lang="en-US" sz="1200" dirty="0"/>
           </a:p>
@@ -6941,26 +7639,61 @@
       </p:sp>
       <p:sp>
         <p:nvSpPr>
-          <p:cNvPr id="12" name="Shape 10"/>
+          <p:cNvPr id="19" name="Text 17"/>
+          <p:cNvSpPr txBox="1"/>
+          <p:nvPr/>
+        </p:nvSpPr>
+        <p:spPr>
+          <a:xfrm>
+            <a:off x="8257032" y="4389120"/>
+            <a:ext cx="2926080" cy="420624"/>
+          </a:xfrm>
+          <a:prstGeom prst="rect">
+            <a:avLst/>
+          </a:prstGeom>
+          <a:noFill/>
+          <a:ln/>
+        </p:spPr>
+        <p:txBody>
+          <a:bodyPr wrap="square" lIns="0" tIns="0" rIns="0" bIns="0" rtlCol="0" anchor="ctr"/>
+          <a:lstStyle/>
+          <a:p>
+            <a:pPr indent="0" marL="0">
+              <a:buNone/>
+            </a:pPr>
+            <a:r>
+              <a:rPr lang="en-US" sz="1200" dirty="0">
+                <a:solidFill>
+                  <a:srgbClr val="141414"/>
+                </a:solidFill>
+                <a:latin typeface="Pretendard" pitchFamily="34" charset="0"/>
+                <a:ea typeface="Pretendard" pitchFamily="34" charset="-122"/>
+                <a:cs typeface="Pretendard" pitchFamily="34" charset="-120"/>
+              </a:rPr>
+              <a:t>Hierarchy 에서 드래그</a:t>
+            </a:r>
+            <a:endParaRPr lang="en-US" sz="1200" dirty="0"/>
+          </a:p>
+        </p:txBody>
+      </p:sp>
+      <p:sp>
+        <p:nvSpPr>
+          <p:cNvPr id="20" name="Shape 18"/>
           <p:cNvSpPr/>
           <p:nvPr/>
         </p:nvSpPr>
         <p:spPr>
           <a:xfrm>
-            <a:off x="758952" y="4370832"/>
-            <a:ext cx="201168" cy="201168"/>
-          </a:xfrm>
-          <a:prstGeom prst="roundRect">
-            <a:avLst>
-              <a:gd name="adj" fmla="val 22727"/>
-            </a:avLst>
-          </a:prstGeom>
-          <a:solidFill>
-            <a:srgbClr val="FFFFFF"/>
-          </a:solidFill>
+            <a:off x="758952" y="4956048"/>
+            <a:ext cx="10673791" cy="0"/>
+          </a:xfrm>
+          <a:prstGeom prst="line">
+            <a:avLst/>
+          </a:prstGeom>
+          <a:noFill/>
           <a:ln w="12700">
             <a:solidFill>
-              <a:srgbClr val="E0E0E0"/>
+              <a:srgbClr val="F0F0F0"/>
             </a:solidFill>
             <a:prstDash val="solid"/>
           </a:ln>
@@ -6968,391 +7701,22 @@
       </p:sp>
       <p:sp>
         <p:nvSpPr>
-          <p:cNvPr id="13" name="Text 11"/>
-          <p:cNvSpPr txBox="1"/>
-          <p:nvPr/>
-        </p:nvSpPr>
-        <p:spPr>
-          <a:xfrm>
-            <a:off x="1143000" y="4297680"/>
-            <a:ext cx="4754880" cy="365760"/>
-          </a:xfrm>
-          <a:prstGeom prst="rect">
-            <a:avLst/>
-          </a:prstGeom>
-          <a:noFill/>
-          <a:ln/>
-        </p:spPr>
-        <p:txBody>
-          <a:bodyPr wrap="square" lIns="0" tIns="0" rIns="0" bIns="0" rtlCol="0" anchor="ctr"/>
-          <a:lstStyle/>
-          <a:p>
-            <a:pPr indent="0" marL="0">
-              <a:buNone/>
-            </a:pPr>
-            <a:r>
-              <a:rPr lang="en-US" sz="1200" dirty="0">
-                <a:solidFill>
-                  <a:srgbClr val="141414"/>
-                </a:solidFill>
-                <a:latin typeface="Pretendard" pitchFamily="34" charset="0"/>
-                <a:ea typeface="Pretendard" pitchFamily="34" charset="-122"/>
-                <a:cs typeface="Pretendard" pitchFamily="34" charset="-120"/>
-              </a:rPr>
-              <a:t>스크립트를 만들어 GameObject 에 붙인다</a:t>
-            </a:r>
-            <a:endParaRPr lang="en-US" sz="1200" dirty="0"/>
-          </a:p>
-        </p:txBody>
-      </p:sp>
-      <p:sp>
-        <p:nvSpPr>
-          <p:cNvPr id="14" name="Shape 12"/>
+          <p:cNvPr id="21" name="Shape 19"/>
           <p:cNvSpPr/>
           <p:nvPr/>
         </p:nvSpPr>
         <p:spPr>
           <a:xfrm>
-            <a:off x="6199632" y="2176272"/>
-            <a:ext cx="201168" cy="201168"/>
+            <a:off x="502920" y="5029200"/>
+            <a:ext cx="11185855" cy="640080"/>
           </a:xfrm>
           <a:prstGeom prst="roundRect">
             <a:avLst>
-              <a:gd name="adj" fmla="val 22727"/>
+              <a:gd name="adj" fmla="val 23857"/>
             </a:avLst>
           </a:prstGeom>
           <a:solidFill>
-            <a:srgbClr val="FFFFFF"/>
-          </a:solidFill>
-          <a:ln w="12700">
-            <a:solidFill>
-              <a:srgbClr val="E0E0E0"/>
-            </a:solidFill>
-            <a:prstDash val="solid"/>
-          </a:ln>
-        </p:spPr>
-      </p:sp>
-      <p:sp>
-        <p:nvSpPr>
-          <p:cNvPr id="15" name="Text 13"/>
-          <p:cNvSpPr txBox="1"/>
-          <p:nvPr/>
-        </p:nvSpPr>
-        <p:spPr>
-          <a:xfrm>
-            <a:off x="6583680" y="2103120"/>
-            <a:ext cx="4754880" cy="365760"/>
-          </a:xfrm>
-          <a:prstGeom prst="rect">
-            <a:avLst/>
-          </a:prstGeom>
-          <a:noFill/>
-          <a:ln/>
-        </p:spPr>
-        <p:txBody>
-          <a:bodyPr wrap="square" lIns="0" tIns="0" rIns="0" bIns="0" rtlCol="0" anchor="ctr"/>
-          <a:lstStyle/>
-          <a:p>
-            <a:pPr indent="0" marL="0">
-              <a:buNone/>
-            </a:pPr>
-            <a:r>
-              <a:rPr lang="en-US" sz="1200" dirty="0">
-                <a:solidFill>
-                  <a:srgbClr val="141414"/>
-                </a:solidFill>
-                <a:latin typeface="Pretendard" pitchFamily="34" charset="0"/>
-                <a:ea typeface="Pretendard" pitchFamily="34" charset="-122"/>
-                <a:cs typeface="Pretendard" pitchFamily="34" charset="-120"/>
-              </a:rPr>
-              <a:t>Start / Update 차이를 한 문장으로 말한다</a:t>
-            </a:r>
-            <a:endParaRPr lang="en-US" sz="1200" dirty="0"/>
-          </a:p>
-        </p:txBody>
-      </p:sp>
-      <p:sp>
-        <p:nvSpPr>
-          <p:cNvPr id="16" name="Shape 14"/>
-          <p:cNvSpPr/>
-          <p:nvPr/>
-        </p:nvSpPr>
-        <p:spPr>
-          <a:xfrm>
-            <a:off x="6199632" y="2724912"/>
-            <a:ext cx="201168" cy="201168"/>
-          </a:xfrm>
-          <a:prstGeom prst="roundRect">
-            <a:avLst>
-              <a:gd name="adj" fmla="val 22727"/>
-            </a:avLst>
-          </a:prstGeom>
-          <a:solidFill>
-            <a:srgbClr val="FFFFFF"/>
-          </a:solidFill>
-          <a:ln w="12700">
-            <a:solidFill>
-              <a:srgbClr val="E0E0E0"/>
-            </a:solidFill>
-            <a:prstDash val="solid"/>
-          </a:ln>
-        </p:spPr>
-      </p:sp>
-      <p:sp>
-        <p:nvSpPr>
-          <p:cNvPr id="17" name="Text 15"/>
-          <p:cNvSpPr txBox="1"/>
-          <p:nvPr/>
-        </p:nvSpPr>
-        <p:spPr>
-          <a:xfrm>
-            <a:off x="6583680" y="2651760"/>
-            <a:ext cx="4754880" cy="365760"/>
-          </a:xfrm>
-          <a:prstGeom prst="rect">
-            <a:avLst/>
-          </a:prstGeom>
-          <a:noFill/>
-          <a:ln/>
-        </p:spPr>
-        <p:txBody>
-          <a:bodyPr wrap="square" lIns="0" tIns="0" rIns="0" bIns="0" rtlCol="0" anchor="ctr"/>
-          <a:lstStyle/>
-          <a:p>
-            <a:pPr indent="0" marL="0">
-              <a:buNone/>
-            </a:pPr>
-            <a:r>
-              <a:rPr lang="en-US" sz="1200" dirty="0">
-                <a:solidFill>
-                  <a:srgbClr val="141414"/>
-                </a:solidFill>
-                <a:latin typeface="Pretendard" pitchFamily="34" charset="0"/>
-                <a:ea typeface="Pretendard" pitchFamily="34" charset="-122"/>
-                <a:cs typeface="Pretendard" pitchFamily="34" charset="-120"/>
-              </a:rPr>
-              <a:t>[SerializeField] 를 Inspector 에서 조절한다</a:t>
-            </a:r>
-            <a:endParaRPr lang="en-US" sz="1200" dirty="0"/>
-          </a:p>
-        </p:txBody>
-      </p:sp>
-      <p:sp>
-        <p:nvSpPr>
-          <p:cNvPr id="18" name="Shape 16"/>
-          <p:cNvSpPr/>
-          <p:nvPr/>
-        </p:nvSpPr>
-        <p:spPr>
-          <a:xfrm>
-            <a:off x="6199632" y="3273552"/>
-            <a:ext cx="201168" cy="201168"/>
-          </a:xfrm>
-          <a:prstGeom prst="roundRect">
-            <a:avLst>
-              <a:gd name="adj" fmla="val 22727"/>
-            </a:avLst>
-          </a:prstGeom>
-          <a:solidFill>
-            <a:srgbClr val="FFFFFF"/>
-          </a:solidFill>
-          <a:ln w="12700">
-            <a:solidFill>
-              <a:srgbClr val="E0E0E0"/>
-            </a:solidFill>
-            <a:prstDash val="solid"/>
-          </a:ln>
-        </p:spPr>
-      </p:sp>
-      <p:sp>
-        <p:nvSpPr>
-          <p:cNvPr id="19" name="Text 17"/>
-          <p:cNvSpPr txBox="1"/>
-          <p:nvPr/>
-        </p:nvSpPr>
-        <p:spPr>
-          <a:xfrm>
-            <a:off x="6583680" y="3200400"/>
-            <a:ext cx="4754880" cy="365760"/>
-          </a:xfrm>
-          <a:prstGeom prst="rect">
-            <a:avLst/>
-          </a:prstGeom>
-          <a:noFill/>
-          <a:ln/>
-        </p:spPr>
-        <p:txBody>
-          <a:bodyPr wrap="square" lIns="0" tIns="0" rIns="0" bIns="0" rtlCol="0" anchor="ctr"/>
-          <a:lstStyle/>
-          <a:p>
-            <a:pPr indent="0" marL="0">
-              <a:buNone/>
-            </a:pPr>
-            <a:r>
-              <a:rPr lang="en-US" sz="1200" dirty="0">
-                <a:solidFill>
-                  <a:srgbClr val="141414"/>
-                </a:solidFill>
-                <a:latin typeface="Pretendard" pitchFamily="34" charset="0"/>
-                <a:ea typeface="Pretendard" pitchFamily="34" charset="-122"/>
-                <a:cs typeface="Pretendard" pitchFamily="34" charset="-120"/>
-              </a:rPr>
-              <a:t>Play 중 변경은 저장되지 않음을 안다</a:t>
-            </a:r>
-            <a:endParaRPr lang="en-US" sz="1200" dirty="0"/>
-          </a:p>
-        </p:txBody>
-      </p:sp>
-      <p:sp>
-        <p:nvSpPr>
-          <p:cNvPr id="20" name="Shape 18"/>
-          <p:cNvSpPr/>
-          <p:nvPr/>
-        </p:nvSpPr>
-        <p:spPr>
-          <a:xfrm>
-            <a:off x="6199632" y="3822192"/>
-            <a:ext cx="201168" cy="201168"/>
-          </a:xfrm>
-          <a:prstGeom prst="roundRect">
-            <a:avLst>
-              <a:gd name="adj" fmla="val 22727"/>
-            </a:avLst>
-          </a:prstGeom>
-          <a:solidFill>
-            <a:srgbClr val="FFFFFF"/>
-          </a:solidFill>
-          <a:ln w="12700">
-            <a:solidFill>
-              <a:srgbClr val="E0E0E0"/>
-            </a:solidFill>
-            <a:prstDash val="solid"/>
-          </a:ln>
-        </p:spPr>
-      </p:sp>
-      <p:sp>
-        <p:nvSpPr>
-          <p:cNvPr id="21" name="Text 19"/>
-          <p:cNvSpPr txBox="1"/>
-          <p:nvPr/>
-        </p:nvSpPr>
-        <p:spPr>
-          <a:xfrm>
-            <a:off x="6583680" y="3749040"/>
-            <a:ext cx="4754880" cy="365760"/>
-          </a:xfrm>
-          <a:prstGeom prst="rect">
-            <a:avLst/>
-          </a:prstGeom>
-          <a:noFill/>
-          <a:ln/>
-        </p:spPr>
-        <p:txBody>
-          <a:bodyPr wrap="square" lIns="0" tIns="0" rIns="0" bIns="0" rtlCol="0" anchor="ctr"/>
-          <a:lstStyle/>
-          <a:p>
-            <a:pPr indent="0" marL="0">
-              <a:buNone/>
-            </a:pPr>
-            <a:r>
-              <a:rPr lang="en-US" sz="1200" dirty="0">
-                <a:solidFill>
-                  <a:srgbClr val="141414"/>
-                </a:solidFill>
-                <a:latin typeface="Pretendard" pitchFamily="34" charset="0"/>
-                <a:ea typeface="Pretendard" pitchFamily="34" charset="-122"/>
-                <a:cs typeface="Pretendard" pitchFamily="34" charset="-120"/>
-              </a:rPr>
-              <a:t>움직이는 코드에 Time.deltaTime 을 곱한다</a:t>
-            </a:r>
-            <a:endParaRPr lang="en-US" sz="1200" dirty="0"/>
-          </a:p>
-        </p:txBody>
-      </p:sp>
-      <p:sp>
-        <p:nvSpPr>
-          <p:cNvPr id="22" name="Shape 20"/>
-          <p:cNvSpPr/>
-          <p:nvPr/>
-        </p:nvSpPr>
-        <p:spPr>
-          <a:xfrm>
-            <a:off x="6199632" y="4370832"/>
-            <a:ext cx="201168" cy="201168"/>
-          </a:xfrm>
-          <a:prstGeom prst="roundRect">
-            <a:avLst>
-              <a:gd name="adj" fmla="val 22727"/>
-            </a:avLst>
-          </a:prstGeom>
-          <a:solidFill>
-            <a:srgbClr val="FFFFFF"/>
-          </a:solidFill>
-          <a:ln w="19050">
-            <a:solidFill>
-              <a:srgbClr val="141414"/>
-            </a:solidFill>
-            <a:prstDash val="solid"/>
-          </a:ln>
-        </p:spPr>
-      </p:sp>
-      <p:sp>
-        <p:nvSpPr>
-          <p:cNvPr id="23" name="Text 21"/>
-          <p:cNvSpPr txBox="1"/>
-          <p:nvPr/>
-        </p:nvSpPr>
-        <p:spPr>
-          <a:xfrm>
-            <a:off x="6583680" y="4297680"/>
-            <a:ext cx="4754880" cy="365760"/>
-          </a:xfrm>
-          <a:prstGeom prst="rect">
-            <a:avLst/>
-          </a:prstGeom>
-          <a:noFill/>
-          <a:ln/>
-        </p:spPr>
-        <p:txBody>
-          <a:bodyPr wrap="square" lIns="0" tIns="0" rIns="0" bIns="0" rtlCol="0" anchor="ctr"/>
-          <a:lstStyle/>
-          <a:p>
-            <a:pPr indent="0" marL="0">
-              <a:buNone/>
-            </a:pPr>
-            <a:r>
-              <a:rPr lang="en-US" sz="1200" dirty="0">
-                <a:solidFill>
-                  <a:srgbClr val="141414"/>
-                </a:solidFill>
-                <a:latin typeface="Pretendard SemiBold" pitchFamily="34" charset="0"/>
-                <a:ea typeface="Pretendard SemiBold" pitchFamily="34" charset="-122"/>
-                <a:cs typeface="Pretendard SemiBold" pitchFamily="34" charset="-120"/>
-              </a:rPr>
-              <a:t>WASD 로 캐릭터를 움직인다</a:t>
-            </a:r>
-            <a:endParaRPr lang="en-US" sz="1200" dirty="0"/>
-          </a:p>
-        </p:txBody>
-      </p:sp>
-      <p:sp>
-        <p:nvSpPr>
-          <p:cNvPr id="24" name="Shape 22"/>
-          <p:cNvSpPr/>
-          <p:nvPr/>
-        </p:nvSpPr>
-        <p:spPr>
-          <a:xfrm>
-            <a:off x="758952" y="5029200"/>
-            <a:ext cx="10673791" cy="1188720"/>
-          </a:xfrm>
-          <a:prstGeom prst="roundRect">
-            <a:avLst>
-              <a:gd name="adj" fmla="val 19231"/>
-            </a:avLst>
-          </a:prstGeom>
-          <a:solidFill>
-            <a:srgbClr val="141414"/>
+            <a:srgbClr val="F3F3F3"/>
           </a:solidFill>
           <a:ln w="12700">
             <a:solidFill>
@@ -7364,42 +7728,147 @@
       </p:sp>
       <p:sp>
         <p:nvSpPr>
-          <p:cNvPr id="25" name="Text 23"/>
-          <p:cNvSpPr txBox="1"/>
-          <p:nvPr/>
-        </p:nvSpPr>
-        <p:spPr>
-          <a:xfrm>
-            <a:off x="1124712" y="5285232"/>
-            <a:ext cx="10332720" cy="402336"/>
-          </a:xfrm>
-          <a:prstGeom prst="rect">
-            <a:avLst/>
-          </a:prstGeom>
-          <a:noFill/>
-          <a:ln/>
-        </p:spPr>
-        <p:txBody>
-          <a:bodyPr wrap="square" lIns="0" tIns="0" rIns="0" bIns="0" rtlCol="0" anchor="ctr"/>
-          <a:lstStyle/>
-          <a:p>
-            <a:pPr indent="0" marL="0">
-              <a:buNone/>
-            </a:pPr>
-            <a:r>
-              <a:rPr lang="en-US" sz="1900" dirty="0">
-                <a:solidFill>
-                  <a:srgbClr val="FFFFFF"/>
+          <p:cNvPr id="22" name="Text 20"/>
+          <p:cNvSpPr txBox="1"/>
+          <p:nvPr/>
+        </p:nvSpPr>
+        <p:spPr>
+          <a:xfrm>
+            <a:off x="758952" y="5120640"/>
+            <a:ext cx="3931920" cy="420624"/>
+          </a:xfrm>
+          <a:prstGeom prst="rect">
+            <a:avLst/>
+          </a:prstGeom>
+          <a:noFill/>
+          <a:ln/>
+        </p:spPr>
+        <p:txBody>
+          <a:bodyPr wrap="square" lIns="0" tIns="0" rIns="0" bIns="0" rtlCol="0" anchor="ctr"/>
+          <a:lstStyle/>
+          <a:p>
+            <a:pPr indent="0" marL="0">
+              <a:buNone/>
+            </a:pPr>
+            <a:r>
+              <a:rPr lang="en-US" sz="1550" dirty="0">
+                <a:solidFill>
+                  <a:srgbClr val="141414"/>
                 </a:solidFill>
                 <a:latin typeface="Pretendard SemiBold" pitchFamily="34" charset="0"/>
                 <a:ea typeface="Pretendard SemiBold" pitchFamily="34" charset="-122"/>
                 <a:cs typeface="Pretendard SemiBold" pitchFamily="34" charset="-120"/>
               </a:rPr>
-              <a:t>하나라도 안 되는 학생이 있으면 이번 주 안에 개별 시간을 잡는다.</a:t>
-            </a:r>
-            <a:endParaRPr lang="en-US" sz="1900" dirty="0"/>
-          </a:p>
-        </p:txBody>
+              <a:t>키를 눌러도 안 움직임</a:t>
+            </a:r>
+            <a:endParaRPr lang="en-US" sz="1550" dirty="0"/>
+          </a:p>
+        </p:txBody>
+      </p:sp>
+      <p:sp>
+        <p:nvSpPr>
+          <p:cNvPr id="23" name="Text 21"/>
+          <p:cNvSpPr txBox="1"/>
+          <p:nvPr/>
+        </p:nvSpPr>
+        <p:spPr>
+          <a:xfrm>
+            <a:off x="4873752" y="5120640"/>
+            <a:ext cx="3291840" cy="420624"/>
+          </a:xfrm>
+          <a:prstGeom prst="rect">
+            <a:avLst/>
+          </a:prstGeom>
+          <a:noFill/>
+          <a:ln/>
+        </p:spPr>
+        <p:txBody>
+          <a:bodyPr wrap="square" lIns="0" tIns="0" rIns="0" bIns="0" rtlCol="0" anchor="ctr"/>
+          <a:lstStyle/>
+          <a:p>
+            <a:pPr indent="0" marL="0">
+              <a:buNone/>
+            </a:pPr>
+            <a:r>
+              <a:rPr lang="en-US" sz="1200" dirty="0">
+                <a:solidFill>
+                  <a:srgbClr val="ADADAD"/>
+                </a:solidFill>
+                <a:latin typeface="Pretendard" pitchFamily="34" charset="0"/>
+                <a:ea typeface="Pretendard" pitchFamily="34" charset="-122"/>
+                <a:cs typeface="Pretendard" pitchFamily="34" charset="-120"/>
+              </a:rPr>
+              <a:t>Active Input Handling</a:t>
+            </a:r>
+            <a:endParaRPr lang="en-US" sz="1200" dirty="0"/>
+          </a:p>
+        </p:txBody>
+      </p:sp>
+      <p:sp>
+        <p:nvSpPr>
+          <p:cNvPr id="24" name="Text 22"/>
+          <p:cNvSpPr txBox="1"/>
+          <p:nvPr/>
+        </p:nvSpPr>
+        <p:spPr>
+          <a:xfrm>
+            <a:off x="8257032" y="5120640"/>
+            <a:ext cx="2926080" cy="420624"/>
+          </a:xfrm>
+          <a:prstGeom prst="rect">
+            <a:avLst/>
+          </a:prstGeom>
+          <a:noFill/>
+          <a:ln/>
+        </p:spPr>
+        <p:txBody>
+          <a:bodyPr wrap="square" lIns="0" tIns="0" rIns="0" bIns="0" rtlCol="0" anchor="ctr"/>
+          <a:lstStyle/>
+          <a:p>
+            <a:pPr indent="0" marL="0">
+              <a:buNone/>
+            </a:pPr>
+            <a:r>
+              <a:rPr lang="en-US" sz="1200" dirty="0">
+                <a:solidFill>
+                  <a:srgbClr val="141414"/>
+                </a:solidFill>
+                <a:latin typeface="Pretendard" pitchFamily="34" charset="0"/>
+                <a:ea typeface="Pretendard" pitchFamily="34" charset="-122"/>
+                <a:cs typeface="Pretendard" pitchFamily="34" charset="-120"/>
+              </a:rPr>
+              <a:t>Both 로. 에디터 재시작</a:t>
+            </a:r>
+            <a:endParaRPr lang="en-US" sz="1200" dirty="0"/>
+          </a:p>
+        </p:txBody>
+      </p:sp>
+      <p:sp>
+        <p:nvSpPr>
+          <p:cNvPr id="25" name="Shape 23"/>
+          <p:cNvSpPr/>
+          <p:nvPr/>
+        </p:nvSpPr>
+        <p:spPr>
+          <a:xfrm>
+            <a:off x="758952" y="6053328"/>
+            <a:ext cx="4480560" cy="329184"/>
+          </a:xfrm>
+          <a:prstGeom prst="roundRect">
+            <a:avLst>
+              <a:gd name="adj" fmla="val 50000"/>
+            </a:avLst>
+          </a:prstGeom>
+          <a:solidFill>
+            <a:srgbClr val="0066FF"/>
+          </a:solidFill>
+          <a:ln w="12700">
+            <a:solidFill>
+              <a:srgbClr val="333333"/>
+            </a:solidFill>
+            <a:prstDash val="solid"/>
+          </a:ln>
+        </p:spPr>
       </p:sp>
       <p:sp>
         <p:nvSpPr>
@@ -7409,8 +7878,47 @@
         </p:nvSpPr>
         <p:spPr>
           <a:xfrm>
-            <a:off x="1124712" y="5760720"/>
-            <a:ext cx="10332720" cy="365760"/>
+            <a:off x="758952" y="6053328"/>
+            <a:ext cx="4480560" cy="329184"/>
+          </a:xfrm>
+          <a:prstGeom prst="rect">
+            <a:avLst/>
+          </a:prstGeom>
+          <a:noFill/>
+          <a:ln/>
+        </p:spPr>
+        <p:txBody>
+          <a:bodyPr wrap="square" lIns="0" tIns="0" rIns="0" bIns="0" rtlCol="0" anchor="ctr"/>
+          <a:lstStyle/>
+          <a:p>
+            <a:pPr algn="ctr" indent="0" marL="0">
+              <a:buNone/>
+            </a:pPr>
+            <a:r>
+              <a:rPr lang="en-US" sz="950" dirty="0">
+                <a:solidFill>
+                  <a:srgbClr val="FFFFFF"/>
+                </a:solidFill>
+                <a:latin typeface="Pretendard SemiBold" pitchFamily="34" charset="0"/>
+                <a:ea typeface="Pretendard SemiBold" pitchFamily="34" charset="-122"/>
+                <a:cs typeface="Pretendard SemiBold" pitchFamily="34" charset="-120"/>
+              </a:rPr>
+              <a:t>040 전에 강사가 반드시 확인할 것</a:t>
+            </a:r>
+            <a:endParaRPr lang="en-US" sz="950" dirty="0"/>
+          </a:p>
+        </p:txBody>
+      </p:sp>
+      <p:sp>
+        <p:nvSpPr>
+          <p:cNvPr id="27" name="Text 25"/>
+          <p:cNvSpPr txBox="1"/>
+          <p:nvPr/>
+        </p:nvSpPr>
+        <p:spPr>
+          <a:xfrm>
+            <a:off x="5559552" y="6053328"/>
+            <a:ext cx="5943600" cy="329184"/>
           </a:xfrm>
           <a:prstGeom prst="rect">
             <a:avLst/>
@@ -7428,13 +7936,13 @@
             <a:r>
               <a:rPr lang="en-US" sz="1200" dirty="0">
                 <a:solidFill>
-                  <a:srgbClr val="ADADAD"/>
+                  <a:srgbClr val="707070"/>
                 </a:solidFill>
                 <a:latin typeface="Pretendard Light" pitchFamily="34" charset="0"/>
                 <a:ea typeface="Pretendard Light" pitchFamily="34" charset="-122"/>
                 <a:cs typeface="Pretendard Light" pitchFamily="34" charset="-120"/>
               </a:rPr>
-              <a:t>Snapshot_P2.zip 을 전원에게 배포한다. 못 따라온 학생은 다음 주에 이걸 열고 시작한다.</a:t>
+              <a:t>New 전용이면 Input.GetAxisRaw 가 런타임에 예외를 던진다. 반 전체가 동시에 막힌다.</a:t>
             </a:r>
             <a:endParaRPr lang="en-US" sz="1200" dirty="0"/>
           </a:p>
@@ -7505,6 +8013,881 @@
                 <a:ea typeface="Pretendard SemiBold" pitchFamily="34" charset="-122"/>
                 <a:cs typeface="Pretendard SemiBold" pitchFamily="34" charset="-120"/>
               </a:rPr>
+              <a:t>Phase 2 종료 조건.</a:t>
+            </a:r>
+            <a:endParaRPr lang="en-US" sz="2600" dirty="0"/>
+          </a:p>
+        </p:txBody>
+      </p:sp>
+      <p:sp>
+        <p:nvSpPr>
+          <p:cNvPr id="3" name="Text 1"/>
+          <p:cNvSpPr txBox="1"/>
+          <p:nvPr/>
+        </p:nvSpPr>
+        <p:spPr>
+          <a:xfrm>
+            <a:off x="758952" y="1060704"/>
+            <a:ext cx="10673791" cy="329184"/>
+          </a:xfrm>
+          <a:prstGeom prst="rect">
+            <a:avLst/>
+          </a:prstGeom>
+          <a:noFill/>
+          <a:ln/>
+        </p:spPr>
+        <p:txBody>
+          <a:bodyPr wrap="square" lIns="0" tIns="0" rIns="0" bIns="0" rtlCol="0" anchor="ctr"/>
+          <a:lstStyle/>
+          <a:p>
+            <a:pPr indent="0" marL="0">
+              <a:buNone/>
+            </a:pPr>
+            <a:r>
+              <a:rPr lang="en-US" sz="1500" dirty="0">
+                <a:solidFill>
+                  <a:srgbClr val="707070"/>
+                </a:solidFill>
+                <a:latin typeface="Pretendard Light" pitchFamily="34" charset="0"/>
+                <a:ea typeface="Pretendard Light" pitchFamily="34" charset="-122"/>
+                <a:cs typeface="Pretendard Light" pitchFamily="34" charset="-120"/>
+              </a:rPr>
+              <a:t>040 데모에서 한 명씩 확인한다. Phase 3는 이 위에 그대로 쌓인다.</a:t>
+            </a:r>
+            <a:endParaRPr lang="en-US" sz="1500" dirty="0"/>
+          </a:p>
+        </p:txBody>
+      </p:sp>
+      <p:sp>
+        <p:nvSpPr>
+          <p:cNvPr id="4" name="Shape 2"/>
+          <p:cNvSpPr/>
+          <p:nvPr/>
+        </p:nvSpPr>
+        <p:spPr>
+          <a:xfrm>
+            <a:off x="758952" y="2176272"/>
+            <a:ext cx="201168" cy="201168"/>
+          </a:xfrm>
+          <a:prstGeom prst="roundRect">
+            <a:avLst>
+              <a:gd name="adj" fmla="val 22727"/>
+            </a:avLst>
+          </a:prstGeom>
+          <a:solidFill>
+            <a:srgbClr val="FFFFFF"/>
+          </a:solidFill>
+          <a:ln w="12700">
+            <a:solidFill>
+              <a:srgbClr val="E0E0E0"/>
+            </a:solidFill>
+            <a:prstDash val="solid"/>
+          </a:ln>
+        </p:spPr>
+      </p:sp>
+      <p:sp>
+        <p:nvSpPr>
+          <p:cNvPr id="5" name="Text 3"/>
+          <p:cNvSpPr txBox="1"/>
+          <p:nvPr/>
+        </p:nvSpPr>
+        <p:spPr>
+          <a:xfrm>
+            <a:off x="1143000" y="2103120"/>
+            <a:ext cx="4754880" cy="365760"/>
+          </a:xfrm>
+          <a:prstGeom prst="rect">
+            <a:avLst/>
+          </a:prstGeom>
+          <a:noFill/>
+          <a:ln/>
+        </p:spPr>
+        <p:txBody>
+          <a:bodyPr wrap="square" lIns="0" tIns="0" rIns="0" bIns="0" rtlCol="0" anchor="ctr"/>
+          <a:lstStyle/>
+          <a:p>
+            <a:pPr indent="0" marL="0">
+              <a:buNone/>
+            </a:pPr>
+            <a:r>
+              <a:rPr lang="en-US" sz="1200" dirty="0">
+                <a:solidFill>
+                  <a:srgbClr val="141414"/>
+                </a:solidFill>
+                <a:latin typeface="Pretendard" pitchFamily="34" charset="0"/>
+                <a:ea typeface="Pretendard" pitchFamily="34" charset="-122"/>
+                <a:cs typeface="Pretendard" pitchFamily="34" charset="-120"/>
+              </a:rPr>
+              <a:t>에디터 6개 창의 역할을 말한다</a:t>
+            </a:r>
+            <a:endParaRPr lang="en-US" sz="1200" dirty="0"/>
+          </a:p>
+        </p:txBody>
+      </p:sp>
+      <p:sp>
+        <p:nvSpPr>
+          <p:cNvPr id="6" name="Shape 4"/>
+          <p:cNvSpPr/>
+          <p:nvPr/>
+        </p:nvSpPr>
+        <p:spPr>
+          <a:xfrm>
+            <a:off x="758952" y="2724912"/>
+            <a:ext cx="201168" cy="201168"/>
+          </a:xfrm>
+          <a:prstGeom prst="roundRect">
+            <a:avLst>
+              <a:gd name="adj" fmla="val 22727"/>
+            </a:avLst>
+          </a:prstGeom>
+          <a:solidFill>
+            <a:srgbClr val="FFFFFF"/>
+          </a:solidFill>
+          <a:ln w="12700">
+            <a:solidFill>
+              <a:srgbClr val="E0E0E0"/>
+            </a:solidFill>
+            <a:prstDash val="solid"/>
+          </a:ln>
+        </p:spPr>
+      </p:sp>
+      <p:sp>
+        <p:nvSpPr>
+          <p:cNvPr id="7" name="Text 5"/>
+          <p:cNvSpPr txBox="1"/>
+          <p:nvPr/>
+        </p:nvSpPr>
+        <p:spPr>
+          <a:xfrm>
+            <a:off x="1143000" y="2651760"/>
+            <a:ext cx="4754880" cy="365760"/>
+          </a:xfrm>
+          <a:prstGeom prst="rect">
+            <a:avLst/>
+          </a:prstGeom>
+          <a:noFill/>
+          <a:ln/>
+        </p:spPr>
+        <p:txBody>
+          <a:bodyPr wrap="square" lIns="0" tIns="0" rIns="0" bIns="0" rtlCol="0" anchor="ctr"/>
+          <a:lstStyle/>
+          <a:p>
+            <a:pPr indent="0" marL="0">
+              <a:buNone/>
+            </a:pPr>
+            <a:r>
+              <a:rPr lang="en-US" sz="1200" dirty="0">
+                <a:solidFill>
+                  <a:srgbClr val="141414"/>
+                </a:solidFill>
+                <a:latin typeface="Pretendard" pitchFamily="34" charset="0"/>
+                <a:ea typeface="Pretendard" pitchFamily="34" charset="-122"/>
+                <a:cs typeface="Pretendard" pitchFamily="34" charset="-120"/>
+              </a:rPr>
+              <a:t>F 키로 오브젝트를 찾는다</a:t>
+            </a:r>
+            <a:endParaRPr lang="en-US" sz="1200" dirty="0"/>
+          </a:p>
+        </p:txBody>
+      </p:sp>
+      <p:sp>
+        <p:nvSpPr>
+          <p:cNvPr id="8" name="Shape 6"/>
+          <p:cNvSpPr/>
+          <p:nvPr/>
+        </p:nvSpPr>
+        <p:spPr>
+          <a:xfrm>
+            <a:off x="758952" y="3273552"/>
+            <a:ext cx="201168" cy="201168"/>
+          </a:xfrm>
+          <a:prstGeom prst="roundRect">
+            <a:avLst>
+              <a:gd name="adj" fmla="val 22727"/>
+            </a:avLst>
+          </a:prstGeom>
+          <a:solidFill>
+            <a:srgbClr val="FFFFFF"/>
+          </a:solidFill>
+          <a:ln w="12700">
+            <a:solidFill>
+              <a:srgbClr val="E0E0E0"/>
+            </a:solidFill>
+            <a:prstDash val="solid"/>
+          </a:ln>
+        </p:spPr>
+      </p:sp>
+      <p:sp>
+        <p:nvSpPr>
+          <p:cNvPr id="9" name="Text 7"/>
+          <p:cNvSpPr txBox="1"/>
+          <p:nvPr/>
+        </p:nvSpPr>
+        <p:spPr>
+          <a:xfrm>
+            <a:off x="1143000" y="3200400"/>
+            <a:ext cx="4754880" cy="365760"/>
+          </a:xfrm>
+          <a:prstGeom prst="rect">
+            <a:avLst/>
+          </a:prstGeom>
+          <a:noFill/>
+          <a:ln/>
+        </p:spPr>
+        <p:txBody>
+          <a:bodyPr wrap="square" lIns="0" tIns="0" rIns="0" bIns="0" rtlCol="0" anchor="ctr"/>
+          <a:lstStyle/>
+          <a:p>
+            <a:pPr indent="0" marL="0">
+              <a:buNone/>
+            </a:pPr>
+            <a:r>
+              <a:rPr lang="en-US" sz="1200" dirty="0">
+                <a:solidFill>
+                  <a:srgbClr val="141414"/>
+                </a:solidFill>
+                <a:latin typeface="Pretendard" pitchFamily="34" charset="0"/>
+                <a:ea typeface="Pretendard" pitchFamily="34" charset="-122"/>
+                <a:cs typeface="Pretendard" pitchFamily="34" charset="-120"/>
+              </a:rPr>
+              <a:t>Component 를 추가·제거한다</a:t>
+            </a:r>
+            <a:endParaRPr lang="en-US" sz="1200" dirty="0"/>
+          </a:p>
+        </p:txBody>
+      </p:sp>
+      <p:sp>
+        <p:nvSpPr>
+          <p:cNvPr id="10" name="Shape 8"/>
+          <p:cNvSpPr/>
+          <p:nvPr/>
+        </p:nvSpPr>
+        <p:spPr>
+          <a:xfrm>
+            <a:off x="758952" y="3822192"/>
+            <a:ext cx="201168" cy="201168"/>
+          </a:xfrm>
+          <a:prstGeom prst="roundRect">
+            <a:avLst>
+              <a:gd name="adj" fmla="val 22727"/>
+            </a:avLst>
+          </a:prstGeom>
+          <a:solidFill>
+            <a:srgbClr val="FFFFFF"/>
+          </a:solidFill>
+          <a:ln w="12700">
+            <a:solidFill>
+              <a:srgbClr val="E0E0E0"/>
+            </a:solidFill>
+            <a:prstDash val="solid"/>
+          </a:ln>
+        </p:spPr>
+      </p:sp>
+      <p:sp>
+        <p:nvSpPr>
+          <p:cNvPr id="11" name="Text 9"/>
+          <p:cNvSpPr txBox="1"/>
+          <p:nvPr/>
+        </p:nvSpPr>
+        <p:spPr>
+          <a:xfrm>
+            <a:off x="1143000" y="3749040"/>
+            <a:ext cx="4754880" cy="365760"/>
+          </a:xfrm>
+          <a:prstGeom prst="rect">
+            <a:avLst/>
+          </a:prstGeom>
+          <a:noFill/>
+          <a:ln/>
+        </p:spPr>
+        <p:txBody>
+          <a:bodyPr wrap="square" lIns="0" tIns="0" rIns="0" bIns="0" rtlCol="0" anchor="ctr"/>
+          <a:lstStyle/>
+          <a:p>
+            <a:pPr indent="0" marL="0">
+              <a:buNone/>
+            </a:pPr>
+            <a:r>
+              <a:rPr lang="en-US" sz="1200" dirty="0">
+                <a:solidFill>
+                  <a:srgbClr val="141414"/>
+                </a:solidFill>
+                <a:latin typeface="Pretendard" pitchFamily="34" charset="0"/>
+                <a:ea typeface="Pretendard" pitchFamily="34" charset="-122"/>
+                <a:cs typeface="Pretendard" pitchFamily="34" charset="-120"/>
+              </a:rPr>
+              <a:t>월드 좌표와 로컬 좌표를 구분한다</a:t>
+            </a:r>
+            <a:endParaRPr lang="en-US" sz="1200" dirty="0"/>
+          </a:p>
+        </p:txBody>
+      </p:sp>
+      <p:sp>
+        <p:nvSpPr>
+          <p:cNvPr id="12" name="Shape 10"/>
+          <p:cNvSpPr/>
+          <p:nvPr/>
+        </p:nvSpPr>
+        <p:spPr>
+          <a:xfrm>
+            <a:off x="758952" y="4370832"/>
+            <a:ext cx="201168" cy="201168"/>
+          </a:xfrm>
+          <a:prstGeom prst="roundRect">
+            <a:avLst>
+              <a:gd name="adj" fmla="val 22727"/>
+            </a:avLst>
+          </a:prstGeom>
+          <a:solidFill>
+            <a:srgbClr val="FFFFFF"/>
+          </a:solidFill>
+          <a:ln w="12700">
+            <a:solidFill>
+              <a:srgbClr val="E0E0E0"/>
+            </a:solidFill>
+            <a:prstDash val="solid"/>
+          </a:ln>
+        </p:spPr>
+      </p:sp>
+      <p:sp>
+        <p:nvSpPr>
+          <p:cNvPr id="13" name="Text 11"/>
+          <p:cNvSpPr txBox="1"/>
+          <p:nvPr/>
+        </p:nvSpPr>
+        <p:spPr>
+          <a:xfrm>
+            <a:off x="1143000" y="4297680"/>
+            <a:ext cx="4754880" cy="365760"/>
+          </a:xfrm>
+          <a:prstGeom prst="rect">
+            <a:avLst/>
+          </a:prstGeom>
+          <a:noFill/>
+          <a:ln/>
+        </p:spPr>
+        <p:txBody>
+          <a:bodyPr wrap="square" lIns="0" tIns="0" rIns="0" bIns="0" rtlCol="0" anchor="ctr"/>
+          <a:lstStyle/>
+          <a:p>
+            <a:pPr indent="0" marL="0">
+              <a:buNone/>
+            </a:pPr>
+            <a:r>
+              <a:rPr lang="en-US" sz="1200" dirty="0">
+                <a:solidFill>
+                  <a:srgbClr val="141414"/>
+                </a:solidFill>
+                <a:latin typeface="Pretendard" pitchFamily="34" charset="0"/>
+                <a:ea typeface="Pretendard" pitchFamily="34" charset="-122"/>
+                <a:cs typeface="Pretendard" pitchFamily="34" charset="-120"/>
+              </a:rPr>
+              <a:t>스크립트를 만들어 GameObject 에 붙인다</a:t>
+            </a:r>
+            <a:endParaRPr lang="en-US" sz="1200" dirty="0"/>
+          </a:p>
+        </p:txBody>
+      </p:sp>
+      <p:sp>
+        <p:nvSpPr>
+          <p:cNvPr id="14" name="Shape 12"/>
+          <p:cNvSpPr/>
+          <p:nvPr/>
+        </p:nvSpPr>
+        <p:spPr>
+          <a:xfrm>
+            <a:off x="6199632" y="2176272"/>
+            <a:ext cx="201168" cy="201168"/>
+          </a:xfrm>
+          <a:prstGeom prst="roundRect">
+            <a:avLst>
+              <a:gd name="adj" fmla="val 22727"/>
+            </a:avLst>
+          </a:prstGeom>
+          <a:solidFill>
+            <a:srgbClr val="FFFFFF"/>
+          </a:solidFill>
+          <a:ln w="12700">
+            <a:solidFill>
+              <a:srgbClr val="E0E0E0"/>
+            </a:solidFill>
+            <a:prstDash val="solid"/>
+          </a:ln>
+        </p:spPr>
+      </p:sp>
+      <p:sp>
+        <p:nvSpPr>
+          <p:cNvPr id="15" name="Text 13"/>
+          <p:cNvSpPr txBox="1"/>
+          <p:nvPr/>
+        </p:nvSpPr>
+        <p:spPr>
+          <a:xfrm>
+            <a:off x="6583680" y="2103120"/>
+            <a:ext cx="4754880" cy="365760"/>
+          </a:xfrm>
+          <a:prstGeom prst="rect">
+            <a:avLst/>
+          </a:prstGeom>
+          <a:noFill/>
+          <a:ln/>
+        </p:spPr>
+        <p:txBody>
+          <a:bodyPr wrap="square" lIns="0" tIns="0" rIns="0" bIns="0" rtlCol="0" anchor="ctr"/>
+          <a:lstStyle/>
+          <a:p>
+            <a:pPr indent="0" marL="0">
+              <a:buNone/>
+            </a:pPr>
+            <a:r>
+              <a:rPr lang="en-US" sz="1200" dirty="0">
+                <a:solidFill>
+                  <a:srgbClr val="141414"/>
+                </a:solidFill>
+                <a:latin typeface="Pretendard" pitchFamily="34" charset="0"/>
+                <a:ea typeface="Pretendard" pitchFamily="34" charset="-122"/>
+                <a:cs typeface="Pretendard" pitchFamily="34" charset="-120"/>
+              </a:rPr>
+              <a:t>Start / Update 차이를 한 문장으로 말한다</a:t>
+            </a:r>
+            <a:endParaRPr lang="en-US" sz="1200" dirty="0"/>
+          </a:p>
+        </p:txBody>
+      </p:sp>
+      <p:sp>
+        <p:nvSpPr>
+          <p:cNvPr id="16" name="Shape 14"/>
+          <p:cNvSpPr/>
+          <p:nvPr/>
+        </p:nvSpPr>
+        <p:spPr>
+          <a:xfrm>
+            <a:off x="6199632" y="2724912"/>
+            <a:ext cx="201168" cy="201168"/>
+          </a:xfrm>
+          <a:prstGeom prst="roundRect">
+            <a:avLst>
+              <a:gd name="adj" fmla="val 22727"/>
+            </a:avLst>
+          </a:prstGeom>
+          <a:solidFill>
+            <a:srgbClr val="FFFFFF"/>
+          </a:solidFill>
+          <a:ln w="12700">
+            <a:solidFill>
+              <a:srgbClr val="E0E0E0"/>
+            </a:solidFill>
+            <a:prstDash val="solid"/>
+          </a:ln>
+        </p:spPr>
+      </p:sp>
+      <p:sp>
+        <p:nvSpPr>
+          <p:cNvPr id="17" name="Text 15"/>
+          <p:cNvSpPr txBox="1"/>
+          <p:nvPr/>
+        </p:nvSpPr>
+        <p:spPr>
+          <a:xfrm>
+            <a:off x="6583680" y="2651760"/>
+            <a:ext cx="4754880" cy="365760"/>
+          </a:xfrm>
+          <a:prstGeom prst="rect">
+            <a:avLst/>
+          </a:prstGeom>
+          <a:noFill/>
+          <a:ln/>
+        </p:spPr>
+        <p:txBody>
+          <a:bodyPr wrap="square" lIns="0" tIns="0" rIns="0" bIns="0" rtlCol="0" anchor="ctr"/>
+          <a:lstStyle/>
+          <a:p>
+            <a:pPr indent="0" marL="0">
+              <a:buNone/>
+            </a:pPr>
+            <a:r>
+              <a:rPr lang="en-US" sz="1200" dirty="0">
+                <a:solidFill>
+                  <a:srgbClr val="141414"/>
+                </a:solidFill>
+                <a:latin typeface="Pretendard" pitchFamily="34" charset="0"/>
+                <a:ea typeface="Pretendard" pitchFamily="34" charset="-122"/>
+                <a:cs typeface="Pretendard" pitchFamily="34" charset="-120"/>
+              </a:rPr>
+              <a:t>[SerializeField] 를 Inspector 에서 조절한다</a:t>
+            </a:r>
+            <a:endParaRPr lang="en-US" sz="1200" dirty="0"/>
+          </a:p>
+        </p:txBody>
+      </p:sp>
+      <p:sp>
+        <p:nvSpPr>
+          <p:cNvPr id="18" name="Shape 16"/>
+          <p:cNvSpPr/>
+          <p:nvPr/>
+        </p:nvSpPr>
+        <p:spPr>
+          <a:xfrm>
+            <a:off x="6199632" y="3273552"/>
+            <a:ext cx="201168" cy="201168"/>
+          </a:xfrm>
+          <a:prstGeom prst="roundRect">
+            <a:avLst>
+              <a:gd name="adj" fmla="val 22727"/>
+            </a:avLst>
+          </a:prstGeom>
+          <a:solidFill>
+            <a:srgbClr val="FFFFFF"/>
+          </a:solidFill>
+          <a:ln w="12700">
+            <a:solidFill>
+              <a:srgbClr val="E0E0E0"/>
+            </a:solidFill>
+            <a:prstDash val="solid"/>
+          </a:ln>
+        </p:spPr>
+      </p:sp>
+      <p:sp>
+        <p:nvSpPr>
+          <p:cNvPr id="19" name="Text 17"/>
+          <p:cNvSpPr txBox="1"/>
+          <p:nvPr/>
+        </p:nvSpPr>
+        <p:spPr>
+          <a:xfrm>
+            <a:off x="6583680" y="3200400"/>
+            <a:ext cx="4754880" cy="365760"/>
+          </a:xfrm>
+          <a:prstGeom prst="rect">
+            <a:avLst/>
+          </a:prstGeom>
+          <a:noFill/>
+          <a:ln/>
+        </p:spPr>
+        <p:txBody>
+          <a:bodyPr wrap="square" lIns="0" tIns="0" rIns="0" bIns="0" rtlCol="0" anchor="ctr"/>
+          <a:lstStyle/>
+          <a:p>
+            <a:pPr indent="0" marL="0">
+              <a:buNone/>
+            </a:pPr>
+            <a:r>
+              <a:rPr lang="en-US" sz="1200" dirty="0">
+                <a:solidFill>
+                  <a:srgbClr val="141414"/>
+                </a:solidFill>
+                <a:latin typeface="Pretendard" pitchFamily="34" charset="0"/>
+                <a:ea typeface="Pretendard" pitchFamily="34" charset="-122"/>
+                <a:cs typeface="Pretendard" pitchFamily="34" charset="-120"/>
+              </a:rPr>
+              <a:t>Play 중 변경은 저장되지 않음을 안다</a:t>
+            </a:r>
+            <a:endParaRPr lang="en-US" sz="1200" dirty="0"/>
+          </a:p>
+        </p:txBody>
+      </p:sp>
+      <p:sp>
+        <p:nvSpPr>
+          <p:cNvPr id="20" name="Shape 18"/>
+          <p:cNvSpPr/>
+          <p:nvPr/>
+        </p:nvSpPr>
+        <p:spPr>
+          <a:xfrm>
+            <a:off x="6199632" y="3822192"/>
+            <a:ext cx="201168" cy="201168"/>
+          </a:xfrm>
+          <a:prstGeom prst="roundRect">
+            <a:avLst>
+              <a:gd name="adj" fmla="val 22727"/>
+            </a:avLst>
+          </a:prstGeom>
+          <a:solidFill>
+            <a:srgbClr val="FFFFFF"/>
+          </a:solidFill>
+          <a:ln w="12700">
+            <a:solidFill>
+              <a:srgbClr val="E0E0E0"/>
+            </a:solidFill>
+            <a:prstDash val="solid"/>
+          </a:ln>
+        </p:spPr>
+      </p:sp>
+      <p:sp>
+        <p:nvSpPr>
+          <p:cNvPr id="21" name="Text 19"/>
+          <p:cNvSpPr txBox="1"/>
+          <p:nvPr/>
+        </p:nvSpPr>
+        <p:spPr>
+          <a:xfrm>
+            <a:off x="6583680" y="3749040"/>
+            <a:ext cx="4754880" cy="365760"/>
+          </a:xfrm>
+          <a:prstGeom prst="rect">
+            <a:avLst/>
+          </a:prstGeom>
+          <a:noFill/>
+          <a:ln/>
+        </p:spPr>
+        <p:txBody>
+          <a:bodyPr wrap="square" lIns="0" tIns="0" rIns="0" bIns="0" rtlCol="0" anchor="ctr"/>
+          <a:lstStyle/>
+          <a:p>
+            <a:pPr indent="0" marL="0">
+              <a:buNone/>
+            </a:pPr>
+            <a:r>
+              <a:rPr lang="en-US" sz="1200" dirty="0">
+                <a:solidFill>
+                  <a:srgbClr val="141414"/>
+                </a:solidFill>
+                <a:latin typeface="Pretendard" pitchFamily="34" charset="0"/>
+                <a:ea typeface="Pretendard" pitchFamily="34" charset="-122"/>
+                <a:cs typeface="Pretendard" pitchFamily="34" charset="-120"/>
+              </a:rPr>
+              <a:t>움직이는 코드에 Time.deltaTime 을 곱한다</a:t>
+            </a:r>
+            <a:endParaRPr lang="en-US" sz="1200" dirty="0"/>
+          </a:p>
+        </p:txBody>
+      </p:sp>
+      <p:sp>
+        <p:nvSpPr>
+          <p:cNvPr id="22" name="Shape 20"/>
+          <p:cNvSpPr/>
+          <p:nvPr/>
+        </p:nvSpPr>
+        <p:spPr>
+          <a:xfrm>
+            <a:off x="6199632" y="4370832"/>
+            <a:ext cx="201168" cy="201168"/>
+          </a:xfrm>
+          <a:prstGeom prst="roundRect">
+            <a:avLst>
+              <a:gd name="adj" fmla="val 22727"/>
+            </a:avLst>
+          </a:prstGeom>
+          <a:solidFill>
+            <a:srgbClr val="FFFFFF"/>
+          </a:solidFill>
+          <a:ln w="19050">
+            <a:solidFill>
+              <a:srgbClr val="141414"/>
+            </a:solidFill>
+            <a:prstDash val="solid"/>
+          </a:ln>
+        </p:spPr>
+      </p:sp>
+      <p:sp>
+        <p:nvSpPr>
+          <p:cNvPr id="23" name="Text 21"/>
+          <p:cNvSpPr txBox="1"/>
+          <p:nvPr/>
+        </p:nvSpPr>
+        <p:spPr>
+          <a:xfrm>
+            <a:off x="6583680" y="4297680"/>
+            <a:ext cx="4754880" cy="365760"/>
+          </a:xfrm>
+          <a:prstGeom prst="rect">
+            <a:avLst/>
+          </a:prstGeom>
+          <a:noFill/>
+          <a:ln/>
+        </p:spPr>
+        <p:txBody>
+          <a:bodyPr wrap="square" lIns="0" tIns="0" rIns="0" bIns="0" rtlCol="0" anchor="ctr"/>
+          <a:lstStyle/>
+          <a:p>
+            <a:pPr indent="0" marL="0">
+              <a:buNone/>
+            </a:pPr>
+            <a:r>
+              <a:rPr lang="en-US" sz="1200" dirty="0">
+                <a:solidFill>
+                  <a:srgbClr val="141414"/>
+                </a:solidFill>
+                <a:latin typeface="Pretendard SemiBold" pitchFamily="34" charset="0"/>
+                <a:ea typeface="Pretendard SemiBold" pitchFamily="34" charset="-122"/>
+                <a:cs typeface="Pretendard SemiBold" pitchFamily="34" charset="-120"/>
+              </a:rPr>
+              <a:t>WASD 로 캐릭터를 움직인다</a:t>
+            </a:r>
+            <a:endParaRPr lang="en-US" sz="1200" dirty="0"/>
+          </a:p>
+        </p:txBody>
+      </p:sp>
+      <p:sp>
+        <p:nvSpPr>
+          <p:cNvPr id="24" name="Shape 22"/>
+          <p:cNvSpPr/>
+          <p:nvPr/>
+        </p:nvSpPr>
+        <p:spPr>
+          <a:xfrm>
+            <a:off x="758952" y="5029200"/>
+            <a:ext cx="10673791" cy="1188720"/>
+          </a:xfrm>
+          <a:prstGeom prst="roundRect">
+            <a:avLst>
+              <a:gd name="adj" fmla="val 19231"/>
+            </a:avLst>
+          </a:prstGeom>
+          <a:solidFill>
+            <a:srgbClr val="141414"/>
+          </a:solidFill>
+          <a:ln w="12700">
+            <a:solidFill>
+              <a:srgbClr val="333333"/>
+            </a:solidFill>
+            <a:prstDash val="solid"/>
+          </a:ln>
+        </p:spPr>
+      </p:sp>
+      <p:sp>
+        <p:nvSpPr>
+          <p:cNvPr id="25" name="Text 23"/>
+          <p:cNvSpPr txBox="1"/>
+          <p:nvPr/>
+        </p:nvSpPr>
+        <p:spPr>
+          <a:xfrm>
+            <a:off x="1124712" y="5285232"/>
+            <a:ext cx="10332720" cy="402336"/>
+          </a:xfrm>
+          <a:prstGeom prst="rect">
+            <a:avLst/>
+          </a:prstGeom>
+          <a:noFill/>
+          <a:ln/>
+        </p:spPr>
+        <p:txBody>
+          <a:bodyPr wrap="square" lIns="0" tIns="0" rIns="0" bIns="0" rtlCol="0" anchor="ctr"/>
+          <a:lstStyle/>
+          <a:p>
+            <a:pPr indent="0" marL="0">
+              <a:buNone/>
+            </a:pPr>
+            <a:r>
+              <a:rPr lang="en-US" sz="1900" dirty="0">
+                <a:solidFill>
+                  <a:srgbClr val="FFFFFF"/>
+                </a:solidFill>
+                <a:latin typeface="Pretendard SemiBold" pitchFamily="34" charset="0"/>
+                <a:ea typeface="Pretendard SemiBold" pitchFamily="34" charset="-122"/>
+                <a:cs typeface="Pretendard SemiBold" pitchFamily="34" charset="-120"/>
+              </a:rPr>
+              <a:t>하나라도 안 되는 학생이 있으면 이번 주 안에 개별 시간을 잡는다.</a:t>
+            </a:r>
+            <a:endParaRPr lang="en-US" sz="1900" dirty="0"/>
+          </a:p>
+        </p:txBody>
+      </p:sp>
+      <p:sp>
+        <p:nvSpPr>
+          <p:cNvPr id="26" name="Text 24"/>
+          <p:cNvSpPr txBox="1"/>
+          <p:nvPr/>
+        </p:nvSpPr>
+        <p:spPr>
+          <a:xfrm>
+            <a:off x="1124712" y="5760720"/>
+            <a:ext cx="10332720" cy="365760"/>
+          </a:xfrm>
+          <a:prstGeom prst="rect">
+            <a:avLst/>
+          </a:prstGeom>
+          <a:noFill/>
+          <a:ln/>
+        </p:spPr>
+        <p:txBody>
+          <a:bodyPr wrap="square" lIns="0" tIns="0" rIns="0" bIns="0" rtlCol="0" anchor="ctr"/>
+          <a:lstStyle/>
+          <a:p>
+            <a:pPr indent="0" marL="0">
+              <a:buNone/>
+            </a:pPr>
+            <a:r>
+              <a:rPr lang="en-US" sz="1200" dirty="0">
+                <a:solidFill>
+                  <a:srgbClr val="ADADAD"/>
+                </a:solidFill>
+                <a:latin typeface="Pretendard Light" pitchFamily="34" charset="0"/>
+                <a:ea typeface="Pretendard Light" pitchFamily="34" charset="-122"/>
+                <a:cs typeface="Pretendard Light" pitchFamily="34" charset="-120"/>
+              </a:rPr>
+              <a:t>Snapshot_P2.zip 을 전원에게 배포한다. 못 따라온 학생은 다음 주에 이걸 열고 시작한다.</a:t>
+            </a:r>
+            <a:endParaRPr lang="en-US" sz="1200" dirty="0"/>
+          </a:p>
+        </p:txBody>
+      </p:sp>
+    </p:spTree>
+  </p:cSld>
+  <p:clrMapOvr>
+    <a:masterClrMapping/>
+  </p:clrMapOvr>
+</p:sld>
+</file>
+
+<file path=ppt/slides/slide16.xml><?xml version="1.0" encoding="utf-8"?>
+<p:sld xmlns:a="http://schemas.openxmlformats.org/drawingml/2006/main" xmlns:r="http://schemas.openxmlformats.org/officeDocument/2006/relationships" xmlns:p="http://schemas.openxmlformats.org/presentationml/2006/main">
+  <p:cSld name="Slide 16">
+    <p:bg>
+      <p:bgPr>
+        <a:solidFill>
+          <a:srgbClr val="FFFFFF"/>
+        </a:solidFill>
+      </p:bgPr>
+    </p:bg>
+    <p:spTree>
+      <p:nvGrpSpPr>
+        <p:cNvPr id="1" name=""/>
+        <p:cNvGrpSpPr/>
+        <p:nvPr/>
+      </p:nvGrpSpPr>
+      <p:grpSpPr>
+        <a:xfrm>
+          <a:off x="0" y="0"/>
+          <a:ext cx="0" cy="0"/>
+          <a:chOff x="0" y="0"/>
+          <a:chExt cx="0" cy="0"/>
+        </a:xfrm>
+      </p:grpSpPr>
+      <p:sp>
+        <p:nvSpPr>
+          <p:cNvPr id="2" name="Text 0"/>
+          <p:cNvSpPr txBox="1"/>
+          <p:nvPr/>
+        </p:nvSpPr>
+        <p:spPr>
+          <a:xfrm>
+            <a:off x="758952" y="566928"/>
+            <a:ext cx="10673791" cy="457200"/>
+          </a:xfrm>
+          <a:prstGeom prst="rect">
+            <a:avLst/>
+          </a:prstGeom>
+          <a:noFill/>
+          <a:ln/>
+        </p:spPr>
+        <p:txBody>
+          <a:bodyPr wrap="square" lIns="0" tIns="0" rIns="0" bIns="0" rtlCol="0" anchor="ctr"/>
+          <a:lstStyle/>
+          <a:p>
+            <a:pPr indent="0" marL="0">
+              <a:buNone/>
+            </a:pPr>
+            <a:r>
+              <a:rPr lang="en-US" sz="2600" dirty="0">
+                <a:solidFill>
+                  <a:srgbClr val="141414"/>
+                </a:solidFill>
+                <a:latin typeface="Pretendard SemiBold" pitchFamily="34" charset="0"/>
+                <a:ea typeface="Pretendard SemiBold" pitchFamily="34" charset="-122"/>
+                <a:cs typeface="Pretendard SemiBold" pitchFamily="34" charset="-120"/>
+              </a:rPr>
               <a:t>다음 주부터 Phase 3.</a:t>
             </a:r>
             <a:endParaRPr lang="en-US" sz="2600" dirty="0"/>
@@ -14536,7 +15919,7 @@
                 <a:ea typeface="Pretendard Light" pitchFamily="34" charset="-122"/>
                 <a:cs typeface="Pretendard Light" pitchFamily="34" charset="-120"/>
               </a:rPr>
-              <a:t>Time.deltaTime 은 직전 한 장을 그리는 데 걸린 시간(초)이다. 1초에 60장이면 한 장에 1/60초.</a:t>
+              <a:t>Time.deltaTime 은 직전 한 장을 그리는 데 걸린 시간(초)이다.  deltaTime = 1 / FPS  —  FPS 가 아니라 FPS 를 뒤집은 값이다.</a:t>
             </a:r>
             <a:endParaRPr lang="en-US" sz="1200" dirty="0"/>
           </a:p>
@@ -16008,7 +17391,7 @@
         </p:nvSpPr>
         <p:spPr>
           <a:xfrm>
-            <a:off x="7589520" y="5074920"/>
+            <a:off x="7589520" y="4956048"/>
             <a:ext cx="3843223" cy="822960"/>
           </a:xfrm>
           <a:prstGeom prst="rect">
